--- a/Manual.pptx
+++ b/Manual.pptx
@@ -5,50 +5,63 @@
     <p:sldMasterId id="2147483659" r:id="rId1"/>
   </p:sldMasterIdLst>
   <p:notesMasterIdLst>
-    <p:notesMasterId r:id="rId14"/>
+    <p:notesMasterId r:id="rId22"/>
   </p:notesMasterIdLst>
   <p:sldIdLst>
     <p:sldId id="256" r:id="rId2"/>
     <p:sldId id="257" r:id="rId3"/>
     <p:sldId id="258" r:id="rId4"/>
-    <p:sldId id="259" r:id="rId5"/>
-    <p:sldId id="260" r:id="rId6"/>
-    <p:sldId id="261" r:id="rId7"/>
-    <p:sldId id="262" r:id="rId8"/>
-    <p:sldId id="263" r:id="rId9"/>
-    <p:sldId id="264" r:id="rId10"/>
-    <p:sldId id="265" r:id="rId11"/>
-    <p:sldId id="266" r:id="rId12"/>
-    <p:sldId id="267" r:id="rId13"/>
+    <p:sldId id="271" r:id="rId5"/>
+    <p:sldId id="259" r:id="rId6"/>
+    <p:sldId id="260" r:id="rId7"/>
+    <p:sldId id="272" r:id="rId8"/>
+    <p:sldId id="273" r:id="rId9"/>
+    <p:sldId id="274" r:id="rId10"/>
+    <p:sldId id="275" r:id="rId11"/>
+    <p:sldId id="261" r:id="rId12"/>
+    <p:sldId id="262" r:id="rId13"/>
+    <p:sldId id="263" r:id="rId14"/>
+    <p:sldId id="264" r:id="rId15"/>
+    <p:sldId id="268" r:id="rId16"/>
+    <p:sldId id="269" r:id="rId17"/>
+    <p:sldId id="270" r:id="rId18"/>
+    <p:sldId id="265" r:id="rId19"/>
+    <p:sldId id="266" r:id="rId20"/>
+    <p:sldId id="267" r:id="rId21"/>
   </p:sldIdLst>
   <p:sldSz cx="12192000" cy="6858000"/>
   <p:notesSz cx="6858000" cy="9144000"/>
   <p:embeddedFontLst>
     <p:embeddedFont>
-      <p:font typeface="Noto Serif JP" panose="02020200000000000000" pitchFamily="18" charset="-128"/>
-      <p:regular r:id="rId15"/>
-      <p:bold r:id="rId16"/>
+      <p:font typeface="Noto Sans JP" panose="020B0600070205080204" charset="-128"/>
+      <p:regular r:id="rId23"/>
+      <p:bold r:id="rId24"/>
     </p:embeddedFont>
     <p:embeddedFont>
       <p:font typeface="Lato" panose="020F0502020204030203" pitchFamily="34" charset="0"/>
-      <p:regular r:id="rId17"/>
-      <p:bold r:id="rId18"/>
-      <p:italic r:id="rId19"/>
-      <p:boldItalic r:id="rId20"/>
-    </p:embeddedFont>
-    <p:embeddedFont>
-      <p:font typeface="Poppins" panose="00000500000000000000" pitchFamily="2" charset="0"/>
-      <p:regular r:id="rId21"/>
-      <p:bold r:id="rId22"/>
-      <p:italic r:id="rId23"/>
-      <p:boldItalic r:id="rId24"/>
-    </p:embeddedFont>
-    <p:embeddedFont>
-      <p:font typeface="Poppins SemiBold" panose="020B0502040204020203" pitchFamily="2" charset="0"/>
       <p:regular r:id="rId25"/>
       <p:bold r:id="rId26"/>
       <p:italic r:id="rId27"/>
       <p:boldItalic r:id="rId28"/>
+    </p:embeddedFont>
+    <p:embeddedFont>
+      <p:font typeface="Noto Serif JP" panose="02020200000000000000" pitchFamily="18" charset="-128"/>
+      <p:regular r:id="rId29"/>
+      <p:bold r:id="rId30"/>
+    </p:embeddedFont>
+    <p:embeddedFont>
+      <p:font typeface="Poppins" panose="00000500000000000000" pitchFamily="2" charset="0"/>
+      <p:regular r:id="rId31"/>
+      <p:bold r:id="rId32"/>
+      <p:italic r:id="rId33"/>
+      <p:boldItalic r:id="rId34"/>
+    </p:embeddedFont>
+    <p:embeddedFont>
+      <p:font typeface="Poppins SemiBold" panose="00000700000000000000" pitchFamily="2" charset="0"/>
+      <p:regular r:id="rId35"/>
+      <p:bold r:id="rId36"/>
+      <p:italic r:id="rId37"/>
+      <p:boldItalic r:id="rId38"/>
     </p:embeddedFont>
   </p:embeddedFontLst>
   <p:defaultTextStyle>
@@ -849,6 +862,838 @@
   <p:cSld>
     <p:spTree>
       <p:nvGrpSpPr>
+        <p:cNvPr id="1" name="Shape 201"/>
+        <p:cNvGrpSpPr/>
+        <p:nvPr/>
+      </p:nvGrpSpPr>
+      <p:grpSpPr>
+        <a:xfrm>
+          <a:off x="0" y="0"/>
+          <a:ext cx="0" cy="0"/>
+          <a:chOff x="0" y="0"/>
+          <a:chExt cx="0" cy="0"/>
+        </a:xfrm>
+      </p:grpSpPr>
+      <p:sp>
+        <p:nvSpPr>
+          <p:cNvPr id="202" name="Google Shape;202;p10:notes"/>
+          <p:cNvSpPr txBox="1">
+            <a:spLocks noGrp="1"/>
+          </p:cNvSpPr>
+          <p:nvPr>
+            <p:ph type="body" idx="1"/>
+          </p:nvPr>
+        </p:nvSpPr>
+        <p:spPr>
+          <a:xfrm>
+            <a:off x="685800" y="4343400"/>
+            <a:ext cx="5486400" cy="4114800"/>
+          </a:xfrm>
+          <a:prstGeom prst="rect">
+            <a:avLst/>
+          </a:prstGeom>
+        </p:spPr>
+        <p:txBody>
+          <a:bodyPr spcFirstLastPara="1" wrap="square" lIns="91425" tIns="91425" rIns="91425" bIns="91425" anchor="t" anchorCtr="0">
+            <a:noAutofit/>
+          </a:bodyPr>
+          <a:lstStyle/>
+          <a:p>
+            <a:pPr marL="0" lvl="0" indent="0" algn="l" rtl="0">
+              <a:spcBef>
+                <a:spcPts val="0"/>
+              </a:spcBef>
+              <a:spcAft>
+                <a:spcPts val="0"/>
+              </a:spcAft>
+              <a:buNone/>
+            </a:pPr>
+            <a:endParaRPr/>
+          </a:p>
+        </p:txBody>
+      </p:sp>
+      <p:sp>
+        <p:nvSpPr>
+          <p:cNvPr id="203" name="Google Shape;203;p10:notes"/>
+          <p:cNvSpPr>
+            <a:spLocks noGrp="1" noRot="1" noChangeAspect="1"/>
+          </p:cNvSpPr>
+          <p:nvPr>
+            <p:ph type="sldImg" idx="2"/>
+          </p:nvPr>
+        </p:nvSpPr>
+        <p:spPr>
+          <a:xfrm>
+            <a:off x="381000" y="685800"/>
+            <a:ext cx="6096000" cy="3429000"/>
+          </a:xfrm>
+          <a:custGeom>
+            <a:avLst/>
+            <a:gdLst/>
+            <a:ahLst/>
+            <a:cxnLst/>
+            <a:rect l="l" t="t" r="r" b="b"/>
+            <a:pathLst>
+              <a:path w="120000" h="120000" extrusionOk="0">
+                <a:moveTo>
+                  <a:pt x="0" y="0"/>
+                </a:moveTo>
+                <a:lnTo>
+                  <a:pt x="120000" y="0"/>
+                </a:lnTo>
+                <a:lnTo>
+                  <a:pt x="120000" y="120000"/>
+                </a:lnTo>
+                <a:lnTo>
+                  <a:pt x="0" y="120000"/>
+                </a:lnTo>
+                <a:close/>
+              </a:path>
+            </a:pathLst>
+          </a:custGeom>
+        </p:spPr>
+      </p:sp>
+    </p:spTree>
+  </p:cSld>
+  <p:clrMapOvr>
+    <a:masterClrMapping/>
+  </p:clrMapOvr>
+</p:notes>
+</file>
+
+<file path=ppt/notesSlides/notesSlide11.xml><?xml version="1.0" encoding="utf-8"?>
+<p:notes xmlns:a="http://schemas.openxmlformats.org/drawingml/2006/main" xmlns:r="http://schemas.openxmlformats.org/officeDocument/2006/relationships" xmlns:p="http://schemas.openxmlformats.org/presentationml/2006/main" showMasterSp="0" showMasterPhAnim="0">
+  <p:cSld>
+    <p:spTree>
+      <p:nvGrpSpPr>
+        <p:cNvPr id="1" name="Shape 142"/>
+        <p:cNvGrpSpPr/>
+        <p:nvPr/>
+      </p:nvGrpSpPr>
+      <p:grpSpPr>
+        <a:xfrm>
+          <a:off x="0" y="0"/>
+          <a:ext cx="0" cy="0"/>
+          <a:chOff x="0" y="0"/>
+          <a:chExt cx="0" cy="0"/>
+        </a:xfrm>
+      </p:grpSpPr>
+      <p:sp>
+        <p:nvSpPr>
+          <p:cNvPr id="143" name="Google Shape;143;p6:notes"/>
+          <p:cNvSpPr txBox="1">
+            <a:spLocks noGrp="1"/>
+          </p:cNvSpPr>
+          <p:nvPr>
+            <p:ph type="body" idx="1"/>
+          </p:nvPr>
+        </p:nvSpPr>
+        <p:spPr>
+          <a:xfrm>
+            <a:off x="685800" y="4343400"/>
+            <a:ext cx="5486400" cy="4114800"/>
+          </a:xfrm>
+          <a:prstGeom prst="rect">
+            <a:avLst/>
+          </a:prstGeom>
+        </p:spPr>
+        <p:txBody>
+          <a:bodyPr spcFirstLastPara="1" wrap="square" lIns="91425" tIns="91425" rIns="91425" bIns="91425" anchor="t" anchorCtr="0">
+            <a:noAutofit/>
+          </a:bodyPr>
+          <a:lstStyle/>
+          <a:p>
+            <a:pPr marL="0" lvl="0" indent="0" algn="l" rtl="0">
+              <a:spcBef>
+                <a:spcPts val="0"/>
+              </a:spcBef>
+              <a:spcAft>
+                <a:spcPts val="0"/>
+              </a:spcAft>
+              <a:buNone/>
+            </a:pPr>
+            <a:endParaRPr/>
+          </a:p>
+        </p:txBody>
+      </p:sp>
+      <p:sp>
+        <p:nvSpPr>
+          <p:cNvPr id="144" name="Google Shape;144;p6:notes"/>
+          <p:cNvSpPr>
+            <a:spLocks noGrp="1" noRot="1" noChangeAspect="1"/>
+          </p:cNvSpPr>
+          <p:nvPr>
+            <p:ph type="sldImg" idx="2"/>
+          </p:nvPr>
+        </p:nvSpPr>
+        <p:spPr>
+          <a:xfrm>
+            <a:off x="1143225" y="685800"/>
+            <a:ext cx="4572225" cy="3429000"/>
+          </a:xfrm>
+          <a:custGeom>
+            <a:avLst/>
+            <a:gdLst/>
+            <a:ahLst/>
+            <a:cxnLst/>
+            <a:rect l="l" t="t" r="r" b="b"/>
+            <a:pathLst>
+              <a:path w="120000" h="120000" extrusionOk="0">
+                <a:moveTo>
+                  <a:pt x="0" y="0"/>
+                </a:moveTo>
+                <a:lnTo>
+                  <a:pt x="120000" y="0"/>
+                </a:lnTo>
+                <a:lnTo>
+                  <a:pt x="120000" y="120000"/>
+                </a:lnTo>
+                <a:lnTo>
+                  <a:pt x="0" y="120000"/>
+                </a:lnTo>
+                <a:close/>
+              </a:path>
+            </a:pathLst>
+          </a:custGeom>
+        </p:spPr>
+      </p:sp>
+    </p:spTree>
+  </p:cSld>
+  <p:clrMapOvr>
+    <a:masterClrMapping/>
+  </p:clrMapOvr>
+</p:notes>
+</file>
+
+<file path=ppt/notesSlides/notesSlide12.xml><?xml version="1.0" encoding="utf-8"?>
+<p:notes xmlns:a="http://schemas.openxmlformats.org/drawingml/2006/main" xmlns:r="http://schemas.openxmlformats.org/officeDocument/2006/relationships" xmlns:p="http://schemas.openxmlformats.org/presentationml/2006/main" showMasterSp="0" showMasterPhAnim="0">
+  <p:cSld>
+    <p:spTree>
+      <p:nvGrpSpPr>
+        <p:cNvPr id="1" name="Shape 150"/>
+        <p:cNvGrpSpPr/>
+        <p:nvPr/>
+      </p:nvGrpSpPr>
+      <p:grpSpPr>
+        <a:xfrm>
+          <a:off x="0" y="0"/>
+          <a:ext cx="0" cy="0"/>
+          <a:chOff x="0" y="0"/>
+          <a:chExt cx="0" cy="0"/>
+        </a:xfrm>
+      </p:grpSpPr>
+      <p:sp>
+        <p:nvSpPr>
+          <p:cNvPr id="151" name="Google Shape;151;p7:notes"/>
+          <p:cNvSpPr txBox="1">
+            <a:spLocks noGrp="1"/>
+          </p:cNvSpPr>
+          <p:nvPr>
+            <p:ph type="body" idx="1"/>
+          </p:nvPr>
+        </p:nvSpPr>
+        <p:spPr>
+          <a:xfrm>
+            <a:off x="685800" y="4343400"/>
+            <a:ext cx="5486400" cy="4114800"/>
+          </a:xfrm>
+          <a:prstGeom prst="rect">
+            <a:avLst/>
+          </a:prstGeom>
+        </p:spPr>
+        <p:txBody>
+          <a:bodyPr spcFirstLastPara="1" wrap="square" lIns="91425" tIns="91425" rIns="91425" bIns="91425" anchor="t" anchorCtr="0">
+            <a:noAutofit/>
+          </a:bodyPr>
+          <a:lstStyle/>
+          <a:p>
+            <a:pPr marL="0" lvl="0" indent="0" algn="l" rtl="0">
+              <a:spcBef>
+                <a:spcPts val="0"/>
+              </a:spcBef>
+              <a:spcAft>
+                <a:spcPts val="0"/>
+              </a:spcAft>
+              <a:buNone/>
+            </a:pPr>
+            <a:endParaRPr/>
+          </a:p>
+        </p:txBody>
+      </p:sp>
+      <p:sp>
+        <p:nvSpPr>
+          <p:cNvPr id="152" name="Google Shape;152;p7:notes"/>
+          <p:cNvSpPr>
+            <a:spLocks noGrp="1" noRot="1" noChangeAspect="1"/>
+          </p:cNvSpPr>
+          <p:nvPr>
+            <p:ph type="sldImg" idx="2"/>
+          </p:nvPr>
+        </p:nvSpPr>
+        <p:spPr>
+          <a:xfrm>
+            <a:off x="381000" y="685800"/>
+            <a:ext cx="6096000" cy="3429000"/>
+          </a:xfrm>
+          <a:custGeom>
+            <a:avLst/>
+            <a:gdLst/>
+            <a:ahLst/>
+            <a:cxnLst/>
+            <a:rect l="l" t="t" r="r" b="b"/>
+            <a:pathLst>
+              <a:path w="120000" h="120000" extrusionOk="0">
+                <a:moveTo>
+                  <a:pt x="0" y="0"/>
+                </a:moveTo>
+                <a:lnTo>
+                  <a:pt x="120000" y="0"/>
+                </a:lnTo>
+                <a:lnTo>
+                  <a:pt x="120000" y="120000"/>
+                </a:lnTo>
+                <a:lnTo>
+                  <a:pt x="0" y="120000"/>
+                </a:lnTo>
+                <a:close/>
+              </a:path>
+            </a:pathLst>
+          </a:custGeom>
+        </p:spPr>
+      </p:sp>
+    </p:spTree>
+  </p:cSld>
+  <p:clrMapOvr>
+    <a:masterClrMapping/>
+  </p:clrMapOvr>
+</p:notes>
+</file>
+
+<file path=ppt/notesSlides/notesSlide13.xml><?xml version="1.0" encoding="utf-8"?>
+<p:notes xmlns:a="http://schemas.openxmlformats.org/drawingml/2006/main" xmlns:r="http://schemas.openxmlformats.org/officeDocument/2006/relationships" xmlns:p="http://schemas.openxmlformats.org/presentationml/2006/main" showMasterSp="0" showMasterPhAnim="0">
+  <p:cSld>
+    <p:spTree>
+      <p:nvGrpSpPr>
+        <p:cNvPr id="1" name="Shape 165"/>
+        <p:cNvGrpSpPr/>
+        <p:nvPr/>
+      </p:nvGrpSpPr>
+      <p:grpSpPr>
+        <a:xfrm>
+          <a:off x="0" y="0"/>
+          <a:ext cx="0" cy="0"/>
+          <a:chOff x="0" y="0"/>
+          <a:chExt cx="0" cy="0"/>
+        </a:xfrm>
+      </p:grpSpPr>
+      <p:sp>
+        <p:nvSpPr>
+          <p:cNvPr id="166" name="Google Shape;166;p8:notes"/>
+          <p:cNvSpPr txBox="1">
+            <a:spLocks noGrp="1"/>
+          </p:cNvSpPr>
+          <p:nvPr>
+            <p:ph type="body" idx="1"/>
+          </p:nvPr>
+        </p:nvSpPr>
+        <p:spPr>
+          <a:xfrm>
+            <a:off x="685800" y="4343400"/>
+            <a:ext cx="5486400" cy="4114800"/>
+          </a:xfrm>
+          <a:prstGeom prst="rect">
+            <a:avLst/>
+          </a:prstGeom>
+        </p:spPr>
+        <p:txBody>
+          <a:bodyPr spcFirstLastPara="1" wrap="square" lIns="91425" tIns="91425" rIns="91425" bIns="91425" anchor="t" anchorCtr="0">
+            <a:noAutofit/>
+          </a:bodyPr>
+          <a:lstStyle/>
+          <a:p>
+            <a:pPr marL="0" lvl="0" indent="0" algn="l" rtl="0">
+              <a:spcBef>
+                <a:spcPts val="0"/>
+              </a:spcBef>
+              <a:spcAft>
+                <a:spcPts val="0"/>
+              </a:spcAft>
+              <a:buNone/>
+            </a:pPr>
+            <a:endParaRPr/>
+          </a:p>
+        </p:txBody>
+      </p:sp>
+      <p:sp>
+        <p:nvSpPr>
+          <p:cNvPr id="167" name="Google Shape;167;p8:notes"/>
+          <p:cNvSpPr>
+            <a:spLocks noGrp="1" noRot="1" noChangeAspect="1"/>
+          </p:cNvSpPr>
+          <p:nvPr>
+            <p:ph type="sldImg" idx="2"/>
+          </p:nvPr>
+        </p:nvSpPr>
+        <p:spPr>
+          <a:xfrm>
+            <a:off x="1143225" y="685800"/>
+            <a:ext cx="4572225" cy="3429000"/>
+          </a:xfrm>
+          <a:custGeom>
+            <a:avLst/>
+            <a:gdLst/>
+            <a:ahLst/>
+            <a:cxnLst/>
+            <a:rect l="l" t="t" r="r" b="b"/>
+            <a:pathLst>
+              <a:path w="120000" h="120000" extrusionOk="0">
+                <a:moveTo>
+                  <a:pt x="0" y="0"/>
+                </a:moveTo>
+                <a:lnTo>
+                  <a:pt x="120000" y="0"/>
+                </a:lnTo>
+                <a:lnTo>
+                  <a:pt x="120000" y="120000"/>
+                </a:lnTo>
+                <a:lnTo>
+                  <a:pt x="0" y="120000"/>
+                </a:lnTo>
+                <a:close/>
+              </a:path>
+            </a:pathLst>
+          </a:custGeom>
+        </p:spPr>
+      </p:sp>
+    </p:spTree>
+  </p:cSld>
+  <p:clrMapOvr>
+    <a:masterClrMapping/>
+  </p:clrMapOvr>
+</p:notes>
+</file>
+
+<file path=ppt/notesSlides/notesSlide14.xml><?xml version="1.0" encoding="utf-8"?>
+<p:notes xmlns:a="http://schemas.openxmlformats.org/drawingml/2006/main" xmlns:r="http://schemas.openxmlformats.org/officeDocument/2006/relationships" xmlns:p="http://schemas.openxmlformats.org/presentationml/2006/main" showMasterSp="0" showMasterPhAnim="0">
+  <p:cSld>
+    <p:spTree>
+      <p:nvGrpSpPr>
+        <p:cNvPr id="1" name="Shape 180"/>
+        <p:cNvGrpSpPr/>
+        <p:nvPr/>
+      </p:nvGrpSpPr>
+      <p:grpSpPr>
+        <a:xfrm>
+          <a:off x="0" y="0"/>
+          <a:ext cx="0" cy="0"/>
+          <a:chOff x="0" y="0"/>
+          <a:chExt cx="0" cy="0"/>
+        </a:xfrm>
+      </p:grpSpPr>
+      <p:sp>
+        <p:nvSpPr>
+          <p:cNvPr id="181" name="Google Shape;181;p9:notes"/>
+          <p:cNvSpPr txBox="1">
+            <a:spLocks noGrp="1"/>
+          </p:cNvSpPr>
+          <p:nvPr>
+            <p:ph type="body" idx="1"/>
+          </p:nvPr>
+        </p:nvSpPr>
+        <p:spPr>
+          <a:xfrm>
+            <a:off x="685800" y="4343400"/>
+            <a:ext cx="5486400" cy="4114800"/>
+          </a:xfrm>
+          <a:prstGeom prst="rect">
+            <a:avLst/>
+          </a:prstGeom>
+        </p:spPr>
+        <p:txBody>
+          <a:bodyPr spcFirstLastPara="1" wrap="square" lIns="91425" tIns="91425" rIns="91425" bIns="91425" anchor="t" anchorCtr="0">
+            <a:noAutofit/>
+          </a:bodyPr>
+          <a:lstStyle/>
+          <a:p>
+            <a:pPr marL="0" lvl="0" indent="0" algn="l" rtl="0">
+              <a:spcBef>
+                <a:spcPts val="0"/>
+              </a:spcBef>
+              <a:spcAft>
+                <a:spcPts val="0"/>
+              </a:spcAft>
+              <a:buNone/>
+            </a:pPr>
+            <a:endParaRPr/>
+          </a:p>
+        </p:txBody>
+      </p:sp>
+      <p:sp>
+        <p:nvSpPr>
+          <p:cNvPr id="182" name="Google Shape;182;p9:notes"/>
+          <p:cNvSpPr>
+            <a:spLocks noGrp="1" noRot="1" noChangeAspect="1"/>
+          </p:cNvSpPr>
+          <p:nvPr>
+            <p:ph type="sldImg" idx="2"/>
+          </p:nvPr>
+        </p:nvSpPr>
+        <p:spPr>
+          <a:xfrm>
+            <a:off x="1143225" y="685800"/>
+            <a:ext cx="4572225" cy="3429000"/>
+          </a:xfrm>
+          <a:custGeom>
+            <a:avLst/>
+            <a:gdLst/>
+            <a:ahLst/>
+            <a:cxnLst/>
+            <a:rect l="l" t="t" r="r" b="b"/>
+            <a:pathLst>
+              <a:path w="120000" h="120000" extrusionOk="0">
+                <a:moveTo>
+                  <a:pt x="0" y="0"/>
+                </a:moveTo>
+                <a:lnTo>
+                  <a:pt x="120000" y="0"/>
+                </a:lnTo>
+                <a:lnTo>
+                  <a:pt x="120000" y="120000"/>
+                </a:lnTo>
+                <a:lnTo>
+                  <a:pt x="0" y="120000"/>
+                </a:lnTo>
+                <a:close/>
+              </a:path>
+            </a:pathLst>
+          </a:custGeom>
+        </p:spPr>
+      </p:sp>
+    </p:spTree>
+  </p:cSld>
+  <p:clrMapOvr>
+    <a:masterClrMapping/>
+  </p:clrMapOvr>
+</p:notes>
+</file>
+
+<file path=ppt/notesSlides/notesSlide15.xml><?xml version="1.0" encoding="utf-8"?>
+<p:notes xmlns:a="http://schemas.openxmlformats.org/drawingml/2006/main" xmlns:r="http://schemas.openxmlformats.org/officeDocument/2006/relationships" xmlns:p="http://schemas.openxmlformats.org/presentationml/2006/main" showMasterSp="0" showMasterPhAnim="0">
+  <p:cSld>
+    <p:spTree>
+      <p:nvGrpSpPr>
+        <p:cNvPr id="1" name="Shape 87"/>
+        <p:cNvGrpSpPr/>
+        <p:nvPr/>
+      </p:nvGrpSpPr>
+      <p:grpSpPr>
+        <a:xfrm>
+          <a:off x="0" y="0"/>
+          <a:ext cx="0" cy="0"/>
+          <a:chOff x="0" y="0"/>
+          <a:chExt cx="0" cy="0"/>
+        </a:xfrm>
+      </p:grpSpPr>
+      <p:sp>
+        <p:nvSpPr>
+          <p:cNvPr id="88" name="Google Shape;88;p2:notes"/>
+          <p:cNvSpPr txBox="1">
+            <a:spLocks noGrp="1"/>
+          </p:cNvSpPr>
+          <p:nvPr>
+            <p:ph type="body" idx="1"/>
+          </p:nvPr>
+        </p:nvSpPr>
+        <p:spPr>
+          <a:xfrm>
+            <a:off x="685800" y="4343400"/>
+            <a:ext cx="5486400" cy="4114800"/>
+          </a:xfrm>
+          <a:prstGeom prst="rect">
+            <a:avLst/>
+          </a:prstGeom>
+        </p:spPr>
+        <p:txBody>
+          <a:bodyPr spcFirstLastPara="1" wrap="square" lIns="91425" tIns="91425" rIns="91425" bIns="91425" anchor="t" anchorCtr="0">
+            <a:noAutofit/>
+          </a:bodyPr>
+          <a:lstStyle/>
+          <a:p>
+            <a:pPr marL="0" lvl="0" indent="0" algn="l" rtl="0">
+              <a:spcBef>
+                <a:spcPts val="0"/>
+              </a:spcBef>
+              <a:spcAft>
+                <a:spcPts val="0"/>
+              </a:spcAft>
+              <a:buNone/>
+            </a:pPr>
+            <a:endParaRPr/>
+          </a:p>
+        </p:txBody>
+      </p:sp>
+      <p:sp>
+        <p:nvSpPr>
+          <p:cNvPr id="89" name="Google Shape;89;p2:notes"/>
+          <p:cNvSpPr>
+            <a:spLocks noGrp="1" noRot="1" noChangeAspect="1"/>
+          </p:cNvSpPr>
+          <p:nvPr>
+            <p:ph type="sldImg" idx="2"/>
+          </p:nvPr>
+        </p:nvSpPr>
+        <p:spPr>
+          <a:xfrm>
+            <a:off x="381000" y="685800"/>
+            <a:ext cx="6096000" cy="3429000"/>
+          </a:xfrm>
+          <a:custGeom>
+            <a:avLst/>
+            <a:gdLst/>
+            <a:ahLst/>
+            <a:cxnLst/>
+            <a:rect l="l" t="t" r="r" b="b"/>
+            <a:pathLst>
+              <a:path w="120000" h="120000" extrusionOk="0">
+                <a:moveTo>
+                  <a:pt x="0" y="0"/>
+                </a:moveTo>
+                <a:lnTo>
+                  <a:pt x="120000" y="0"/>
+                </a:lnTo>
+                <a:lnTo>
+                  <a:pt x="120000" y="120000"/>
+                </a:lnTo>
+                <a:lnTo>
+                  <a:pt x="0" y="120000"/>
+                </a:lnTo>
+                <a:close/>
+              </a:path>
+            </a:pathLst>
+          </a:custGeom>
+        </p:spPr>
+      </p:sp>
+    </p:spTree>
+  </p:cSld>
+  <p:clrMapOvr>
+    <a:masterClrMapping/>
+  </p:clrMapOvr>
+</p:notes>
+</file>
+
+<file path=ppt/notesSlides/notesSlide16.xml><?xml version="1.0" encoding="utf-8"?>
+<p:notes xmlns:a="http://schemas.openxmlformats.org/drawingml/2006/main" xmlns:r="http://schemas.openxmlformats.org/officeDocument/2006/relationships" xmlns:p="http://schemas.openxmlformats.org/presentationml/2006/main" showMasterSp="0" showMasterPhAnim="0">
+  <p:cSld>
+    <p:spTree>
+      <p:nvGrpSpPr>
+        <p:cNvPr id="1" name="Shape 95"/>
+        <p:cNvGrpSpPr/>
+        <p:nvPr/>
+      </p:nvGrpSpPr>
+      <p:grpSpPr>
+        <a:xfrm>
+          <a:off x="0" y="0"/>
+          <a:ext cx="0" cy="0"/>
+          <a:chOff x="0" y="0"/>
+          <a:chExt cx="0" cy="0"/>
+        </a:xfrm>
+      </p:grpSpPr>
+      <p:sp>
+        <p:nvSpPr>
+          <p:cNvPr id="96" name="Google Shape;96;p3:notes"/>
+          <p:cNvSpPr txBox="1">
+            <a:spLocks noGrp="1"/>
+          </p:cNvSpPr>
+          <p:nvPr>
+            <p:ph type="body" idx="1"/>
+          </p:nvPr>
+        </p:nvSpPr>
+        <p:spPr>
+          <a:xfrm>
+            <a:off x="685800" y="4343400"/>
+            <a:ext cx="5486400" cy="4114800"/>
+          </a:xfrm>
+          <a:prstGeom prst="rect">
+            <a:avLst/>
+          </a:prstGeom>
+        </p:spPr>
+        <p:txBody>
+          <a:bodyPr spcFirstLastPara="1" wrap="square" lIns="91425" tIns="91425" rIns="91425" bIns="91425" anchor="t" anchorCtr="0">
+            <a:noAutofit/>
+          </a:bodyPr>
+          <a:lstStyle/>
+          <a:p>
+            <a:pPr marL="0" lvl="0" indent="0" algn="l" rtl="0">
+              <a:spcBef>
+                <a:spcPts val="0"/>
+              </a:spcBef>
+              <a:spcAft>
+                <a:spcPts val="0"/>
+              </a:spcAft>
+              <a:buNone/>
+            </a:pPr>
+            <a:endParaRPr/>
+          </a:p>
+        </p:txBody>
+      </p:sp>
+      <p:sp>
+        <p:nvSpPr>
+          <p:cNvPr id="97" name="Google Shape;97;p3:notes"/>
+          <p:cNvSpPr>
+            <a:spLocks noGrp="1" noRot="1" noChangeAspect="1"/>
+          </p:cNvSpPr>
+          <p:nvPr>
+            <p:ph type="sldImg" idx="2"/>
+          </p:nvPr>
+        </p:nvSpPr>
+        <p:spPr>
+          <a:xfrm>
+            <a:off x="381000" y="685800"/>
+            <a:ext cx="6096000" cy="3429000"/>
+          </a:xfrm>
+          <a:custGeom>
+            <a:avLst/>
+            <a:gdLst/>
+            <a:ahLst/>
+            <a:cxnLst/>
+            <a:rect l="l" t="t" r="r" b="b"/>
+            <a:pathLst>
+              <a:path w="120000" h="120000" extrusionOk="0">
+                <a:moveTo>
+                  <a:pt x="0" y="0"/>
+                </a:moveTo>
+                <a:lnTo>
+                  <a:pt x="120000" y="0"/>
+                </a:lnTo>
+                <a:lnTo>
+                  <a:pt x="120000" y="120000"/>
+                </a:lnTo>
+                <a:lnTo>
+                  <a:pt x="0" y="120000"/>
+                </a:lnTo>
+                <a:close/>
+              </a:path>
+            </a:pathLst>
+          </a:custGeom>
+        </p:spPr>
+      </p:sp>
+    </p:spTree>
+  </p:cSld>
+  <p:clrMapOvr>
+    <a:masterClrMapping/>
+  </p:clrMapOvr>
+</p:notes>
+</file>
+
+<file path=ppt/notesSlides/notesSlide17.xml><?xml version="1.0" encoding="utf-8"?>
+<p:notes xmlns:a="http://schemas.openxmlformats.org/drawingml/2006/main" xmlns:r="http://schemas.openxmlformats.org/officeDocument/2006/relationships" xmlns:p="http://schemas.openxmlformats.org/presentationml/2006/main" showMasterSp="0" showMasterPhAnim="0">
+  <p:cSld>
+    <p:spTree>
+      <p:nvGrpSpPr>
+        <p:cNvPr id="1" name="Shape 109"/>
+        <p:cNvGrpSpPr/>
+        <p:nvPr/>
+      </p:nvGrpSpPr>
+      <p:grpSpPr>
+        <a:xfrm>
+          <a:off x="0" y="0"/>
+          <a:ext cx="0" cy="0"/>
+          <a:chOff x="0" y="0"/>
+          <a:chExt cx="0" cy="0"/>
+        </a:xfrm>
+      </p:grpSpPr>
+      <p:sp>
+        <p:nvSpPr>
+          <p:cNvPr id="110" name="Google Shape;110;p4:notes"/>
+          <p:cNvSpPr txBox="1">
+            <a:spLocks noGrp="1"/>
+          </p:cNvSpPr>
+          <p:nvPr>
+            <p:ph type="body" idx="1"/>
+          </p:nvPr>
+        </p:nvSpPr>
+        <p:spPr>
+          <a:xfrm>
+            <a:off x="685800" y="4343400"/>
+            <a:ext cx="5486400" cy="4114800"/>
+          </a:xfrm>
+          <a:prstGeom prst="rect">
+            <a:avLst/>
+          </a:prstGeom>
+        </p:spPr>
+        <p:txBody>
+          <a:bodyPr spcFirstLastPara="1" wrap="square" lIns="91425" tIns="91425" rIns="91425" bIns="91425" anchor="t" anchorCtr="0">
+            <a:noAutofit/>
+          </a:bodyPr>
+          <a:lstStyle/>
+          <a:p>
+            <a:pPr marL="0" lvl="0" indent="0" algn="l" rtl="0">
+              <a:spcBef>
+                <a:spcPts val="0"/>
+              </a:spcBef>
+              <a:spcAft>
+                <a:spcPts val="0"/>
+              </a:spcAft>
+              <a:buNone/>
+            </a:pPr>
+            <a:endParaRPr/>
+          </a:p>
+        </p:txBody>
+      </p:sp>
+      <p:sp>
+        <p:nvSpPr>
+          <p:cNvPr id="111" name="Google Shape;111;p4:notes"/>
+          <p:cNvSpPr>
+            <a:spLocks noGrp="1" noRot="1" noChangeAspect="1"/>
+          </p:cNvSpPr>
+          <p:nvPr>
+            <p:ph type="sldImg" idx="2"/>
+          </p:nvPr>
+        </p:nvSpPr>
+        <p:spPr>
+          <a:xfrm>
+            <a:off x="381000" y="685800"/>
+            <a:ext cx="6096000" cy="3429000"/>
+          </a:xfrm>
+          <a:custGeom>
+            <a:avLst/>
+            <a:gdLst/>
+            <a:ahLst/>
+            <a:cxnLst/>
+            <a:rect l="l" t="t" r="r" b="b"/>
+            <a:pathLst>
+              <a:path w="120000" h="120000" extrusionOk="0">
+                <a:moveTo>
+                  <a:pt x="0" y="0"/>
+                </a:moveTo>
+                <a:lnTo>
+                  <a:pt x="120000" y="0"/>
+                </a:lnTo>
+                <a:lnTo>
+                  <a:pt x="120000" y="120000"/>
+                </a:lnTo>
+                <a:lnTo>
+                  <a:pt x="0" y="120000"/>
+                </a:lnTo>
+                <a:close/>
+              </a:path>
+            </a:pathLst>
+          </a:custGeom>
+        </p:spPr>
+      </p:sp>
+    </p:spTree>
+  </p:cSld>
+  <p:clrMapOvr>
+    <a:masterClrMapping/>
+  </p:clrMapOvr>
+</p:notes>
+</file>
+
+<file path=ppt/notesSlides/notesSlide18.xml><?xml version="1.0" encoding="utf-8"?>
+<p:notes xmlns:a="http://schemas.openxmlformats.org/drawingml/2006/main" xmlns:r="http://schemas.openxmlformats.org/officeDocument/2006/relationships" xmlns:p="http://schemas.openxmlformats.org/presentationml/2006/main" showMasterSp="0" showMasterPhAnim="0">
+  <p:cSld>
+    <p:spTree>
+      <p:nvGrpSpPr>
         <p:cNvPr id="1" name="Shape 200"/>
         <p:cNvGrpSpPr/>
         <p:nvPr/>
@@ -948,7 +1793,7 @@
 </p:notes>
 </file>
 
-<file path=ppt/notesSlides/notesSlide11.xml><?xml version="1.0" encoding="utf-8"?>
+<file path=ppt/notesSlides/notesSlide19.xml><?xml version="1.0" encoding="utf-8"?>
 <p:notes xmlns:a="http://schemas.openxmlformats.org/drawingml/2006/main" xmlns:r="http://schemas.openxmlformats.org/officeDocument/2006/relationships" xmlns:p="http://schemas.openxmlformats.org/presentationml/2006/main" showMasterSp="0" showMasterPhAnim="0">
   <p:cSld>
     <p:spTree>
@@ -1017,110 +1862,6 @@
           <a:xfrm>
             <a:off x="1143225" y="685800"/>
             <a:ext cx="4572225" cy="3429000"/>
-          </a:xfrm>
-          <a:custGeom>
-            <a:avLst/>
-            <a:gdLst/>
-            <a:ahLst/>
-            <a:cxnLst/>
-            <a:rect l="l" t="t" r="r" b="b"/>
-            <a:pathLst>
-              <a:path w="120000" h="120000" extrusionOk="0">
-                <a:moveTo>
-                  <a:pt x="0" y="0"/>
-                </a:moveTo>
-                <a:lnTo>
-                  <a:pt x="120000" y="0"/>
-                </a:lnTo>
-                <a:lnTo>
-                  <a:pt x="120000" y="120000"/>
-                </a:lnTo>
-                <a:lnTo>
-                  <a:pt x="0" y="120000"/>
-                </a:lnTo>
-                <a:close/>
-              </a:path>
-            </a:pathLst>
-          </a:custGeom>
-        </p:spPr>
-      </p:sp>
-    </p:spTree>
-  </p:cSld>
-  <p:clrMapOvr>
-    <a:masterClrMapping/>
-  </p:clrMapOvr>
-</p:notes>
-</file>
-
-<file path=ppt/notesSlides/notesSlide12.xml><?xml version="1.0" encoding="utf-8"?>
-<p:notes xmlns:a="http://schemas.openxmlformats.org/drawingml/2006/main" xmlns:r="http://schemas.openxmlformats.org/officeDocument/2006/relationships" xmlns:p="http://schemas.openxmlformats.org/presentationml/2006/main" showMasterSp="0" showMasterPhAnim="0">
-  <p:cSld>
-    <p:spTree>
-      <p:nvGrpSpPr>
-        <p:cNvPr id="1" name="Shape 222"/>
-        <p:cNvGrpSpPr/>
-        <p:nvPr/>
-      </p:nvGrpSpPr>
-      <p:grpSpPr>
-        <a:xfrm>
-          <a:off x="0" y="0"/>
-          <a:ext cx="0" cy="0"/>
-          <a:chOff x="0" y="0"/>
-          <a:chExt cx="0" cy="0"/>
-        </a:xfrm>
-      </p:grpSpPr>
-      <p:sp>
-        <p:nvSpPr>
-          <p:cNvPr id="223" name="Google Shape;223;p12:notes"/>
-          <p:cNvSpPr txBox="1">
-            <a:spLocks noGrp="1"/>
-          </p:cNvSpPr>
-          <p:nvPr>
-            <p:ph type="body" idx="1"/>
-          </p:nvPr>
-        </p:nvSpPr>
-        <p:spPr>
-          <a:xfrm>
-            <a:off x="685800" y="4343400"/>
-            <a:ext cx="5486400" cy="4114800"/>
-          </a:xfrm>
-          <a:prstGeom prst="rect">
-            <a:avLst/>
-          </a:prstGeom>
-        </p:spPr>
-        <p:txBody>
-          <a:bodyPr spcFirstLastPara="1" wrap="square" lIns="91425" tIns="91425" rIns="91425" bIns="91425" anchor="t" anchorCtr="0">
-            <a:noAutofit/>
-          </a:bodyPr>
-          <a:lstStyle/>
-          <a:p>
-            <a:pPr marL="0" lvl="0" indent="0" algn="l" rtl="0">
-              <a:spcBef>
-                <a:spcPts val="0"/>
-              </a:spcBef>
-              <a:spcAft>
-                <a:spcPts val="0"/>
-              </a:spcAft>
-              <a:buNone/>
-            </a:pPr>
-            <a:endParaRPr/>
-          </a:p>
-        </p:txBody>
-      </p:sp>
-      <p:sp>
-        <p:nvSpPr>
-          <p:cNvPr id="224" name="Google Shape;224;p12:notes"/>
-          <p:cNvSpPr>
-            <a:spLocks noGrp="1" noRot="1" noChangeAspect="1"/>
-          </p:cNvSpPr>
-          <p:nvPr>
-            <p:ph type="sldImg" idx="2"/>
-          </p:nvPr>
-        </p:nvSpPr>
-        <p:spPr>
-          <a:xfrm>
-            <a:off x="381000" y="685800"/>
-            <a:ext cx="6096000" cy="3429000"/>
           </a:xfrm>
           <a:custGeom>
             <a:avLst/>
@@ -1260,6 +2001,110 @@
 </p:notes>
 </file>
 
+<file path=ppt/notesSlides/notesSlide20.xml><?xml version="1.0" encoding="utf-8"?>
+<p:notes xmlns:a="http://schemas.openxmlformats.org/drawingml/2006/main" xmlns:r="http://schemas.openxmlformats.org/officeDocument/2006/relationships" xmlns:p="http://schemas.openxmlformats.org/presentationml/2006/main" showMasterSp="0" showMasterPhAnim="0">
+  <p:cSld>
+    <p:spTree>
+      <p:nvGrpSpPr>
+        <p:cNvPr id="1" name="Shape 222"/>
+        <p:cNvGrpSpPr/>
+        <p:nvPr/>
+      </p:nvGrpSpPr>
+      <p:grpSpPr>
+        <a:xfrm>
+          <a:off x="0" y="0"/>
+          <a:ext cx="0" cy="0"/>
+          <a:chOff x="0" y="0"/>
+          <a:chExt cx="0" cy="0"/>
+        </a:xfrm>
+      </p:grpSpPr>
+      <p:sp>
+        <p:nvSpPr>
+          <p:cNvPr id="223" name="Google Shape;223;p12:notes"/>
+          <p:cNvSpPr txBox="1">
+            <a:spLocks noGrp="1"/>
+          </p:cNvSpPr>
+          <p:nvPr>
+            <p:ph type="body" idx="1"/>
+          </p:nvPr>
+        </p:nvSpPr>
+        <p:spPr>
+          <a:xfrm>
+            <a:off x="685800" y="4343400"/>
+            <a:ext cx="5486400" cy="4114800"/>
+          </a:xfrm>
+          <a:prstGeom prst="rect">
+            <a:avLst/>
+          </a:prstGeom>
+        </p:spPr>
+        <p:txBody>
+          <a:bodyPr spcFirstLastPara="1" wrap="square" lIns="91425" tIns="91425" rIns="91425" bIns="91425" anchor="t" anchorCtr="0">
+            <a:noAutofit/>
+          </a:bodyPr>
+          <a:lstStyle/>
+          <a:p>
+            <a:pPr marL="0" lvl="0" indent="0" algn="l" rtl="0">
+              <a:spcBef>
+                <a:spcPts val="0"/>
+              </a:spcBef>
+              <a:spcAft>
+                <a:spcPts val="0"/>
+              </a:spcAft>
+              <a:buNone/>
+            </a:pPr>
+            <a:endParaRPr/>
+          </a:p>
+        </p:txBody>
+      </p:sp>
+      <p:sp>
+        <p:nvSpPr>
+          <p:cNvPr id="224" name="Google Shape;224;p12:notes"/>
+          <p:cNvSpPr>
+            <a:spLocks noGrp="1" noRot="1" noChangeAspect="1"/>
+          </p:cNvSpPr>
+          <p:nvPr>
+            <p:ph type="sldImg" idx="2"/>
+          </p:nvPr>
+        </p:nvSpPr>
+        <p:spPr>
+          <a:xfrm>
+            <a:off x="381000" y="685800"/>
+            <a:ext cx="6096000" cy="3429000"/>
+          </a:xfrm>
+          <a:custGeom>
+            <a:avLst/>
+            <a:gdLst/>
+            <a:ahLst/>
+            <a:cxnLst/>
+            <a:rect l="l" t="t" r="r" b="b"/>
+            <a:pathLst>
+              <a:path w="120000" h="120000" extrusionOk="0">
+                <a:moveTo>
+                  <a:pt x="0" y="0"/>
+                </a:moveTo>
+                <a:lnTo>
+                  <a:pt x="120000" y="0"/>
+                </a:lnTo>
+                <a:lnTo>
+                  <a:pt x="120000" y="120000"/>
+                </a:lnTo>
+                <a:lnTo>
+                  <a:pt x="0" y="120000"/>
+                </a:lnTo>
+                <a:close/>
+              </a:path>
+            </a:pathLst>
+          </a:custGeom>
+        </p:spPr>
+      </p:sp>
+    </p:spTree>
+  </p:cSld>
+  <p:clrMapOvr>
+    <a:masterClrMapping/>
+  </p:clrMapOvr>
+</p:notes>
+</file>
+
 <file path=ppt/notesSlides/notesSlide3.xml><?xml version="1.0" encoding="utf-8"?>
 <p:notes xmlns:a="http://schemas.openxmlformats.org/drawingml/2006/main" xmlns:r="http://schemas.openxmlformats.org/officeDocument/2006/relationships" xmlns:p="http://schemas.openxmlformats.org/presentationml/2006/main" showMasterSp="0" showMasterPhAnim="0">
   <p:cSld>
@@ -1369,6 +2214,110 @@
   <p:cSld>
     <p:spTree>
       <p:nvGrpSpPr>
+        <p:cNvPr id="1" name="Shape 136"/>
+        <p:cNvGrpSpPr/>
+        <p:nvPr/>
+      </p:nvGrpSpPr>
+      <p:grpSpPr>
+        <a:xfrm>
+          <a:off x="0" y="0"/>
+          <a:ext cx="0" cy="0"/>
+          <a:chOff x="0" y="0"/>
+          <a:chExt cx="0" cy="0"/>
+        </a:xfrm>
+      </p:grpSpPr>
+      <p:sp>
+        <p:nvSpPr>
+          <p:cNvPr id="137" name="Google Shape;137;p6:notes"/>
+          <p:cNvSpPr txBox="1">
+            <a:spLocks noGrp="1"/>
+          </p:cNvSpPr>
+          <p:nvPr>
+            <p:ph type="body" idx="1"/>
+          </p:nvPr>
+        </p:nvSpPr>
+        <p:spPr>
+          <a:xfrm>
+            <a:off x="685800" y="4343400"/>
+            <a:ext cx="5486400" cy="4114800"/>
+          </a:xfrm>
+          <a:prstGeom prst="rect">
+            <a:avLst/>
+          </a:prstGeom>
+        </p:spPr>
+        <p:txBody>
+          <a:bodyPr spcFirstLastPara="1" wrap="square" lIns="91425" tIns="91425" rIns="91425" bIns="91425" anchor="t" anchorCtr="0">
+            <a:noAutofit/>
+          </a:bodyPr>
+          <a:lstStyle/>
+          <a:p>
+            <a:pPr marL="0" lvl="0" indent="0" algn="l" rtl="0">
+              <a:spcBef>
+                <a:spcPts val="0"/>
+              </a:spcBef>
+              <a:spcAft>
+                <a:spcPts val="0"/>
+              </a:spcAft>
+              <a:buNone/>
+            </a:pPr>
+            <a:endParaRPr/>
+          </a:p>
+        </p:txBody>
+      </p:sp>
+      <p:sp>
+        <p:nvSpPr>
+          <p:cNvPr id="138" name="Google Shape;138;p6:notes"/>
+          <p:cNvSpPr>
+            <a:spLocks noGrp="1" noRot="1" noChangeAspect="1"/>
+          </p:cNvSpPr>
+          <p:nvPr>
+            <p:ph type="sldImg" idx="2"/>
+          </p:nvPr>
+        </p:nvSpPr>
+        <p:spPr>
+          <a:xfrm>
+            <a:off x="381000" y="685800"/>
+            <a:ext cx="6096000" cy="3429000"/>
+          </a:xfrm>
+          <a:custGeom>
+            <a:avLst/>
+            <a:gdLst/>
+            <a:ahLst/>
+            <a:cxnLst/>
+            <a:rect l="l" t="t" r="r" b="b"/>
+            <a:pathLst>
+              <a:path w="120000" h="120000" extrusionOk="0">
+                <a:moveTo>
+                  <a:pt x="0" y="0"/>
+                </a:moveTo>
+                <a:lnTo>
+                  <a:pt x="120000" y="0"/>
+                </a:lnTo>
+                <a:lnTo>
+                  <a:pt x="120000" y="120000"/>
+                </a:lnTo>
+                <a:lnTo>
+                  <a:pt x="0" y="120000"/>
+                </a:lnTo>
+                <a:close/>
+              </a:path>
+            </a:pathLst>
+          </a:custGeom>
+        </p:spPr>
+      </p:sp>
+    </p:spTree>
+  </p:cSld>
+  <p:clrMapOvr>
+    <a:masterClrMapping/>
+  </p:clrMapOvr>
+</p:notes>
+</file>
+
+<file path=ppt/notesSlides/notesSlide5.xml><?xml version="1.0" encoding="utf-8"?>
+<p:notes xmlns:a="http://schemas.openxmlformats.org/drawingml/2006/main" xmlns:r="http://schemas.openxmlformats.org/officeDocument/2006/relationships" xmlns:p="http://schemas.openxmlformats.org/presentationml/2006/main" showMasterSp="0" showMasterPhAnim="0">
+  <p:cSld>
+    <p:spTree>
+      <p:nvGrpSpPr>
         <p:cNvPr id="1" name="Shape 114"/>
         <p:cNvGrpSpPr/>
         <p:nvPr/>
@@ -1468,7 +2417,7 @@
 </p:notes>
 </file>
 
-<file path=ppt/notesSlides/notesSlide5.xml><?xml version="1.0" encoding="utf-8"?>
+<file path=ppt/notesSlides/notesSlide6.xml><?xml version="1.0" encoding="utf-8"?>
 <p:notes xmlns:a="http://schemas.openxmlformats.org/drawingml/2006/main" xmlns:r="http://schemas.openxmlformats.org/officeDocument/2006/relationships" xmlns:p="http://schemas.openxmlformats.org/presentationml/2006/main" showMasterSp="0" showMasterPhAnim="0">
   <p:cSld>
     <p:spTree>
@@ -1572,12 +2521,12 @@
 </p:notes>
 </file>
 
-<file path=ppt/notesSlides/notesSlide6.xml><?xml version="1.0" encoding="utf-8"?>
+<file path=ppt/notesSlides/notesSlide7.xml><?xml version="1.0" encoding="utf-8"?>
 <p:notes xmlns:a="http://schemas.openxmlformats.org/drawingml/2006/main" xmlns:r="http://schemas.openxmlformats.org/officeDocument/2006/relationships" xmlns:p="http://schemas.openxmlformats.org/presentationml/2006/main" showMasterSp="0" showMasterPhAnim="0">
   <p:cSld>
     <p:spTree>
       <p:nvGrpSpPr>
-        <p:cNvPr id="1" name="Shape 142"/>
+        <p:cNvPr id="1" name="Shape 155"/>
         <p:cNvGrpSpPr/>
         <p:nvPr/>
       </p:nvGrpSpPr>
@@ -1591,7 +2540,7 @@
       </p:grpSpPr>
       <p:sp>
         <p:nvSpPr>
-          <p:cNvPr id="143" name="Google Shape;143;p6:notes"/>
+          <p:cNvPr id="156" name="Google Shape;156;p7:notes"/>
           <p:cNvSpPr txBox="1">
             <a:spLocks noGrp="1"/>
           </p:cNvSpPr>
@@ -1629,7 +2578,7 @@
       </p:sp>
       <p:sp>
         <p:nvSpPr>
-          <p:cNvPr id="144" name="Google Shape;144;p6:notes"/>
+          <p:cNvPr id="157" name="Google Shape;157;p7:notes"/>
           <p:cNvSpPr>
             <a:spLocks noGrp="1" noRot="1" noChangeAspect="1"/>
           </p:cNvSpPr>
@@ -1639,8 +2588,8 @@
         </p:nvSpPr>
         <p:spPr>
           <a:xfrm>
-            <a:off x="1143225" y="685800"/>
-            <a:ext cx="4572225" cy="3429000"/>
+            <a:off x="381000" y="685800"/>
+            <a:ext cx="6096000" cy="3429000"/>
           </a:xfrm>
           <a:custGeom>
             <a:avLst/>
@@ -1676,12 +2625,12 @@
 </p:notes>
 </file>
 
-<file path=ppt/notesSlides/notesSlide7.xml><?xml version="1.0" encoding="utf-8"?>
+<file path=ppt/notesSlides/notesSlide8.xml><?xml version="1.0" encoding="utf-8"?>
 <p:notes xmlns:a="http://schemas.openxmlformats.org/drawingml/2006/main" xmlns:r="http://schemas.openxmlformats.org/officeDocument/2006/relationships" xmlns:p="http://schemas.openxmlformats.org/presentationml/2006/main" showMasterSp="0" showMasterPhAnim="0">
   <p:cSld>
     <p:spTree>
       <p:nvGrpSpPr>
-        <p:cNvPr id="1" name="Shape 150"/>
+        <p:cNvPr id="1" name="Shape 172"/>
         <p:cNvGrpSpPr/>
         <p:nvPr/>
       </p:nvGrpSpPr>
@@ -1695,7 +2644,7 @@
       </p:grpSpPr>
       <p:sp>
         <p:nvSpPr>
-          <p:cNvPr id="151" name="Google Shape;151;p7:notes"/>
+          <p:cNvPr id="173" name="Google Shape;173;p8:notes"/>
           <p:cNvSpPr txBox="1">
             <a:spLocks noGrp="1"/>
           </p:cNvSpPr>
@@ -1733,7 +2682,7 @@
       </p:sp>
       <p:sp>
         <p:nvSpPr>
-          <p:cNvPr id="152" name="Google Shape;152;p7:notes"/>
+          <p:cNvPr id="174" name="Google Shape;174;p8:notes"/>
           <p:cNvSpPr>
             <a:spLocks noGrp="1" noRot="1" noChangeAspect="1"/>
           </p:cNvSpPr>
@@ -1780,12 +2729,12 @@
 </p:notes>
 </file>
 
-<file path=ppt/notesSlides/notesSlide8.xml><?xml version="1.0" encoding="utf-8"?>
+<file path=ppt/notesSlides/notesSlide9.xml><?xml version="1.0" encoding="utf-8"?>
 <p:notes xmlns:a="http://schemas.openxmlformats.org/drawingml/2006/main" xmlns:r="http://schemas.openxmlformats.org/officeDocument/2006/relationships" xmlns:p="http://schemas.openxmlformats.org/presentationml/2006/main" showMasterSp="0" showMasterPhAnim="0">
   <p:cSld>
     <p:spTree>
       <p:nvGrpSpPr>
-        <p:cNvPr id="1" name="Shape 165"/>
+        <p:cNvPr id="1" name="Shape 188"/>
         <p:cNvGrpSpPr/>
         <p:nvPr/>
       </p:nvGrpSpPr>
@@ -1799,7 +2748,7 @@
       </p:grpSpPr>
       <p:sp>
         <p:nvSpPr>
-          <p:cNvPr id="166" name="Google Shape;166;p8:notes"/>
+          <p:cNvPr id="189" name="Google Shape;189;p9:notes"/>
           <p:cNvSpPr txBox="1">
             <a:spLocks noGrp="1"/>
           </p:cNvSpPr>
@@ -1837,7 +2786,7 @@
       </p:sp>
       <p:sp>
         <p:nvSpPr>
-          <p:cNvPr id="167" name="Google Shape;167;p8:notes"/>
+          <p:cNvPr id="190" name="Google Shape;190;p9:notes"/>
           <p:cNvSpPr>
             <a:spLocks noGrp="1" noRot="1" noChangeAspect="1"/>
           </p:cNvSpPr>
@@ -1847,112 +2796,8 @@
         </p:nvSpPr>
         <p:spPr>
           <a:xfrm>
-            <a:off x="1143225" y="685800"/>
-            <a:ext cx="4572225" cy="3429000"/>
-          </a:xfrm>
-          <a:custGeom>
-            <a:avLst/>
-            <a:gdLst/>
-            <a:ahLst/>
-            <a:cxnLst/>
-            <a:rect l="l" t="t" r="r" b="b"/>
-            <a:pathLst>
-              <a:path w="120000" h="120000" extrusionOk="0">
-                <a:moveTo>
-                  <a:pt x="0" y="0"/>
-                </a:moveTo>
-                <a:lnTo>
-                  <a:pt x="120000" y="0"/>
-                </a:lnTo>
-                <a:lnTo>
-                  <a:pt x="120000" y="120000"/>
-                </a:lnTo>
-                <a:lnTo>
-                  <a:pt x="0" y="120000"/>
-                </a:lnTo>
-                <a:close/>
-              </a:path>
-            </a:pathLst>
-          </a:custGeom>
-        </p:spPr>
-      </p:sp>
-    </p:spTree>
-  </p:cSld>
-  <p:clrMapOvr>
-    <a:masterClrMapping/>
-  </p:clrMapOvr>
-</p:notes>
-</file>
-
-<file path=ppt/notesSlides/notesSlide9.xml><?xml version="1.0" encoding="utf-8"?>
-<p:notes xmlns:a="http://schemas.openxmlformats.org/drawingml/2006/main" xmlns:r="http://schemas.openxmlformats.org/officeDocument/2006/relationships" xmlns:p="http://schemas.openxmlformats.org/presentationml/2006/main" showMasterSp="0" showMasterPhAnim="0">
-  <p:cSld>
-    <p:spTree>
-      <p:nvGrpSpPr>
-        <p:cNvPr id="1" name="Shape 180"/>
-        <p:cNvGrpSpPr/>
-        <p:nvPr/>
-      </p:nvGrpSpPr>
-      <p:grpSpPr>
-        <a:xfrm>
-          <a:off x="0" y="0"/>
-          <a:ext cx="0" cy="0"/>
-          <a:chOff x="0" y="0"/>
-          <a:chExt cx="0" cy="0"/>
-        </a:xfrm>
-      </p:grpSpPr>
-      <p:sp>
-        <p:nvSpPr>
-          <p:cNvPr id="181" name="Google Shape;181;p9:notes"/>
-          <p:cNvSpPr txBox="1">
-            <a:spLocks noGrp="1"/>
-          </p:cNvSpPr>
-          <p:nvPr>
-            <p:ph type="body" idx="1"/>
-          </p:nvPr>
-        </p:nvSpPr>
-        <p:spPr>
-          <a:xfrm>
-            <a:off x="685800" y="4343400"/>
-            <a:ext cx="5486400" cy="4114800"/>
-          </a:xfrm>
-          <a:prstGeom prst="rect">
-            <a:avLst/>
-          </a:prstGeom>
-        </p:spPr>
-        <p:txBody>
-          <a:bodyPr spcFirstLastPara="1" wrap="square" lIns="91425" tIns="91425" rIns="91425" bIns="91425" anchor="t" anchorCtr="0">
-            <a:noAutofit/>
-          </a:bodyPr>
-          <a:lstStyle/>
-          <a:p>
-            <a:pPr marL="0" lvl="0" indent="0" algn="l" rtl="0">
-              <a:spcBef>
-                <a:spcPts val="0"/>
-              </a:spcBef>
-              <a:spcAft>
-                <a:spcPts val="0"/>
-              </a:spcAft>
-              <a:buNone/>
-            </a:pPr>
-            <a:endParaRPr/>
-          </a:p>
-        </p:txBody>
-      </p:sp>
-      <p:sp>
-        <p:nvSpPr>
-          <p:cNvPr id="182" name="Google Shape;182;p9:notes"/>
-          <p:cNvSpPr>
-            <a:spLocks noGrp="1" noRot="1" noChangeAspect="1"/>
-          </p:cNvSpPr>
-          <p:nvPr>
-            <p:ph type="sldImg" idx="2"/>
-          </p:nvPr>
-        </p:nvSpPr>
-        <p:spPr>
-          <a:xfrm>
-            <a:off x="1143225" y="685800"/>
-            <a:ext cx="4572225" cy="3429000"/>
+            <a:off x="381000" y="685800"/>
+            <a:ext cx="6096000" cy="3429000"/>
           </a:xfrm>
           <a:custGeom>
             <a:avLst/>
@@ -12027,6 +12872,3976 @@
 <file path=ppt/slides/slide10.xml><?xml version="1.0" encoding="utf-8"?>
 <p:sld xmlns:a="http://schemas.openxmlformats.org/drawingml/2006/main" xmlns:r="http://schemas.openxmlformats.org/officeDocument/2006/relationships" xmlns:p="http://schemas.openxmlformats.org/presentationml/2006/main">
   <p:cSld>
+    <p:spTree>
+      <p:nvGrpSpPr>
+        <p:cNvPr id="1" name="Shape 204"/>
+        <p:cNvGrpSpPr/>
+        <p:nvPr/>
+      </p:nvGrpSpPr>
+      <p:grpSpPr>
+        <a:xfrm>
+          <a:off x="0" y="0"/>
+          <a:ext cx="0" cy="0"/>
+          <a:chOff x="0" y="0"/>
+          <a:chExt cx="0" cy="0"/>
+        </a:xfrm>
+      </p:grpSpPr>
+      <p:pic>
+        <p:nvPicPr>
+          <p:cNvPr id="205" name="Google Shape;205;p22" descr="image.png"/>
+          <p:cNvPicPr preferRelativeResize="0"/>
+          <p:nvPr/>
+        </p:nvPicPr>
+        <p:blipFill rotWithShape="1">
+          <a:blip r:embed="rId3">
+            <a:alphaModFix/>
+          </a:blip>
+          <a:srcRect/>
+          <a:stretch/>
+        </p:blipFill>
+        <p:spPr>
+          <a:xfrm>
+            <a:off x="0" y="0"/>
+            <a:ext cx="12192000" cy="6858000"/>
+          </a:xfrm>
+          <a:prstGeom prst="rect">
+            <a:avLst/>
+          </a:prstGeom>
+          <a:noFill/>
+          <a:ln>
+            <a:noFill/>
+          </a:ln>
+        </p:spPr>
+      </p:pic>
+      <p:sp>
+        <p:nvSpPr>
+          <p:cNvPr id="206" name="Google Shape;206;p22"/>
+          <p:cNvSpPr txBox="1"/>
+          <p:nvPr/>
+        </p:nvSpPr>
+        <p:spPr>
+          <a:xfrm>
+            <a:off x="571500" y="571500"/>
+            <a:ext cx="5200650" cy="586680"/>
+          </a:xfrm>
+          <a:prstGeom prst="rect">
+            <a:avLst/>
+          </a:prstGeom>
+          <a:noFill/>
+          <a:ln>
+            <a:noFill/>
+          </a:ln>
+        </p:spPr>
+        <p:txBody>
+          <a:bodyPr spcFirstLastPara="1" wrap="square" lIns="0" tIns="0" rIns="0" bIns="0" anchor="t" anchorCtr="0">
+            <a:spAutoFit/>
+          </a:bodyPr>
+          <a:lstStyle/>
+          <a:p>
+            <a:pPr marL="0" marR="0" lvl="0" indent="0" algn="l" rtl="0">
+              <a:lnSpc>
+                <a:spcPct val="120000"/>
+              </a:lnSpc>
+              <a:spcBef>
+                <a:spcPts val="0"/>
+              </a:spcBef>
+              <a:spcAft>
+                <a:spcPts val="0"/>
+              </a:spcAft>
+              <a:buNone/>
+            </a:pPr>
+            <a:r>
+              <a:rPr lang="en-US" sz="3600" b="1" i="0" u="none" strike="noStrike" cap="none">
+                <a:solidFill>
+                  <a:srgbClr val="FFFFFF"/>
+                </a:solidFill>
+                <a:latin typeface="Noto Sans JP"/>
+                <a:ea typeface="Noto Sans JP"/>
+                <a:cs typeface="Noto Sans JP"/>
+                <a:sym typeface="Noto Sans JP"/>
+              </a:rPr>
+              <a:t>最強の復旧機能</a:t>
+            </a:r>
+            <a:endParaRPr/>
+          </a:p>
+        </p:txBody>
+      </p:sp>
+      <p:sp>
+        <p:nvSpPr>
+          <p:cNvPr id="207" name="Google Shape;207;p22"/>
+          <p:cNvSpPr/>
+          <p:nvPr/>
+        </p:nvSpPr>
+        <p:spPr>
+          <a:xfrm>
+            <a:off x="571500" y="1215330"/>
+            <a:ext cx="4953000" cy="38100"/>
+          </a:xfrm>
+          <a:prstGeom prst="rect">
+            <a:avLst/>
+          </a:prstGeom>
+          <a:solidFill>
+            <a:srgbClr val="3498DB"/>
+          </a:solidFill>
+          <a:ln>
+            <a:noFill/>
+          </a:ln>
+        </p:spPr>
+        <p:txBody>
+          <a:bodyPr spcFirstLastPara="1" wrap="square" lIns="91425" tIns="45700" rIns="91425" bIns="45700" anchor="ctr" anchorCtr="0">
+            <a:noAutofit/>
+          </a:bodyPr>
+          <a:lstStyle/>
+          <a:p>
+            <a:pPr marL="0" marR="0" lvl="0" indent="0" algn="ctr" rtl="0">
+              <a:spcBef>
+                <a:spcPts val="0"/>
+              </a:spcBef>
+              <a:spcAft>
+                <a:spcPts val="0"/>
+              </a:spcAft>
+              <a:buNone/>
+            </a:pPr>
+            <a:endParaRPr sz="1800" b="0" i="0" u="none" strike="noStrike" cap="none">
+              <a:solidFill>
+                <a:schemeClr val="dk1"/>
+              </a:solidFill>
+              <a:latin typeface="Calibri"/>
+              <a:ea typeface="Calibri"/>
+              <a:cs typeface="Calibri"/>
+              <a:sym typeface="Calibri"/>
+            </a:endParaRPr>
+          </a:p>
+        </p:txBody>
+      </p:sp>
+      <p:pic>
+        <p:nvPicPr>
+          <p:cNvPr id="208" name="Google Shape;208;p22" descr="image.png"/>
+          <p:cNvPicPr preferRelativeResize="0"/>
+          <p:nvPr/>
+        </p:nvPicPr>
+        <p:blipFill rotWithShape="1">
+          <a:blip r:embed="rId4">
+            <a:alphaModFix/>
+          </a:blip>
+          <a:srcRect/>
+          <a:stretch/>
+        </p:blipFill>
+        <p:spPr>
+          <a:xfrm>
+            <a:off x="6343650" y="137037"/>
+            <a:ext cx="5683045" cy="6583926"/>
+          </a:xfrm>
+          <a:prstGeom prst="rect">
+            <a:avLst/>
+          </a:prstGeom>
+          <a:noFill/>
+          <a:ln>
+            <a:noFill/>
+          </a:ln>
+        </p:spPr>
+      </p:pic>
+      <p:sp>
+        <p:nvSpPr>
+          <p:cNvPr id="209" name="Google Shape;209;p22"/>
+          <p:cNvSpPr txBox="1"/>
+          <p:nvPr/>
+        </p:nvSpPr>
+        <p:spPr>
+          <a:xfrm>
+            <a:off x="571500" y="1253430"/>
+            <a:ext cx="5200650" cy="381000"/>
+          </a:xfrm>
+          <a:prstGeom prst="rect">
+            <a:avLst/>
+          </a:prstGeom>
+          <a:noFill/>
+          <a:ln>
+            <a:noFill/>
+          </a:ln>
+        </p:spPr>
+        <p:txBody>
+          <a:bodyPr spcFirstLastPara="1" wrap="square" lIns="0" tIns="0" rIns="0" bIns="0" anchor="t" anchorCtr="0">
+            <a:spAutoFit/>
+          </a:bodyPr>
+          <a:lstStyle/>
+          <a:p>
+            <a:pPr marL="0" marR="0" lvl="0" indent="0" algn="l" rtl="0">
+              <a:spcBef>
+                <a:spcPts val="0"/>
+              </a:spcBef>
+              <a:spcAft>
+                <a:spcPts val="0"/>
+              </a:spcAft>
+              <a:buNone/>
+            </a:pPr>
+            <a:r>
+              <a:rPr lang="en-US" sz="2100" b="1" i="0" u="none" strike="noStrike" cap="none">
+                <a:solidFill>
+                  <a:srgbClr val="E74C3C"/>
+                </a:solidFill>
+                <a:latin typeface="Noto Sans JP"/>
+                <a:ea typeface="Noto Sans JP"/>
+                <a:cs typeface="Noto Sans JP"/>
+                <a:sym typeface="Noto Sans JP"/>
+              </a:rPr>
+              <a:t>もしトラブルが起きても大丈夫！</a:t>
+            </a:r>
+            <a:endParaRPr/>
+          </a:p>
+        </p:txBody>
+      </p:sp>
+      <p:sp>
+        <p:nvSpPr>
+          <p:cNvPr id="210" name="Google Shape;210;p22"/>
+          <p:cNvSpPr txBox="1"/>
+          <p:nvPr/>
+        </p:nvSpPr>
+        <p:spPr>
+          <a:xfrm>
+            <a:off x="571500" y="1685925"/>
+            <a:ext cx="4953000" cy="1675804"/>
+          </a:xfrm>
+          <a:prstGeom prst="rect">
+            <a:avLst/>
+          </a:prstGeom>
+          <a:noFill/>
+          <a:ln>
+            <a:noFill/>
+          </a:ln>
+        </p:spPr>
+        <p:txBody>
+          <a:bodyPr spcFirstLastPara="1" wrap="square" lIns="0" tIns="0" rIns="0" bIns="0" anchor="t" anchorCtr="0">
+            <a:spAutoFit/>
+          </a:bodyPr>
+          <a:lstStyle/>
+          <a:p>
+            <a:pPr marL="0" marR="0" lvl="0" indent="0" algn="l" rtl="0">
+              <a:lnSpc>
+                <a:spcPct val="146666"/>
+              </a:lnSpc>
+              <a:spcBef>
+                <a:spcPts val="0"/>
+              </a:spcBef>
+              <a:spcAft>
+                <a:spcPts val="0"/>
+              </a:spcAft>
+              <a:buNone/>
+            </a:pPr>
+            <a:r>
+              <a:rPr lang="en-US" sz="1650" b="1" i="0" u="none" strike="noStrike" cap="none" dirty="0" err="1">
+                <a:solidFill>
+                  <a:srgbClr val="E0E0E0"/>
+                </a:solidFill>
+                <a:latin typeface="Noto Sans JP"/>
+                <a:ea typeface="Noto Sans JP"/>
+                <a:cs typeface="Noto Sans JP"/>
+                <a:sym typeface="Noto Sans JP"/>
+              </a:rPr>
+              <a:t>PCがフリーズした！画面を誤って閉じた</a:t>
+            </a:r>
+            <a:r>
+              <a:rPr lang="en-US" sz="1650" b="1" i="0" u="none" strike="noStrike" cap="none" dirty="0">
+                <a:solidFill>
+                  <a:srgbClr val="E0E0E0"/>
+                </a:solidFill>
+                <a:latin typeface="Noto Sans JP"/>
+                <a:ea typeface="Noto Sans JP"/>
+                <a:cs typeface="Noto Sans JP"/>
+                <a:sym typeface="Noto Sans JP"/>
+              </a:rPr>
+              <a:t>！</a:t>
+            </a:r>
+            <a:br>
+              <a:rPr lang="en-US" sz="1800" b="0" i="0" u="none" strike="noStrike" cap="none" dirty="0">
+                <a:solidFill>
+                  <a:schemeClr val="dk1"/>
+                </a:solidFill>
+                <a:latin typeface="Calibri"/>
+                <a:ea typeface="Calibri"/>
+                <a:cs typeface="Calibri"/>
+                <a:sym typeface="Calibri"/>
+              </a:rPr>
+            </a:br>
+            <a:r>
+              <a:rPr lang="en-US" sz="1650" b="0" i="0" u="none" strike="noStrike" cap="none" dirty="0">
+                <a:solidFill>
+                  <a:srgbClr val="E0E0E0"/>
+                </a:solidFill>
+                <a:latin typeface="Noto Sans JP"/>
+                <a:ea typeface="Noto Sans JP"/>
+                <a:cs typeface="Noto Sans JP"/>
+                <a:sym typeface="Noto Sans JP"/>
+              </a:rPr>
+              <a:t> ➡ ブラウザを「更新（F5）」してください。全データはクラウドに0.1秒単位で自動保存されているため、フリーズした瞬間の状態からノーダメージで復旧できます。</a:t>
+            </a:r>
+            <a:endParaRPr dirty="0"/>
+          </a:p>
+        </p:txBody>
+      </p:sp>
+      <p:sp>
+        <p:nvSpPr>
+          <p:cNvPr id="211" name="Google Shape;211;p22"/>
+          <p:cNvSpPr txBox="1"/>
+          <p:nvPr/>
+        </p:nvSpPr>
+        <p:spPr>
+          <a:xfrm>
+            <a:off x="571500" y="3575893"/>
+            <a:ext cx="4953000" cy="1340643"/>
+          </a:xfrm>
+          <a:prstGeom prst="rect">
+            <a:avLst/>
+          </a:prstGeom>
+          <a:noFill/>
+          <a:ln>
+            <a:noFill/>
+          </a:ln>
+        </p:spPr>
+        <p:txBody>
+          <a:bodyPr spcFirstLastPara="1" wrap="square" lIns="0" tIns="0" rIns="0" bIns="0" anchor="t" anchorCtr="0">
+            <a:spAutoFit/>
+          </a:bodyPr>
+          <a:lstStyle/>
+          <a:p>
+            <a:pPr marL="0" marR="0" lvl="0" indent="0" algn="l" rtl="0">
+              <a:lnSpc>
+                <a:spcPct val="146666"/>
+              </a:lnSpc>
+              <a:spcBef>
+                <a:spcPts val="0"/>
+              </a:spcBef>
+              <a:spcAft>
+                <a:spcPts val="0"/>
+              </a:spcAft>
+              <a:buNone/>
+            </a:pPr>
+            <a:r>
+              <a:rPr lang="en-US" sz="1650" b="1" i="0" u="none" strike="noStrike" cap="none" dirty="0" err="1">
+                <a:solidFill>
+                  <a:srgbClr val="E0E0E0"/>
+                </a:solidFill>
+                <a:latin typeface="Noto Sans JP"/>
+                <a:ea typeface="Noto Sans JP"/>
+                <a:cs typeface="Noto Sans JP"/>
+                <a:sym typeface="Noto Sans JP"/>
+              </a:rPr>
+              <a:t>参加者がスマホの画面を閉じてしまった</a:t>
+            </a:r>
+            <a:r>
+              <a:rPr lang="en-US" sz="1650" b="1" i="0" u="none" strike="noStrike" cap="none" dirty="0">
+                <a:solidFill>
+                  <a:srgbClr val="E0E0E0"/>
+                </a:solidFill>
+                <a:latin typeface="Noto Sans JP"/>
+                <a:ea typeface="Noto Sans JP"/>
+                <a:cs typeface="Noto Sans JP"/>
+                <a:sym typeface="Noto Sans JP"/>
+              </a:rPr>
+              <a:t>！</a:t>
+            </a:r>
+            <a:br>
+              <a:rPr lang="en-US" sz="1800" b="0" i="0" u="none" strike="noStrike" cap="none" dirty="0">
+                <a:solidFill>
+                  <a:schemeClr val="dk1"/>
+                </a:solidFill>
+                <a:latin typeface="Calibri"/>
+                <a:ea typeface="Calibri"/>
+                <a:cs typeface="Calibri"/>
+                <a:sym typeface="Calibri"/>
+              </a:rPr>
+            </a:br>
+            <a:r>
+              <a:rPr lang="en-US" sz="1650" b="0" i="0" u="none" strike="noStrike" cap="none" dirty="0">
+                <a:solidFill>
+                  <a:srgbClr val="E0E0E0"/>
+                </a:solidFill>
+                <a:latin typeface="Noto Sans JP"/>
+                <a:ea typeface="Noto Sans JP"/>
+                <a:cs typeface="Noto Sans JP"/>
+                <a:sym typeface="Noto Sans JP"/>
+              </a:rPr>
+              <a:t> ➡ もう一度QRコードを読み込ませてください。スマホ内にIDが記憶されているため、名前入力不要で元の得点を持ったままシームレスに復帰できます。</a:t>
+            </a:r>
+            <a:endParaRPr dirty="0"/>
+          </a:p>
+        </p:txBody>
+      </p:sp>
+      <p:sp>
+        <p:nvSpPr>
+          <p:cNvPr id="212" name="Google Shape;212;p22"/>
+          <p:cNvSpPr txBox="1"/>
+          <p:nvPr/>
+        </p:nvSpPr>
+        <p:spPr>
+          <a:xfrm>
+            <a:off x="571500" y="5172075"/>
+            <a:ext cx="4953000" cy="1006971"/>
+          </a:xfrm>
+          <a:prstGeom prst="rect">
+            <a:avLst/>
+          </a:prstGeom>
+          <a:noFill/>
+          <a:ln>
+            <a:noFill/>
+          </a:ln>
+        </p:spPr>
+        <p:txBody>
+          <a:bodyPr spcFirstLastPara="1" wrap="square" lIns="0" tIns="0" rIns="0" bIns="0" anchor="t" anchorCtr="0">
+            <a:spAutoFit/>
+          </a:bodyPr>
+          <a:lstStyle/>
+          <a:p>
+            <a:pPr marL="0" marR="0" lvl="0" indent="0" algn="l" rtl="0">
+              <a:lnSpc>
+                <a:spcPct val="146666"/>
+              </a:lnSpc>
+              <a:spcBef>
+                <a:spcPts val="0"/>
+              </a:spcBef>
+              <a:spcAft>
+                <a:spcPts val="0"/>
+              </a:spcAft>
+              <a:buNone/>
+            </a:pPr>
+            <a:r>
+              <a:rPr lang="en-US" sz="1650" b="1" i="0" u="none" strike="noStrike" cap="none" dirty="0" err="1">
+                <a:solidFill>
+                  <a:srgbClr val="E0E0E0"/>
+                </a:solidFill>
+                <a:latin typeface="Noto Sans JP"/>
+                <a:ea typeface="Noto Sans JP"/>
+                <a:cs typeface="Noto Sans JP"/>
+                <a:sym typeface="Noto Sans JP"/>
+              </a:rPr>
+              <a:t>司会が「次へ</a:t>
+            </a:r>
+            <a:r>
+              <a:rPr lang="en-US" sz="1650" b="1" i="0" u="none" strike="noStrike" cap="none" dirty="0">
+                <a:solidFill>
+                  <a:srgbClr val="E0E0E0"/>
+                </a:solidFill>
+                <a:latin typeface="Noto Sans JP"/>
+                <a:ea typeface="Noto Sans JP"/>
+                <a:cs typeface="Noto Sans JP"/>
+                <a:sym typeface="Noto Sans JP"/>
+              </a:rPr>
+              <a:t>」「</a:t>
+            </a:r>
+            <a:r>
+              <a:rPr lang="en-US" sz="1650" b="1" i="0" u="none" strike="noStrike" cap="none" dirty="0" err="1">
+                <a:solidFill>
+                  <a:srgbClr val="E0E0E0"/>
+                </a:solidFill>
+                <a:latin typeface="Noto Sans JP"/>
+                <a:ea typeface="Noto Sans JP"/>
+                <a:cs typeface="Noto Sans JP"/>
+                <a:sym typeface="Noto Sans JP"/>
+              </a:rPr>
+              <a:t>戻る」を押し間違えた</a:t>
+            </a:r>
+            <a:r>
+              <a:rPr lang="en-US" sz="1650" b="1" i="0" u="none" strike="noStrike" cap="none" dirty="0">
+                <a:solidFill>
+                  <a:srgbClr val="E0E0E0"/>
+                </a:solidFill>
+                <a:latin typeface="Noto Sans JP"/>
+                <a:ea typeface="Noto Sans JP"/>
+                <a:cs typeface="Noto Sans JP"/>
+                <a:sym typeface="Noto Sans JP"/>
+              </a:rPr>
+              <a:t>！</a:t>
+            </a:r>
+            <a:br>
+              <a:rPr lang="en-US" sz="1800" b="0" i="0" u="none" strike="noStrike" cap="none" dirty="0">
+                <a:solidFill>
+                  <a:schemeClr val="dk1"/>
+                </a:solidFill>
+                <a:latin typeface="Calibri"/>
+                <a:ea typeface="Calibri"/>
+                <a:cs typeface="Calibri"/>
+                <a:sym typeface="Calibri"/>
+              </a:rPr>
+            </a:br>
+            <a:r>
+              <a:rPr lang="en-US" sz="1650" b="0" i="0" u="none" strike="noStrike" cap="none" dirty="0">
+                <a:solidFill>
+                  <a:srgbClr val="E0E0E0"/>
+                </a:solidFill>
+                <a:latin typeface="Noto Sans JP"/>
+                <a:ea typeface="Noto Sans JP"/>
+                <a:cs typeface="Noto Sans JP"/>
+                <a:sym typeface="Noto Sans JP"/>
+              </a:rPr>
+              <a:t> ➡ 焦らず正しい問題画面に戻してください。システムは毎回ゼロから点数を再計算するため、点数が二重に入ったりバグったりすることはありません。</a:t>
+            </a:r>
+            <a:endParaRPr dirty="0"/>
+          </a:p>
+        </p:txBody>
+      </p:sp>
+    </p:spTree>
+  </p:cSld>
+  <p:clrMapOvr>
+    <a:masterClrMapping/>
+  </p:clrMapOvr>
+</p:sld>
+</file>
+
+<file path=ppt/slides/slide11.xml><?xml version="1.0" encoding="utf-8"?>
+<p:sld xmlns:a="http://schemas.openxmlformats.org/drawingml/2006/main" xmlns:r="http://schemas.openxmlformats.org/officeDocument/2006/relationships" xmlns:p="http://schemas.openxmlformats.org/presentationml/2006/main">
+  <p:cSld>
+    <p:bg>
+      <p:bgPr>
+        <a:solidFill>
+          <a:srgbClr val="1E293B"/>
+        </a:solidFill>
+        <a:effectLst/>
+      </p:bgPr>
+    </p:bg>
+    <p:spTree>
+      <p:nvGrpSpPr>
+        <p:cNvPr id="1" name="Shape 145"/>
+        <p:cNvGrpSpPr/>
+        <p:nvPr/>
+      </p:nvGrpSpPr>
+      <p:grpSpPr>
+        <a:xfrm>
+          <a:off x="0" y="0"/>
+          <a:ext cx="0" cy="0"/>
+          <a:chOff x="0" y="0"/>
+          <a:chExt cx="0" cy="0"/>
+        </a:xfrm>
+      </p:grpSpPr>
+      <p:pic>
+        <p:nvPicPr>
+          <p:cNvPr id="146" name="Google Shape;146;p18" descr="image.png"/>
+          <p:cNvPicPr preferRelativeResize="0"/>
+          <p:nvPr/>
+        </p:nvPicPr>
+        <p:blipFill rotWithShape="1">
+          <a:blip r:embed="rId3">
+            <a:alphaModFix/>
+          </a:blip>
+          <a:srcRect/>
+          <a:stretch/>
+        </p:blipFill>
+        <p:spPr>
+          <a:xfrm>
+            <a:off x="0" y="0"/>
+            <a:ext cx="12192000" cy="6858000"/>
+          </a:xfrm>
+          <a:prstGeom prst="rect">
+            <a:avLst/>
+          </a:prstGeom>
+          <a:noFill/>
+          <a:ln>
+            <a:noFill/>
+          </a:ln>
+        </p:spPr>
+      </p:pic>
+      <p:sp>
+        <p:nvSpPr>
+          <p:cNvPr id="147" name="Google Shape;147;p18"/>
+          <p:cNvSpPr/>
+          <p:nvPr/>
+        </p:nvSpPr>
+        <p:spPr>
+          <a:xfrm>
+            <a:off x="5524500" y="2386905"/>
+            <a:ext cx="1143000" cy="57150"/>
+          </a:xfrm>
+          <a:prstGeom prst="rect">
+            <a:avLst/>
+          </a:prstGeom>
+          <a:solidFill>
+            <a:srgbClr val="10B981"/>
+          </a:solidFill>
+          <a:ln>
+            <a:noFill/>
+          </a:ln>
+        </p:spPr>
+        <p:txBody>
+          <a:bodyPr spcFirstLastPara="1" wrap="square" lIns="91425" tIns="45700" rIns="91425" bIns="45700" anchor="ctr" anchorCtr="0">
+            <a:noAutofit/>
+          </a:bodyPr>
+          <a:lstStyle/>
+          <a:p>
+            <a:pPr marL="0" marR="0" lvl="0" indent="0" algn="ctr" rtl="0">
+              <a:spcBef>
+                <a:spcPts val="0"/>
+              </a:spcBef>
+              <a:spcAft>
+                <a:spcPts val="0"/>
+              </a:spcAft>
+              <a:buNone/>
+            </a:pPr>
+            <a:endParaRPr sz="1800" b="0" i="0" u="none" strike="noStrike" cap="none">
+              <a:solidFill>
+                <a:schemeClr val="dk1"/>
+              </a:solidFill>
+              <a:latin typeface="Calibri"/>
+              <a:ea typeface="Calibri"/>
+              <a:cs typeface="Calibri"/>
+              <a:sym typeface="Calibri"/>
+            </a:endParaRPr>
+          </a:p>
+        </p:txBody>
+      </p:sp>
+      <p:sp>
+        <p:nvSpPr>
+          <p:cNvPr id="148" name="Google Shape;148;p18"/>
+          <p:cNvSpPr txBox="1"/>
+          <p:nvPr/>
+        </p:nvSpPr>
+        <p:spPr>
+          <a:xfrm>
+            <a:off x="295275" y="2729805"/>
+            <a:ext cx="11601450" cy="1143000"/>
+          </a:xfrm>
+          <a:prstGeom prst="rect">
+            <a:avLst/>
+          </a:prstGeom>
+          <a:noFill/>
+          <a:ln>
+            <a:noFill/>
+          </a:ln>
+        </p:spPr>
+        <p:txBody>
+          <a:bodyPr spcFirstLastPara="1" wrap="square" lIns="0" tIns="0" rIns="0" bIns="0" anchor="t" anchorCtr="0">
+            <a:spAutoFit/>
+          </a:bodyPr>
+          <a:lstStyle/>
+          <a:p>
+            <a:pPr marL="0" marR="0" lvl="0" indent="0" algn="ctr" rtl="0">
+              <a:spcBef>
+                <a:spcPts val="0"/>
+              </a:spcBef>
+              <a:spcAft>
+                <a:spcPts val="0"/>
+              </a:spcAft>
+              <a:buNone/>
+            </a:pPr>
+            <a:r>
+              <a:rPr lang="en-US" sz="6000" b="1" i="0" u="none" strike="noStrike" cap="none">
+                <a:solidFill>
+                  <a:srgbClr val="F8FAFC"/>
+                </a:solidFill>
+                <a:latin typeface="Poppins"/>
+                <a:ea typeface="Poppins"/>
+                <a:cs typeface="Poppins"/>
+                <a:sym typeface="Poppins"/>
+              </a:rPr>
+              <a:t>Phase 2: 本番運営</a:t>
+            </a:r>
+            <a:endParaRPr/>
+          </a:p>
+        </p:txBody>
+      </p:sp>
+      <p:sp>
+        <p:nvSpPr>
+          <p:cNvPr id="149" name="Google Shape;149;p18"/>
+          <p:cNvSpPr txBox="1"/>
+          <p:nvPr/>
+        </p:nvSpPr>
+        <p:spPr>
+          <a:xfrm>
+            <a:off x="571500" y="4063305"/>
+            <a:ext cx="11049000" cy="426690"/>
+          </a:xfrm>
+          <a:prstGeom prst="rect">
+            <a:avLst/>
+          </a:prstGeom>
+          <a:noFill/>
+          <a:ln>
+            <a:noFill/>
+          </a:ln>
+        </p:spPr>
+        <p:txBody>
+          <a:bodyPr spcFirstLastPara="1" wrap="square" lIns="0" tIns="0" rIns="0" bIns="0" anchor="t" anchorCtr="0">
+            <a:spAutoFit/>
+          </a:bodyPr>
+          <a:lstStyle/>
+          <a:p>
+            <a:pPr marL="0" marR="0" lvl="0" indent="0" algn="ctr" rtl="0">
+              <a:lnSpc>
+                <a:spcPct val="159952"/>
+              </a:lnSpc>
+              <a:spcBef>
+                <a:spcPts val="0"/>
+              </a:spcBef>
+              <a:spcAft>
+                <a:spcPts val="0"/>
+              </a:spcAft>
+              <a:buNone/>
+            </a:pPr>
+            <a:r>
+              <a:rPr lang="en-US" sz="2100" b="0" i="0" u="none" strike="noStrike" cap="none">
+                <a:solidFill>
+                  <a:srgbClr val="94A3B8"/>
+                </a:solidFill>
+                <a:latin typeface="Lato"/>
+                <a:ea typeface="Lato"/>
+                <a:cs typeface="Lato"/>
+                <a:sym typeface="Lato"/>
+              </a:rPr>
+              <a:t>受付から結果発表まで</a:t>
+            </a:r>
+            <a:endParaRPr/>
+          </a:p>
+        </p:txBody>
+      </p:sp>
+    </p:spTree>
+  </p:cSld>
+  <p:clrMapOvr>
+    <a:masterClrMapping/>
+  </p:clrMapOvr>
+</p:sld>
+</file>
+
+<file path=ppt/slides/slide12.xml><?xml version="1.0" encoding="utf-8"?>
+<p:sld xmlns:a="http://schemas.openxmlformats.org/drawingml/2006/main" xmlns:r="http://schemas.openxmlformats.org/officeDocument/2006/relationships" xmlns:p="http://schemas.openxmlformats.org/presentationml/2006/main">
+  <p:cSld>
+    <p:bg>
+      <p:bgPr>
+        <a:solidFill>
+          <a:srgbClr val="1E293B"/>
+        </a:solidFill>
+        <a:effectLst/>
+      </p:bgPr>
+    </p:bg>
+    <p:spTree>
+      <p:nvGrpSpPr>
+        <p:cNvPr id="1" name="Shape 153"/>
+        <p:cNvGrpSpPr/>
+        <p:nvPr/>
+      </p:nvGrpSpPr>
+      <p:grpSpPr>
+        <a:xfrm>
+          <a:off x="0" y="0"/>
+          <a:ext cx="0" cy="0"/>
+          <a:chOff x="0" y="0"/>
+          <a:chExt cx="0" cy="0"/>
+        </a:xfrm>
+      </p:grpSpPr>
+      <p:pic>
+        <p:nvPicPr>
+          <p:cNvPr id="154" name="Google Shape;154;p19" descr="image.png"/>
+          <p:cNvPicPr preferRelativeResize="0"/>
+          <p:nvPr/>
+        </p:nvPicPr>
+        <p:blipFill rotWithShape="1">
+          <a:blip r:embed="rId3">
+            <a:alphaModFix/>
+          </a:blip>
+          <a:srcRect/>
+          <a:stretch/>
+        </p:blipFill>
+        <p:spPr>
+          <a:xfrm>
+            <a:off x="0" y="0"/>
+            <a:ext cx="12192000" cy="6858000"/>
+          </a:xfrm>
+          <a:prstGeom prst="rect">
+            <a:avLst/>
+          </a:prstGeom>
+          <a:noFill/>
+          <a:ln>
+            <a:noFill/>
+          </a:ln>
+        </p:spPr>
+      </p:pic>
+      <p:sp>
+        <p:nvSpPr>
+          <p:cNvPr id="157" name="Google Shape;157;p19"/>
+          <p:cNvSpPr txBox="1"/>
+          <p:nvPr/>
+        </p:nvSpPr>
+        <p:spPr>
+          <a:xfrm>
+            <a:off x="1047750" y="2878633"/>
+            <a:ext cx="4762500" cy="365670"/>
+          </a:xfrm>
+          <a:prstGeom prst="rect">
+            <a:avLst/>
+          </a:prstGeom>
+          <a:noFill/>
+          <a:ln>
+            <a:noFill/>
+          </a:ln>
+        </p:spPr>
+        <p:txBody>
+          <a:bodyPr spcFirstLastPara="1" wrap="square" lIns="0" tIns="0" rIns="0" bIns="0" anchor="t" anchorCtr="0">
+            <a:spAutoFit/>
+          </a:bodyPr>
+          <a:lstStyle/>
+          <a:p>
+            <a:pPr marL="0" marR="0" lvl="0" indent="0" algn="l" rtl="0">
+              <a:lnSpc>
+                <a:spcPct val="159944"/>
+              </a:lnSpc>
+              <a:spcBef>
+                <a:spcPts val="0"/>
+              </a:spcBef>
+              <a:spcAft>
+                <a:spcPts val="0"/>
+              </a:spcAft>
+              <a:buNone/>
+            </a:pPr>
+            <a:r>
+              <a:rPr lang="en-US" sz="1800" b="0" i="0" u="none" strike="noStrike" cap="none">
+                <a:solidFill>
+                  <a:srgbClr val="CBD5E1"/>
+                </a:solidFill>
+                <a:latin typeface="Lato"/>
+                <a:ea typeface="Lato"/>
+                <a:cs typeface="Lato"/>
+                <a:sym typeface="Lato"/>
+              </a:rPr>
+              <a:t>スクリーンにQRコードを表示。</a:t>
+            </a:r>
+            <a:endParaRPr/>
+          </a:p>
+        </p:txBody>
+      </p:sp>
+      <p:sp>
+        <p:nvSpPr>
+          <p:cNvPr id="158" name="Google Shape;158;p19"/>
+          <p:cNvSpPr txBox="1"/>
+          <p:nvPr/>
+        </p:nvSpPr>
+        <p:spPr>
+          <a:xfrm>
+            <a:off x="1047750" y="3530054"/>
+            <a:ext cx="4762500" cy="365670"/>
+          </a:xfrm>
+          <a:prstGeom prst="rect">
+            <a:avLst/>
+          </a:prstGeom>
+          <a:noFill/>
+          <a:ln>
+            <a:noFill/>
+          </a:ln>
+        </p:spPr>
+        <p:txBody>
+          <a:bodyPr spcFirstLastPara="1" wrap="square" lIns="0" tIns="0" rIns="0" bIns="0" anchor="t" anchorCtr="0">
+            <a:spAutoFit/>
+          </a:bodyPr>
+          <a:lstStyle/>
+          <a:p>
+            <a:pPr marL="0" marR="0" lvl="0" indent="0" algn="l" rtl="0">
+              <a:lnSpc>
+                <a:spcPct val="159944"/>
+              </a:lnSpc>
+              <a:spcBef>
+                <a:spcPts val="0"/>
+              </a:spcBef>
+              <a:spcAft>
+                <a:spcPts val="0"/>
+              </a:spcAft>
+              <a:buNone/>
+            </a:pPr>
+            <a:r>
+              <a:rPr lang="en-US" sz="1800" b="0" i="0" u="none" strike="noStrike" cap="none">
+                <a:solidFill>
+                  <a:srgbClr val="CBD5E1"/>
+                </a:solidFill>
+                <a:latin typeface="Lato"/>
+                <a:ea typeface="Lato"/>
+                <a:cs typeface="Lato"/>
+                <a:sym typeface="Lato"/>
+              </a:rPr>
+              <a:t>参加者は名前を入力し「参加」ボタン。</a:t>
+            </a:r>
+            <a:endParaRPr/>
+          </a:p>
+        </p:txBody>
+      </p:sp>
+      <p:sp>
+        <p:nvSpPr>
+          <p:cNvPr id="159" name="Google Shape;159;p19"/>
+          <p:cNvSpPr txBox="1"/>
+          <p:nvPr/>
+        </p:nvSpPr>
+        <p:spPr>
+          <a:xfrm>
+            <a:off x="1047750" y="4181475"/>
+            <a:ext cx="4762500" cy="731341"/>
+          </a:xfrm>
+          <a:prstGeom prst="rect">
+            <a:avLst/>
+          </a:prstGeom>
+          <a:noFill/>
+          <a:ln>
+            <a:noFill/>
+          </a:ln>
+        </p:spPr>
+        <p:txBody>
+          <a:bodyPr spcFirstLastPara="1" wrap="square" lIns="0" tIns="0" rIns="0" bIns="0" anchor="t" anchorCtr="0">
+            <a:spAutoFit/>
+          </a:bodyPr>
+          <a:lstStyle/>
+          <a:p>
+            <a:pPr marL="0" marR="0" lvl="0" indent="0" algn="l" rtl="0">
+              <a:lnSpc>
+                <a:spcPct val="159944"/>
+              </a:lnSpc>
+              <a:spcBef>
+                <a:spcPts val="0"/>
+              </a:spcBef>
+              <a:spcAft>
+                <a:spcPts val="0"/>
+              </a:spcAft>
+              <a:buNone/>
+            </a:pPr>
+            <a:r>
+              <a:rPr lang="en-US" sz="1800" b="0" i="0" u="none" strike="noStrike" cap="none">
+                <a:solidFill>
+                  <a:srgbClr val="CBD5E1"/>
+                </a:solidFill>
+                <a:latin typeface="Lato"/>
+                <a:ea typeface="Lato"/>
+                <a:cs typeface="Lato"/>
+                <a:sym typeface="Lato"/>
+              </a:rPr>
+              <a:t>会場画面(m.html)でリアルタイムに参加人数と名前を確認できます。</a:t>
+            </a:r>
+            <a:endParaRPr/>
+          </a:p>
+        </p:txBody>
+      </p:sp>
+      <p:pic>
+        <p:nvPicPr>
+          <p:cNvPr id="160" name="Google Shape;160;p19" descr="image.png"/>
+          <p:cNvPicPr preferRelativeResize="0"/>
+          <p:nvPr/>
+        </p:nvPicPr>
+        <p:blipFill rotWithShape="1">
+          <a:blip r:embed="rId4">
+            <a:alphaModFix/>
+          </a:blip>
+          <a:srcRect/>
+          <a:stretch/>
+        </p:blipFill>
+        <p:spPr>
+          <a:xfrm>
+            <a:off x="571500" y="2921496"/>
+            <a:ext cx="247650" cy="295275"/>
+          </a:xfrm>
+          <a:prstGeom prst="rect">
+            <a:avLst/>
+          </a:prstGeom>
+          <a:noFill/>
+          <a:ln>
+            <a:noFill/>
+          </a:ln>
+        </p:spPr>
+      </p:pic>
+      <p:pic>
+        <p:nvPicPr>
+          <p:cNvPr id="161" name="Google Shape;161;p19" descr="image.png"/>
+          <p:cNvPicPr preferRelativeResize="0"/>
+          <p:nvPr/>
+        </p:nvPicPr>
+        <p:blipFill rotWithShape="1">
+          <a:blip r:embed="rId5">
+            <a:alphaModFix/>
+          </a:blip>
+          <a:srcRect/>
+          <a:stretch/>
+        </p:blipFill>
+        <p:spPr>
+          <a:xfrm>
+            <a:off x="571500" y="3572916"/>
+            <a:ext cx="361950" cy="295275"/>
+          </a:xfrm>
+          <a:prstGeom prst="rect">
+            <a:avLst/>
+          </a:prstGeom>
+          <a:noFill/>
+          <a:ln>
+            <a:noFill/>
+          </a:ln>
+        </p:spPr>
+      </p:pic>
+      <p:pic>
+        <p:nvPicPr>
+          <p:cNvPr id="162" name="Google Shape;162;p19" descr="image.png"/>
+          <p:cNvPicPr preferRelativeResize="0"/>
+          <p:nvPr/>
+        </p:nvPicPr>
+        <p:blipFill rotWithShape="1">
+          <a:blip r:embed="rId6">
+            <a:alphaModFix/>
+          </a:blip>
+          <a:srcRect/>
+          <a:stretch/>
+        </p:blipFill>
+        <p:spPr>
+          <a:xfrm>
+            <a:off x="571500" y="4224337"/>
+            <a:ext cx="285750" cy="295275"/>
+          </a:xfrm>
+          <a:prstGeom prst="rect">
+            <a:avLst/>
+          </a:prstGeom>
+          <a:noFill/>
+          <a:ln>
+            <a:noFill/>
+          </a:ln>
+        </p:spPr>
+      </p:pic>
+      <p:sp>
+        <p:nvSpPr>
+          <p:cNvPr id="163" name="Google Shape;163;p19"/>
+          <p:cNvSpPr txBox="1"/>
+          <p:nvPr/>
+        </p:nvSpPr>
+        <p:spPr>
+          <a:xfrm>
+            <a:off x="800100" y="571500"/>
+            <a:ext cx="11361420" cy="685800"/>
+          </a:xfrm>
+          <a:prstGeom prst="rect">
+            <a:avLst/>
+          </a:prstGeom>
+          <a:noFill/>
+          <a:ln>
+            <a:noFill/>
+          </a:ln>
+        </p:spPr>
+        <p:txBody>
+          <a:bodyPr spcFirstLastPara="1" wrap="square" lIns="0" tIns="0" rIns="0" bIns="0" anchor="t" anchorCtr="0">
+            <a:spAutoFit/>
+          </a:bodyPr>
+          <a:lstStyle/>
+          <a:p>
+            <a:pPr marL="0" marR="0" lvl="0" indent="0" algn="l" rtl="0">
+              <a:spcBef>
+                <a:spcPts val="0"/>
+              </a:spcBef>
+              <a:spcAft>
+                <a:spcPts val="0"/>
+              </a:spcAft>
+              <a:buNone/>
+            </a:pPr>
+            <a:r>
+              <a:rPr lang="en-US" sz="3600" b="0" i="0" u="none" strike="noStrike" cap="none">
+                <a:solidFill>
+                  <a:srgbClr val="F8FAFC"/>
+                </a:solidFill>
+                <a:latin typeface="Poppins SemiBold"/>
+                <a:ea typeface="Poppins SemiBold"/>
+                <a:cs typeface="Poppins SemiBold"/>
+                <a:sym typeface="Poppins SemiBold"/>
+              </a:rPr>
+              <a:t>参加者の受付</a:t>
+            </a:r>
+            <a:endParaRPr/>
+          </a:p>
+        </p:txBody>
+      </p:sp>
+      <p:sp>
+        <p:nvSpPr>
+          <p:cNvPr id="164" name="Google Shape;164;p19"/>
+          <p:cNvSpPr/>
+          <p:nvPr/>
+        </p:nvSpPr>
+        <p:spPr>
+          <a:xfrm>
+            <a:off x="571500" y="571500"/>
+            <a:ext cx="76200" cy="685800"/>
+          </a:xfrm>
+          <a:prstGeom prst="rect">
+            <a:avLst/>
+          </a:prstGeom>
+          <a:solidFill>
+            <a:srgbClr val="10B981"/>
+          </a:solidFill>
+          <a:ln>
+            <a:noFill/>
+          </a:ln>
+        </p:spPr>
+        <p:txBody>
+          <a:bodyPr spcFirstLastPara="1" wrap="square" lIns="91425" tIns="45700" rIns="91425" bIns="45700" anchor="ctr" anchorCtr="0">
+            <a:noAutofit/>
+          </a:bodyPr>
+          <a:lstStyle/>
+          <a:p>
+            <a:pPr marL="0" marR="0" lvl="0" indent="0" algn="ctr" rtl="0">
+              <a:spcBef>
+                <a:spcPts val="0"/>
+              </a:spcBef>
+              <a:spcAft>
+                <a:spcPts val="0"/>
+              </a:spcAft>
+              <a:buNone/>
+            </a:pPr>
+            <a:endParaRPr sz="1800" b="0" i="0" u="none" strike="noStrike" cap="none">
+              <a:solidFill>
+                <a:schemeClr val="dk1"/>
+              </a:solidFill>
+              <a:latin typeface="Calibri"/>
+              <a:ea typeface="Calibri"/>
+              <a:cs typeface="Calibri"/>
+              <a:sym typeface="Calibri"/>
+            </a:endParaRPr>
+          </a:p>
+        </p:txBody>
+      </p:sp>
+      <p:pic>
+        <p:nvPicPr>
+          <p:cNvPr id="3" name="図 2">
+            <a:extLst>
+              <a:ext uri="{FF2B5EF4-FFF2-40B4-BE49-F238E27FC236}">
+                <a16:creationId xmlns:a16="http://schemas.microsoft.com/office/drawing/2014/main" id="{B33E81C7-F893-4C2F-5850-10A193796C4D}"/>
+              </a:ext>
+            </a:extLst>
+          </p:cNvPr>
+          <p:cNvPicPr>
+            <a:picLocks noChangeAspect="1"/>
+          </p:cNvPicPr>
+          <p:nvPr/>
+        </p:nvPicPr>
+        <p:blipFill>
+          <a:blip r:embed="rId7"/>
+          <a:stretch>
+            <a:fillRect/>
+          </a:stretch>
+        </p:blipFill>
+        <p:spPr>
+          <a:xfrm>
+            <a:off x="6096000" y="1316191"/>
+            <a:ext cx="5593565" cy="4793395"/>
+          </a:xfrm>
+          <a:prstGeom prst="rect">
+            <a:avLst/>
+          </a:prstGeom>
+        </p:spPr>
+      </p:pic>
+    </p:spTree>
+  </p:cSld>
+  <p:clrMapOvr>
+    <a:masterClrMapping/>
+  </p:clrMapOvr>
+</p:sld>
+</file>
+
+<file path=ppt/slides/slide13.xml><?xml version="1.0" encoding="utf-8"?>
+<p:sld xmlns:a="http://schemas.openxmlformats.org/drawingml/2006/main" xmlns:r="http://schemas.openxmlformats.org/officeDocument/2006/relationships" xmlns:p="http://schemas.openxmlformats.org/presentationml/2006/main">
+  <p:cSld>
+    <p:bg>
+      <p:bgPr>
+        <a:solidFill>
+          <a:srgbClr val="1E293B"/>
+        </a:solidFill>
+        <a:effectLst/>
+      </p:bgPr>
+    </p:bg>
+    <p:spTree>
+      <p:nvGrpSpPr>
+        <p:cNvPr id="1" name="Shape 168"/>
+        <p:cNvGrpSpPr/>
+        <p:nvPr/>
+      </p:nvGrpSpPr>
+      <p:grpSpPr>
+        <a:xfrm>
+          <a:off x="0" y="0"/>
+          <a:ext cx="0" cy="0"/>
+          <a:chOff x="0" y="0"/>
+          <a:chExt cx="0" cy="0"/>
+        </a:xfrm>
+      </p:grpSpPr>
+      <p:pic>
+        <p:nvPicPr>
+          <p:cNvPr id="169" name="Google Shape;169;p20" descr="image.png"/>
+          <p:cNvPicPr preferRelativeResize="0"/>
+          <p:nvPr/>
+        </p:nvPicPr>
+        <p:blipFill rotWithShape="1">
+          <a:blip r:embed="rId3">
+            <a:alphaModFix/>
+          </a:blip>
+          <a:srcRect/>
+          <a:stretch/>
+        </p:blipFill>
+        <p:spPr>
+          <a:xfrm>
+            <a:off x="0" y="0"/>
+            <a:ext cx="12192000" cy="6858000"/>
+          </a:xfrm>
+          <a:prstGeom prst="rect">
+            <a:avLst/>
+          </a:prstGeom>
+          <a:noFill/>
+          <a:ln>
+            <a:noFill/>
+          </a:ln>
+        </p:spPr>
+      </p:pic>
+      <p:sp>
+        <p:nvSpPr>
+          <p:cNvPr id="170" name="Google Shape;170;p20"/>
+          <p:cNvSpPr txBox="1"/>
+          <p:nvPr/>
+        </p:nvSpPr>
+        <p:spPr>
+          <a:xfrm>
+            <a:off x="1428750" y="2735758"/>
+            <a:ext cx="10191750" cy="365670"/>
+          </a:xfrm>
+          <a:prstGeom prst="rect">
+            <a:avLst/>
+          </a:prstGeom>
+          <a:noFill/>
+          <a:ln>
+            <a:noFill/>
+          </a:ln>
+        </p:spPr>
+        <p:txBody>
+          <a:bodyPr spcFirstLastPara="1" wrap="square" lIns="0" tIns="0" rIns="0" bIns="0" anchor="t" anchorCtr="0">
+            <a:spAutoFit/>
+          </a:bodyPr>
+          <a:lstStyle/>
+          <a:p>
+            <a:pPr marL="0" marR="0" lvl="0" indent="0" algn="l" rtl="0">
+              <a:lnSpc>
+                <a:spcPct val="159944"/>
+              </a:lnSpc>
+              <a:spcBef>
+                <a:spcPts val="0"/>
+              </a:spcBef>
+              <a:spcAft>
+                <a:spcPts val="0"/>
+              </a:spcAft>
+              <a:buNone/>
+            </a:pPr>
+            <a:r>
+              <a:rPr lang="en-US" sz="1800" b="1" i="0" u="none" strike="noStrike" cap="none">
+                <a:solidFill>
+                  <a:srgbClr val="CBD5E1"/>
+                </a:solidFill>
+                <a:latin typeface="Lato"/>
+                <a:ea typeface="Lato"/>
+                <a:cs typeface="Lato"/>
+                <a:sym typeface="Lato"/>
+              </a:rPr>
+              <a:t>START QUIZ:</a:t>
+            </a:r>
+            <a:r>
+              <a:rPr lang="en-US" sz="1800" b="0" i="0" u="none" strike="noStrike" cap="none">
+                <a:solidFill>
+                  <a:srgbClr val="CBD5E1"/>
+                </a:solidFill>
+                <a:latin typeface="Lato"/>
+                <a:ea typeface="Lato"/>
+                <a:cs typeface="Lato"/>
+                <a:sym typeface="Lato"/>
+              </a:rPr>
+              <a:t> 最初の問題を表示し、受付を終了します。</a:t>
+            </a:r>
+            <a:endParaRPr/>
+          </a:p>
+        </p:txBody>
+      </p:sp>
+      <p:sp>
+        <p:nvSpPr>
+          <p:cNvPr id="171" name="Google Shape;171;p20"/>
+          <p:cNvSpPr txBox="1"/>
+          <p:nvPr/>
+        </p:nvSpPr>
+        <p:spPr>
+          <a:xfrm>
+            <a:off x="1428750" y="3387179"/>
+            <a:ext cx="10191750" cy="365670"/>
+          </a:xfrm>
+          <a:prstGeom prst="rect">
+            <a:avLst/>
+          </a:prstGeom>
+          <a:noFill/>
+          <a:ln>
+            <a:noFill/>
+          </a:ln>
+        </p:spPr>
+        <p:txBody>
+          <a:bodyPr spcFirstLastPara="1" wrap="square" lIns="0" tIns="0" rIns="0" bIns="0" anchor="t" anchorCtr="0">
+            <a:spAutoFit/>
+          </a:bodyPr>
+          <a:lstStyle/>
+          <a:p>
+            <a:pPr marL="0" marR="0" lvl="0" indent="0" algn="l" rtl="0">
+              <a:lnSpc>
+                <a:spcPct val="159944"/>
+              </a:lnSpc>
+              <a:spcBef>
+                <a:spcPts val="0"/>
+              </a:spcBef>
+              <a:spcAft>
+                <a:spcPts val="0"/>
+              </a:spcAft>
+              <a:buNone/>
+            </a:pPr>
+            <a:r>
+              <a:rPr lang="en-US" sz="1800" b="1" i="0" u="none" strike="noStrike" cap="none">
+                <a:solidFill>
+                  <a:srgbClr val="CBD5E1"/>
+                </a:solidFill>
+                <a:latin typeface="Lato"/>
+                <a:ea typeface="Lato"/>
+                <a:cs typeface="Lato"/>
+                <a:sym typeface="Lato"/>
+              </a:rPr>
+              <a:t>SHOW ANSWER:</a:t>
+            </a:r>
+            <a:r>
+              <a:rPr lang="en-US" sz="1800" b="0" i="0" u="none" strike="noStrike" cap="none">
+                <a:solidFill>
+                  <a:srgbClr val="CBD5E1"/>
+                </a:solidFill>
+                <a:latin typeface="Lato"/>
+                <a:ea typeface="Lato"/>
+                <a:cs typeface="Lato"/>
+                <a:sym typeface="Lato"/>
+              </a:rPr>
+              <a:t> 回答を締め切り、正解と統計を提示します。</a:t>
+            </a:r>
+            <a:endParaRPr/>
+          </a:p>
+        </p:txBody>
+      </p:sp>
+      <p:sp>
+        <p:nvSpPr>
+          <p:cNvPr id="172" name="Google Shape;172;p20"/>
+          <p:cNvSpPr txBox="1"/>
+          <p:nvPr/>
+        </p:nvSpPr>
+        <p:spPr>
+          <a:xfrm>
+            <a:off x="1428750" y="4038600"/>
+            <a:ext cx="10191750" cy="365670"/>
+          </a:xfrm>
+          <a:prstGeom prst="rect">
+            <a:avLst/>
+          </a:prstGeom>
+          <a:noFill/>
+          <a:ln>
+            <a:noFill/>
+          </a:ln>
+        </p:spPr>
+        <p:txBody>
+          <a:bodyPr spcFirstLastPara="1" wrap="square" lIns="0" tIns="0" rIns="0" bIns="0" anchor="t" anchorCtr="0">
+            <a:spAutoFit/>
+          </a:bodyPr>
+          <a:lstStyle/>
+          <a:p>
+            <a:pPr marL="0" marR="0" lvl="0" indent="0" algn="l" rtl="0">
+              <a:lnSpc>
+                <a:spcPct val="159944"/>
+              </a:lnSpc>
+              <a:spcBef>
+                <a:spcPts val="0"/>
+              </a:spcBef>
+              <a:spcAft>
+                <a:spcPts val="0"/>
+              </a:spcAft>
+              <a:buNone/>
+            </a:pPr>
+            <a:r>
+              <a:rPr lang="en-US" sz="1800" b="1" i="0" u="none" strike="noStrike" cap="none">
+                <a:solidFill>
+                  <a:srgbClr val="CBD5E1"/>
+                </a:solidFill>
+                <a:latin typeface="Lato"/>
+                <a:ea typeface="Lato"/>
+                <a:cs typeface="Lato"/>
+                <a:sym typeface="Lato"/>
+              </a:rPr>
+              <a:t>NEXT QUESTION:</a:t>
+            </a:r>
+            <a:r>
+              <a:rPr lang="en-US" sz="1800" b="0" i="0" u="none" strike="noStrike" cap="none">
+                <a:solidFill>
+                  <a:srgbClr val="CBD5E1"/>
+                </a:solidFill>
+                <a:latin typeface="Lato"/>
+                <a:ea typeface="Lato"/>
+                <a:cs typeface="Lato"/>
+                <a:sym typeface="Lato"/>
+              </a:rPr>
+              <a:t> 全員が正解を確認したら、次の問題へ。</a:t>
+            </a:r>
+            <a:endParaRPr/>
+          </a:p>
+        </p:txBody>
+      </p:sp>
+      <p:sp>
+        <p:nvSpPr>
+          <p:cNvPr id="173" name="Google Shape;173;p20"/>
+          <p:cNvSpPr txBox="1"/>
+          <p:nvPr/>
+        </p:nvSpPr>
+        <p:spPr>
+          <a:xfrm>
+            <a:off x="1428750" y="4690020"/>
+            <a:ext cx="10191750" cy="365670"/>
+          </a:xfrm>
+          <a:prstGeom prst="rect">
+            <a:avLst/>
+          </a:prstGeom>
+          <a:noFill/>
+          <a:ln>
+            <a:noFill/>
+          </a:ln>
+        </p:spPr>
+        <p:txBody>
+          <a:bodyPr spcFirstLastPara="1" wrap="square" lIns="0" tIns="0" rIns="0" bIns="0" anchor="t" anchorCtr="0">
+            <a:spAutoFit/>
+          </a:bodyPr>
+          <a:lstStyle/>
+          <a:p>
+            <a:pPr marL="0" marR="0" lvl="0" indent="0" algn="l" rtl="0">
+              <a:lnSpc>
+                <a:spcPct val="159944"/>
+              </a:lnSpc>
+              <a:spcBef>
+                <a:spcPts val="0"/>
+              </a:spcBef>
+              <a:spcAft>
+                <a:spcPts val="0"/>
+              </a:spcAft>
+              <a:buNone/>
+            </a:pPr>
+            <a:r>
+              <a:rPr lang="en-US" sz="1800" b="1" i="0" u="none" strike="noStrike" cap="none">
+                <a:solidFill>
+                  <a:srgbClr val="CBD5E1"/>
+                </a:solidFill>
+                <a:latin typeface="Lato"/>
+                <a:ea typeface="Lato"/>
+                <a:cs typeface="Lato"/>
+                <a:sym typeface="Lato"/>
+              </a:rPr>
+              <a:t>SHOW RESULTS:</a:t>
+            </a:r>
+            <a:r>
+              <a:rPr lang="en-US" sz="1800" b="0" i="0" u="none" strike="noStrike" cap="none">
+                <a:solidFill>
+                  <a:srgbClr val="CBD5E1"/>
+                </a:solidFill>
+                <a:latin typeface="Lato"/>
+                <a:ea typeface="Lato"/>
+                <a:cs typeface="Lato"/>
+                <a:sym typeface="Lato"/>
+              </a:rPr>
+              <a:t> 全問終了後、最終ランキングを表示。</a:t>
+            </a:r>
+            <a:endParaRPr/>
+          </a:p>
+        </p:txBody>
+      </p:sp>
+      <p:pic>
+        <p:nvPicPr>
+          <p:cNvPr id="174" name="Google Shape;174;p20" descr="image.png"/>
+          <p:cNvPicPr preferRelativeResize="0"/>
+          <p:nvPr/>
+        </p:nvPicPr>
+        <p:blipFill rotWithShape="1">
+          <a:blip r:embed="rId4">
+            <a:alphaModFix/>
+          </a:blip>
+          <a:srcRect/>
+          <a:stretch/>
+        </p:blipFill>
+        <p:spPr>
+          <a:xfrm>
+            <a:off x="952500" y="2778621"/>
+            <a:ext cx="219075" cy="295275"/>
+          </a:xfrm>
+          <a:prstGeom prst="rect">
+            <a:avLst/>
+          </a:prstGeom>
+          <a:noFill/>
+          <a:ln>
+            <a:noFill/>
+          </a:ln>
+        </p:spPr>
+      </p:pic>
+      <p:pic>
+        <p:nvPicPr>
+          <p:cNvPr id="175" name="Google Shape;175;p20" descr="image.png"/>
+          <p:cNvPicPr preferRelativeResize="0"/>
+          <p:nvPr/>
+        </p:nvPicPr>
+        <p:blipFill rotWithShape="1">
+          <a:blip r:embed="rId5">
+            <a:alphaModFix/>
+          </a:blip>
+          <a:srcRect/>
+          <a:stretch/>
+        </p:blipFill>
+        <p:spPr>
+          <a:xfrm>
+            <a:off x="952500" y="3430041"/>
+            <a:ext cx="323850" cy="295275"/>
+          </a:xfrm>
+          <a:prstGeom prst="rect">
+            <a:avLst/>
+          </a:prstGeom>
+          <a:noFill/>
+          <a:ln>
+            <a:noFill/>
+          </a:ln>
+        </p:spPr>
+      </p:pic>
+      <p:pic>
+        <p:nvPicPr>
+          <p:cNvPr id="176" name="Google Shape;176;p20" descr="image.png"/>
+          <p:cNvPicPr preferRelativeResize="0"/>
+          <p:nvPr/>
+        </p:nvPicPr>
+        <p:blipFill rotWithShape="1">
+          <a:blip r:embed="rId6">
+            <a:alphaModFix/>
+          </a:blip>
+          <a:srcRect/>
+          <a:stretch/>
+        </p:blipFill>
+        <p:spPr>
+          <a:xfrm>
+            <a:off x="952500" y="4081462"/>
+            <a:ext cx="180975" cy="295275"/>
+          </a:xfrm>
+          <a:prstGeom prst="rect">
+            <a:avLst/>
+          </a:prstGeom>
+          <a:noFill/>
+          <a:ln>
+            <a:noFill/>
+          </a:ln>
+        </p:spPr>
+      </p:pic>
+      <p:pic>
+        <p:nvPicPr>
+          <p:cNvPr id="177" name="Google Shape;177;p20" descr="image.png"/>
+          <p:cNvPicPr preferRelativeResize="0"/>
+          <p:nvPr/>
+        </p:nvPicPr>
+        <p:blipFill rotWithShape="1">
+          <a:blip r:embed="rId7">
+            <a:alphaModFix/>
+          </a:blip>
+          <a:srcRect/>
+          <a:stretch/>
+        </p:blipFill>
+        <p:spPr>
+          <a:xfrm>
+            <a:off x="952500" y="4732883"/>
+            <a:ext cx="323850" cy="295275"/>
+          </a:xfrm>
+          <a:prstGeom prst="rect">
+            <a:avLst/>
+          </a:prstGeom>
+          <a:noFill/>
+          <a:ln>
+            <a:noFill/>
+          </a:ln>
+        </p:spPr>
+      </p:pic>
+      <p:sp>
+        <p:nvSpPr>
+          <p:cNvPr id="178" name="Google Shape;178;p20"/>
+          <p:cNvSpPr txBox="1"/>
+          <p:nvPr/>
+        </p:nvSpPr>
+        <p:spPr>
+          <a:xfrm>
+            <a:off x="800100" y="571500"/>
+            <a:ext cx="11361420" cy="685800"/>
+          </a:xfrm>
+          <a:prstGeom prst="rect">
+            <a:avLst/>
+          </a:prstGeom>
+          <a:noFill/>
+          <a:ln>
+            <a:noFill/>
+          </a:ln>
+        </p:spPr>
+        <p:txBody>
+          <a:bodyPr spcFirstLastPara="1" wrap="square" lIns="0" tIns="0" rIns="0" bIns="0" anchor="t" anchorCtr="0">
+            <a:spAutoFit/>
+          </a:bodyPr>
+          <a:lstStyle/>
+          <a:p>
+            <a:pPr marL="0" marR="0" lvl="0" indent="0" algn="l" rtl="0">
+              <a:spcBef>
+                <a:spcPts val="0"/>
+              </a:spcBef>
+              <a:spcAft>
+                <a:spcPts val="0"/>
+              </a:spcAft>
+              <a:buNone/>
+            </a:pPr>
+            <a:r>
+              <a:rPr lang="en-US" sz="3600" b="0" i="0" u="none" strike="noStrike" cap="none">
+                <a:solidFill>
+                  <a:srgbClr val="F8FAFC"/>
+                </a:solidFill>
+                <a:latin typeface="Poppins SemiBold"/>
+                <a:ea typeface="Poppins SemiBold"/>
+                <a:cs typeface="Poppins SemiBold"/>
+                <a:sym typeface="Poppins SemiBold"/>
+              </a:rPr>
+              <a:t>クイズの進行手順</a:t>
+            </a:r>
+            <a:endParaRPr/>
+          </a:p>
+        </p:txBody>
+      </p:sp>
+      <p:sp>
+        <p:nvSpPr>
+          <p:cNvPr id="179" name="Google Shape;179;p20"/>
+          <p:cNvSpPr/>
+          <p:nvPr/>
+        </p:nvSpPr>
+        <p:spPr>
+          <a:xfrm>
+            <a:off x="571500" y="571500"/>
+            <a:ext cx="76200" cy="685800"/>
+          </a:xfrm>
+          <a:prstGeom prst="rect">
+            <a:avLst/>
+          </a:prstGeom>
+          <a:solidFill>
+            <a:srgbClr val="10B981"/>
+          </a:solidFill>
+          <a:ln>
+            <a:noFill/>
+          </a:ln>
+        </p:spPr>
+        <p:txBody>
+          <a:bodyPr spcFirstLastPara="1" wrap="square" lIns="91425" tIns="45700" rIns="91425" bIns="45700" anchor="ctr" anchorCtr="0">
+            <a:noAutofit/>
+          </a:bodyPr>
+          <a:lstStyle/>
+          <a:p>
+            <a:pPr marL="0" marR="0" lvl="0" indent="0" algn="ctr" rtl="0">
+              <a:spcBef>
+                <a:spcPts val="0"/>
+              </a:spcBef>
+              <a:spcAft>
+                <a:spcPts val="0"/>
+              </a:spcAft>
+              <a:buNone/>
+            </a:pPr>
+            <a:endParaRPr sz="1800" b="0" i="0" u="none" strike="noStrike" cap="none">
+              <a:solidFill>
+                <a:schemeClr val="dk1"/>
+              </a:solidFill>
+              <a:latin typeface="Calibri"/>
+              <a:ea typeface="Calibri"/>
+              <a:cs typeface="Calibri"/>
+              <a:sym typeface="Calibri"/>
+            </a:endParaRPr>
+          </a:p>
+        </p:txBody>
+      </p:sp>
+    </p:spTree>
+  </p:cSld>
+  <p:clrMapOvr>
+    <a:masterClrMapping/>
+  </p:clrMapOvr>
+</p:sld>
+</file>
+
+<file path=ppt/slides/slide14.xml><?xml version="1.0" encoding="utf-8"?>
+<p:sld xmlns:a="http://schemas.openxmlformats.org/drawingml/2006/main" xmlns:r="http://schemas.openxmlformats.org/officeDocument/2006/relationships" xmlns:p="http://schemas.openxmlformats.org/presentationml/2006/main">
+  <p:cSld>
+    <p:bg>
+      <p:bgPr>
+        <a:solidFill>
+          <a:srgbClr val="1E293B"/>
+        </a:solidFill>
+        <a:effectLst/>
+      </p:bgPr>
+    </p:bg>
+    <p:spTree>
+      <p:nvGrpSpPr>
+        <p:cNvPr id="1" name="Shape 183"/>
+        <p:cNvGrpSpPr/>
+        <p:nvPr/>
+      </p:nvGrpSpPr>
+      <p:grpSpPr>
+        <a:xfrm>
+          <a:off x="0" y="0"/>
+          <a:ext cx="0" cy="0"/>
+          <a:chOff x="0" y="0"/>
+          <a:chExt cx="0" cy="0"/>
+        </a:xfrm>
+      </p:grpSpPr>
+      <p:pic>
+        <p:nvPicPr>
+          <p:cNvPr id="184" name="Google Shape;184;p21" descr="image.png"/>
+          <p:cNvPicPr preferRelativeResize="0"/>
+          <p:nvPr/>
+        </p:nvPicPr>
+        <p:blipFill rotWithShape="1">
+          <a:blip r:embed="rId3">
+            <a:alphaModFix/>
+          </a:blip>
+          <a:srcRect/>
+          <a:stretch/>
+        </p:blipFill>
+        <p:spPr>
+          <a:xfrm>
+            <a:off x="0" y="0"/>
+            <a:ext cx="12192000" cy="6858000"/>
+          </a:xfrm>
+          <a:prstGeom prst="rect">
+            <a:avLst/>
+          </a:prstGeom>
+          <a:noFill/>
+          <a:ln>
+            <a:noFill/>
+          </a:ln>
+        </p:spPr>
+      </p:pic>
+      <p:sp>
+        <p:nvSpPr>
+          <p:cNvPr id="185" name="Google Shape;185;p21"/>
+          <p:cNvSpPr/>
+          <p:nvPr/>
+        </p:nvSpPr>
+        <p:spPr>
+          <a:xfrm>
+            <a:off x="952500" y="4419600"/>
+            <a:ext cx="10287000" cy="38100"/>
+          </a:xfrm>
+          <a:prstGeom prst="rect">
+            <a:avLst/>
+          </a:prstGeom>
+          <a:solidFill>
+            <a:srgbClr val="475569"/>
+          </a:solidFill>
+          <a:ln>
+            <a:noFill/>
+          </a:ln>
+        </p:spPr>
+        <p:txBody>
+          <a:bodyPr spcFirstLastPara="1" wrap="square" lIns="91425" tIns="45700" rIns="91425" bIns="45700" anchor="ctr" anchorCtr="0">
+            <a:noAutofit/>
+          </a:bodyPr>
+          <a:lstStyle/>
+          <a:p>
+            <a:pPr marL="0" marR="0" lvl="0" indent="0" algn="ctr" rtl="0">
+              <a:spcBef>
+                <a:spcPts val="0"/>
+              </a:spcBef>
+              <a:spcAft>
+                <a:spcPts val="0"/>
+              </a:spcAft>
+              <a:buNone/>
+            </a:pPr>
+            <a:endParaRPr sz="1800" b="0" i="0" u="none" strike="noStrike" cap="none">
+              <a:solidFill>
+                <a:schemeClr val="dk1"/>
+              </a:solidFill>
+              <a:latin typeface="Calibri"/>
+              <a:ea typeface="Calibri"/>
+              <a:cs typeface="Calibri"/>
+              <a:sym typeface="Calibri"/>
+            </a:endParaRPr>
+          </a:p>
+        </p:txBody>
+      </p:sp>
+      <p:sp>
+        <p:nvSpPr>
+          <p:cNvPr id="186" name="Google Shape;186;p21"/>
+          <p:cNvSpPr/>
+          <p:nvPr/>
+        </p:nvSpPr>
+        <p:spPr>
+          <a:xfrm>
+            <a:off x="1771650" y="3694807"/>
+            <a:ext cx="266700" cy="266700"/>
+          </a:xfrm>
+          <a:prstGeom prst="roundRect">
+            <a:avLst>
+              <a:gd name="adj" fmla="val 50000"/>
+            </a:avLst>
+          </a:prstGeom>
+          <a:solidFill>
+            <a:srgbClr val="10B981"/>
+          </a:solidFill>
+          <a:ln w="38100" cap="flat" cmpd="sng">
+            <a:solidFill>
+              <a:srgbClr val="1E293B"/>
+            </a:solidFill>
+            <a:prstDash val="solid"/>
+            <a:round/>
+            <a:headEnd type="none" w="sm" len="sm"/>
+            <a:tailEnd type="none" w="sm" len="sm"/>
+          </a:ln>
+        </p:spPr>
+        <p:txBody>
+          <a:bodyPr spcFirstLastPara="1" wrap="square" lIns="91425" tIns="45700" rIns="91425" bIns="45700" anchor="ctr" anchorCtr="0">
+            <a:noAutofit/>
+          </a:bodyPr>
+          <a:lstStyle/>
+          <a:p>
+            <a:pPr marL="0" marR="0" lvl="0" indent="0" algn="ctr" rtl="0">
+              <a:spcBef>
+                <a:spcPts val="0"/>
+              </a:spcBef>
+              <a:spcAft>
+                <a:spcPts val="0"/>
+              </a:spcAft>
+              <a:buNone/>
+            </a:pPr>
+            <a:endParaRPr sz="1800" b="0" i="0" u="none" strike="noStrike" cap="none">
+              <a:solidFill>
+                <a:schemeClr val="dk1"/>
+              </a:solidFill>
+              <a:latin typeface="Calibri"/>
+              <a:ea typeface="Calibri"/>
+              <a:cs typeface="Calibri"/>
+              <a:sym typeface="Calibri"/>
+            </a:endParaRPr>
+          </a:p>
+        </p:txBody>
+      </p:sp>
+      <p:sp>
+        <p:nvSpPr>
+          <p:cNvPr id="187" name="Google Shape;187;p21"/>
+          <p:cNvSpPr txBox="1"/>
+          <p:nvPr/>
+        </p:nvSpPr>
+        <p:spPr>
+          <a:xfrm>
+            <a:off x="904875" y="4152007"/>
+            <a:ext cx="2000250" cy="276225"/>
+          </a:xfrm>
+          <a:prstGeom prst="rect">
+            <a:avLst/>
+          </a:prstGeom>
+          <a:noFill/>
+          <a:ln>
+            <a:noFill/>
+          </a:ln>
+        </p:spPr>
+        <p:txBody>
+          <a:bodyPr spcFirstLastPara="1" wrap="square" lIns="0" tIns="0" rIns="0" bIns="0" anchor="t" anchorCtr="0">
+            <a:spAutoFit/>
+          </a:bodyPr>
+          <a:lstStyle/>
+          <a:p>
+            <a:pPr marL="0" marR="0" lvl="0" indent="0" algn="ctr" rtl="0">
+              <a:spcBef>
+                <a:spcPts val="0"/>
+              </a:spcBef>
+              <a:spcAft>
+                <a:spcPts val="0"/>
+              </a:spcAft>
+              <a:buNone/>
+            </a:pPr>
+            <a:r>
+              <a:rPr lang="en-US" sz="1404" b="1" i="0" u="none" strike="noStrike" cap="none">
+                <a:solidFill>
+                  <a:srgbClr val="F8FAFC"/>
+                </a:solidFill>
+                <a:latin typeface="Poppins"/>
+                <a:ea typeface="Poppins"/>
+                <a:cs typeface="Poppins"/>
+                <a:sym typeface="Poppins"/>
+              </a:rPr>
+              <a:t>待機</a:t>
+            </a:r>
+            <a:endParaRPr/>
+          </a:p>
+        </p:txBody>
+      </p:sp>
+      <p:sp>
+        <p:nvSpPr>
+          <p:cNvPr id="188" name="Google Shape;188;p21"/>
+          <p:cNvSpPr txBox="1"/>
+          <p:nvPr/>
+        </p:nvSpPr>
+        <p:spPr>
+          <a:xfrm>
+            <a:off x="952500" y="4637782"/>
+            <a:ext cx="1905000" cy="335160"/>
+          </a:xfrm>
+          <a:prstGeom prst="rect">
+            <a:avLst/>
+          </a:prstGeom>
+          <a:noFill/>
+          <a:ln>
+            <a:noFill/>
+          </a:ln>
+        </p:spPr>
+        <p:txBody>
+          <a:bodyPr spcFirstLastPara="1" wrap="square" lIns="0" tIns="0" rIns="0" bIns="0" anchor="t" anchorCtr="0">
+            <a:spAutoFit/>
+          </a:bodyPr>
+          <a:lstStyle/>
+          <a:p>
+            <a:pPr marL="0" marR="0" lvl="0" indent="0" algn="ctr" rtl="0">
+              <a:lnSpc>
+                <a:spcPct val="160000"/>
+              </a:lnSpc>
+              <a:spcBef>
+                <a:spcPts val="0"/>
+              </a:spcBef>
+              <a:spcAft>
+                <a:spcPts val="0"/>
+              </a:spcAft>
+              <a:buNone/>
+            </a:pPr>
+            <a:r>
+              <a:rPr lang="en-US" sz="1650" b="0" i="0" u="none" strike="noStrike" cap="none">
+                <a:solidFill>
+                  <a:srgbClr val="CBD5E1"/>
+                </a:solidFill>
+                <a:latin typeface="Lato"/>
+                <a:ea typeface="Lato"/>
+                <a:cs typeface="Lato"/>
+                <a:sym typeface="Lato"/>
+              </a:rPr>
+              <a:t>受付画面の投影</a:t>
+            </a:r>
+            <a:endParaRPr/>
+          </a:p>
+        </p:txBody>
+      </p:sp>
+      <p:sp>
+        <p:nvSpPr>
+          <p:cNvPr id="189" name="Google Shape;189;p21"/>
+          <p:cNvSpPr/>
+          <p:nvPr/>
+        </p:nvSpPr>
+        <p:spPr>
+          <a:xfrm>
+            <a:off x="4565600" y="3694807"/>
+            <a:ext cx="266700" cy="266700"/>
+          </a:xfrm>
+          <a:prstGeom prst="roundRect">
+            <a:avLst>
+              <a:gd name="adj" fmla="val 50000"/>
+            </a:avLst>
+          </a:prstGeom>
+          <a:solidFill>
+            <a:srgbClr val="10B981"/>
+          </a:solidFill>
+          <a:ln w="38100" cap="flat" cmpd="sng">
+            <a:solidFill>
+              <a:srgbClr val="1E293B"/>
+            </a:solidFill>
+            <a:prstDash val="solid"/>
+            <a:round/>
+            <a:headEnd type="none" w="sm" len="sm"/>
+            <a:tailEnd type="none" w="sm" len="sm"/>
+          </a:ln>
+        </p:spPr>
+        <p:txBody>
+          <a:bodyPr spcFirstLastPara="1" wrap="square" lIns="91425" tIns="45700" rIns="91425" bIns="45700" anchor="ctr" anchorCtr="0">
+            <a:noAutofit/>
+          </a:bodyPr>
+          <a:lstStyle/>
+          <a:p>
+            <a:pPr marL="0" marR="0" lvl="0" indent="0" algn="ctr" rtl="0">
+              <a:spcBef>
+                <a:spcPts val="0"/>
+              </a:spcBef>
+              <a:spcAft>
+                <a:spcPts val="0"/>
+              </a:spcAft>
+              <a:buNone/>
+            </a:pPr>
+            <a:endParaRPr sz="1800" b="0" i="0" u="none" strike="noStrike" cap="none">
+              <a:solidFill>
+                <a:schemeClr val="dk1"/>
+              </a:solidFill>
+              <a:latin typeface="Calibri"/>
+              <a:ea typeface="Calibri"/>
+              <a:cs typeface="Calibri"/>
+              <a:sym typeface="Calibri"/>
+            </a:endParaRPr>
+          </a:p>
+        </p:txBody>
+      </p:sp>
+      <p:sp>
+        <p:nvSpPr>
+          <p:cNvPr id="190" name="Google Shape;190;p21"/>
+          <p:cNvSpPr txBox="1"/>
+          <p:nvPr/>
+        </p:nvSpPr>
+        <p:spPr>
+          <a:xfrm>
+            <a:off x="3698825" y="4152007"/>
+            <a:ext cx="2000250" cy="276225"/>
+          </a:xfrm>
+          <a:prstGeom prst="rect">
+            <a:avLst/>
+          </a:prstGeom>
+          <a:noFill/>
+          <a:ln>
+            <a:noFill/>
+          </a:ln>
+        </p:spPr>
+        <p:txBody>
+          <a:bodyPr spcFirstLastPara="1" wrap="square" lIns="0" tIns="0" rIns="0" bIns="0" anchor="t" anchorCtr="0">
+            <a:spAutoFit/>
+          </a:bodyPr>
+          <a:lstStyle/>
+          <a:p>
+            <a:pPr marL="0" marR="0" lvl="0" indent="0" algn="ctr" rtl="0">
+              <a:spcBef>
+                <a:spcPts val="0"/>
+              </a:spcBef>
+              <a:spcAft>
+                <a:spcPts val="0"/>
+              </a:spcAft>
+              <a:buNone/>
+            </a:pPr>
+            <a:r>
+              <a:rPr lang="en-US" sz="1404" b="1" i="0" u="none" strike="noStrike" cap="none">
+                <a:solidFill>
+                  <a:srgbClr val="F8FAFC"/>
+                </a:solidFill>
+                <a:latin typeface="Poppins"/>
+                <a:ea typeface="Poppins"/>
+                <a:cs typeface="Poppins"/>
+                <a:sym typeface="Poppins"/>
+              </a:rPr>
+              <a:t>出題</a:t>
+            </a:r>
+            <a:endParaRPr/>
+          </a:p>
+        </p:txBody>
+      </p:sp>
+      <p:sp>
+        <p:nvSpPr>
+          <p:cNvPr id="191" name="Google Shape;191;p21"/>
+          <p:cNvSpPr txBox="1"/>
+          <p:nvPr/>
+        </p:nvSpPr>
+        <p:spPr>
+          <a:xfrm>
+            <a:off x="3746450" y="4637782"/>
+            <a:ext cx="1905000" cy="335160"/>
+          </a:xfrm>
+          <a:prstGeom prst="rect">
+            <a:avLst/>
+          </a:prstGeom>
+          <a:noFill/>
+          <a:ln>
+            <a:noFill/>
+          </a:ln>
+        </p:spPr>
+        <p:txBody>
+          <a:bodyPr spcFirstLastPara="1" wrap="square" lIns="0" tIns="0" rIns="0" bIns="0" anchor="t" anchorCtr="0">
+            <a:spAutoFit/>
+          </a:bodyPr>
+          <a:lstStyle/>
+          <a:p>
+            <a:pPr marL="0" marR="0" lvl="0" indent="0" algn="ctr" rtl="0">
+              <a:lnSpc>
+                <a:spcPct val="160000"/>
+              </a:lnSpc>
+              <a:spcBef>
+                <a:spcPts val="0"/>
+              </a:spcBef>
+              <a:spcAft>
+                <a:spcPts val="0"/>
+              </a:spcAft>
+              <a:buNone/>
+            </a:pPr>
+            <a:r>
+              <a:rPr lang="en-US" sz="1650" b="0" i="0" u="none" strike="noStrike" cap="none">
+                <a:solidFill>
+                  <a:srgbClr val="CBD5E1"/>
+                </a:solidFill>
+                <a:latin typeface="Lato"/>
+                <a:ea typeface="Lato"/>
+                <a:cs typeface="Lato"/>
+                <a:sym typeface="Lato"/>
+              </a:rPr>
+              <a:t>問題文の表示</a:t>
+            </a:r>
+            <a:endParaRPr/>
+          </a:p>
+        </p:txBody>
+      </p:sp>
+      <p:sp>
+        <p:nvSpPr>
+          <p:cNvPr id="192" name="Google Shape;192;p21"/>
+          <p:cNvSpPr/>
+          <p:nvPr/>
+        </p:nvSpPr>
+        <p:spPr>
+          <a:xfrm>
+            <a:off x="7359550" y="3694807"/>
+            <a:ext cx="266700" cy="266700"/>
+          </a:xfrm>
+          <a:prstGeom prst="roundRect">
+            <a:avLst>
+              <a:gd name="adj" fmla="val 50000"/>
+            </a:avLst>
+          </a:prstGeom>
+          <a:solidFill>
+            <a:srgbClr val="10B981"/>
+          </a:solidFill>
+          <a:ln w="38100" cap="flat" cmpd="sng">
+            <a:solidFill>
+              <a:srgbClr val="1E293B"/>
+            </a:solidFill>
+            <a:prstDash val="solid"/>
+            <a:round/>
+            <a:headEnd type="none" w="sm" len="sm"/>
+            <a:tailEnd type="none" w="sm" len="sm"/>
+          </a:ln>
+        </p:spPr>
+        <p:txBody>
+          <a:bodyPr spcFirstLastPara="1" wrap="square" lIns="91425" tIns="45700" rIns="91425" bIns="45700" anchor="ctr" anchorCtr="0">
+            <a:noAutofit/>
+          </a:bodyPr>
+          <a:lstStyle/>
+          <a:p>
+            <a:pPr marL="0" marR="0" lvl="0" indent="0" algn="ctr" rtl="0">
+              <a:spcBef>
+                <a:spcPts val="0"/>
+              </a:spcBef>
+              <a:spcAft>
+                <a:spcPts val="0"/>
+              </a:spcAft>
+              <a:buNone/>
+            </a:pPr>
+            <a:endParaRPr sz="1800" b="0" i="0" u="none" strike="noStrike" cap="none">
+              <a:solidFill>
+                <a:schemeClr val="dk1"/>
+              </a:solidFill>
+              <a:latin typeface="Calibri"/>
+              <a:ea typeface="Calibri"/>
+              <a:cs typeface="Calibri"/>
+              <a:sym typeface="Calibri"/>
+            </a:endParaRPr>
+          </a:p>
+        </p:txBody>
+      </p:sp>
+      <p:sp>
+        <p:nvSpPr>
+          <p:cNvPr id="193" name="Google Shape;193;p21"/>
+          <p:cNvSpPr txBox="1"/>
+          <p:nvPr/>
+        </p:nvSpPr>
+        <p:spPr>
+          <a:xfrm>
+            <a:off x="6492775" y="4152007"/>
+            <a:ext cx="2000250" cy="276225"/>
+          </a:xfrm>
+          <a:prstGeom prst="rect">
+            <a:avLst/>
+          </a:prstGeom>
+          <a:noFill/>
+          <a:ln>
+            <a:noFill/>
+          </a:ln>
+        </p:spPr>
+        <p:txBody>
+          <a:bodyPr spcFirstLastPara="1" wrap="square" lIns="0" tIns="0" rIns="0" bIns="0" anchor="t" anchorCtr="0">
+            <a:spAutoFit/>
+          </a:bodyPr>
+          <a:lstStyle/>
+          <a:p>
+            <a:pPr marL="0" marR="0" lvl="0" indent="0" algn="ctr" rtl="0">
+              <a:spcBef>
+                <a:spcPts val="0"/>
+              </a:spcBef>
+              <a:spcAft>
+                <a:spcPts val="0"/>
+              </a:spcAft>
+              <a:buNone/>
+            </a:pPr>
+            <a:r>
+              <a:rPr lang="en-US" sz="1404" b="1" i="0" u="none" strike="noStrike" cap="none">
+                <a:solidFill>
+                  <a:srgbClr val="F8FAFC"/>
+                </a:solidFill>
+                <a:latin typeface="Poppins"/>
+                <a:ea typeface="Poppins"/>
+                <a:cs typeface="Poppins"/>
+                <a:sym typeface="Poppins"/>
+              </a:rPr>
+              <a:t>締切</a:t>
+            </a:r>
+            <a:endParaRPr/>
+          </a:p>
+        </p:txBody>
+      </p:sp>
+      <p:sp>
+        <p:nvSpPr>
+          <p:cNvPr id="194" name="Google Shape;194;p21"/>
+          <p:cNvSpPr txBox="1"/>
+          <p:nvPr/>
+        </p:nvSpPr>
+        <p:spPr>
+          <a:xfrm>
+            <a:off x="6540400" y="4637782"/>
+            <a:ext cx="1905000" cy="335160"/>
+          </a:xfrm>
+          <a:prstGeom prst="rect">
+            <a:avLst/>
+          </a:prstGeom>
+          <a:noFill/>
+          <a:ln>
+            <a:noFill/>
+          </a:ln>
+        </p:spPr>
+        <p:txBody>
+          <a:bodyPr spcFirstLastPara="1" wrap="square" lIns="0" tIns="0" rIns="0" bIns="0" anchor="t" anchorCtr="0">
+            <a:spAutoFit/>
+          </a:bodyPr>
+          <a:lstStyle/>
+          <a:p>
+            <a:pPr marL="0" marR="0" lvl="0" indent="0" algn="ctr" rtl="0">
+              <a:lnSpc>
+                <a:spcPct val="160000"/>
+              </a:lnSpc>
+              <a:spcBef>
+                <a:spcPts val="0"/>
+              </a:spcBef>
+              <a:spcAft>
+                <a:spcPts val="0"/>
+              </a:spcAft>
+              <a:buNone/>
+            </a:pPr>
+            <a:r>
+              <a:rPr lang="en-US" sz="1650" b="0" i="0" u="none" strike="noStrike" cap="none">
+                <a:solidFill>
+                  <a:srgbClr val="CBD5E1"/>
+                </a:solidFill>
+                <a:latin typeface="Lato"/>
+                <a:ea typeface="Lato"/>
+                <a:cs typeface="Lato"/>
+                <a:sym typeface="Lato"/>
+              </a:rPr>
+              <a:t>正解の発表</a:t>
+            </a:r>
+            <a:endParaRPr/>
+          </a:p>
+        </p:txBody>
+      </p:sp>
+      <p:sp>
+        <p:nvSpPr>
+          <p:cNvPr id="195" name="Google Shape;195;p21"/>
+          <p:cNvSpPr/>
+          <p:nvPr/>
+        </p:nvSpPr>
+        <p:spPr>
+          <a:xfrm>
+            <a:off x="10153501" y="3694807"/>
+            <a:ext cx="266700" cy="266700"/>
+          </a:xfrm>
+          <a:prstGeom prst="roundRect">
+            <a:avLst>
+              <a:gd name="adj" fmla="val 50000"/>
+            </a:avLst>
+          </a:prstGeom>
+          <a:solidFill>
+            <a:srgbClr val="10B981"/>
+          </a:solidFill>
+          <a:ln w="38100" cap="flat" cmpd="sng">
+            <a:solidFill>
+              <a:srgbClr val="1E293B"/>
+            </a:solidFill>
+            <a:prstDash val="solid"/>
+            <a:round/>
+            <a:headEnd type="none" w="sm" len="sm"/>
+            <a:tailEnd type="none" w="sm" len="sm"/>
+          </a:ln>
+        </p:spPr>
+        <p:txBody>
+          <a:bodyPr spcFirstLastPara="1" wrap="square" lIns="91425" tIns="45700" rIns="91425" bIns="45700" anchor="ctr" anchorCtr="0">
+            <a:noAutofit/>
+          </a:bodyPr>
+          <a:lstStyle/>
+          <a:p>
+            <a:pPr marL="0" marR="0" lvl="0" indent="0" algn="ctr" rtl="0">
+              <a:spcBef>
+                <a:spcPts val="0"/>
+              </a:spcBef>
+              <a:spcAft>
+                <a:spcPts val="0"/>
+              </a:spcAft>
+              <a:buNone/>
+            </a:pPr>
+            <a:endParaRPr sz="1800" b="0" i="0" u="none" strike="noStrike" cap="none">
+              <a:solidFill>
+                <a:schemeClr val="dk1"/>
+              </a:solidFill>
+              <a:latin typeface="Calibri"/>
+              <a:ea typeface="Calibri"/>
+              <a:cs typeface="Calibri"/>
+              <a:sym typeface="Calibri"/>
+            </a:endParaRPr>
+          </a:p>
+        </p:txBody>
+      </p:sp>
+      <p:sp>
+        <p:nvSpPr>
+          <p:cNvPr id="196" name="Google Shape;196;p21"/>
+          <p:cNvSpPr txBox="1"/>
+          <p:nvPr/>
+        </p:nvSpPr>
+        <p:spPr>
+          <a:xfrm>
+            <a:off x="9286726" y="4152007"/>
+            <a:ext cx="2000250" cy="276225"/>
+          </a:xfrm>
+          <a:prstGeom prst="rect">
+            <a:avLst/>
+          </a:prstGeom>
+          <a:noFill/>
+          <a:ln>
+            <a:noFill/>
+          </a:ln>
+        </p:spPr>
+        <p:txBody>
+          <a:bodyPr spcFirstLastPara="1" wrap="square" lIns="0" tIns="0" rIns="0" bIns="0" anchor="t" anchorCtr="0">
+            <a:spAutoFit/>
+          </a:bodyPr>
+          <a:lstStyle/>
+          <a:p>
+            <a:pPr marL="0" marR="0" lvl="0" indent="0" algn="ctr" rtl="0">
+              <a:spcBef>
+                <a:spcPts val="0"/>
+              </a:spcBef>
+              <a:spcAft>
+                <a:spcPts val="0"/>
+              </a:spcAft>
+              <a:buNone/>
+            </a:pPr>
+            <a:r>
+              <a:rPr lang="en-US" sz="1404" b="1" i="0" u="none" strike="noStrike" cap="none">
+                <a:solidFill>
+                  <a:srgbClr val="F8FAFC"/>
+                </a:solidFill>
+                <a:latin typeface="Poppins"/>
+                <a:ea typeface="Poppins"/>
+                <a:cs typeface="Poppins"/>
+                <a:sym typeface="Poppins"/>
+              </a:rPr>
+              <a:t>発表</a:t>
+            </a:r>
+            <a:endParaRPr/>
+          </a:p>
+        </p:txBody>
+      </p:sp>
+      <p:sp>
+        <p:nvSpPr>
+          <p:cNvPr id="197" name="Google Shape;197;p21"/>
+          <p:cNvSpPr txBox="1"/>
+          <p:nvPr/>
+        </p:nvSpPr>
+        <p:spPr>
+          <a:xfrm>
+            <a:off x="9334351" y="4637782"/>
+            <a:ext cx="1905000" cy="335160"/>
+          </a:xfrm>
+          <a:prstGeom prst="rect">
+            <a:avLst/>
+          </a:prstGeom>
+          <a:noFill/>
+          <a:ln>
+            <a:noFill/>
+          </a:ln>
+        </p:spPr>
+        <p:txBody>
+          <a:bodyPr spcFirstLastPara="1" wrap="square" lIns="0" tIns="0" rIns="0" bIns="0" anchor="t" anchorCtr="0">
+            <a:spAutoFit/>
+          </a:bodyPr>
+          <a:lstStyle/>
+          <a:p>
+            <a:pPr marL="0" marR="0" lvl="0" indent="0" algn="ctr" rtl="0">
+              <a:lnSpc>
+                <a:spcPct val="160000"/>
+              </a:lnSpc>
+              <a:spcBef>
+                <a:spcPts val="0"/>
+              </a:spcBef>
+              <a:spcAft>
+                <a:spcPts val="0"/>
+              </a:spcAft>
+              <a:buNone/>
+            </a:pPr>
+            <a:r>
+              <a:rPr lang="en-US" sz="1650" b="0" i="0" u="none" strike="noStrike" cap="none">
+                <a:solidFill>
+                  <a:srgbClr val="CBD5E1"/>
+                </a:solidFill>
+                <a:latin typeface="Lato"/>
+                <a:ea typeface="Lato"/>
+                <a:cs typeface="Lato"/>
+                <a:sym typeface="Lato"/>
+              </a:rPr>
+              <a:t>最終ランク表示</a:t>
+            </a:r>
+            <a:endParaRPr/>
+          </a:p>
+        </p:txBody>
+      </p:sp>
+      <p:sp>
+        <p:nvSpPr>
+          <p:cNvPr id="198" name="Google Shape;198;p21"/>
+          <p:cNvSpPr txBox="1"/>
+          <p:nvPr/>
+        </p:nvSpPr>
+        <p:spPr>
+          <a:xfrm>
+            <a:off x="800100" y="571500"/>
+            <a:ext cx="11361420" cy="685800"/>
+          </a:xfrm>
+          <a:prstGeom prst="rect">
+            <a:avLst/>
+          </a:prstGeom>
+          <a:noFill/>
+          <a:ln>
+            <a:noFill/>
+          </a:ln>
+        </p:spPr>
+        <p:txBody>
+          <a:bodyPr spcFirstLastPara="1" wrap="square" lIns="0" tIns="0" rIns="0" bIns="0" anchor="t" anchorCtr="0">
+            <a:spAutoFit/>
+          </a:bodyPr>
+          <a:lstStyle/>
+          <a:p>
+            <a:pPr marL="0" marR="0" lvl="0" indent="0" algn="l" rtl="0">
+              <a:spcBef>
+                <a:spcPts val="0"/>
+              </a:spcBef>
+              <a:spcAft>
+                <a:spcPts val="0"/>
+              </a:spcAft>
+              <a:buNone/>
+            </a:pPr>
+            <a:r>
+              <a:rPr lang="en-US" sz="3600" b="0" i="0" u="none" strike="noStrike" cap="none">
+                <a:solidFill>
+                  <a:srgbClr val="F8FAFC"/>
+                </a:solidFill>
+                <a:latin typeface="Poppins SemiBold"/>
+                <a:ea typeface="Poppins SemiBold"/>
+                <a:cs typeface="Poppins SemiBold"/>
+                <a:sym typeface="Poppins SemiBold"/>
+              </a:rPr>
+              <a:t>運営コントロールのフロー</a:t>
+            </a:r>
+            <a:endParaRPr/>
+          </a:p>
+        </p:txBody>
+      </p:sp>
+      <p:sp>
+        <p:nvSpPr>
+          <p:cNvPr id="199" name="Google Shape;199;p21"/>
+          <p:cNvSpPr/>
+          <p:nvPr/>
+        </p:nvSpPr>
+        <p:spPr>
+          <a:xfrm>
+            <a:off x="571500" y="571500"/>
+            <a:ext cx="76200" cy="685800"/>
+          </a:xfrm>
+          <a:prstGeom prst="rect">
+            <a:avLst/>
+          </a:prstGeom>
+          <a:solidFill>
+            <a:srgbClr val="10B981"/>
+          </a:solidFill>
+          <a:ln>
+            <a:noFill/>
+          </a:ln>
+        </p:spPr>
+        <p:txBody>
+          <a:bodyPr spcFirstLastPara="1" wrap="square" lIns="91425" tIns="45700" rIns="91425" bIns="45700" anchor="ctr" anchorCtr="0">
+            <a:noAutofit/>
+          </a:bodyPr>
+          <a:lstStyle/>
+          <a:p>
+            <a:pPr marL="0" marR="0" lvl="0" indent="0" algn="ctr" rtl="0">
+              <a:spcBef>
+                <a:spcPts val="0"/>
+              </a:spcBef>
+              <a:spcAft>
+                <a:spcPts val="0"/>
+              </a:spcAft>
+              <a:buNone/>
+            </a:pPr>
+            <a:endParaRPr sz="1800" b="0" i="0" u="none" strike="noStrike" cap="none">
+              <a:solidFill>
+                <a:schemeClr val="dk1"/>
+              </a:solidFill>
+              <a:latin typeface="Calibri"/>
+              <a:ea typeface="Calibri"/>
+              <a:cs typeface="Calibri"/>
+              <a:sym typeface="Calibri"/>
+            </a:endParaRPr>
+          </a:p>
+        </p:txBody>
+      </p:sp>
+    </p:spTree>
+  </p:cSld>
+  <p:clrMapOvr>
+    <a:masterClrMapping/>
+  </p:clrMapOvr>
+</p:sld>
+</file>
+
+<file path=ppt/slides/slide15.xml><?xml version="1.0" encoding="utf-8"?>
+<p:sld xmlns:a="http://schemas.openxmlformats.org/drawingml/2006/main" xmlns:r="http://schemas.openxmlformats.org/officeDocument/2006/relationships" xmlns:p="http://schemas.openxmlformats.org/presentationml/2006/main">
+  <p:cSld>
+    <p:spTree>
+      <p:nvGrpSpPr>
+        <p:cNvPr id="1" name="Shape 90"/>
+        <p:cNvGrpSpPr/>
+        <p:nvPr/>
+      </p:nvGrpSpPr>
+      <p:grpSpPr>
+        <a:xfrm>
+          <a:off x="0" y="0"/>
+          <a:ext cx="0" cy="0"/>
+          <a:chOff x="0" y="0"/>
+          <a:chExt cx="0" cy="0"/>
+        </a:xfrm>
+      </p:grpSpPr>
+      <p:pic>
+        <p:nvPicPr>
+          <p:cNvPr id="91" name="Google Shape;91;p14" descr="image.png"/>
+          <p:cNvPicPr preferRelativeResize="0"/>
+          <p:nvPr/>
+        </p:nvPicPr>
+        <p:blipFill rotWithShape="1">
+          <a:blip r:embed="rId3">
+            <a:alphaModFix/>
+          </a:blip>
+          <a:srcRect/>
+          <a:stretch/>
+        </p:blipFill>
+        <p:spPr>
+          <a:xfrm>
+            <a:off x="0" y="0"/>
+            <a:ext cx="12192000" cy="6858000"/>
+          </a:xfrm>
+          <a:prstGeom prst="rect">
+            <a:avLst/>
+          </a:prstGeom>
+          <a:noFill/>
+          <a:ln>
+            <a:noFill/>
+          </a:ln>
+        </p:spPr>
+      </p:pic>
+      <p:sp>
+        <p:nvSpPr>
+          <p:cNvPr id="92" name="Google Shape;92;p14"/>
+          <p:cNvSpPr/>
+          <p:nvPr/>
+        </p:nvSpPr>
+        <p:spPr>
+          <a:xfrm>
+            <a:off x="5524500" y="1996380"/>
+            <a:ext cx="1143000" cy="57150"/>
+          </a:xfrm>
+          <a:prstGeom prst="rect">
+            <a:avLst/>
+          </a:prstGeom>
+          <a:solidFill>
+            <a:srgbClr val="3498DB"/>
+          </a:solidFill>
+          <a:ln>
+            <a:noFill/>
+          </a:ln>
+        </p:spPr>
+        <p:txBody>
+          <a:bodyPr spcFirstLastPara="1" wrap="square" lIns="91425" tIns="45700" rIns="91425" bIns="45700" anchor="ctr" anchorCtr="0">
+            <a:noAutofit/>
+          </a:bodyPr>
+          <a:lstStyle/>
+          <a:p>
+            <a:pPr marL="0" marR="0" lvl="0" indent="0" algn="ctr" rtl="0">
+              <a:spcBef>
+                <a:spcPts val="0"/>
+              </a:spcBef>
+              <a:spcAft>
+                <a:spcPts val="0"/>
+              </a:spcAft>
+              <a:buNone/>
+            </a:pPr>
+            <a:endParaRPr sz="1800" b="0" i="0" u="none" strike="noStrike" cap="none">
+              <a:solidFill>
+                <a:schemeClr val="dk1"/>
+              </a:solidFill>
+              <a:latin typeface="Calibri"/>
+              <a:ea typeface="Calibri"/>
+              <a:cs typeface="Calibri"/>
+              <a:sym typeface="Calibri"/>
+            </a:endParaRPr>
+          </a:p>
+        </p:txBody>
+      </p:sp>
+      <p:sp>
+        <p:nvSpPr>
+          <p:cNvPr id="93" name="Google Shape;93;p14"/>
+          <p:cNvSpPr txBox="1"/>
+          <p:nvPr/>
+        </p:nvSpPr>
+        <p:spPr>
+          <a:xfrm>
+            <a:off x="2215514" y="2339280"/>
+            <a:ext cx="7760970" cy="1924050"/>
+          </a:xfrm>
+          <a:prstGeom prst="rect">
+            <a:avLst/>
+          </a:prstGeom>
+          <a:noFill/>
+          <a:ln>
+            <a:noFill/>
+          </a:ln>
+        </p:spPr>
+        <p:txBody>
+          <a:bodyPr spcFirstLastPara="1" wrap="square" lIns="0" tIns="0" rIns="0" bIns="0" anchor="t" anchorCtr="0">
+            <a:spAutoFit/>
+          </a:bodyPr>
+          <a:lstStyle/>
+          <a:p>
+            <a:pPr marL="0" marR="0" lvl="0" indent="0" algn="ctr" rtl="0">
+              <a:spcBef>
+                <a:spcPts val="0"/>
+              </a:spcBef>
+              <a:spcAft>
+                <a:spcPts val="0"/>
+              </a:spcAft>
+              <a:buNone/>
+            </a:pPr>
+            <a:r>
+              <a:rPr lang="en-US" sz="5250" b="1" i="0" u="none" strike="noStrike" cap="none">
+                <a:solidFill>
+                  <a:srgbClr val="F1C40F"/>
+                </a:solidFill>
+                <a:latin typeface="Noto Sans JP"/>
+                <a:ea typeface="Noto Sans JP"/>
+                <a:cs typeface="Noto Sans JP"/>
+                <a:sym typeface="Noto Sans JP"/>
+              </a:rPr>
+              <a:t>1台のPCで運用する際の</a:t>
+            </a:r>
+            <a:br>
+              <a:rPr lang="en-US" sz="1800" b="0" i="0" u="none" strike="noStrike" cap="none">
+                <a:solidFill>
+                  <a:schemeClr val="dk1"/>
+                </a:solidFill>
+                <a:latin typeface="Calibri"/>
+                <a:ea typeface="Calibri"/>
+                <a:cs typeface="Calibri"/>
+                <a:sym typeface="Calibri"/>
+              </a:rPr>
+            </a:br>
+            <a:r>
+              <a:rPr lang="en-US" sz="5250" b="1" i="0" u="none" strike="noStrike" cap="none">
+                <a:solidFill>
+                  <a:srgbClr val="F1C40F"/>
+                </a:solidFill>
+                <a:latin typeface="Noto Sans JP"/>
+                <a:ea typeface="Noto Sans JP"/>
+                <a:cs typeface="Noto Sans JP"/>
+                <a:sym typeface="Noto Sans JP"/>
+              </a:rPr>
+              <a:t> 【超重要】ルール</a:t>
+            </a:r>
+            <a:endParaRPr/>
+          </a:p>
+        </p:txBody>
+      </p:sp>
+      <p:sp>
+        <p:nvSpPr>
+          <p:cNvPr id="94" name="Google Shape;94;p14"/>
+          <p:cNvSpPr txBox="1"/>
+          <p:nvPr/>
+        </p:nvSpPr>
+        <p:spPr>
+          <a:xfrm>
+            <a:off x="3028950" y="4453830"/>
+            <a:ext cx="6134100" cy="426690"/>
+          </a:xfrm>
+          <a:prstGeom prst="rect">
+            <a:avLst/>
+          </a:prstGeom>
+          <a:noFill/>
+          <a:ln>
+            <a:noFill/>
+          </a:ln>
+        </p:spPr>
+        <p:txBody>
+          <a:bodyPr spcFirstLastPara="1" wrap="square" lIns="0" tIns="0" rIns="0" bIns="0" anchor="t" anchorCtr="0">
+            <a:spAutoFit/>
+          </a:bodyPr>
+          <a:lstStyle/>
+          <a:p>
+            <a:pPr marL="0" marR="0" lvl="0" indent="0" algn="ctr" rtl="0">
+              <a:lnSpc>
+                <a:spcPct val="159952"/>
+              </a:lnSpc>
+              <a:spcBef>
+                <a:spcPts val="0"/>
+              </a:spcBef>
+              <a:spcAft>
+                <a:spcPts val="0"/>
+              </a:spcAft>
+              <a:buNone/>
+            </a:pPr>
+            <a:r>
+              <a:rPr lang="en-US" sz="2100" b="0" i="0" u="none" strike="noStrike" cap="none">
+                <a:solidFill>
+                  <a:srgbClr val="E0E0E0"/>
+                </a:solidFill>
+                <a:latin typeface="Noto Sans JP"/>
+                <a:ea typeface="Noto Sans JP"/>
+                <a:cs typeface="Noto Sans JP"/>
+                <a:sym typeface="Noto Sans JP"/>
+              </a:rPr>
+              <a:t>正解や管理画面が参加者にバレないための必須設定</a:t>
+            </a:r>
+            <a:endParaRPr/>
+          </a:p>
+        </p:txBody>
+      </p:sp>
+    </p:spTree>
+  </p:cSld>
+  <p:clrMapOvr>
+    <a:masterClrMapping/>
+  </p:clrMapOvr>
+</p:sld>
+</file>
+
+<file path=ppt/slides/slide16.xml><?xml version="1.0" encoding="utf-8"?>
+<p:sld xmlns:a="http://schemas.openxmlformats.org/drawingml/2006/main" xmlns:r="http://schemas.openxmlformats.org/officeDocument/2006/relationships" xmlns:p="http://schemas.openxmlformats.org/presentationml/2006/main">
+  <p:cSld>
+    <p:spTree>
+      <p:nvGrpSpPr>
+        <p:cNvPr id="1" name="Shape 98"/>
+        <p:cNvGrpSpPr/>
+        <p:nvPr/>
+      </p:nvGrpSpPr>
+      <p:grpSpPr>
+        <a:xfrm>
+          <a:off x="0" y="0"/>
+          <a:ext cx="0" cy="0"/>
+          <a:chOff x="0" y="0"/>
+          <a:chExt cx="0" cy="0"/>
+        </a:xfrm>
+      </p:grpSpPr>
+      <p:pic>
+        <p:nvPicPr>
+          <p:cNvPr id="99" name="Google Shape;99;p15" descr="image.png"/>
+          <p:cNvPicPr preferRelativeResize="0"/>
+          <p:nvPr/>
+        </p:nvPicPr>
+        <p:blipFill rotWithShape="1">
+          <a:blip r:embed="rId3">
+            <a:alphaModFix/>
+          </a:blip>
+          <a:srcRect/>
+          <a:stretch/>
+        </p:blipFill>
+        <p:spPr>
+          <a:xfrm>
+            <a:off x="0" y="0"/>
+            <a:ext cx="12192000" cy="6858000"/>
+          </a:xfrm>
+          <a:prstGeom prst="rect">
+            <a:avLst/>
+          </a:prstGeom>
+          <a:noFill/>
+          <a:ln>
+            <a:noFill/>
+          </a:ln>
+        </p:spPr>
+      </p:pic>
+      <p:pic>
+        <p:nvPicPr>
+          <p:cNvPr id="100" name="Google Shape;100;p15" descr="image.png"/>
+          <p:cNvPicPr preferRelativeResize="0"/>
+          <p:nvPr/>
+        </p:nvPicPr>
+        <p:blipFill rotWithShape="1">
+          <a:blip r:embed="rId4">
+            <a:alphaModFix/>
+          </a:blip>
+          <a:srcRect/>
+          <a:stretch/>
+        </p:blipFill>
+        <p:spPr>
+          <a:xfrm>
+            <a:off x="571500" y="3529859"/>
+            <a:ext cx="5191125" cy="3049190"/>
+          </a:xfrm>
+          <a:prstGeom prst="rect">
+            <a:avLst/>
+          </a:prstGeom>
+          <a:noFill/>
+          <a:ln>
+            <a:noFill/>
+          </a:ln>
+        </p:spPr>
+      </p:pic>
+      <p:pic>
+        <p:nvPicPr>
+          <p:cNvPr id="101" name="Google Shape;101;p15" descr="image.png"/>
+          <p:cNvPicPr preferRelativeResize="0"/>
+          <p:nvPr/>
+        </p:nvPicPr>
+        <p:blipFill rotWithShape="1">
+          <a:blip r:embed="rId5">
+            <a:alphaModFix/>
+          </a:blip>
+          <a:srcRect/>
+          <a:stretch/>
+        </p:blipFill>
+        <p:spPr>
+          <a:xfrm>
+            <a:off x="6429375" y="2150715"/>
+            <a:ext cx="5191125" cy="3619500"/>
+          </a:xfrm>
+          <a:prstGeom prst="rect">
+            <a:avLst/>
+          </a:prstGeom>
+          <a:noFill/>
+          <a:ln>
+            <a:noFill/>
+          </a:ln>
+        </p:spPr>
+      </p:pic>
+      <p:sp>
+        <p:nvSpPr>
+          <p:cNvPr id="102" name="Google Shape;102;p15"/>
+          <p:cNvSpPr txBox="1"/>
+          <p:nvPr/>
+        </p:nvSpPr>
+        <p:spPr>
+          <a:xfrm>
+            <a:off x="571500" y="387101"/>
+            <a:ext cx="11601450" cy="586680"/>
+          </a:xfrm>
+          <a:prstGeom prst="rect">
+            <a:avLst/>
+          </a:prstGeom>
+          <a:noFill/>
+          <a:ln>
+            <a:noFill/>
+          </a:ln>
+        </p:spPr>
+        <p:txBody>
+          <a:bodyPr spcFirstLastPara="1" wrap="square" lIns="0" tIns="0" rIns="0" bIns="0" anchor="t" anchorCtr="0">
+            <a:spAutoFit/>
+          </a:bodyPr>
+          <a:lstStyle/>
+          <a:p>
+            <a:pPr marL="0" marR="0" lvl="0" indent="0" algn="l" rtl="0">
+              <a:lnSpc>
+                <a:spcPct val="120000"/>
+              </a:lnSpc>
+              <a:spcBef>
+                <a:spcPts val="0"/>
+              </a:spcBef>
+              <a:spcAft>
+                <a:spcPts val="0"/>
+              </a:spcAft>
+              <a:buNone/>
+            </a:pPr>
+            <a:r>
+              <a:rPr lang="en-US" sz="3600" b="1" i="0" u="none" strike="noStrike" cap="none">
+                <a:solidFill>
+                  <a:srgbClr val="FFFFFF"/>
+                </a:solidFill>
+                <a:latin typeface="Noto Sans JP"/>
+                <a:ea typeface="Noto Sans JP"/>
+                <a:cs typeface="Noto Sans JP"/>
+                <a:sym typeface="Noto Sans JP"/>
+              </a:rPr>
+              <a:t>ディスプレイ設定は</a:t>
+            </a:r>
+            <a:r>
+              <a:rPr lang="en-US" sz="3600" b="1" i="0" u="none" strike="noStrike" cap="none">
+                <a:solidFill>
+                  <a:srgbClr val="E74C3C"/>
+                </a:solidFill>
+                <a:latin typeface="Noto Sans JP"/>
+                <a:ea typeface="Noto Sans JP"/>
+                <a:cs typeface="Noto Sans JP"/>
+                <a:sym typeface="Noto Sans JP"/>
+              </a:rPr>
+              <a:t>「拡張」</a:t>
+            </a:r>
+            <a:r>
+              <a:rPr lang="en-US" sz="3600" b="1" i="0" u="none" strike="noStrike" cap="none">
+                <a:solidFill>
+                  <a:srgbClr val="FFFFFF"/>
+                </a:solidFill>
+                <a:latin typeface="Noto Sans JP"/>
+                <a:ea typeface="Noto Sans JP"/>
+                <a:cs typeface="Noto Sans JP"/>
+                <a:sym typeface="Noto Sans JP"/>
+              </a:rPr>
+              <a:t>に！</a:t>
+            </a:r>
+            <a:endParaRPr/>
+          </a:p>
+        </p:txBody>
+      </p:sp>
+      <p:sp>
+        <p:nvSpPr>
+          <p:cNvPr id="103" name="Google Shape;103;p15"/>
+          <p:cNvSpPr/>
+          <p:nvPr/>
+        </p:nvSpPr>
+        <p:spPr>
+          <a:xfrm>
+            <a:off x="571500" y="1030932"/>
+            <a:ext cx="11049000" cy="38100"/>
+          </a:xfrm>
+          <a:prstGeom prst="rect">
+            <a:avLst/>
+          </a:prstGeom>
+          <a:solidFill>
+            <a:srgbClr val="3498DB"/>
+          </a:solidFill>
+          <a:ln>
+            <a:noFill/>
+          </a:ln>
+        </p:spPr>
+        <p:txBody>
+          <a:bodyPr spcFirstLastPara="1" wrap="square" lIns="91425" tIns="45700" rIns="91425" bIns="45700" anchor="ctr" anchorCtr="0">
+            <a:noAutofit/>
+          </a:bodyPr>
+          <a:lstStyle/>
+          <a:p>
+            <a:pPr marL="0" marR="0" lvl="0" indent="0" algn="ctr" rtl="0">
+              <a:spcBef>
+                <a:spcPts val="0"/>
+              </a:spcBef>
+              <a:spcAft>
+                <a:spcPts val="0"/>
+              </a:spcAft>
+              <a:buNone/>
+            </a:pPr>
+            <a:endParaRPr sz="1800" b="0" i="0" u="none" strike="noStrike" cap="none">
+              <a:solidFill>
+                <a:schemeClr val="dk1"/>
+              </a:solidFill>
+              <a:latin typeface="Calibri"/>
+              <a:ea typeface="Calibri"/>
+              <a:cs typeface="Calibri"/>
+              <a:sym typeface="Calibri"/>
+            </a:endParaRPr>
+          </a:p>
+        </p:txBody>
+      </p:sp>
+      <p:sp>
+        <p:nvSpPr>
+          <p:cNvPr id="104" name="Google Shape;104;p15"/>
+          <p:cNvSpPr txBox="1"/>
+          <p:nvPr/>
+        </p:nvSpPr>
+        <p:spPr>
+          <a:xfrm>
+            <a:off x="571500" y="1697682"/>
+            <a:ext cx="5191125" cy="1485900"/>
+          </a:xfrm>
+          <a:prstGeom prst="rect">
+            <a:avLst/>
+          </a:prstGeom>
+          <a:noFill/>
+          <a:ln>
+            <a:noFill/>
+          </a:ln>
+        </p:spPr>
+        <p:txBody>
+          <a:bodyPr spcFirstLastPara="1" wrap="square" lIns="0" tIns="0" rIns="0" bIns="0" anchor="t" anchorCtr="0">
+            <a:spAutoFit/>
+          </a:bodyPr>
+          <a:lstStyle/>
+          <a:p>
+            <a:pPr marL="0" marR="0" lvl="0" indent="0" algn="l" rtl="0">
+              <a:lnSpc>
+                <a:spcPct val="150000"/>
+              </a:lnSpc>
+              <a:spcBef>
+                <a:spcPts val="0"/>
+              </a:spcBef>
+              <a:spcAft>
+                <a:spcPts val="0"/>
+              </a:spcAft>
+              <a:buNone/>
+            </a:pPr>
+            <a:r>
+              <a:rPr lang="en-US" sz="1950" b="0" i="0" u="none" strike="noStrike" cap="none" dirty="0">
+                <a:solidFill>
+                  <a:srgbClr val="E0E0E0"/>
+                </a:solidFill>
+                <a:latin typeface="Noto Sans JP"/>
+                <a:ea typeface="Noto Sans JP"/>
+                <a:cs typeface="Noto Sans JP"/>
+                <a:sym typeface="Noto Sans JP"/>
+              </a:rPr>
+              <a:t>パソコンとプロジェクターを繋いだ際、設定を「画面の複製」にしてしまうと、</a:t>
+            </a:r>
+            <a:r>
+              <a:rPr lang="en-US" sz="1950" b="1" i="0" u="none" strike="noStrike" cap="none" dirty="0">
+                <a:solidFill>
+                  <a:srgbClr val="E74C3C"/>
+                </a:solidFill>
+                <a:latin typeface="Noto Sans JP"/>
+                <a:ea typeface="Noto Sans JP"/>
+                <a:cs typeface="Noto Sans JP"/>
+                <a:sym typeface="Noto Sans JP"/>
+              </a:rPr>
+              <a:t>司会者が見ている正解や裏側の管理画面が、参加者全員に丸見え</a:t>
+            </a:r>
+            <a:r>
+              <a:rPr lang="en-US" sz="1950" b="0" i="0" u="none" strike="noStrike" cap="none" dirty="0">
+                <a:solidFill>
+                  <a:srgbClr val="E0E0E0"/>
+                </a:solidFill>
+                <a:latin typeface="Noto Sans JP"/>
+                <a:ea typeface="Noto Sans JP"/>
+                <a:cs typeface="Noto Sans JP"/>
+                <a:sym typeface="Noto Sans JP"/>
+              </a:rPr>
+              <a:t>になってしまいます！</a:t>
+            </a:r>
+            <a:endParaRPr dirty="0"/>
+          </a:p>
+        </p:txBody>
+      </p:sp>
+      <p:sp>
+        <p:nvSpPr>
+          <p:cNvPr id="105" name="Google Shape;105;p15"/>
+          <p:cNvSpPr txBox="1"/>
+          <p:nvPr/>
+        </p:nvSpPr>
+        <p:spPr>
+          <a:xfrm>
+            <a:off x="828675" y="3678882"/>
+            <a:ext cx="4910613" cy="381000"/>
+          </a:xfrm>
+          <a:prstGeom prst="rect">
+            <a:avLst/>
+          </a:prstGeom>
+          <a:noFill/>
+          <a:ln>
+            <a:noFill/>
+          </a:ln>
+        </p:spPr>
+        <p:txBody>
+          <a:bodyPr spcFirstLastPara="1" wrap="square" lIns="314325" tIns="0" rIns="0" bIns="0" anchor="t" anchorCtr="0">
+            <a:spAutoFit/>
+          </a:bodyPr>
+          <a:lstStyle/>
+          <a:p>
+            <a:pPr marL="0" marR="0" lvl="0" indent="0" algn="l" rtl="0">
+              <a:spcBef>
+                <a:spcPts val="0"/>
+              </a:spcBef>
+              <a:spcAft>
+                <a:spcPts val="0"/>
+              </a:spcAft>
+              <a:buNone/>
+            </a:pPr>
+            <a:r>
+              <a:rPr lang="en-US" sz="2100" b="1" i="0" u="none" strike="noStrike" cap="none">
+                <a:solidFill>
+                  <a:srgbClr val="3498DB"/>
+                </a:solidFill>
+                <a:latin typeface="Noto Sans JP"/>
+                <a:ea typeface="Noto Sans JP"/>
+                <a:cs typeface="Noto Sans JP"/>
+                <a:sym typeface="Noto Sans JP"/>
+              </a:rPr>
+              <a:t>設定方法</a:t>
+            </a:r>
+            <a:endParaRPr/>
+          </a:p>
+        </p:txBody>
+      </p:sp>
+      <p:sp>
+        <p:nvSpPr>
+          <p:cNvPr id="106" name="Google Shape;106;p15"/>
+          <p:cNvSpPr txBox="1"/>
+          <p:nvPr/>
+        </p:nvSpPr>
+        <p:spPr>
+          <a:xfrm>
+            <a:off x="828675" y="4202757"/>
+            <a:ext cx="4676775" cy="2010965"/>
+          </a:xfrm>
+          <a:prstGeom prst="rect">
+            <a:avLst/>
+          </a:prstGeom>
+          <a:noFill/>
+          <a:ln>
+            <a:noFill/>
+          </a:ln>
+        </p:spPr>
+        <p:txBody>
+          <a:bodyPr spcFirstLastPara="1" wrap="square" lIns="0" tIns="0" rIns="0" bIns="0" anchor="t" anchorCtr="0">
+            <a:spAutoFit/>
+          </a:bodyPr>
+          <a:lstStyle/>
+          <a:p>
+            <a:pPr marL="0" marR="0" lvl="0" indent="0" algn="l" rtl="0">
+              <a:lnSpc>
+                <a:spcPct val="146666"/>
+              </a:lnSpc>
+              <a:spcBef>
+                <a:spcPts val="0"/>
+              </a:spcBef>
+              <a:spcAft>
+                <a:spcPts val="0"/>
+              </a:spcAft>
+              <a:buNone/>
+            </a:pPr>
+            <a:r>
+              <a:rPr lang="en-US" sz="1650" b="0" i="0" u="none" strike="noStrike" cap="none">
+                <a:solidFill>
+                  <a:srgbClr val="E0E0E0"/>
+                </a:solidFill>
+                <a:latin typeface="Noto Sans JP"/>
+                <a:ea typeface="Noto Sans JP"/>
+                <a:cs typeface="Noto Sans JP"/>
+                <a:sym typeface="Noto Sans JP"/>
+              </a:rPr>
+              <a:t>・Windows: 「Windowsキー + P」を押し、</a:t>
+            </a:r>
+            <a:r>
+              <a:rPr lang="en-US" sz="1650" b="1" i="0" u="none" strike="noStrike" cap="none">
+                <a:solidFill>
+                  <a:srgbClr val="E0E0E0"/>
+                </a:solidFill>
+                <a:latin typeface="Noto Sans JP"/>
+                <a:ea typeface="Noto Sans JP"/>
+                <a:cs typeface="Noto Sans JP"/>
+                <a:sym typeface="Noto Sans JP"/>
+              </a:rPr>
+              <a:t>「拡張」</a:t>
+            </a:r>
+            <a:r>
+              <a:rPr lang="en-US" sz="1650" b="0" i="0" u="none" strike="noStrike" cap="none">
+                <a:solidFill>
+                  <a:srgbClr val="E0E0E0"/>
+                </a:solidFill>
+                <a:latin typeface="Noto Sans JP"/>
+                <a:ea typeface="Noto Sans JP"/>
+                <a:cs typeface="Noto Sans JP"/>
+                <a:sym typeface="Noto Sans JP"/>
+              </a:rPr>
+              <a:t>を選択。</a:t>
+            </a:r>
+            <a:br>
+              <a:rPr lang="en-US" sz="1800" b="0" i="0" u="none" strike="noStrike" cap="none">
+                <a:solidFill>
+                  <a:schemeClr val="dk1"/>
+                </a:solidFill>
+                <a:latin typeface="Calibri"/>
+                <a:ea typeface="Calibri"/>
+                <a:cs typeface="Calibri"/>
+                <a:sym typeface="Calibri"/>
+              </a:rPr>
+            </a:br>
+            <a:br>
+              <a:rPr lang="en-US" sz="1800" b="0" i="0" u="none" strike="noStrike" cap="none">
+                <a:solidFill>
+                  <a:schemeClr val="dk1"/>
+                </a:solidFill>
+                <a:latin typeface="Calibri"/>
+                <a:ea typeface="Calibri"/>
+                <a:cs typeface="Calibri"/>
+                <a:sym typeface="Calibri"/>
+              </a:rPr>
+            </a:br>
+            <a:r>
+              <a:rPr lang="en-US" sz="1650" b="0" i="0" u="none" strike="noStrike" cap="none">
+                <a:solidFill>
+                  <a:srgbClr val="E0E0E0"/>
+                </a:solidFill>
+                <a:latin typeface="Noto Sans JP"/>
+                <a:ea typeface="Noto Sans JP"/>
+                <a:cs typeface="Noto Sans JP"/>
+                <a:sym typeface="Noto Sans JP"/>
+              </a:rPr>
+              <a:t> ・Mac: 「システム設定」＞「ディスプレイ」から、プロジェクターを</a:t>
+            </a:r>
+            <a:r>
+              <a:rPr lang="en-US" sz="1650" b="1" i="0" u="none" strike="noStrike" cap="none">
+                <a:solidFill>
+                  <a:srgbClr val="E0E0E0"/>
+                </a:solidFill>
+                <a:latin typeface="Noto Sans JP"/>
+                <a:ea typeface="Noto Sans JP"/>
+                <a:cs typeface="Noto Sans JP"/>
+                <a:sym typeface="Noto Sans JP"/>
+              </a:rPr>
+              <a:t>「拡張ディスプレイ」</a:t>
+            </a:r>
+            <a:r>
+              <a:rPr lang="en-US" sz="1650" b="0" i="0" u="none" strike="noStrike" cap="none">
+                <a:solidFill>
+                  <a:srgbClr val="E0E0E0"/>
+                </a:solidFill>
+                <a:latin typeface="Noto Sans JP"/>
+                <a:ea typeface="Noto Sans JP"/>
+                <a:cs typeface="Noto Sans JP"/>
+                <a:sym typeface="Noto Sans JP"/>
+              </a:rPr>
+              <a:t>に設定。</a:t>
+            </a:r>
+            <a:endParaRPr/>
+          </a:p>
+        </p:txBody>
+      </p:sp>
+      <p:pic>
+        <p:nvPicPr>
+          <p:cNvPr id="107" name="Google Shape;107;p15" descr="image.png"/>
+          <p:cNvPicPr preferRelativeResize="0"/>
+          <p:nvPr/>
+        </p:nvPicPr>
+        <p:blipFill rotWithShape="1">
+          <a:blip r:embed="rId6">
+            <a:alphaModFix/>
+          </a:blip>
+          <a:srcRect/>
+          <a:stretch/>
+        </p:blipFill>
+        <p:spPr>
+          <a:xfrm>
+            <a:off x="6448425" y="2169765"/>
+            <a:ext cx="5153025" cy="3581400"/>
+          </a:xfrm>
+          <a:prstGeom prst="rect">
+            <a:avLst/>
+          </a:prstGeom>
+          <a:noFill/>
+          <a:ln>
+            <a:noFill/>
+          </a:ln>
+        </p:spPr>
+      </p:pic>
+      <p:pic>
+        <p:nvPicPr>
+          <p:cNvPr id="108" name="Google Shape;108;p15" descr="image.png"/>
+          <p:cNvPicPr preferRelativeResize="0"/>
+          <p:nvPr/>
+        </p:nvPicPr>
+        <p:blipFill rotWithShape="1">
+          <a:blip r:embed="rId7">
+            <a:alphaModFix/>
+          </a:blip>
+          <a:srcRect/>
+          <a:stretch/>
+        </p:blipFill>
+        <p:spPr>
+          <a:xfrm>
+            <a:off x="828675" y="3755082"/>
+            <a:ext cx="314325" cy="266700"/>
+          </a:xfrm>
+          <a:prstGeom prst="rect">
+            <a:avLst/>
+          </a:prstGeom>
+          <a:noFill/>
+          <a:ln>
+            <a:noFill/>
+          </a:ln>
+        </p:spPr>
+      </p:pic>
+    </p:spTree>
+  </p:cSld>
+  <p:clrMapOvr>
+    <a:masterClrMapping/>
+  </p:clrMapOvr>
+</p:sld>
+</file>
+
+<file path=ppt/slides/slide17.xml><?xml version="1.0" encoding="utf-8"?>
+<p:sld xmlns:a="http://schemas.openxmlformats.org/drawingml/2006/main" xmlns:r="http://schemas.openxmlformats.org/officeDocument/2006/relationships" xmlns:p="http://schemas.openxmlformats.org/presentationml/2006/main">
+  <p:cSld>
+    <p:spTree>
+      <p:nvGrpSpPr>
+        <p:cNvPr id="1" name="Shape 112"/>
+        <p:cNvGrpSpPr/>
+        <p:nvPr/>
+      </p:nvGrpSpPr>
+      <p:grpSpPr>
+        <a:xfrm>
+          <a:off x="0" y="0"/>
+          <a:ext cx="0" cy="0"/>
+          <a:chOff x="0" y="0"/>
+          <a:chExt cx="0" cy="0"/>
+        </a:xfrm>
+      </p:grpSpPr>
+      <p:pic>
+        <p:nvPicPr>
+          <p:cNvPr id="113" name="Google Shape;113;p16" descr="image.png"/>
+          <p:cNvPicPr preferRelativeResize="0"/>
+          <p:nvPr/>
+        </p:nvPicPr>
+        <p:blipFill rotWithShape="1">
+          <a:blip r:embed="rId3">
+            <a:alphaModFix/>
+          </a:blip>
+          <a:srcRect/>
+          <a:stretch/>
+        </p:blipFill>
+        <p:spPr>
+          <a:xfrm>
+            <a:off x="0" y="0"/>
+            <a:ext cx="12192000" cy="6858000"/>
+          </a:xfrm>
+          <a:prstGeom prst="rect">
+            <a:avLst/>
+          </a:prstGeom>
+          <a:noFill/>
+          <a:ln>
+            <a:noFill/>
+          </a:ln>
+        </p:spPr>
+      </p:pic>
+      <p:pic>
+        <p:nvPicPr>
+          <p:cNvPr id="114" name="Google Shape;114;p16" descr="image.png"/>
+          <p:cNvPicPr preferRelativeResize="0"/>
+          <p:nvPr/>
+        </p:nvPicPr>
+        <p:blipFill rotWithShape="1">
+          <a:blip r:embed="rId4">
+            <a:alphaModFix/>
+          </a:blip>
+          <a:srcRect/>
+          <a:stretch/>
+        </p:blipFill>
+        <p:spPr>
+          <a:xfrm>
+            <a:off x="571500" y="1824930"/>
+            <a:ext cx="3492549" cy="4486275"/>
+          </a:xfrm>
+          <a:prstGeom prst="rect">
+            <a:avLst/>
+          </a:prstGeom>
+          <a:noFill/>
+          <a:ln>
+            <a:noFill/>
+          </a:ln>
+        </p:spPr>
+      </p:pic>
+      <p:pic>
+        <p:nvPicPr>
+          <p:cNvPr id="115" name="Google Shape;115;p16" descr="image.png"/>
+          <p:cNvPicPr preferRelativeResize="0"/>
+          <p:nvPr/>
+        </p:nvPicPr>
+        <p:blipFill rotWithShape="1">
+          <a:blip r:embed="rId5">
+            <a:alphaModFix/>
+          </a:blip>
+          <a:srcRect/>
+          <a:stretch/>
+        </p:blipFill>
+        <p:spPr>
+          <a:xfrm>
+            <a:off x="4349799" y="1824930"/>
+            <a:ext cx="3492549" cy="4486275"/>
+          </a:xfrm>
+          <a:prstGeom prst="rect">
+            <a:avLst/>
+          </a:prstGeom>
+          <a:noFill/>
+          <a:ln>
+            <a:noFill/>
+          </a:ln>
+        </p:spPr>
+      </p:pic>
+      <p:pic>
+        <p:nvPicPr>
+          <p:cNvPr id="116" name="Google Shape;116;p16" descr="image.png"/>
+          <p:cNvPicPr preferRelativeResize="0"/>
+          <p:nvPr/>
+        </p:nvPicPr>
+        <p:blipFill rotWithShape="1">
+          <a:blip r:embed="rId6">
+            <a:alphaModFix/>
+          </a:blip>
+          <a:srcRect/>
+          <a:stretch/>
+        </p:blipFill>
+        <p:spPr>
+          <a:xfrm>
+            <a:off x="8128099" y="1824930"/>
+            <a:ext cx="3492549" cy="4486275"/>
+          </a:xfrm>
+          <a:prstGeom prst="rect">
+            <a:avLst/>
+          </a:prstGeom>
+          <a:noFill/>
+          <a:ln>
+            <a:noFill/>
+          </a:ln>
+        </p:spPr>
+      </p:pic>
+      <p:sp>
+        <p:nvSpPr>
+          <p:cNvPr id="117" name="Google Shape;117;p16"/>
+          <p:cNvSpPr txBox="1"/>
+          <p:nvPr/>
+        </p:nvSpPr>
+        <p:spPr>
+          <a:xfrm>
+            <a:off x="571500" y="476250"/>
+            <a:ext cx="11601450" cy="586680"/>
+          </a:xfrm>
+          <a:prstGeom prst="rect">
+            <a:avLst/>
+          </a:prstGeom>
+          <a:noFill/>
+          <a:ln>
+            <a:noFill/>
+          </a:ln>
+        </p:spPr>
+        <p:txBody>
+          <a:bodyPr spcFirstLastPara="1" wrap="square" lIns="0" tIns="0" rIns="0" bIns="0" anchor="t" anchorCtr="0">
+            <a:spAutoFit/>
+          </a:bodyPr>
+          <a:lstStyle/>
+          <a:p>
+            <a:pPr marL="0" marR="0" lvl="0" indent="0" algn="l" rtl="0">
+              <a:lnSpc>
+                <a:spcPct val="120000"/>
+              </a:lnSpc>
+              <a:spcBef>
+                <a:spcPts val="0"/>
+              </a:spcBef>
+              <a:spcAft>
+                <a:spcPts val="0"/>
+              </a:spcAft>
+              <a:buNone/>
+            </a:pPr>
+            <a:r>
+              <a:rPr lang="en-US" sz="3600" b="1" i="0" u="none" strike="noStrike" cap="none">
+                <a:solidFill>
+                  <a:srgbClr val="FFFFFF"/>
+                </a:solidFill>
+                <a:latin typeface="Noto Sans JP"/>
+                <a:ea typeface="Noto Sans JP"/>
+                <a:cs typeface="Noto Sans JP"/>
+                <a:sym typeface="Noto Sans JP"/>
+              </a:rPr>
+              <a:t>1台のPCで完璧に運用する「3つの鉄則」</a:t>
+            </a:r>
+            <a:endParaRPr/>
+          </a:p>
+        </p:txBody>
+      </p:sp>
+      <p:sp>
+        <p:nvSpPr>
+          <p:cNvPr id="118" name="Google Shape;118;p16"/>
+          <p:cNvSpPr/>
+          <p:nvPr/>
+        </p:nvSpPr>
+        <p:spPr>
+          <a:xfrm>
+            <a:off x="571500" y="1120080"/>
+            <a:ext cx="11049000" cy="38100"/>
+          </a:xfrm>
+          <a:prstGeom prst="rect">
+            <a:avLst/>
+          </a:prstGeom>
+          <a:solidFill>
+            <a:srgbClr val="3498DB"/>
+          </a:solidFill>
+          <a:ln>
+            <a:noFill/>
+          </a:ln>
+        </p:spPr>
+        <p:txBody>
+          <a:bodyPr spcFirstLastPara="1" wrap="square" lIns="91425" tIns="45700" rIns="91425" bIns="45700" anchor="ctr" anchorCtr="0">
+            <a:noAutofit/>
+          </a:bodyPr>
+          <a:lstStyle/>
+          <a:p>
+            <a:pPr marL="0" marR="0" lvl="0" indent="0" algn="ctr" rtl="0">
+              <a:spcBef>
+                <a:spcPts val="0"/>
+              </a:spcBef>
+              <a:spcAft>
+                <a:spcPts val="0"/>
+              </a:spcAft>
+              <a:buNone/>
+            </a:pPr>
+            <a:endParaRPr sz="1800" b="0" i="0" u="none" strike="noStrike" cap="none">
+              <a:solidFill>
+                <a:schemeClr val="dk1"/>
+              </a:solidFill>
+              <a:latin typeface="Calibri"/>
+              <a:ea typeface="Calibri"/>
+              <a:cs typeface="Calibri"/>
+              <a:sym typeface="Calibri"/>
+            </a:endParaRPr>
+          </a:p>
+        </p:txBody>
+      </p:sp>
+      <p:sp>
+        <p:nvSpPr>
+          <p:cNvPr id="119" name="Google Shape;119;p16"/>
+          <p:cNvSpPr txBox="1"/>
+          <p:nvPr/>
+        </p:nvSpPr>
+        <p:spPr>
+          <a:xfrm>
+            <a:off x="854232" y="3177480"/>
+            <a:ext cx="2927084" cy="762000"/>
+          </a:xfrm>
+          <a:prstGeom prst="rect">
+            <a:avLst/>
+          </a:prstGeom>
+          <a:noFill/>
+          <a:ln>
+            <a:noFill/>
+          </a:ln>
+        </p:spPr>
+        <p:txBody>
+          <a:bodyPr spcFirstLastPara="1" wrap="square" lIns="0" tIns="0" rIns="0" bIns="0" anchor="t" anchorCtr="0">
+            <a:spAutoFit/>
+          </a:bodyPr>
+          <a:lstStyle/>
+          <a:p>
+            <a:pPr marL="0" marR="0" lvl="0" indent="0" algn="ctr" rtl="0">
+              <a:spcBef>
+                <a:spcPts val="0"/>
+              </a:spcBef>
+              <a:spcAft>
+                <a:spcPts val="0"/>
+              </a:spcAft>
+              <a:buNone/>
+            </a:pPr>
+            <a:r>
+              <a:rPr lang="en-US" sz="2100" b="1" i="0" u="none" strike="noStrike" cap="none">
+                <a:solidFill>
+                  <a:srgbClr val="F1C40F"/>
+                </a:solidFill>
+                <a:latin typeface="Noto Sans JP"/>
+                <a:ea typeface="Noto Sans JP"/>
+                <a:cs typeface="Noto Sans JP"/>
+                <a:sym typeface="Noto Sans JP"/>
+              </a:rPr>
+              <a:t>1. ウィンドウを分ける</a:t>
+            </a:r>
+            <a:endParaRPr/>
+          </a:p>
+        </p:txBody>
+      </p:sp>
+      <p:sp>
+        <p:nvSpPr>
+          <p:cNvPr id="120" name="Google Shape;120;p16"/>
+          <p:cNvSpPr txBox="1"/>
+          <p:nvPr/>
+        </p:nvSpPr>
+        <p:spPr>
+          <a:xfrm>
+            <a:off x="864933" y="4129980"/>
+            <a:ext cx="2927084" cy="1828800"/>
+          </a:xfrm>
+          <a:prstGeom prst="rect">
+            <a:avLst/>
+          </a:prstGeom>
+          <a:noFill/>
+          <a:ln>
+            <a:noFill/>
+          </a:ln>
+        </p:spPr>
+        <p:txBody>
+          <a:bodyPr spcFirstLastPara="1" wrap="square" lIns="0" tIns="0" rIns="0" bIns="0" anchor="t" anchorCtr="0">
+            <a:spAutoFit/>
+          </a:bodyPr>
+          <a:lstStyle/>
+          <a:p>
+            <a:pPr marL="0" marR="0" lvl="0" indent="0" algn="l" rtl="0">
+              <a:lnSpc>
+                <a:spcPct val="160000"/>
+              </a:lnSpc>
+              <a:spcBef>
+                <a:spcPts val="0"/>
+              </a:spcBef>
+              <a:spcAft>
+                <a:spcPts val="0"/>
+              </a:spcAft>
+              <a:buNone/>
+            </a:pPr>
+            <a:r>
+              <a:rPr lang="en-US" sz="1500" b="0" i="0" u="none" strike="noStrike" cap="none" dirty="0">
+                <a:solidFill>
+                  <a:srgbClr val="CCCCCC"/>
+                </a:solidFill>
+                <a:latin typeface="Noto Sans JP"/>
+                <a:ea typeface="Noto Sans JP"/>
+                <a:cs typeface="Noto Sans JP"/>
+                <a:sym typeface="Noto Sans JP"/>
+              </a:rPr>
+              <a:t>ブラウザの「ウィンドウ」を2つ立ち上げます。1つで「管理画面」を開いて手元に置き、もう1つで「スクリーン画面」を開いてプロジェクター側へ移動させます。</a:t>
+            </a:r>
+            <a:endParaRPr dirty="0"/>
+          </a:p>
+        </p:txBody>
+      </p:sp>
+      <p:sp>
+        <p:nvSpPr>
+          <p:cNvPr id="121" name="Google Shape;121;p16"/>
+          <p:cNvSpPr txBox="1"/>
+          <p:nvPr/>
+        </p:nvSpPr>
+        <p:spPr>
+          <a:xfrm>
+            <a:off x="4632532" y="3177480"/>
+            <a:ext cx="2927084" cy="762000"/>
+          </a:xfrm>
+          <a:prstGeom prst="rect">
+            <a:avLst/>
+          </a:prstGeom>
+          <a:noFill/>
+          <a:ln>
+            <a:noFill/>
+          </a:ln>
+        </p:spPr>
+        <p:txBody>
+          <a:bodyPr spcFirstLastPara="1" wrap="square" lIns="0" tIns="0" rIns="0" bIns="0" anchor="t" anchorCtr="0">
+            <a:spAutoFit/>
+          </a:bodyPr>
+          <a:lstStyle/>
+          <a:p>
+            <a:pPr marL="0" marR="0" lvl="0" indent="0" algn="ctr" rtl="0">
+              <a:spcBef>
+                <a:spcPts val="0"/>
+              </a:spcBef>
+              <a:spcAft>
+                <a:spcPts val="0"/>
+              </a:spcAft>
+              <a:buNone/>
+            </a:pPr>
+            <a:r>
+              <a:rPr lang="en-US" sz="2100" b="1" i="0" u="none" strike="noStrike" cap="none">
+                <a:solidFill>
+                  <a:srgbClr val="F1C40F"/>
+                </a:solidFill>
+                <a:latin typeface="Noto Sans JP"/>
+                <a:ea typeface="Noto Sans JP"/>
+                <a:cs typeface="Noto Sans JP"/>
+                <a:sym typeface="Noto Sans JP"/>
+              </a:rPr>
+              <a:t>2. 全画面＆1回クリック</a:t>
+            </a:r>
+            <a:endParaRPr/>
+          </a:p>
+        </p:txBody>
+      </p:sp>
+      <p:sp>
+        <p:nvSpPr>
+          <p:cNvPr id="122" name="Google Shape;122;p16"/>
+          <p:cNvSpPr txBox="1"/>
+          <p:nvPr/>
+        </p:nvSpPr>
+        <p:spPr>
+          <a:xfrm>
+            <a:off x="4662896" y="4129980"/>
+            <a:ext cx="2927084" cy="1828800"/>
+          </a:xfrm>
+          <a:prstGeom prst="rect">
+            <a:avLst/>
+          </a:prstGeom>
+          <a:noFill/>
+          <a:ln>
+            <a:noFill/>
+          </a:ln>
+        </p:spPr>
+        <p:txBody>
+          <a:bodyPr spcFirstLastPara="1" wrap="square" lIns="0" tIns="0" rIns="0" bIns="0" anchor="t" anchorCtr="0">
+            <a:spAutoFit/>
+          </a:bodyPr>
+          <a:lstStyle/>
+          <a:p>
+            <a:pPr marL="0" marR="0" lvl="0" indent="0" algn="l" rtl="0">
+              <a:lnSpc>
+                <a:spcPct val="160000"/>
+              </a:lnSpc>
+              <a:spcBef>
+                <a:spcPts val="0"/>
+              </a:spcBef>
+              <a:spcAft>
+                <a:spcPts val="0"/>
+              </a:spcAft>
+              <a:buNone/>
+            </a:pPr>
+            <a:r>
+              <a:rPr lang="en-US" sz="1500" b="0" i="0" u="none" strike="noStrike" cap="none" dirty="0">
+                <a:solidFill>
+                  <a:srgbClr val="CCCCCC"/>
+                </a:solidFill>
+                <a:latin typeface="Noto Sans JP"/>
+                <a:ea typeface="Noto Sans JP"/>
+                <a:cs typeface="Noto Sans JP"/>
+                <a:sym typeface="Noto Sans JP"/>
+              </a:rPr>
+              <a:t>プロジェクター側のスクリーン画面を全画面表示にします。その後、</a:t>
+            </a:r>
+            <a:r>
+              <a:rPr lang="en-US" sz="1500" b="1" i="0" u="none" strike="noStrike" cap="none" dirty="0">
+                <a:solidFill>
+                  <a:srgbClr val="E74C3C"/>
+                </a:solidFill>
+                <a:latin typeface="Noto Sans JP"/>
+                <a:ea typeface="Noto Sans JP"/>
+                <a:cs typeface="Noto Sans JP"/>
+                <a:sym typeface="Noto Sans JP"/>
+              </a:rPr>
+              <a:t>必ずマウスで画面のどこかを1回クリック</a:t>
+            </a:r>
+            <a:r>
+              <a:rPr lang="en-US" sz="1500" b="0" i="0" u="none" strike="noStrike" cap="none" dirty="0">
+                <a:solidFill>
+                  <a:srgbClr val="CCCCCC"/>
+                </a:solidFill>
+                <a:latin typeface="Noto Sans JP"/>
+                <a:ea typeface="Noto Sans JP"/>
+                <a:cs typeface="Noto Sans JP"/>
+                <a:sym typeface="Noto Sans JP"/>
+              </a:rPr>
+              <a:t>してください。（</a:t>
+            </a:r>
+            <a:r>
+              <a:rPr lang="en-US" sz="1500" b="0" i="0" u="none" strike="noStrike" cap="none" dirty="0" err="1">
+                <a:solidFill>
+                  <a:srgbClr val="CCCCCC"/>
+                </a:solidFill>
+                <a:latin typeface="Noto Sans JP"/>
+                <a:ea typeface="Noto Sans JP"/>
+                <a:cs typeface="Noto Sans JP"/>
+                <a:sym typeface="Noto Sans JP"/>
+              </a:rPr>
+              <a:t>音を鳴らすための必須操作です</a:t>
+            </a:r>
+            <a:r>
+              <a:rPr lang="en-US" sz="1500" b="0" i="0" u="none" strike="noStrike" cap="none" dirty="0">
+                <a:solidFill>
+                  <a:srgbClr val="CCCCCC"/>
+                </a:solidFill>
+                <a:latin typeface="Noto Sans JP"/>
+                <a:ea typeface="Noto Sans JP"/>
+                <a:cs typeface="Noto Sans JP"/>
+                <a:sym typeface="Noto Sans JP"/>
+              </a:rPr>
+              <a:t>）</a:t>
+            </a:r>
+            <a:endParaRPr dirty="0"/>
+          </a:p>
+        </p:txBody>
+      </p:sp>
+      <p:sp>
+        <p:nvSpPr>
+          <p:cNvPr id="123" name="Google Shape;123;p16"/>
+          <p:cNvSpPr txBox="1"/>
+          <p:nvPr/>
+        </p:nvSpPr>
+        <p:spPr>
+          <a:xfrm>
+            <a:off x="8410831" y="3177480"/>
+            <a:ext cx="2927084" cy="381000"/>
+          </a:xfrm>
+          <a:prstGeom prst="rect">
+            <a:avLst/>
+          </a:prstGeom>
+          <a:noFill/>
+          <a:ln>
+            <a:noFill/>
+          </a:ln>
+        </p:spPr>
+        <p:txBody>
+          <a:bodyPr spcFirstLastPara="1" wrap="square" lIns="0" tIns="0" rIns="0" bIns="0" anchor="t" anchorCtr="0">
+            <a:spAutoFit/>
+          </a:bodyPr>
+          <a:lstStyle/>
+          <a:p>
+            <a:pPr marL="0" marR="0" lvl="0" indent="0" algn="ctr" rtl="0">
+              <a:spcBef>
+                <a:spcPts val="0"/>
+              </a:spcBef>
+              <a:spcAft>
+                <a:spcPts val="0"/>
+              </a:spcAft>
+              <a:buNone/>
+            </a:pPr>
+            <a:r>
+              <a:rPr lang="en-US" sz="2100" b="1" i="0" u="none" strike="noStrike" cap="none">
+                <a:solidFill>
+                  <a:srgbClr val="F1C40F"/>
+                </a:solidFill>
+                <a:latin typeface="Noto Sans JP"/>
+                <a:ea typeface="Noto Sans JP"/>
+                <a:cs typeface="Noto Sans JP"/>
+                <a:sym typeface="Noto Sans JP"/>
+              </a:rPr>
+              <a:t>3. 音声の出力先確認</a:t>
+            </a:r>
+            <a:endParaRPr/>
+          </a:p>
+        </p:txBody>
+      </p:sp>
+      <p:sp>
+        <p:nvSpPr>
+          <p:cNvPr id="124" name="Google Shape;124;p16"/>
+          <p:cNvSpPr txBox="1"/>
+          <p:nvPr/>
+        </p:nvSpPr>
+        <p:spPr>
+          <a:xfrm>
+            <a:off x="8410831" y="3742789"/>
+            <a:ext cx="2927084" cy="2215991"/>
+          </a:xfrm>
+          <a:prstGeom prst="rect">
+            <a:avLst/>
+          </a:prstGeom>
+          <a:noFill/>
+          <a:ln>
+            <a:noFill/>
+          </a:ln>
+        </p:spPr>
+        <p:txBody>
+          <a:bodyPr spcFirstLastPara="1" wrap="square" lIns="0" tIns="0" rIns="0" bIns="0" anchor="t" anchorCtr="0">
+            <a:spAutoFit/>
+          </a:bodyPr>
+          <a:lstStyle/>
+          <a:p>
+            <a:pPr marL="0" marR="0" lvl="0" indent="0" algn="l" rtl="0">
+              <a:lnSpc>
+                <a:spcPct val="160000"/>
+              </a:lnSpc>
+              <a:spcBef>
+                <a:spcPts val="0"/>
+              </a:spcBef>
+              <a:spcAft>
+                <a:spcPts val="0"/>
+              </a:spcAft>
+              <a:buNone/>
+            </a:pPr>
+            <a:r>
+              <a:rPr lang="en-US" sz="1500" b="0" i="0" u="none" strike="noStrike" cap="none" dirty="0">
+                <a:solidFill>
+                  <a:srgbClr val="CCCCCC"/>
+                </a:solidFill>
+                <a:latin typeface="Noto Sans JP"/>
+                <a:ea typeface="Noto Sans JP"/>
+                <a:cs typeface="Noto Sans JP"/>
+                <a:sym typeface="Noto Sans JP"/>
+              </a:rPr>
+              <a:t>PCとプロジェクターをHDMI等で繋ぐと、出力先がプロジェクターの小さなスピーカーに変わることがあります。会場のスピーカーから音が出るよう、PCのサウンド設定を確認しましょう。</a:t>
+            </a:r>
+            <a:endParaRPr dirty="0"/>
+          </a:p>
+        </p:txBody>
+      </p:sp>
+      <p:pic>
+        <p:nvPicPr>
+          <p:cNvPr id="125" name="Google Shape;125;p16" descr="image.png"/>
+          <p:cNvPicPr preferRelativeResize="0"/>
+          <p:nvPr/>
+        </p:nvPicPr>
+        <p:blipFill rotWithShape="1">
+          <a:blip r:embed="rId7">
+            <a:alphaModFix/>
+          </a:blip>
+          <a:srcRect/>
+          <a:stretch/>
+        </p:blipFill>
+        <p:spPr>
+          <a:xfrm>
+            <a:off x="2055762" y="2329755"/>
+            <a:ext cx="523875" cy="523875"/>
+          </a:xfrm>
+          <a:prstGeom prst="rect">
+            <a:avLst/>
+          </a:prstGeom>
+          <a:noFill/>
+          <a:ln>
+            <a:noFill/>
+          </a:ln>
+        </p:spPr>
+      </p:pic>
+      <p:pic>
+        <p:nvPicPr>
+          <p:cNvPr id="126" name="Google Shape;126;p16" descr="image.png"/>
+          <p:cNvPicPr preferRelativeResize="0"/>
+          <p:nvPr/>
+        </p:nvPicPr>
+        <p:blipFill rotWithShape="1">
+          <a:blip r:embed="rId8">
+            <a:alphaModFix/>
+          </a:blip>
+          <a:srcRect/>
+          <a:stretch/>
+        </p:blipFill>
+        <p:spPr>
+          <a:xfrm>
+            <a:off x="5900737" y="2329755"/>
+            <a:ext cx="390525" cy="523875"/>
+          </a:xfrm>
+          <a:prstGeom prst="rect">
+            <a:avLst/>
+          </a:prstGeom>
+          <a:noFill/>
+          <a:ln>
+            <a:noFill/>
+          </a:ln>
+        </p:spPr>
+      </p:pic>
+      <p:pic>
+        <p:nvPicPr>
+          <p:cNvPr id="127" name="Google Shape;127;p16" descr="image.png"/>
+          <p:cNvPicPr preferRelativeResize="0"/>
+          <p:nvPr/>
+        </p:nvPicPr>
+        <p:blipFill rotWithShape="1">
+          <a:blip r:embed="rId9">
+            <a:alphaModFix/>
+          </a:blip>
+          <a:srcRect/>
+          <a:stretch/>
+        </p:blipFill>
+        <p:spPr>
+          <a:xfrm>
+            <a:off x="9545687" y="2329755"/>
+            <a:ext cx="657225" cy="523875"/>
+          </a:xfrm>
+          <a:prstGeom prst="rect">
+            <a:avLst/>
+          </a:prstGeom>
+          <a:noFill/>
+          <a:ln>
+            <a:noFill/>
+          </a:ln>
+        </p:spPr>
+      </p:pic>
+    </p:spTree>
+  </p:cSld>
+  <p:clrMapOvr>
+    <a:masterClrMapping/>
+  </p:clrMapOvr>
+</p:sld>
+</file>
+
+<file path=ppt/slides/slide18.xml><?xml version="1.0" encoding="utf-8"?>
+<p:sld xmlns:a="http://schemas.openxmlformats.org/drawingml/2006/main" xmlns:r="http://schemas.openxmlformats.org/officeDocument/2006/relationships" xmlns:p="http://schemas.openxmlformats.org/presentationml/2006/main">
+  <p:cSld>
     <p:bg>
       <p:bgPr>
         <a:solidFill>
@@ -12262,7 +17077,7 @@
 </p:sld>
 </file>
 
-<file path=ppt/slides/slide11.xml><?xml version="1.0" encoding="utf-8"?>
+<file path=ppt/slides/slide19.xml><?xml version="1.0" encoding="utf-8"?>
 <p:sld xmlns:a="http://schemas.openxmlformats.org/drawingml/2006/main" xmlns:r="http://schemas.openxmlformats.org/officeDocument/2006/relationships" xmlns:p="http://schemas.openxmlformats.org/presentationml/2006/main">
   <p:cSld>
     <p:bg>
@@ -12669,119 +17484,6 @@
               <a:cs typeface="Calibri"/>
               <a:sym typeface="Calibri"/>
             </a:endParaRPr>
-          </a:p>
-        </p:txBody>
-      </p:sp>
-    </p:spTree>
-  </p:cSld>
-  <p:clrMapOvr>
-    <a:masterClrMapping/>
-  </p:clrMapOvr>
-</p:sld>
-</file>
-
-<file path=ppt/slides/slide12.xml><?xml version="1.0" encoding="utf-8"?>
-<p:sld xmlns:a="http://schemas.openxmlformats.org/drawingml/2006/main" xmlns:r="http://schemas.openxmlformats.org/officeDocument/2006/relationships" xmlns:p="http://schemas.openxmlformats.org/presentationml/2006/main">
-  <p:cSld>
-    <p:bg>
-      <p:bgPr>
-        <a:solidFill>
-          <a:srgbClr val="1E293B"/>
-        </a:solidFill>
-        <a:effectLst/>
-      </p:bgPr>
-    </p:bg>
-    <p:spTree>
-      <p:nvGrpSpPr>
-        <p:cNvPr id="1" name="Shape 225"/>
-        <p:cNvGrpSpPr/>
-        <p:nvPr/>
-      </p:nvGrpSpPr>
-      <p:grpSpPr>
-        <a:xfrm>
-          <a:off x="0" y="0"/>
-          <a:ext cx="0" cy="0"/>
-          <a:chOff x="0" y="0"/>
-          <a:chExt cx="0" cy="0"/>
-        </a:xfrm>
-      </p:grpSpPr>
-      <p:pic>
-        <p:nvPicPr>
-          <p:cNvPr id="226" name="Google Shape;226;p24" descr="image.png"/>
-          <p:cNvPicPr preferRelativeResize="0"/>
-          <p:nvPr/>
-        </p:nvPicPr>
-        <p:blipFill rotWithShape="1">
-          <a:blip r:embed="rId3">
-            <a:alphaModFix/>
-          </a:blip>
-          <a:srcRect/>
-          <a:stretch/>
-        </p:blipFill>
-        <p:spPr>
-          <a:xfrm>
-            <a:off x="0" y="0"/>
-            <a:ext cx="12192000" cy="6858000"/>
-          </a:xfrm>
-          <a:prstGeom prst="rect">
-            <a:avLst/>
-          </a:prstGeom>
-          <a:noFill/>
-          <a:ln>
-            <a:noFill/>
-          </a:ln>
-        </p:spPr>
-      </p:pic>
-      <p:sp>
-        <p:nvSpPr>
-          <p:cNvPr id="228" name="Google Shape;228;p24"/>
-          <p:cNvSpPr txBox="1"/>
-          <p:nvPr/>
-        </p:nvSpPr>
-        <p:spPr>
-          <a:xfrm>
-            <a:off x="88797" y="4043209"/>
-            <a:ext cx="11601450" cy="914096"/>
-          </a:xfrm>
-          <a:prstGeom prst="rect">
-            <a:avLst/>
-          </a:prstGeom>
-          <a:noFill/>
-          <a:ln>
-            <a:noFill/>
-          </a:ln>
-        </p:spPr>
-        <p:txBody>
-          <a:bodyPr spcFirstLastPara="1" wrap="square" lIns="0" tIns="0" rIns="0" bIns="0" anchor="t" anchorCtr="0">
-            <a:spAutoFit/>
-          </a:bodyPr>
-          <a:lstStyle/>
-          <a:p>
-            <a:pPr marL="0" marR="0" lvl="0" indent="0" algn="ctr" rtl="0">
-              <a:lnSpc>
-                <a:spcPct val="110000"/>
-              </a:lnSpc>
-              <a:spcBef>
-                <a:spcPts val="0"/>
-              </a:spcBef>
-              <a:spcAft>
-                <a:spcPts val="0"/>
-              </a:spcAft>
-              <a:buNone/>
-            </a:pPr>
-            <a:r>
-              <a:rPr lang="ja-JP" altLang="en-US" sz="5400" b="1" i="0" u="none" strike="noStrike" cap="none" dirty="0">
-                <a:solidFill>
-                  <a:srgbClr val="10B981"/>
-                </a:solidFill>
-                <a:latin typeface="Poppins"/>
-                <a:ea typeface="Poppins"/>
-                <a:cs typeface="Poppins"/>
-                <a:sym typeface="Poppins"/>
-              </a:rPr>
-              <a:t>以上</a:t>
-            </a:r>
-            <a:endParaRPr dirty="0"/>
           </a:p>
         </p:txBody>
       </p:sp>
@@ -13422,6 +18124,119 @@
 </p:sld>
 </file>
 
+<file path=ppt/slides/slide20.xml><?xml version="1.0" encoding="utf-8"?>
+<p:sld xmlns:a="http://schemas.openxmlformats.org/drawingml/2006/main" xmlns:r="http://schemas.openxmlformats.org/officeDocument/2006/relationships" xmlns:p="http://schemas.openxmlformats.org/presentationml/2006/main">
+  <p:cSld>
+    <p:bg>
+      <p:bgPr>
+        <a:solidFill>
+          <a:srgbClr val="1E293B"/>
+        </a:solidFill>
+        <a:effectLst/>
+      </p:bgPr>
+    </p:bg>
+    <p:spTree>
+      <p:nvGrpSpPr>
+        <p:cNvPr id="1" name="Shape 225"/>
+        <p:cNvGrpSpPr/>
+        <p:nvPr/>
+      </p:nvGrpSpPr>
+      <p:grpSpPr>
+        <a:xfrm>
+          <a:off x="0" y="0"/>
+          <a:ext cx="0" cy="0"/>
+          <a:chOff x="0" y="0"/>
+          <a:chExt cx="0" cy="0"/>
+        </a:xfrm>
+      </p:grpSpPr>
+      <p:pic>
+        <p:nvPicPr>
+          <p:cNvPr id="226" name="Google Shape;226;p24" descr="image.png"/>
+          <p:cNvPicPr preferRelativeResize="0"/>
+          <p:nvPr/>
+        </p:nvPicPr>
+        <p:blipFill rotWithShape="1">
+          <a:blip r:embed="rId3">
+            <a:alphaModFix/>
+          </a:blip>
+          <a:srcRect/>
+          <a:stretch/>
+        </p:blipFill>
+        <p:spPr>
+          <a:xfrm>
+            <a:off x="0" y="0"/>
+            <a:ext cx="12192000" cy="6858000"/>
+          </a:xfrm>
+          <a:prstGeom prst="rect">
+            <a:avLst/>
+          </a:prstGeom>
+          <a:noFill/>
+          <a:ln>
+            <a:noFill/>
+          </a:ln>
+        </p:spPr>
+      </p:pic>
+      <p:sp>
+        <p:nvSpPr>
+          <p:cNvPr id="228" name="Google Shape;228;p24"/>
+          <p:cNvSpPr txBox="1"/>
+          <p:nvPr/>
+        </p:nvSpPr>
+        <p:spPr>
+          <a:xfrm>
+            <a:off x="88797" y="4043209"/>
+            <a:ext cx="11601450" cy="914096"/>
+          </a:xfrm>
+          <a:prstGeom prst="rect">
+            <a:avLst/>
+          </a:prstGeom>
+          <a:noFill/>
+          <a:ln>
+            <a:noFill/>
+          </a:ln>
+        </p:spPr>
+        <p:txBody>
+          <a:bodyPr spcFirstLastPara="1" wrap="square" lIns="0" tIns="0" rIns="0" bIns="0" anchor="t" anchorCtr="0">
+            <a:spAutoFit/>
+          </a:bodyPr>
+          <a:lstStyle/>
+          <a:p>
+            <a:pPr marL="0" marR="0" lvl="0" indent="0" algn="ctr" rtl="0">
+              <a:lnSpc>
+                <a:spcPct val="110000"/>
+              </a:lnSpc>
+              <a:spcBef>
+                <a:spcPts val="0"/>
+              </a:spcBef>
+              <a:spcAft>
+                <a:spcPts val="0"/>
+              </a:spcAft>
+              <a:buNone/>
+            </a:pPr>
+            <a:r>
+              <a:rPr lang="ja-JP" altLang="en-US" sz="5400" b="1" i="0" u="none" strike="noStrike" cap="none" dirty="0">
+                <a:solidFill>
+                  <a:srgbClr val="10B981"/>
+                </a:solidFill>
+                <a:latin typeface="Poppins"/>
+                <a:ea typeface="Poppins"/>
+                <a:cs typeface="Poppins"/>
+                <a:sym typeface="Poppins"/>
+              </a:rPr>
+              <a:t>以上</a:t>
+            </a:r>
+            <a:endParaRPr dirty="0"/>
+          </a:p>
+        </p:txBody>
+      </p:sp>
+    </p:spTree>
+  </p:cSld>
+  <p:clrMapOvr>
+    <a:masterClrMapping/>
+  </p:clrMapOvr>
+</p:sld>
+</file>
+
 <file path=ppt/slides/slide3.xml><?xml version="1.0" encoding="utf-8"?>
 <p:sld xmlns:a="http://schemas.openxmlformats.org/drawingml/2006/main" xmlns:r="http://schemas.openxmlformats.org/officeDocument/2006/relationships" xmlns:p="http://schemas.openxmlformats.org/presentationml/2006/main">
   <p:cSld>
@@ -13634,6 +18449,681 @@
 </file>
 
 <file path=ppt/slides/slide4.xml><?xml version="1.0" encoding="utf-8"?>
+<p:sld xmlns:a="http://schemas.openxmlformats.org/drawingml/2006/main" xmlns:r="http://schemas.openxmlformats.org/officeDocument/2006/relationships" xmlns:p="http://schemas.openxmlformats.org/presentationml/2006/main">
+  <p:cSld>
+    <p:spTree>
+      <p:nvGrpSpPr>
+        <p:cNvPr id="1" name="Shape 139"/>
+        <p:cNvGrpSpPr/>
+        <p:nvPr/>
+      </p:nvGrpSpPr>
+      <p:grpSpPr>
+        <a:xfrm>
+          <a:off x="0" y="0"/>
+          <a:ext cx="0" cy="0"/>
+          <a:chOff x="0" y="0"/>
+          <a:chExt cx="0" cy="0"/>
+        </a:xfrm>
+      </p:grpSpPr>
+      <p:pic>
+        <p:nvPicPr>
+          <p:cNvPr id="140" name="Google Shape;140;p18" descr="image.png"/>
+          <p:cNvPicPr preferRelativeResize="0"/>
+          <p:nvPr/>
+        </p:nvPicPr>
+        <p:blipFill rotWithShape="1">
+          <a:blip r:embed="rId3">
+            <a:alphaModFix/>
+          </a:blip>
+          <a:srcRect/>
+          <a:stretch/>
+        </p:blipFill>
+        <p:spPr>
+          <a:xfrm>
+            <a:off x="0" y="0"/>
+            <a:ext cx="12192000" cy="6858000"/>
+          </a:xfrm>
+          <a:prstGeom prst="rect">
+            <a:avLst/>
+          </a:prstGeom>
+          <a:noFill/>
+          <a:ln>
+            <a:noFill/>
+          </a:ln>
+        </p:spPr>
+      </p:pic>
+      <p:pic>
+        <p:nvPicPr>
+          <p:cNvPr id="141" name="Google Shape;141;p18" descr="image.png"/>
+          <p:cNvPicPr preferRelativeResize="0"/>
+          <p:nvPr/>
+        </p:nvPicPr>
+        <p:blipFill rotWithShape="1">
+          <a:blip r:embed="rId4">
+            <a:alphaModFix/>
+          </a:blip>
+          <a:srcRect/>
+          <a:stretch/>
+        </p:blipFill>
+        <p:spPr>
+          <a:xfrm>
+            <a:off x="571500" y="1729680"/>
+            <a:ext cx="3492549" cy="3771900"/>
+          </a:xfrm>
+          <a:prstGeom prst="rect">
+            <a:avLst/>
+          </a:prstGeom>
+          <a:noFill/>
+          <a:ln>
+            <a:noFill/>
+          </a:ln>
+        </p:spPr>
+      </p:pic>
+      <p:pic>
+        <p:nvPicPr>
+          <p:cNvPr id="142" name="Google Shape;142;p18" descr="image.png"/>
+          <p:cNvPicPr preferRelativeResize="0"/>
+          <p:nvPr/>
+        </p:nvPicPr>
+        <p:blipFill rotWithShape="1">
+          <a:blip r:embed="rId5">
+            <a:alphaModFix/>
+          </a:blip>
+          <a:srcRect/>
+          <a:stretch/>
+        </p:blipFill>
+        <p:spPr>
+          <a:xfrm>
+            <a:off x="4349799" y="1729680"/>
+            <a:ext cx="3492549" cy="3771900"/>
+          </a:xfrm>
+          <a:prstGeom prst="rect">
+            <a:avLst/>
+          </a:prstGeom>
+          <a:noFill/>
+          <a:ln>
+            <a:noFill/>
+          </a:ln>
+        </p:spPr>
+      </p:pic>
+      <p:pic>
+        <p:nvPicPr>
+          <p:cNvPr id="143" name="Google Shape;143;p18" descr="image.png"/>
+          <p:cNvPicPr preferRelativeResize="0"/>
+          <p:nvPr/>
+        </p:nvPicPr>
+        <p:blipFill rotWithShape="1">
+          <a:blip r:embed="rId6">
+            <a:alphaModFix/>
+          </a:blip>
+          <a:srcRect/>
+          <a:stretch/>
+        </p:blipFill>
+        <p:spPr>
+          <a:xfrm>
+            <a:off x="8128099" y="1729680"/>
+            <a:ext cx="3492549" cy="3771900"/>
+          </a:xfrm>
+          <a:prstGeom prst="rect">
+            <a:avLst/>
+          </a:prstGeom>
+          <a:noFill/>
+          <a:ln>
+            <a:noFill/>
+          </a:ln>
+        </p:spPr>
+      </p:pic>
+      <p:sp>
+        <p:nvSpPr>
+          <p:cNvPr id="144" name="Google Shape;144;p18"/>
+          <p:cNvSpPr txBox="1"/>
+          <p:nvPr/>
+        </p:nvSpPr>
+        <p:spPr>
+          <a:xfrm>
+            <a:off x="571500" y="476250"/>
+            <a:ext cx="11601450" cy="586680"/>
+          </a:xfrm>
+          <a:prstGeom prst="rect">
+            <a:avLst/>
+          </a:prstGeom>
+          <a:noFill/>
+          <a:ln>
+            <a:noFill/>
+          </a:ln>
+        </p:spPr>
+        <p:txBody>
+          <a:bodyPr spcFirstLastPara="1" wrap="square" lIns="0" tIns="0" rIns="0" bIns="0" anchor="t" anchorCtr="0">
+            <a:spAutoFit/>
+          </a:bodyPr>
+          <a:lstStyle/>
+          <a:p>
+            <a:pPr marL="0" marR="0" lvl="0" indent="0" algn="l" rtl="0">
+              <a:lnSpc>
+                <a:spcPct val="120000"/>
+              </a:lnSpc>
+              <a:spcBef>
+                <a:spcPts val="0"/>
+              </a:spcBef>
+              <a:spcAft>
+                <a:spcPts val="0"/>
+              </a:spcAft>
+              <a:buNone/>
+            </a:pPr>
+            <a:r>
+              <a:rPr lang="en-US" sz="3600" b="1" i="0" u="none" strike="noStrike" cap="none">
+                <a:solidFill>
+                  <a:srgbClr val="FFFFFF"/>
+                </a:solidFill>
+                <a:latin typeface="Noto Sans JP"/>
+                <a:ea typeface="Noto Sans JP"/>
+                <a:cs typeface="Noto Sans JP"/>
+                <a:sym typeface="Noto Sans JP"/>
+              </a:rPr>
+              <a:t>システムを構成する3つの画面</a:t>
+            </a:r>
+            <a:endParaRPr/>
+          </a:p>
+        </p:txBody>
+      </p:sp>
+      <p:sp>
+        <p:nvSpPr>
+          <p:cNvPr id="145" name="Google Shape;145;p18"/>
+          <p:cNvSpPr/>
+          <p:nvPr/>
+        </p:nvSpPr>
+        <p:spPr>
+          <a:xfrm>
+            <a:off x="571500" y="1120080"/>
+            <a:ext cx="11049000" cy="38100"/>
+          </a:xfrm>
+          <a:prstGeom prst="rect">
+            <a:avLst/>
+          </a:prstGeom>
+          <a:solidFill>
+            <a:srgbClr val="3498DB"/>
+          </a:solidFill>
+          <a:ln>
+            <a:noFill/>
+          </a:ln>
+        </p:spPr>
+        <p:txBody>
+          <a:bodyPr spcFirstLastPara="1" wrap="square" lIns="91425" tIns="45700" rIns="91425" bIns="45700" anchor="ctr" anchorCtr="0">
+            <a:noAutofit/>
+          </a:bodyPr>
+          <a:lstStyle/>
+          <a:p>
+            <a:pPr marL="0" marR="0" lvl="0" indent="0" algn="ctr" rtl="0">
+              <a:spcBef>
+                <a:spcPts val="0"/>
+              </a:spcBef>
+              <a:spcAft>
+                <a:spcPts val="0"/>
+              </a:spcAft>
+              <a:buNone/>
+            </a:pPr>
+            <a:endParaRPr sz="1800" b="0" i="0" u="none" strike="noStrike" cap="none">
+              <a:solidFill>
+                <a:schemeClr val="dk1"/>
+              </a:solidFill>
+              <a:latin typeface="Calibri"/>
+              <a:ea typeface="Calibri"/>
+              <a:cs typeface="Calibri"/>
+              <a:sym typeface="Calibri"/>
+            </a:endParaRPr>
+          </a:p>
+        </p:txBody>
+      </p:sp>
+      <p:sp>
+        <p:nvSpPr>
+          <p:cNvPr id="146" name="Google Shape;146;p18"/>
+          <p:cNvSpPr txBox="1"/>
+          <p:nvPr/>
+        </p:nvSpPr>
+        <p:spPr>
+          <a:xfrm>
+            <a:off x="771525" y="4215705"/>
+            <a:ext cx="3092499" cy="304800"/>
+          </a:xfrm>
+          <a:prstGeom prst="rect">
+            <a:avLst/>
+          </a:prstGeom>
+          <a:noFill/>
+          <a:ln>
+            <a:noFill/>
+          </a:ln>
+        </p:spPr>
+        <p:txBody>
+          <a:bodyPr spcFirstLastPara="1" wrap="square" lIns="0" tIns="0" rIns="0" bIns="0" anchor="t" anchorCtr="0">
+            <a:spAutoFit/>
+          </a:bodyPr>
+          <a:lstStyle/>
+          <a:p>
+            <a:pPr marL="0" marR="0" lvl="0" indent="0" algn="ctr" rtl="0">
+              <a:lnSpc>
+                <a:spcPct val="160000"/>
+              </a:lnSpc>
+              <a:spcBef>
+                <a:spcPts val="0"/>
+              </a:spcBef>
+              <a:spcAft>
+                <a:spcPts val="0"/>
+              </a:spcAft>
+              <a:buNone/>
+            </a:pPr>
+            <a:r>
+              <a:rPr lang="en-US" sz="1500" b="1" i="0" u="none" strike="noStrike" cap="none">
+                <a:solidFill>
+                  <a:srgbClr val="3498DB"/>
+                </a:solidFill>
+                <a:latin typeface="Noto Sans JP"/>
+                <a:ea typeface="Noto Sans JP"/>
+                <a:cs typeface="Noto Sans JP"/>
+                <a:sym typeface="Noto Sans JP"/>
+              </a:rPr>
+              <a:t>① 管理画面 (PC)</a:t>
+            </a:r>
+            <a:endParaRPr/>
+          </a:p>
+        </p:txBody>
+      </p:sp>
+      <p:sp>
+        <p:nvSpPr>
+          <p:cNvPr id="147" name="Google Shape;147;p18"/>
+          <p:cNvSpPr txBox="1"/>
+          <p:nvPr/>
+        </p:nvSpPr>
+        <p:spPr>
+          <a:xfrm>
+            <a:off x="702701" y="4615755"/>
+            <a:ext cx="3206947" cy="369332"/>
+          </a:xfrm>
+          <a:prstGeom prst="rect">
+            <a:avLst/>
+          </a:prstGeom>
+          <a:noFill/>
+          <a:ln>
+            <a:noFill/>
+          </a:ln>
+        </p:spPr>
+        <p:txBody>
+          <a:bodyPr spcFirstLastPara="1" wrap="square" lIns="0" tIns="0" rIns="0" bIns="0" anchor="t" anchorCtr="0">
+            <a:spAutoFit/>
+          </a:bodyPr>
+          <a:lstStyle/>
+          <a:p>
+            <a:pPr marL="0" marR="0" lvl="0" indent="0" algn="ctr" rtl="0">
+              <a:spcBef>
+                <a:spcPts val="0"/>
+              </a:spcBef>
+              <a:spcAft>
+                <a:spcPts val="0"/>
+              </a:spcAft>
+              <a:buNone/>
+            </a:pPr>
+            <a:r>
+              <a:rPr lang="en-US" sz="1200" b="0" i="0" u="none" strike="noStrike" cap="none" dirty="0" err="1">
+                <a:solidFill>
+                  <a:srgbClr val="AAAAAA"/>
+                </a:solidFill>
+                <a:latin typeface="Noto Sans JP"/>
+                <a:ea typeface="Noto Sans JP"/>
+                <a:cs typeface="Noto Sans JP"/>
+                <a:sym typeface="Noto Sans JP"/>
+              </a:rPr>
+              <a:t>司会者の手元で操作する司令塔。問題設定、進行ボタン、回答状況・順位の確認を行います</a:t>
+            </a:r>
+            <a:r>
+              <a:rPr lang="en-US" sz="1200" b="0" i="0" u="none" strike="noStrike" cap="none" dirty="0">
+                <a:solidFill>
+                  <a:srgbClr val="AAAAAA"/>
+                </a:solidFill>
+                <a:latin typeface="Noto Sans JP"/>
+                <a:ea typeface="Noto Sans JP"/>
+                <a:cs typeface="Noto Sans JP"/>
+                <a:sym typeface="Noto Sans JP"/>
+              </a:rPr>
+              <a:t>。</a:t>
+            </a:r>
+            <a:endParaRPr dirty="0"/>
+          </a:p>
+        </p:txBody>
+      </p:sp>
+      <p:sp>
+        <p:nvSpPr>
+          <p:cNvPr id="148" name="Google Shape;148;p18"/>
+          <p:cNvSpPr txBox="1"/>
+          <p:nvPr/>
+        </p:nvSpPr>
+        <p:spPr>
+          <a:xfrm>
+            <a:off x="4549824" y="4215705"/>
+            <a:ext cx="3092499" cy="304800"/>
+          </a:xfrm>
+          <a:prstGeom prst="rect">
+            <a:avLst/>
+          </a:prstGeom>
+          <a:noFill/>
+          <a:ln>
+            <a:noFill/>
+          </a:ln>
+        </p:spPr>
+        <p:txBody>
+          <a:bodyPr spcFirstLastPara="1" wrap="square" lIns="0" tIns="0" rIns="0" bIns="0" anchor="t" anchorCtr="0">
+            <a:spAutoFit/>
+          </a:bodyPr>
+          <a:lstStyle/>
+          <a:p>
+            <a:pPr marL="0" marR="0" lvl="0" indent="0" algn="ctr" rtl="0">
+              <a:lnSpc>
+                <a:spcPct val="160000"/>
+              </a:lnSpc>
+              <a:spcBef>
+                <a:spcPts val="0"/>
+              </a:spcBef>
+              <a:spcAft>
+                <a:spcPts val="0"/>
+              </a:spcAft>
+              <a:buNone/>
+            </a:pPr>
+            <a:r>
+              <a:rPr lang="en-US" sz="1500" b="1" i="0" u="none" strike="noStrike" cap="none">
+                <a:solidFill>
+                  <a:srgbClr val="F1C40F"/>
+                </a:solidFill>
+                <a:latin typeface="Noto Sans JP"/>
+                <a:ea typeface="Noto Sans JP"/>
+                <a:cs typeface="Noto Sans JP"/>
+                <a:sym typeface="Noto Sans JP"/>
+              </a:rPr>
+              <a:t>② 会場スクリーン (プロジェクター)</a:t>
+            </a:r>
+            <a:endParaRPr/>
+          </a:p>
+        </p:txBody>
+      </p:sp>
+      <p:sp>
+        <p:nvSpPr>
+          <p:cNvPr id="149" name="Google Shape;149;p18"/>
+          <p:cNvSpPr txBox="1"/>
+          <p:nvPr/>
+        </p:nvSpPr>
+        <p:spPr>
+          <a:xfrm>
+            <a:off x="4549824" y="4615755"/>
+            <a:ext cx="3092499" cy="685800"/>
+          </a:xfrm>
+          <a:prstGeom prst="rect">
+            <a:avLst/>
+          </a:prstGeom>
+          <a:noFill/>
+          <a:ln>
+            <a:noFill/>
+          </a:ln>
+        </p:spPr>
+        <p:txBody>
+          <a:bodyPr spcFirstLastPara="1" wrap="square" lIns="0" tIns="0" rIns="0" bIns="0" anchor="t" anchorCtr="0">
+            <a:spAutoFit/>
+          </a:bodyPr>
+          <a:lstStyle/>
+          <a:p>
+            <a:pPr marL="0" marR="0" lvl="0" indent="0" algn="ctr" rtl="0">
+              <a:spcBef>
+                <a:spcPts val="0"/>
+              </a:spcBef>
+              <a:spcAft>
+                <a:spcPts val="0"/>
+              </a:spcAft>
+              <a:buNone/>
+            </a:pPr>
+            <a:r>
+              <a:rPr lang="en-US" sz="1200" b="0" i="0" u="none" strike="noStrike" cap="none">
+                <a:solidFill>
+                  <a:srgbClr val="AAAAAA"/>
+                </a:solidFill>
+                <a:latin typeface="Noto Sans JP"/>
+                <a:ea typeface="Noto Sans JP"/>
+                <a:cs typeface="Noto Sans JP"/>
+                <a:sym typeface="Noto Sans JP"/>
+              </a:rPr>
+              <a:t>参加者全員が見る大画面。QRコード、問題文、制限時間タイマー、マトリクス表を映し出します。</a:t>
+            </a:r>
+            <a:endParaRPr/>
+          </a:p>
+        </p:txBody>
+      </p:sp>
+      <p:sp>
+        <p:nvSpPr>
+          <p:cNvPr id="150" name="Google Shape;150;p18"/>
+          <p:cNvSpPr txBox="1"/>
+          <p:nvPr/>
+        </p:nvSpPr>
+        <p:spPr>
+          <a:xfrm>
+            <a:off x="8328124" y="4215705"/>
+            <a:ext cx="3092499" cy="304800"/>
+          </a:xfrm>
+          <a:prstGeom prst="rect">
+            <a:avLst/>
+          </a:prstGeom>
+          <a:noFill/>
+          <a:ln>
+            <a:noFill/>
+          </a:ln>
+        </p:spPr>
+        <p:txBody>
+          <a:bodyPr spcFirstLastPara="1" wrap="square" lIns="0" tIns="0" rIns="0" bIns="0" anchor="t" anchorCtr="0">
+            <a:spAutoFit/>
+          </a:bodyPr>
+          <a:lstStyle/>
+          <a:p>
+            <a:pPr marL="0" marR="0" lvl="0" indent="0" algn="ctr" rtl="0">
+              <a:lnSpc>
+                <a:spcPct val="160000"/>
+              </a:lnSpc>
+              <a:spcBef>
+                <a:spcPts val="0"/>
+              </a:spcBef>
+              <a:spcAft>
+                <a:spcPts val="0"/>
+              </a:spcAft>
+              <a:buNone/>
+            </a:pPr>
+            <a:r>
+              <a:rPr lang="en-US" sz="1500" b="1" i="0" u="none" strike="noStrike" cap="none">
+                <a:solidFill>
+                  <a:srgbClr val="2ECC71"/>
+                </a:solidFill>
+                <a:latin typeface="Noto Sans JP"/>
+                <a:ea typeface="Noto Sans JP"/>
+                <a:cs typeface="Noto Sans JP"/>
+                <a:sym typeface="Noto Sans JP"/>
+              </a:rPr>
+              <a:t>③ 参加者スマホ</a:t>
+            </a:r>
+            <a:endParaRPr/>
+          </a:p>
+        </p:txBody>
+      </p:sp>
+      <p:sp>
+        <p:nvSpPr>
+          <p:cNvPr id="151" name="Google Shape;151;p18"/>
+          <p:cNvSpPr txBox="1"/>
+          <p:nvPr/>
+        </p:nvSpPr>
+        <p:spPr>
+          <a:xfrm>
+            <a:off x="8288796" y="4615755"/>
+            <a:ext cx="3165786" cy="553998"/>
+          </a:xfrm>
+          <a:prstGeom prst="rect">
+            <a:avLst/>
+          </a:prstGeom>
+          <a:noFill/>
+          <a:ln>
+            <a:noFill/>
+          </a:ln>
+        </p:spPr>
+        <p:txBody>
+          <a:bodyPr spcFirstLastPara="1" wrap="square" lIns="0" tIns="0" rIns="0" bIns="0" anchor="t" anchorCtr="0">
+            <a:spAutoFit/>
+          </a:bodyPr>
+          <a:lstStyle/>
+          <a:p>
+            <a:pPr marL="0" marR="0" lvl="0" indent="0" algn="ctr" rtl="0">
+              <a:spcBef>
+                <a:spcPts val="0"/>
+              </a:spcBef>
+              <a:spcAft>
+                <a:spcPts val="0"/>
+              </a:spcAft>
+              <a:buNone/>
+            </a:pPr>
+            <a:r>
+              <a:rPr lang="en-US" sz="1200" b="0" i="0" u="none" strike="noStrike" cap="none" dirty="0" err="1">
+                <a:solidFill>
+                  <a:srgbClr val="AAAAAA"/>
+                </a:solidFill>
+                <a:latin typeface="Noto Sans JP"/>
+                <a:ea typeface="Noto Sans JP"/>
+                <a:cs typeface="Noto Sans JP"/>
+                <a:sym typeface="Noto Sans JP"/>
+              </a:rPr>
+              <a:t>各チームの回答用リモコン。自撮り写真の撮影と、選択肢</a:t>
+            </a:r>
+            <a:r>
+              <a:rPr lang="en-US" sz="1200" b="0" i="0" u="none" strike="noStrike" cap="none" dirty="0">
+                <a:solidFill>
+                  <a:srgbClr val="AAAAAA"/>
+                </a:solidFill>
+                <a:latin typeface="Noto Sans JP"/>
+                <a:ea typeface="Noto Sans JP"/>
+                <a:cs typeface="Noto Sans JP"/>
+                <a:sym typeface="Noto Sans JP"/>
+              </a:rPr>
+              <a:t>(A〜G)</a:t>
+            </a:r>
+            <a:r>
+              <a:rPr lang="en-US" sz="1200" b="0" i="0" u="none" strike="noStrike" cap="none" dirty="0" err="1">
+                <a:solidFill>
+                  <a:srgbClr val="AAAAAA"/>
+                </a:solidFill>
+                <a:latin typeface="Noto Sans JP"/>
+                <a:ea typeface="Noto Sans JP"/>
+                <a:cs typeface="Noto Sans JP"/>
+                <a:sym typeface="Noto Sans JP"/>
+              </a:rPr>
+              <a:t>のスピード送信を行います</a:t>
+            </a:r>
+            <a:r>
+              <a:rPr lang="en-US" sz="1200" b="0" i="0" u="none" strike="noStrike" cap="none" dirty="0">
+                <a:solidFill>
+                  <a:srgbClr val="AAAAAA"/>
+                </a:solidFill>
+                <a:latin typeface="Noto Sans JP"/>
+                <a:ea typeface="Noto Sans JP"/>
+                <a:cs typeface="Noto Sans JP"/>
+                <a:sym typeface="Noto Sans JP"/>
+              </a:rPr>
+              <a:t>。</a:t>
+            </a:r>
+            <a:endParaRPr dirty="0"/>
+          </a:p>
+        </p:txBody>
+      </p:sp>
+      <p:pic>
+        <p:nvPicPr>
+          <p:cNvPr id="153" name="Google Shape;153;p18" descr="image.png"/>
+          <p:cNvPicPr preferRelativeResize="0"/>
+          <p:nvPr/>
+        </p:nvPicPr>
+        <p:blipFill rotWithShape="1">
+          <a:blip r:embed="rId7">
+            <a:alphaModFix/>
+          </a:blip>
+          <a:srcRect/>
+          <a:stretch/>
+        </p:blipFill>
+        <p:spPr>
+          <a:xfrm>
+            <a:off x="4549824" y="1929705"/>
+            <a:ext cx="3092499" cy="2095500"/>
+          </a:xfrm>
+          <a:prstGeom prst="rect">
+            <a:avLst/>
+          </a:prstGeom>
+          <a:noFill/>
+          <a:ln>
+            <a:noFill/>
+          </a:ln>
+        </p:spPr>
+      </p:pic>
+      <p:pic>
+        <p:nvPicPr>
+          <p:cNvPr id="154" name="Google Shape;154;p18" descr="image.png"/>
+          <p:cNvPicPr preferRelativeResize="0"/>
+          <p:nvPr/>
+        </p:nvPicPr>
+        <p:blipFill rotWithShape="1">
+          <a:blip r:embed="rId8">
+            <a:alphaModFix/>
+          </a:blip>
+          <a:srcRect/>
+          <a:stretch/>
+        </p:blipFill>
+        <p:spPr>
+          <a:xfrm>
+            <a:off x="8328124" y="1929705"/>
+            <a:ext cx="3092499" cy="2095500"/>
+          </a:xfrm>
+          <a:prstGeom prst="rect">
+            <a:avLst/>
+          </a:prstGeom>
+          <a:noFill/>
+          <a:ln>
+            <a:noFill/>
+          </a:ln>
+        </p:spPr>
+      </p:pic>
+      <p:pic>
+        <p:nvPicPr>
+          <p:cNvPr id="3" name="図 2">
+            <a:extLst>
+              <a:ext uri="{FF2B5EF4-FFF2-40B4-BE49-F238E27FC236}">
+                <a16:creationId xmlns:a16="http://schemas.microsoft.com/office/drawing/2014/main" id="{4FFA121A-1AEC-9518-8DAE-839204961A83}"/>
+              </a:ext>
+            </a:extLst>
+          </p:cNvPr>
+          <p:cNvPicPr>
+            <a:picLocks noChangeAspect="1"/>
+          </p:cNvPicPr>
+          <p:nvPr/>
+        </p:nvPicPr>
+        <p:blipFill>
+          <a:blip r:embed="rId9"/>
+          <a:stretch>
+            <a:fillRect/>
+          </a:stretch>
+        </p:blipFill>
+        <p:spPr>
+          <a:xfrm>
+            <a:off x="810706" y="1926971"/>
+            <a:ext cx="3007070" cy="2159918"/>
+          </a:xfrm>
+          <a:prstGeom prst="rect">
+            <a:avLst/>
+          </a:prstGeom>
+        </p:spPr>
+      </p:pic>
+    </p:spTree>
+  </p:cSld>
+  <p:clrMapOvr>
+    <a:masterClrMapping/>
+  </p:clrMapOvr>
+</p:sld>
+</file>
+
+<file path=ppt/slides/slide5.xml><?xml version="1.0" encoding="utf-8"?>
 <p:sld xmlns:a="http://schemas.openxmlformats.org/drawingml/2006/main" xmlns:r="http://schemas.openxmlformats.org/officeDocument/2006/relationships" xmlns:p="http://schemas.openxmlformats.org/presentationml/2006/main">
   <p:cSld>
     <p:bg>
@@ -15270,7 +20760,7 @@
 </p:sld>
 </file>
 
-<file path=ppt/slides/slide5.xml><?xml version="1.0" encoding="utf-8"?>
+<file path=ppt/slides/slide6.xml><?xml version="1.0" encoding="utf-8"?>
 <p:sld xmlns:a="http://schemas.openxmlformats.org/drawingml/2006/main" xmlns:r="http://schemas.openxmlformats.org/officeDocument/2006/relationships" xmlns:p="http://schemas.openxmlformats.org/presentationml/2006/main">
   <p:cSld>
     <p:bg>
@@ -15798,20 +21288,12 @@
 </p:sld>
 </file>
 
-<file path=ppt/slides/slide6.xml><?xml version="1.0" encoding="utf-8"?>
+<file path=ppt/slides/slide7.xml><?xml version="1.0" encoding="utf-8"?>
 <p:sld xmlns:a="http://schemas.openxmlformats.org/drawingml/2006/main" xmlns:r="http://schemas.openxmlformats.org/officeDocument/2006/relationships" xmlns:p="http://schemas.openxmlformats.org/presentationml/2006/main">
   <p:cSld>
-    <p:bg>
-      <p:bgPr>
-        <a:solidFill>
-          <a:srgbClr val="1E293B"/>
-        </a:solidFill>
-        <a:effectLst/>
-      </p:bgPr>
-    </p:bg>
     <p:spTree>
       <p:nvGrpSpPr>
-        <p:cNvPr id="1" name="Shape 145"/>
+        <p:cNvPr id="1" name="Shape 158"/>
         <p:cNvGrpSpPr/>
         <p:nvPr/>
       </p:nvGrpSpPr>
@@ -15825,7 +21307,7 @@
       </p:grpSpPr>
       <p:pic>
         <p:nvPicPr>
-          <p:cNvPr id="146" name="Google Shape;146;p18" descr="image.png"/>
+          <p:cNvPr id="159" name="Google Shape;159;p19" descr="image.png"/>
           <p:cNvPicPr preferRelativeResize="0"/>
           <p:nvPr/>
         </p:nvPicPr>
@@ -15850,22 +21332,102 @@
           </a:ln>
         </p:spPr>
       </p:pic>
+      <p:pic>
+        <p:nvPicPr>
+          <p:cNvPr id="160" name="Google Shape;160;p19" descr="image.png"/>
+          <p:cNvPicPr preferRelativeResize="0"/>
+          <p:nvPr/>
+        </p:nvPicPr>
+        <p:blipFill rotWithShape="1">
+          <a:blip r:embed="rId4">
+            <a:alphaModFix/>
+          </a:blip>
+          <a:srcRect/>
+          <a:stretch/>
+        </p:blipFill>
+        <p:spPr>
+          <a:xfrm>
+            <a:off x="571500" y="402260"/>
+            <a:ext cx="11049000" cy="5996432"/>
+          </a:xfrm>
+          <a:prstGeom prst="rect">
+            <a:avLst/>
+          </a:prstGeom>
+          <a:noFill/>
+          <a:ln>
+            <a:noFill/>
+          </a:ln>
+        </p:spPr>
+      </p:pic>
       <p:sp>
         <p:nvSpPr>
-          <p:cNvPr id="147" name="Google Shape;147;p18"/>
+          <p:cNvPr id="161" name="Google Shape;161;p19"/>
+          <p:cNvSpPr txBox="1"/>
+          <p:nvPr/>
+        </p:nvSpPr>
+        <p:spPr>
+          <a:xfrm>
+            <a:off x="571500" y="-327124"/>
+            <a:ext cx="11601450" cy="586680"/>
+          </a:xfrm>
+          <a:prstGeom prst="rect">
+            <a:avLst/>
+          </a:prstGeom>
+          <a:noFill/>
+          <a:ln>
+            <a:noFill/>
+          </a:ln>
+        </p:spPr>
+        <p:txBody>
+          <a:bodyPr spcFirstLastPara="1" wrap="square" lIns="0" tIns="0" rIns="0" bIns="0" anchor="t" anchorCtr="0">
+            <a:spAutoFit/>
+          </a:bodyPr>
+          <a:lstStyle/>
+          <a:p>
+            <a:pPr marL="0" marR="0" lvl="0" indent="0" algn="l" rtl="0">
+              <a:lnSpc>
+                <a:spcPct val="120000"/>
+              </a:lnSpc>
+              <a:spcBef>
+                <a:spcPts val="0"/>
+              </a:spcBef>
+              <a:spcAft>
+                <a:spcPts val="0"/>
+              </a:spcAft>
+              <a:buNone/>
+            </a:pPr>
+            <a:r>
+              <a:rPr lang="en-US" sz="3600" b="1" i="0" u="none" strike="noStrike" cap="none">
+                <a:solidFill>
+                  <a:srgbClr val="FFFFFF"/>
+                </a:solidFill>
+                <a:latin typeface="Noto Sans JP"/>
+                <a:ea typeface="Noto Sans JP"/>
+                <a:cs typeface="Noto Sans JP"/>
+                <a:sym typeface="Noto Sans JP"/>
+              </a:rPr>
+              <a:t>事前準備（セットアップ）</a:t>
+            </a:r>
+            <a:endParaRPr/>
+          </a:p>
+        </p:txBody>
+      </p:sp>
+      <p:sp>
+        <p:nvSpPr>
+          <p:cNvPr id="162" name="Google Shape;162;p19"/>
           <p:cNvSpPr/>
           <p:nvPr/>
         </p:nvSpPr>
         <p:spPr>
           <a:xfrm>
-            <a:off x="5524500" y="2386905"/>
-            <a:ext cx="1143000" cy="57150"/>
+            <a:off x="571500" y="316706"/>
+            <a:ext cx="11049000" cy="38100"/>
           </a:xfrm>
           <a:prstGeom prst="rect">
             <a:avLst/>
           </a:prstGeom>
           <a:solidFill>
-            <a:srgbClr val="10B981"/>
+            <a:srgbClr val="3498DB"/>
           </a:solidFill>
           <a:ln>
             <a:noFill/>
@@ -15900,14 +21462,14 @@
       </p:sp>
       <p:sp>
         <p:nvSpPr>
-          <p:cNvPr id="148" name="Google Shape;148;p18"/>
+          <p:cNvPr id="163" name="Google Shape;163;p19"/>
           <p:cNvSpPr txBox="1"/>
           <p:nvPr/>
         </p:nvSpPr>
         <p:spPr>
           <a:xfrm>
-            <a:off x="295275" y="2729805"/>
-            <a:ext cx="11601450" cy="1143000"/>
+            <a:off x="962025" y="1373981"/>
+            <a:ext cx="10267950" cy="396180"/>
           </a:xfrm>
           <a:prstGeom prst="rect">
             <a:avLst/>
@@ -15923,7 +21485,10 @@
           </a:bodyPr>
           <a:lstStyle/>
           <a:p>
-            <a:pPr marL="0" marR="0" lvl="0" indent="0" algn="ctr" rtl="0">
+            <a:pPr marL="0" marR="0" lvl="0" indent="0" algn="l" rtl="0">
+              <a:lnSpc>
+                <a:spcPct val="160000"/>
+              </a:lnSpc>
               <a:spcBef>
                 <a:spcPts val="0"/>
               </a:spcBef>
@@ -15933,16 +21498,16 @@
               <a:buNone/>
             </a:pPr>
             <a:r>
-              <a:rPr lang="en-US" sz="6000" b="1" i="0" u="none" strike="noStrike" cap="none">
+              <a:rPr lang="en-US" sz="1950" b="1" i="0" u="none" strike="noStrike" cap="none">
                 <a:solidFill>
-                  <a:srgbClr val="F8FAFC"/>
+                  <a:srgbClr val="3498DB"/>
                 </a:solidFill>
-                <a:latin typeface="Poppins"/>
-                <a:ea typeface="Poppins"/>
-                <a:cs typeface="Poppins"/>
-                <a:sym typeface="Poppins"/>
+                <a:latin typeface="Noto Sans JP"/>
+                <a:ea typeface="Noto Sans JP"/>
+                <a:cs typeface="Noto Sans JP"/>
+                <a:sym typeface="Noto Sans JP"/>
               </a:rPr>
-              <a:t>Phase 2: 本番運営</a:t>
+              <a:t>イベント開始前に「管理画面」を開いて設定を完了させます。</a:t>
             </a:r>
             <a:endParaRPr/>
           </a:p>
@@ -15950,14 +21515,14 @@
       </p:sp>
       <p:sp>
         <p:nvSpPr>
-          <p:cNvPr id="149" name="Google Shape;149;p18"/>
+          <p:cNvPr id="164" name="Google Shape;164;p19"/>
           <p:cNvSpPr txBox="1"/>
           <p:nvPr/>
         </p:nvSpPr>
         <p:spPr>
           <a:xfrm>
-            <a:off x="571500" y="4063305"/>
-            <a:ext cx="11049000" cy="426690"/>
+            <a:off x="1369450" y="1996919"/>
+            <a:ext cx="10182225" cy="886397"/>
           </a:xfrm>
           <a:prstGeom prst="rect">
             <a:avLst/>
@@ -15973,9 +21538,9 @@
           </a:bodyPr>
           <a:lstStyle/>
           <a:p>
-            <a:pPr marL="0" marR="0" lvl="0" indent="0" algn="ctr" rtl="0">
+            <a:pPr marL="0" marR="0" lvl="0" indent="0" algn="l" rtl="0">
               <a:lnSpc>
-                <a:spcPct val="159952"/>
+                <a:spcPct val="159944"/>
               </a:lnSpc>
               <a:spcBef>
                 <a:spcPts val="0"/>
@@ -15986,21 +21551,464 @@
               <a:buNone/>
             </a:pPr>
             <a:r>
-              <a:rPr lang="en-US" sz="2100" b="0" i="0" u="none" strike="noStrike" cap="none">
+              <a:rPr lang="en-US" sz="1800" b="1" i="0" u="none" strike="noStrike" cap="none" dirty="0" err="1">
                 <a:solidFill>
-                  <a:srgbClr val="94A3B8"/>
+                  <a:srgbClr val="F1C40F"/>
                 </a:solidFill>
-                <a:latin typeface="Lato"/>
-                <a:ea typeface="Lato"/>
-                <a:cs typeface="Lato"/>
-                <a:sym typeface="Lato"/>
+                <a:latin typeface="Noto Sans JP"/>
+                <a:ea typeface="Noto Sans JP"/>
+                <a:cs typeface="Noto Sans JP"/>
+                <a:sym typeface="Noto Sans JP"/>
               </a:rPr>
-              <a:t>受付から結果発表まで</a:t>
+              <a:t>音源URLの設定</a:t>
             </a:r>
-            <a:endParaRPr/>
+            <a:br>
+              <a:rPr lang="en-US" sz="1800" b="0" i="0" u="none" strike="noStrike" cap="none" dirty="0">
+                <a:solidFill>
+                  <a:schemeClr val="dk1"/>
+                </a:solidFill>
+                <a:latin typeface="Calibri"/>
+                <a:ea typeface="Calibri"/>
+                <a:cs typeface="Calibri"/>
+                <a:sym typeface="Calibri"/>
+              </a:rPr>
+            </a:br>
+            <a:r>
+              <a:rPr lang="en-US" sz="1800" b="0" i="0" u="none" strike="noStrike" cap="none" dirty="0">
+                <a:solidFill>
+                  <a:srgbClr val="E0E0E0"/>
+                </a:solidFill>
+                <a:latin typeface="Noto Sans JP"/>
+                <a:ea typeface="Noto Sans JP"/>
+                <a:cs typeface="Noto Sans JP"/>
+                <a:sym typeface="Noto Sans JP"/>
+              </a:rPr>
+              <a:t> 「音源一括設定」にGitHubのフォルダURLを入力し、6つのシーンの音源を自動セットします。</a:t>
+            </a:r>
+            <a:endParaRPr dirty="0"/>
           </a:p>
         </p:txBody>
       </p:sp>
+      <p:sp>
+        <p:nvSpPr>
+          <p:cNvPr id="165" name="Google Shape;165;p19"/>
+          <p:cNvSpPr txBox="1"/>
+          <p:nvPr/>
+        </p:nvSpPr>
+        <p:spPr>
+          <a:xfrm>
+            <a:off x="1359619" y="3080379"/>
+            <a:ext cx="9791700" cy="807541"/>
+          </a:xfrm>
+          <a:prstGeom prst="rect">
+            <a:avLst/>
+          </a:prstGeom>
+          <a:noFill/>
+          <a:ln>
+            <a:noFill/>
+          </a:ln>
+        </p:spPr>
+        <p:txBody>
+          <a:bodyPr spcFirstLastPara="1" wrap="square" lIns="0" tIns="0" rIns="0" bIns="0" anchor="t" anchorCtr="0">
+            <a:spAutoFit/>
+          </a:bodyPr>
+          <a:lstStyle/>
+          <a:p>
+            <a:pPr marL="0" marR="0" lvl="0" indent="0" algn="l" rtl="0">
+              <a:lnSpc>
+                <a:spcPct val="159944"/>
+              </a:lnSpc>
+              <a:spcBef>
+                <a:spcPts val="0"/>
+              </a:spcBef>
+              <a:spcAft>
+                <a:spcPts val="0"/>
+              </a:spcAft>
+              <a:buNone/>
+            </a:pPr>
+            <a:r>
+              <a:rPr lang="en-US" sz="1800" b="1" i="0" u="none" strike="noStrike" cap="none" dirty="0" err="1">
+                <a:solidFill>
+                  <a:srgbClr val="F1C40F"/>
+                </a:solidFill>
+                <a:latin typeface="Noto Sans JP"/>
+                <a:ea typeface="Noto Sans JP"/>
+                <a:cs typeface="Noto Sans JP"/>
+                <a:sym typeface="Noto Sans JP"/>
+              </a:rPr>
+              <a:t>クイズ問題の登録</a:t>
+            </a:r>
+            <a:br>
+              <a:rPr lang="en-US" sz="1800" b="0" i="0" u="none" strike="noStrike" cap="none" dirty="0">
+                <a:solidFill>
+                  <a:schemeClr val="dk1"/>
+                </a:solidFill>
+                <a:latin typeface="Calibri"/>
+                <a:ea typeface="Calibri"/>
+                <a:cs typeface="Calibri"/>
+                <a:sym typeface="Calibri"/>
+              </a:rPr>
+            </a:br>
+            <a:r>
+              <a:rPr lang="en-US" sz="1800" b="0" i="0" u="none" strike="noStrike" cap="none" dirty="0">
+                <a:solidFill>
+                  <a:srgbClr val="E0E0E0"/>
+                </a:solidFill>
+                <a:latin typeface="Noto Sans JP"/>
+                <a:ea typeface="Noto Sans JP"/>
+                <a:cs typeface="Noto Sans JP"/>
+                <a:sym typeface="Noto Sans JP"/>
+              </a:rPr>
+              <a:t> 「＋</a:t>
+            </a:r>
+            <a:r>
+              <a:rPr lang="en-US" sz="1800" b="0" i="0" u="none" strike="noStrike" cap="none" dirty="0" err="1">
+                <a:solidFill>
+                  <a:srgbClr val="E0E0E0"/>
+                </a:solidFill>
+                <a:latin typeface="Noto Sans JP"/>
+                <a:ea typeface="Noto Sans JP"/>
+                <a:cs typeface="Noto Sans JP"/>
+                <a:sym typeface="Noto Sans JP"/>
+              </a:rPr>
+              <a:t>問題を追加」から、出題する問題文と正解（A〜G）を入力します</a:t>
+            </a:r>
+            <a:r>
+              <a:rPr lang="en-US" sz="1800" b="0" i="0" u="none" strike="noStrike" cap="none" dirty="0">
+                <a:solidFill>
+                  <a:srgbClr val="E0E0E0"/>
+                </a:solidFill>
+                <a:latin typeface="Noto Sans JP"/>
+                <a:ea typeface="Noto Sans JP"/>
+                <a:cs typeface="Noto Sans JP"/>
+                <a:sym typeface="Noto Sans JP"/>
+              </a:rPr>
+              <a:t>。</a:t>
+            </a:r>
+            <a:endParaRPr dirty="0"/>
+          </a:p>
+        </p:txBody>
+      </p:sp>
+      <p:sp>
+        <p:nvSpPr>
+          <p:cNvPr id="166" name="Google Shape;166;p19"/>
+          <p:cNvSpPr txBox="1"/>
+          <p:nvPr/>
+        </p:nvSpPr>
+        <p:spPr>
+          <a:xfrm>
+            <a:off x="1290795" y="4173670"/>
+            <a:ext cx="9791700" cy="807541"/>
+          </a:xfrm>
+          <a:prstGeom prst="rect">
+            <a:avLst/>
+          </a:prstGeom>
+          <a:noFill/>
+          <a:ln>
+            <a:noFill/>
+          </a:ln>
+        </p:spPr>
+        <p:txBody>
+          <a:bodyPr spcFirstLastPara="1" wrap="square" lIns="0" tIns="0" rIns="0" bIns="0" anchor="t" anchorCtr="0">
+            <a:spAutoFit/>
+          </a:bodyPr>
+          <a:lstStyle/>
+          <a:p>
+            <a:pPr marL="0" marR="0" lvl="0" indent="0" algn="l" rtl="0">
+              <a:lnSpc>
+                <a:spcPct val="159944"/>
+              </a:lnSpc>
+              <a:spcBef>
+                <a:spcPts val="0"/>
+              </a:spcBef>
+              <a:spcAft>
+                <a:spcPts val="0"/>
+              </a:spcAft>
+              <a:buNone/>
+            </a:pPr>
+            <a:r>
+              <a:rPr lang="en-US" sz="1800" b="1" i="0" u="none" strike="noStrike" cap="none" dirty="0">
+                <a:solidFill>
+                  <a:srgbClr val="F1C40F"/>
+                </a:solidFill>
+                <a:latin typeface="Noto Sans JP"/>
+                <a:ea typeface="Noto Sans JP"/>
+                <a:cs typeface="Noto Sans JP"/>
+                <a:sym typeface="Noto Sans JP"/>
+              </a:rPr>
+              <a:t>「</a:t>
+            </a:r>
+            <a:r>
+              <a:rPr lang="en-US" sz="1800" b="1" i="0" u="none" strike="noStrike" cap="none" dirty="0" err="1">
+                <a:solidFill>
+                  <a:srgbClr val="F1C40F"/>
+                </a:solidFill>
+                <a:latin typeface="Noto Sans JP"/>
+                <a:ea typeface="Noto Sans JP"/>
+                <a:cs typeface="Noto Sans JP"/>
+                <a:sym typeface="Noto Sans JP"/>
+              </a:rPr>
+              <a:t>設定を保存して反映」を押す</a:t>
+            </a:r>
+            <a:br>
+              <a:rPr lang="en-US" sz="1800" b="0" i="0" u="none" strike="noStrike" cap="none" dirty="0">
+                <a:solidFill>
+                  <a:schemeClr val="dk1"/>
+                </a:solidFill>
+                <a:latin typeface="Calibri"/>
+                <a:ea typeface="Calibri"/>
+                <a:cs typeface="Calibri"/>
+                <a:sym typeface="Calibri"/>
+              </a:rPr>
+            </a:br>
+            <a:r>
+              <a:rPr lang="en-US" sz="1800" b="0" i="0" u="none" strike="noStrike" cap="none" dirty="0">
+                <a:solidFill>
+                  <a:srgbClr val="E0E0E0"/>
+                </a:solidFill>
+                <a:latin typeface="Noto Sans JP"/>
+                <a:ea typeface="Noto Sans JP"/>
+                <a:cs typeface="Noto Sans JP"/>
+                <a:sym typeface="Noto Sans JP"/>
+              </a:rPr>
+              <a:t> </a:t>
+            </a:r>
+            <a:r>
+              <a:rPr lang="en-US" sz="1800" b="0" i="0" u="none" strike="noStrike" cap="none" dirty="0" err="1">
+                <a:solidFill>
+                  <a:srgbClr val="E0E0E0"/>
+                </a:solidFill>
+                <a:latin typeface="Noto Sans JP"/>
+                <a:ea typeface="Noto Sans JP"/>
+                <a:cs typeface="Noto Sans JP"/>
+                <a:sym typeface="Noto Sans JP"/>
+              </a:rPr>
+              <a:t>入力が終わったら、必ず保存ボタンを押してデータをクラウドにロックしてください</a:t>
+            </a:r>
+            <a:r>
+              <a:rPr lang="en-US" sz="1800" b="0" i="0" u="none" strike="noStrike" cap="none" dirty="0">
+                <a:solidFill>
+                  <a:srgbClr val="E0E0E0"/>
+                </a:solidFill>
+                <a:latin typeface="Noto Sans JP"/>
+                <a:ea typeface="Noto Sans JP"/>
+                <a:cs typeface="Noto Sans JP"/>
+                <a:sym typeface="Noto Sans JP"/>
+              </a:rPr>
+              <a:t>。</a:t>
+            </a:r>
+            <a:endParaRPr dirty="0"/>
+          </a:p>
+        </p:txBody>
+      </p:sp>
+      <p:sp>
+        <p:nvSpPr>
+          <p:cNvPr id="167" name="Google Shape;167;p19"/>
+          <p:cNvSpPr txBox="1"/>
+          <p:nvPr/>
+        </p:nvSpPr>
+        <p:spPr>
+          <a:xfrm>
+            <a:off x="1320290" y="5266961"/>
+            <a:ext cx="10572751" cy="886397"/>
+          </a:xfrm>
+          <a:prstGeom prst="rect">
+            <a:avLst/>
+          </a:prstGeom>
+          <a:noFill/>
+          <a:ln>
+            <a:noFill/>
+          </a:ln>
+        </p:spPr>
+        <p:txBody>
+          <a:bodyPr spcFirstLastPara="1" wrap="square" lIns="0" tIns="0" rIns="0" bIns="0" anchor="t" anchorCtr="0">
+            <a:spAutoFit/>
+          </a:bodyPr>
+          <a:lstStyle/>
+          <a:p>
+            <a:pPr marL="0" marR="0" lvl="0" indent="0" algn="l" rtl="0">
+              <a:lnSpc>
+                <a:spcPct val="159944"/>
+              </a:lnSpc>
+              <a:spcBef>
+                <a:spcPts val="0"/>
+              </a:spcBef>
+              <a:spcAft>
+                <a:spcPts val="0"/>
+              </a:spcAft>
+              <a:buNone/>
+            </a:pPr>
+            <a:r>
+              <a:rPr lang="en-US" sz="1800" b="1" i="0" u="none" strike="noStrike" cap="none" dirty="0" err="1">
+                <a:solidFill>
+                  <a:srgbClr val="F1C40F"/>
+                </a:solidFill>
+                <a:latin typeface="Noto Sans JP"/>
+                <a:ea typeface="Noto Sans JP"/>
+                <a:cs typeface="Noto Sans JP"/>
+                <a:sym typeface="Noto Sans JP"/>
+              </a:rPr>
+              <a:t>パネルの折りたたみ</a:t>
+            </a:r>
+            <a:br>
+              <a:rPr lang="en-US" sz="1800" b="0" i="0" u="none" strike="noStrike" cap="none" dirty="0">
+                <a:solidFill>
+                  <a:schemeClr val="dk1"/>
+                </a:solidFill>
+                <a:latin typeface="Calibri"/>
+                <a:ea typeface="Calibri"/>
+                <a:cs typeface="Calibri"/>
+                <a:sym typeface="Calibri"/>
+              </a:rPr>
+            </a:br>
+            <a:r>
+              <a:rPr lang="en-US" sz="1800" b="0" i="0" u="none" strike="noStrike" cap="none" dirty="0">
+                <a:solidFill>
+                  <a:srgbClr val="E0E0E0"/>
+                </a:solidFill>
+                <a:latin typeface="Noto Sans JP"/>
+                <a:ea typeface="Noto Sans JP"/>
+                <a:cs typeface="Noto Sans JP"/>
+                <a:sym typeface="Noto Sans JP"/>
+              </a:rPr>
+              <a:t> </a:t>
+            </a:r>
+            <a:r>
+              <a:rPr lang="en-US" sz="1800" b="0" i="0" u="none" strike="noStrike" cap="none" dirty="0" err="1">
+                <a:solidFill>
+                  <a:srgbClr val="E0E0E0"/>
+                </a:solidFill>
+                <a:latin typeface="Noto Sans JP"/>
+                <a:ea typeface="Noto Sans JP"/>
+                <a:cs typeface="Noto Sans JP"/>
+                <a:sym typeface="Noto Sans JP"/>
+              </a:rPr>
+              <a:t>設定が終わったら、タイトル部分をクリックして設定パネルを折りたたむと進行しやすくなります</a:t>
+            </a:r>
+            <a:r>
+              <a:rPr lang="en-US" sz="1800" b="0" i="0" u="none" strike="noStrike" cap="none" dirty="0">
+                <a:solidFill>
+                  <a:srgbClr val="E0E0E0"/>
+                </a:solidFill>
+                <a:latin typeface="Noto Sans JP"/>
+                <a:ea typeface="Noto Sans JP"/>
+                <a:cs typeface="Noto Sans JP"/>
+                <a:sym typeface="Noto Sans JP"/>
+              </a:rPr>
+              <a:t>。</a:t>
+            </a:r>
+            <a:endParaRPr dirty="0"/>
+          </a:p>
+        </p:txBody>
+      </p:sp>
+      <p:pic>
+        <p:nvPicPr>
+          <p:cNvPr id="168" name="Google Shape;168;p19" descr="image.png"/>
+          <p:cNvPicPr preferRelativeResize="0"/>
+          <p:nvPr/>
+        </p:nvPicPr>
+        <p:blipFill rotWithShape="1">
+          <a:blip r:embed="rId5">
+            <a:alphaModFix/>
+          </a:blip>
+          <a:srcRect/>
+          <a:stretch/>
+        </p:blipFill>
+        <p:spPr>
+          <a:xfrm>
+            <a:off x="962025" y="2065436"/>
+            <a:ext cx="304800" cy="323850"/>
+          </a:xfrm>
+          <a:prstGeom prst="rect">
+            <a:avLst/>
+          </a:prstGeom>
+          <a:noFill/>
+          <a:ln>
+            <a:noFill/>
+          </a:ln>
+        </p:spPr>
+      </p:pic>
+      <p:pic>
+        <p:nvPicPr>
+          <p:cNvPr id="169" name="Google Shape;169;p19" descr="image.png"/>
+          <p:cNvPicPr preferRelativeResize="0"/>
+          <p:nvPr/>
+        </p:nvPicPr>
+        <p:blipFill rotWithShape="1">
+          <a:blip r:embed="rId5">
+            <a:alphaModFix/>
+          </a:blip>
+          <a:srcRect/>
+          <a:stretch/>
+        </p:blipFill>
+        <p:spPr>
+          <a:xfrm>
+            <a:off x="962025" y="3158728"/>
+            <a:ext cx="304800" cy="323850"/>
+          </a:xfrm>
+          <a:prstGeom prst="rect">
+            <a:avLst/>
+          </a:prstGeom>
+          <a:noFill/>
+          <a:ln>
+            <a:noFill/>
+          </a:ln>
+        </p:spPr>
+      </p:pic>
+      <p:pic>
+        <p:nvPicPr>
+          <p:cNvPr id="170" name="Google Shape;170;p19" descr="image.png"/>
+          <p:cNvPicPr preferRelativeResize="0"/>
+          <p:nvPr/>
+        </p:nvPicPr>
+        <p:blipFill rotWithShape="1">
+          <a:blip r:embed="rId6">
+            <a:alphaModFix/>
+          </a:blip>
+          <a:srcRect/>
+          <a:stretch/>
+        </p:blipFill>
+        <p:spPr>
+          <a:xfrm>
+            <a:off x="962025" y="4252019"/>
+            <a:ext cx="304800" cy="323850"/>
+          </a:xfrm>
+          <a:prstGeom prst="rect">
+            <a:avLst/>
+          </a:prstGeom>
+          <a:noFill/>
+          <a:ln>
+            <a:noFill/>
+          </a:ln>
+        </p:spPr>
+      </p:pic>
+      <p:pic>
+        <p:nvPicPr>
+          <p:cNvPr id="171" name="Google Shape;171;p19" descr="image.png"/>
+          <p:cNvPicPr preferRelativeResize="0"/>
+          <p:nvPr/>
+        </p:nvPicPr>
+        <p:blipFill rotWithShape="1">
+          <a:blip r:embed="rId5">
+            <a:alphaModFix/>
+          </a:blip>
+          <a:srcRect/>
+          <a:stretch/>
+        </p:blipFill>
+        <p:spPr>
+          <a:xfrm>
+            <a:off x="962025" y="5345310"/>
+            <a:ext cx="304800" cy="323850"/>
+          </a:xfrm>
+          <a:prstGeom prst="rect">
+            <a:avLst/>
+          </a:prstGeom>
+          <a:noFill/>
+          <a:ln>
+            <a:noFill/>
+          </a:ln>
+        </p:spPr>
+      </p:pic>
     </p:spTree>
   </p:cSld>
   <p:clrMapOvr>
@@ -16009,20 +22017,12 @@
 </p:sld>
 </file>
 
-<file path=ppt/slides/slide7.xml><?xml version="1.0" encoding="utf-8"?>
+<file path=ppt/slides/slide8.xml><?xml version="1.0" encoding="utf-8"?>
 <p:sld xmlns:a="http://schemas.openxmlformats.org/drawingml/2006/main" xmlns:r="http://schemas.openxmlformats.org/officeDocument/2006/relationships" xmlns:p="http://schemas.openxmlformats.org/presentationml/2006/main">
   <p:cSld>
-    <p:bg>
-      <p:bgPr>
-        <a:solidFill>
-          <a:srgbClr val="1E293B"/>
-        </a:solidFill>
-        <a:effectLst/>
-      </p:bgPr>
-    </p:bg>
     <p:spTree>
       <p:nvGrpSpPr>
-        <p:cNvPr id="1" name="Shape 153"/>
+        <p:cNvPr id="1" name="Shape 175"/>
         <p:cNvGrpSpPr/>
         <p:nvPr/>
       </p:nvGrpSpPr>
@@ -16036,7 +22036,7 @@
       </p:grpSpPr>
       <p:pic>
         <p:nvPicPr>
-          <p:cNvPr id="154" name="Google Shape;154;p19" descr="image.png"/>
+          <p:cNvPr id="176" name="Google Shape;176;p20" descr="image.png"/>
           <p:cNvPicPr preferRelativeResize="0"/>
           <p:nvPr/>
         </p:nvPicPr>
@@ -16061,168 +22061,9 @@
           </a:ln>
         </p:spPr>
       </p:pic>
-      <p:sp>
-        <p:nvSpPr>
-          <p:cNvPr id="157" name="Google Shape;157;p19"/>
-          <p:cNvSpPr txBox="1"/>
-          <p:nvPr/>
-        </p:nvSpPr>
-        <p:spPr>
-          <a:xfrm>
-            <a:off x="1047750" y="2878633"/>
-            <a:ext cx="4762500" cy="365670"/>
-          </a:xfrm>
-          <a:prstGeom prst="rect">
-            <a:avLst/>
-          </a:prstGeom>
-          <a:noFill/>
-          <a:ln>
-            <a:noFill/>
-          </a:ln>
-        </p:spPr>
-        <p:txBody>
-          <a:bodyPr spcFirstLastPara="1" wrap="square" lIns="0" tIns="0" rIns="0" bIns="0" anchor="t" anchorCtr="0">
-            <a:spAutoFit/>
-          </a:bodyPr>
-          <a:lstStyle/>
-          <a:p>
-            <a:pPr marL="0" marR="0" lvl="0" indent="0" algn="l" rtl="0">
-              <a:lnSpc>
-                <a:spcPct val="159944"/>
-              </a:lnSpc>
-              <a:spcBef>
-                <a:spcPts val="0"/>
-              </a:spcBef>
-              <a:spcAft>
-                <a:spcPts val="0"/>
-              </a:spcAft>
-              <a:buNone/>
-            </a:pPr>
-            <a:r>
-              <a:rPr lang="en-US" sz="1800" b="0" i="0" u="none" strike="noStrike" cap="none">
-                <a:solidFill>
-                  <a:srgbClr val="CBD5E1"/>
-                </a:solidFill>
-                <a:latin typeface="Lato"/>
-                <a:ea typeface="Lato"/>
-                <a:cs typeface="Lato"/>
-                <a:sym typeface="Lato"/>
-              </a:rPr>
-              <a:t>スクリーンにQRコードを表示。</a:t>
-            </a:r>
-            <a:endParaRPr/>
-          </a:p>
-        </p:txBody>
-      </p:sp>
-      <p:sp>
-        <p:nvSpPr>
-          <p:cNvPr id="158" name="Google Shape;158;p19"/>
-          <p:cNvSpPr txBox="1"/>
-          <p:nvPr/>
-        </p:nvSpPr>
-        <p:spPr>
-          <a:xfrm>
-            <a:off x="1047750" y="3530054"/>
-            <a:ext cx="4762500" cy="365670"/>
-          </a:xfrm>
-          <a:prstGeom prst="rect">
-            <a:avLst/>
-          </a:prstGeom>
-          <a:noFill/>
-          <a:ln>
-            <a:noFill/>
-          </a:ln>
-        </p:spPr>
-        <p:txBody>
-          <a:bodyPr spcFirstLastPara="1" wrap="square" lIns="0" tIns="0" rIns="0" bIns="0" anchor="t" anchorCtr="0">
-            <a:spAutoFit/>
-          </a:bodyPr>
-          <a:lstStyle/>
-          <a:p>
-            <a:pPr marL="0" marR="0" lvl="0" indent="0" algn="l" rtl="0">
-              <a:lnSpc>
-                <a:spcPct val="159944"/>
-              </a:lnSpc>
-              <a:spcBef>
-                <a:spcPts val="0"/>
-              </a:spcBef>
-              <a:spcAft>
-                <a:spcPts val="0"/>
-              </a:spcAft>
-              <a:buNone/>
-            </a:pPr>
-            <a:r>
-              <a:rPr lang="en-US" sz="1800" b="0" i="0" u="none" strike="noStrike" cap="none">
-                <a:solidFill>
-                  <a:srgbClr val="CBD5E1"/>
-                </a:solidFill>
-                <a:latin typeface="Lato"/>
-                <a:ea typeface="Lato"/>
-                <a:cs typeface="Lato"/>
-                <a:sym typeface="Lato"/>
-              </a:rPr>
-              <a:t>参加者は名前を入力し「参加」ボタン。</a:t>
-            </a:r>
-            <a:endParaRPr/>
-          </a:p>
-        </p:txBody>
-      </p:sp>
-      <p:sp>
-        <p:nvSpPr>
-          <p:cNvPr id="159" name="Google Shape;159;p19"/>
-          <p:cNvSpPr txBox="1"/>
-          <p:nvPr/>
-        </p:nvSpPr>
-        <p:spPr>
-          <a:xfrm>
-            <a:off x="1047750" y="4181475"/>
-            <a:ext cx="4762500" cy="731341"/>
-          </a:xfrm>
-          <a:prstGeom prst="rect">
-            <a:avLst/>
-          </a:prstGeom>
-          <a:noFill/>
-          <a:ln>
-            <a:noFill/>
-          </a:ln>
-        </p:spPr>
-        <p:txBody>
-          <a:bodyPr spcFirstLastPara="1" wrap="square" lIns="0" tIns="0" rIns="0" bIns="0" anchor="t" anchorCtr="0">
-            <a:spAutoFit/>
-          </a:bodyPr>
-          <a:lstStyle/>
-          <a:p>
-            <a:pPr marL="0" marR="0" lvl="0" indent="0" algn="l" rtl="0">
-              <a:lnSpc>
-                <a:spcPct val="159944"/>
-              </a:lnSpc>
-              <a:spcBef>
-                <a:spcPts val="0"/>
-              </a:spcBef>
-              <a:spcAft>
-                <a:spcPts val="0"/>
-              </a:spcAft>
-              <a:buNone/>
-            </a:pPr>
-            <a:r>
-              <a:rPr lang="en-US" sz="1800" b="0" i="0" u="none" strike="noStrike" cap="none">
-                <a:solidFill>
-                  <a:srgbClr val="CBD5E1"/>
-                </a:solidFill>
-                <a:latin typeface="Lato"/>
-                <a:ea typeface="Lato"/>
-                <a:cs typeface="Lato"/>
-                <a:sym typeface="Lato"/>
-              </a:rPr>
-              <a:t>会場画面(m.html)でリアルタイムに参加人数と名前を確認できます。</a:t>
-            </a:r>
-            <a:endParaRPr/>
-          </a:p>
-        </p:txBody>
-      </p:sp>
       <p:pic>
         <p:nvPicPr>
-          <p:cNvPr id="160" name="Google Shape;160;p19" descr="image.png"/>
+          <p:cNvPr id="177" name="Google Shape;177;p20" descr="image.png"/>
           <p:cNvPicPr preferRelativeResize="0"/>
           <p:nvPr/>
         </p:nvPicPr>
@@ -16235,62 +22076,8 @@
         </p:blipFill>
         <p:spPr>
           <a:xfrm>
-            <a:off x="571500" y="2921496"/>
-            <a:ext cx="247650" cy="295275"/>
-          </a:xfrm>
-          <a:prstGeom prst="rect">
-            <a:avLst/>
-          </a:prstGeom>
-          <a:noFill/>
-          <a:ln>
-            <a:noFill/>
-          </a:ln>
-        </p:spPr>
-      </p:pic>
-      <p:pic>
-        <p:nvPicPr>
-          <p:cNvPr id="161" name="Google Shape;161;p19" descr="image.png"/>
-          <p:cNvPicPr preferRelativeResize="0"/>
-          <p:nvPr/>
-        </p:nvPicPr>
-        <p:blipFill rotWithShape="1">
-          <a:blip r:embed="rId5">
-            <a:alphaModFix/>
-          </a:blip>
-          <a:srcRect/>
-          <a:stretch/>
-        </p:blipFill>
-        <p:spPr>
-          <a:xfrm>
-            <a:off x="571500" y="3572916"/>
-            <a:ext cx="361950" cy="295275"/>
-          </a:xfrm>
-          <a:prstGeom prst="rect">
-            <a:avLst/>
-          </a:prstGeom>
-          <a:noFill/>
-          <a:ln>
-            <a:noFill/>
-          </a:ln>
-        </p:spPr>
-      </p:pic>
-      <p:pic>
-        <p:nvPicPr>
-          <p:cNvPr id="162" name="Google Shape;162;p19" descr="image.png"/>
-          <p:cNvPicPr preferRelativeResize="0"/>
-          <p:nvPr/>
-        </p:nvPicPr>
-        <p:blipFill rotWithShape="1">
-          <a:blip r:embed="rId6">
-            <a:alphaModFix/>
-          </a:blip>
-          <a:srcRect/>
-          <a:stretch/>
-        </p:blipFill>
-        <p:spPr>
-          <a:xfrm>
-            <a:off x="571500" y="4224337"/>
-            <a:ext cx="285750" cy="295275"/>
+            <a:off x="6334125" y="2150715"/>
+            <a:ext cx="5286375" cy="3619500"/>
           </a:xfrm>
           <a:prstGeom prst="rect">
             <a:avLst/>
@@ -16303,202 +22090,14 @@
       </p:pic>
       <p:sp>
         <p:nvSpPr>
-          <p:cNvPr id="163" name="Google Shape;163;p19"/>
+          <p:cNvPr id="178" name="Google Shape;178;p20"/>
           <p:cNvSpPr txBox="1"/>
           <p:nvPr/>
         </p:nvSpPr>
         <p:spPr>
           <a:xfrm>
-            <a:off x="800100" y="571500"/>
-            <a:ext cx="11361420" cy="685800"/>
-          </a:xfrm>
-          <a:prstGeom prst="rect">
-            <a:avLst/>
-          </a:prstGeom>
-          <a:noFill/>
-          <a:ln>
-            <a:noFill/>
-          </a:ln>
-        </p:spPr>
-        <p:txBody>
-          <a:bodyPr spcFirstLastPara="1" wrap="square" lIns="0" tIns="0" rIns="0" bIns="0" anchor="t" anchorCtr="0">
-            <a:spAutoFit/>
-          </a:bodyPr>
-          <a:lstStyle/>
-          <a:p>
-            <a:pPr marL="0" marR="0" lvl="0" indent="0" algn="l" rtl="0">
-              <a:spcBef>
-                <a:spcPts val="0"/>
-              </a:spcBef>
-              <a:spcAft>
-                <a:spcPts val="0"/>
-              </a:spcAft>
-              <a:buNone/>
-            </a:pPr>
-            <a:r>
-              <a:rPr lang="en-US" sz="3600" b="0" i="0" u="none" strike="noStrike" cap="none">
-                <a:solidFill>
-                  <a:srgbClr val="F8FAFC"/>
-                </a:solidFill>
-                <a:latin typeface="Poppins SemiBold"/>
-                <a:ea typeface="Poppins SemiBold"/>
-                <a:cs typeface="Poppins SemiBold"/>
-                <a:sym typeface="Poppins SemiBold"/>
-              </a:rPr>
-              <a:t>参加者の受付</a:t>
-            </a:r>
-            <a:endParaRPr/>
-          </a:p>
-        </p:txBody>
-      </p:sp>
-      <p:sp>
-        <p:nvSpPr>
-          <p:cNvPr id="164" name="Google Shape;164;p19"/>
-          <p:cNvSpPr/>
-          <p:nvPr/>
-        </p:nvSpPr>
-        <p:spPr>
-          <a:xfrm>
-            <a:off x="571500" y="571500"/>
-            <a:ext cx="76200" cy="685800"/>
-          </a:xfrm>
-          <a:prstGeom prst="rect">
-            <a:avLst/>
-          </a:prstGeom>
-          <a:solidFill>
-            <a:srgbClr val="10B981"/>
-          </a:solidFill>
-          <a:ln>
-            <a:noFill/>
-          </a:ln>
-        </p:spPr>
-        <p:txBody>
-          <a:bodyPr spcFirstLastPara="1" wrap="square" lIns="91425" tIns="45700" rIns="91425" bIns="45700" anchor="ctr" anchorCtr="0">
-            <a:noAutofit/>
-          </a:bodyPr>
-          <a:lstStyle/>
-          <a:p>
-            <a:pPr marL="0" marR="0" lvl="0" indent="0" algn="ctr" rtl="0">
-              <a:spcBef>
-                <a:spcPts val="0"/>
-              </a:spcBef>
-              <a:spcAft>
-                <a:spcPts val="0"/>
-              </a:spcAft>
-              <a:buNone/>
-            </a:pPr>
-            <a:endParaRPr sz="1800" b="0" i="0" u="none" strike="noStrike" cap="none">
-              <a:solidFill>
-                <a:schemeClr val="dk1"/>
-              </a:solidFill>
-              <a:latin typeface="Calibri"/>
-              <a:ea typeface="Calibri"/>
-              <a:cs typeface="Calibri"/>
-              <a:sym typeface="Calibri"/>
-            </a:endParaRPr>
-          </a:p>
-        </p:txBody>
-      </p:sp>
-      <p:pic>
-        <p:nvPicPr>
-          <p:cNvPr id="3" name="図 2">
-            <a:extLst>
-              <a:ext uri="{FF2B5EF4-FFF2-40B4-BE49-F238E27FC236}">
-                <a16:creationId xmlns:a16="http://schemas.microsoft.com/office/drawing/2014/main" id="{B33E81C7-F893-4C2F-5850-10A193796C4D}"/>
-              </a:ext>
-            </a:extLst>
-          </p:cNvPr>
-          <p:cNvPicPr>
-            <a:picLocks noChangeAspect="1"/>
-          </p:cNvPicPr>
-          <p:nvPr/>
-        </p:nvPicPr>
-        <p:blipFill>
-          <a:blip r:embed="rId7"/>
-          <a:stretch>
-            <a:fillRect/>
-          </a:stretch>
-        </p:blipFill>
-        <p:spPr>
-          <a:xfrm>
-            <a:off x="6096000" y="1316191"/>
-            <a:ext cx="5593565" cy="4793395"/>
-          </a:xfrm>
-          <a:prstGeom prst="rect">
-            <a:avLst/>
-          </a:prstGeom>
-        </p:spPr>
-      </p:pic>
-    </p:spTree>
-  </p:cSld>
-  <p:clrMapOvr>
-    <a:masterClrMapping/>
-  </p:clrMapOvr>
-</p:sld>
-</file>
-
-<file path=ppt/slides/slide8.xml><?xml version="1.0" encoding="utf-8"?>
-<p:sld xmlns:a="http://schemas.openxmlformats.org/drawingml/2006/main" xmlns:r="http://schemas.openxmlformats.org/officeDocument/2006/relationships" xmlns:p="http://schemas.openxmlformats.org/presentationml/2006/main">
-  <p:cSld>
-    <p:bg>
-      <p:bgPr>
-        <a:solidFill>
-          <a:srgbClr val="1E293B"/>
-        </a:solidFill>
-        <a:effectLst/>
-      </p:bgPr>
-    </p:bg>
-    <p:spTree>
-      <p:nvGrpSpPr>
-        <p:cNvPr id="1" name="Shape 168"/>
-        <p:cNvGrpSpPr/>
-        <p:nvPr/>
-      </p:nvGrpSpPr>
-      <p:grpSpPr>
-        <a:xfrm>
-          <a:off x="0" y="0"/>
-          <a:ext cx="0" cy="0"/>
-          <a:chOff x="0" y="0"/>
-          <a:chExt cx="0" cy="0"/>
-        </a:xfrm>
-      </p:grpSpPr>
-      <p:pic>
-        <p:nvPicPr>
-          <p:cNvPr id="169" name="Google Shape;169;p20" descr="image.png"/>
-          <p:cNvPicPr preferRelativeResize="0"/>
-          <p:nvPr/>
-        </p:nvPicPr>
-        <p:blipFill rotWithShape="1">
-          <a:blip r:embed="rId3">
-            <a:alphaModFix/>
-          </a:blip>
-          <a:srcRect/>
-          <a:stretch/>
-        </p:blipFill>
-        <p:spPr>
-          <a:xfrm>
-            <a:off x="0" y="0"/>
-            <a:ext cx="12192000" cy="6858000"/>
-          </a:xfrm>
-          <a:prstGeom prst="rect">
-            <a:avLst/>
-          </a:prstGeom>
-          <a:noFill/>
-          <a:ln>
-            <a:noFill/>
-          </a:ln>
-        </p:spPr>
-      </p:pic>
-      <p:sp>
-        <p:nvSpPr>
-          <p:cNvPr id="170" name="Google Shape;170;p20"/>
-          <p:cNvSpPr txBox="1"/>
-          <p:nvPr/>
-        </p:nvSpPr>
-        <p:spPr>
-          <a:xfrm>
-            <a:off x="1428750" y="2735758"/>
-            <a:ext cx="10191750" cy="365670"/>
+            <a:off x="571500" y="426243"/>
+            <a:ext cx="11601450" cy="586680"/>
           </a:xfrm>
           <a:prstGeom prst="rect">
             <a:avLst/>
@@ -16516,7 +22115,7 @@
           <a:p>
             <a:pPr marL="0" marR="0" lvl="0" indent="0" algn="l" rtl="0">
               <a:lnSpc>
-                <a:spcPct val="159944"/>
+                <a:spcPct val="120000"/>
               </a:lnSpc>
               <a:spcBef>
                 <a:spcPts val="0"/>
@@ -16527,381 +22126,16 @@
               <a:buNone/>
             </a:pPr>
             <a:r>
-              <a:rPr lang="en-US" sz="1800" b="1" i="0" u="none" strike="noStrike" cap="none">
+              <a:rPr lang="en-US" sz="3600" b="1" i="0" u="none" strike="noStrike" cap="none">
                 <a:solidFill>
-                  <a:srgbClr val="CBD5E1"/>
+                  <a:srgbClr val="FFFFFF"/>
                 </a:solidFill>
-                <a:latin typeface="Lato"/>
-                <a:ea typeface="Lato"/>
-                <a:cs typeface="Lato"/>
-                <a:sym typeface="Lato"/>
+                <a:latin typeface="Noto Sans JP"/>
+                <a:ea typeface="Noto Sans JP"/>
+                <a:cs typeface="Noto Sans JP"/>
+                <a:sym typeface="Noto Sans JP"/>
               </a:rPr>
-              <a:t>START QUIZ:</a:t>
-            </a:r>
-            <a:r>
-              <a:rPr lang="en-US" sz="1800" b="0" i="0" u="none" strike="noStrike" cap="none">
-                <a:solidFill>
-                  <a:srgbClr val="CBD5E1"/>
-                </a:solidFill>
-                <a:latin typeface="Lato"/>
-                <a:ea typeface="Lato"/>
-                <a:cs typeface="Lato"/>
-                <a:sym typeface="Lato"/>
-              </a:rPr>
-              <a:t> 最初の問題を表示し、受付を終了します。</a:t>
-            </a:r>
-            <a:endParaRPr/>
-          </a:p>
-        </p:txBody>
-      </p:sp>
-      <p:sp>
-        <p:nvSpPr>
-          <p:cNvPr id="171" name="Google Shape;171;p20"/>
-          <p:cNvSpPr txBox="1"/>
-          <p:nvPr/>
-        </p:nvSpPr>
-        <p:spPr>
-          <a:xfrm>
-            <a:off x="1428750" y="3387179"/>
-            <a:ext cx="10191750" cy="365670"/>
-          </a:xfrm>
-          <a:prstGeom prst="rect">
-            <a:avLst/>
-          </a:prstGeom>
-          <a:noFill/>
-          <a:ln>
-            <a:noFill/>
-          </a:ln>
-        </p:spPr>
-        <p:txBody>
-          <a:bodyPr spcFirstLastPara="1" wrap="square" lIns="0" tIns="0" rIns="0" bIns="0" anchor="t" anchorCtr="0">
-            <a:spAutoFit/>
-          </a:bodyPr>
-          <a:lstStyle/>
-          <a:p>
-            <a:pPr marL="0" marR="0" lvl="0" indent="0" algn="l" rtl="0">
-              <a:lnSpc>
-                <a:spcPct val="159944"/>
-              </a:lnSpc>
-              <a:spcBef>
-                <a:spcPts val="0"/>
-              </a:spcBef>
-              <a:spcAft>
-                <a:spcPts val="0"/>
-              </a:spcAft>
-              <a:buNone/>
-            </a:pPr>
-            <a:r>
-              <a:rPr lang="en-US" sz="1800" b="1" i="0" u="none" strike="noStrike" cap="none">
-                <a:solidFill>
-                  <a:srgbClr val="CBD5E1"/>
-                </a:solidFill>
-                <a:latin typeface="Lato"/>
-                <a:ea typeface="Lato"/>
-                <a:cs typeface="Lato"/>
-                <a:sym typeface="Lato"/>
-              </a:rPr>
-              <a:t>SHOW ANSWER:</a:t>
-            </a:r>
-            <a:r>
-              <a:rPr lang="en-US" sz="1800" b="0" i="0" u="none" strike="noStrike" cap="none">
-                <a:solidFill>
-                  <a:srgbClr val="CBD5E1"/>
-                </a:solidFill>
-                <a:latin typeface="Lato"/>
-                <a:ea typeface="Lato"/>
-                <a:cs typeface="Lato"/>
-                <a:sym typeface="Lato"/>
-              </a:rPr>
-              <a:t> 回答を締め切り、正解と統計を提示します。</a:t>
-            </a:r>
-            <a:endParaRPr/>
-          </a:p>
-        </p:txBody>
-      </p:sp>
-      <p:sp>
-        <p:nvSpPr>
-          <p:cNvPr id="172" name="Google Shape;172;p20"/>
-          <p:cNvSpPr txBox="1"/>
-          <p:nvPr/>
-        </p:nvSpPr>
-        <p:spPr>
-          <a:xfrm>
-            <a:off x="1428750" y="4038600"/>
-            <a:ext cx="10191750" cy="365670"/>
-          </a:xfrm>
-          <a:prstGeom prst="rect">
-            <a:avLst/>
-          </a:prstGeom>
-          <a:noFill/>
-          <a:ln>
-            <a:noFill/>
-          </a:ln>
-        </p:spPr>
-        <p:txBody>
-          <a:bodyPr spcFirstLastPara="1" wrap="square" lIns="0" tIns="0" rIns="0" bIns="0" anchor="t" anchorCtr="0">
-            <a:spAutoFit/>
-          </a:bodyPr>
-          <a:lstStyle/>
-          <a:p>
-            <a:pPr marL="0" marR="0" lvl="0" indent="0" algn="l" rtl="0">
-              <a:lnSpc>
-                <a:spcPct val="159944"/>
-              </a:lnSpc>
-              <a:spcBef>
-                <a:spcPts val="0"/>
-              </a:spcBef>
-              <a:spcAft>
-                <a:spcPts val="0"/>
-              </a:spcAft>
-              <a:buNone/>
-            </a:pPr>
-            <a:r>
-              <a:rPr lang="en-US" sz="1800" b="1" i="0" u="none" strike="noStrike" cap="none">
-                <a:solidFill>
-                  <a:srgbClr val="CBD5E1"/>
-                </a:solidFill>
-                <a:latin typeface="Lato"/>
-                <a:ea typeface="Lato"/>
-                <a:cs typeface="Lato"/>
-                <a:sym typeface="Lato"/>
-              </a:rPr>
-              <a:t>NEXT QUESTION:</a:t>
-            </a:r>
-            <a:r>
-              <a:rPr lang="en-US" sz="1800" b="0" i="0" u="none" strike="noStrike" cap="none">
-                <a:solidFill>
-                  <a:srgbClr val="CBD5E1"/>
-                </a:solidFill>
-                <a:latin typeface="Lato"/>
-                <a:ea typeface="Lato"/>
-                <a:cs typeface="Lato"/>
-                <a:sym typeface="Lato"/>
-              </a:rPr>
-              <a:t> 全員が正解を確認したら、次の問題へ。</a:t>
-            </a:r>
-            <a:endParaRPr/>
-          </a:p>
-        </p:txBody>
-      </p:sp>
-      <p:sp>
-        <p:nvSpPr>
-          <p:cNvPr id="173" name="Google Shape;173;p20"/>
-          <p:cNvSpPr txBox="1"/>
-          <p:nvPr/>
-        </p:nvSpPr>
-        <p:spPr>
-          <a:xfrm>
-            <a:off x="1428750" y="4690020"/>
-            <a:ext cx="10191750" cy="365670"/>
-          </a:xfrm>
-          <a:prstGeom prst="rect">
-            <a:avLst/>
-          </a:prstGeom>
-          <a:noFill/>
-          <a:ln>
-            <a:noFill/>
-          </a:ln>
-        </p:spPr>
-        <p:txBody>
-          <a:bodyPr spcFirstLastPara="1" wrap="square" lIns="0" tIns="0" rIns="0" bIns="0" anchor="t" anchorCtr="0">
-            <a:spAutoFit/>
-          </a:bodyPr>
-          <a:lstStyle/>
-          <a:p>
-            <a:pPr marL="0" marR="0" lvl="0" indent="0" algn="l" rtl="0">
-              <a:lnSpc>
-                <a:spcPct val="159944"/>
-              </a:lnSpc>
-              <a:spcBef>
-                <a:spcPts val="0"/>
-              </a:spcBef>
-              <a:spcAft>
-                <a:spcPts val="0"/>
-              </a:spcAft>
-              <a:buNone/>
-            </a:pPr>
-            <a:r>
-              <a:rPr lang="en-US" sz="1800" b="1" i="0" u="none" strike="noStrike" cap="none">
-                <a:solidFill>
-                  <a:srgbClr val="CBD5E1"/>
-                </a:solidFill>
-                <a:latin typeface="Lato"/>
-                <a:ea typeface="Lato"/>
-                <a:cs typeface="Lato"/>
-                <a:sym typeface="Lato"/>
-              </a:rPr>
-              <a:t>SHOW RESULTS:</a:t>
-            </a:r>
-            <a:r>
-              <a:rPr lang="en-US" sz="1800" b="0" i="0" u="none" strike="noStrike" cap="none">
-                <a:solidFill>
-                  <a:srgbClr val="CBD5E1"/>
-                </a:solidFill>
-                <a:latin typeface="Lato"/>
-                <a:ea typeface="Lato"/>
-                <a:cs typeface="Lato"/>
-                <a:sym typeface="Lato"/>
-              </a:rPr>
-              <a:t> 全問終了後、最終ランキングを表示。</a:t>
-            </a:r>
-            <a:endParaRPr/>
-          </a:p>
-        </p:txBody>
-      </p:sp>
-      <p:pic>
-        <p:nvPicPr>
-          <p:cNvPr id="174" name="Google Shape;174;p20" descr="image.png"/>
-          <p:cNvPicPr preferRelativeResize="0"/>
-          <p:nvPr/>
-        </p:nvPicPr>
-        <p:blipFill rotWithShape="1">
-          <a:blip r:embed="rId4">
-            <a:alphaModFix/>
-          </a:blip>
-          <a:srcRect/>
-          <a:stretch/>
-        </p:blipFill>
-        <p:spPr>
-          <a:xfrm>
-            <a:off x="952500" y="2778621"/>
-            <a:ext cx="219075" cy="295275"/>
-          </a:xfrm>
-          <a:prstGeom prst="rect">
-            <a:avLst/>
-          </a:prstGeom>
-          <a:noFill/>
-          <a:ln>
-            <a:noFill/>
-          </a:ln>
-        </p:spPr>
-      </p:pic>
-      <p:pic>
-        <p:nvPicPr>
-          <p:cNvPr id="175" name="Google Shape;175;p20" descr="image.png"/>
-          <p:cNvPicPr preferRelativeResize="0"/>
-          <p:nvPr/>
-        </p:nvPicPr>
-        <p:blipFill rotWithShape="1">
-          <a:blip r:embed="rId5">
-            <a:alphaModFix/>
-          </a:blip>
-          <a:srcRect/>
-          <a:stretch/>
-        </p:blipFill>
-        <p:spPr>
-          <a:xfrm>
-            <a:off x="952500" y="3430041"/>
-            <a:ext cx="323850" cy="295275"/>
-          </a:xfrm>
-          <a:prstGeom prst="rect">
-            <a:avLst/>
-          </a:prstGeom>
-          <a:noFill/>
-          <a:ln>
-            <a:noFill/>
-          </a:ln>
-        </p:spPr>
-      </p:pic>
-      <p:pic>
-        <p:nvPicPr>
-          <p:cNvPr id="176" name="Google Shape;176;p20" descr="image.png"/>
-          <p:cNvPicPr preferRelativeResize="0"/>
-          <p:nvPr/>
-        </p:nvPicPr>
-        <p:blipFill rotWithShape="1">
-          <a:blip r:embed="rId6">
-            <a:alphaModFix/>
-          </a:blip>
-          <a:srcRect/>
-          <a:stretch/>
-        </p:blipFill>
-        <p:spPr>
-          <a:xfrm>
-            <a:off x="952500" y="4081462"/>
-            <a:ext cx="180975" cy="295275"/>
-          </a:xfrm>
-          <a:prstGeom prst="rect">
-            <a:avLst/>
-          </a:prstGeom>
-          <a:noFill/>
-          <a:ln>
-            <a:noFill/>
-          </a:ln>
-        </p:spPr>
-      </p:pic>
-      <p:pic>
-        <p:nvPicPr>
-          <p:cNvPr id="177" name="Google Shape;177;p20" descr="image.png"/>
-          <p:cNvPicPr preferRelativeResize="0"/>
-          <p:nvPr/>
-        </p:nvPicPr>
-        <p:blipFill rotWithShape="1">
-          <a:blip r:embed="rId7">
-            <a:alphaModFix/>
-          </a:blip>
-          <a:srcRect/>
-          <a:stretch/>
-        </p:blipFill>
-        <p:spPr>
-          <a:xfrm>
-            <a:off x="952500" y="4732883"/>
-            <a:ext cx="323850" cy="295275"/>
-          </a:xfrm>
-          <a:prstGeom prst="rect">
-            <a:avLst/>
-          </a:prstGeom>
-          <a:noFill/>
-          <a:ln>
-            <a:noFill/>
-          </a:ln>
-        </p:spPr>
-      </p:pic>
-      <p:sp>
-        <p:nvSpPr>
-          <p:cNvPr id="178" name="Google Shape;178;p20"/>
-          <p:cNvSpPr txBox="1"/>
-          <p:nvPr/>
-        </p:nvSpPr>
-        <p:spPr>
-          <a:xfrm>
-            <a:off x="800100" y="571500"/>
-            <a:ext cx="11361420" cy="685800"/>
-          </a:xfrm>
-          <a:prstGeom prst="rect">
-            <a:avLst/>
-          </a:prstGeom>
-          <a:noFill/>
-          <a:ln>
-            <a:noFill/>
-          </a:ln>
-        </p:spPr>
-        <p:txBody>
-          <a:bodyPr spcFirstLastPara="1" wrap="square" lIns="0" tIns="0" rIns="0" bIns="0" anchor="t" anchorCtr="0">
-            <a:spAutoFit/>
-          </a:bodyPr>
-          <a:lstStyle/>
-          <a:p>
-            <a:pPr marL="0" marR="0" lvl="0" indent="0" algn="l" rtl="0">
-              <a:spcBef>
-                <a:spcPts val="0"/>
-              </a:spcBef>
-              <a:spcAft>
-                <a:spcPts val="0"/>
-              </a:spcAft>
-              <a:buNone/>
-            </a:pPr>
-            <a:r>
-              <a:rPr lang="en-US" sz="3600" b="0" i="0" u="none" strike="noStrike" cap="none">
-                <a:solidFill>
-                  <a:srgbClr val="F8FAFC"/>
-                </a:solidFill>
-                <a:latin typeface="Poppins SemiBold"/>
-                <a:ea typeface="Poppins SemiBold"/>
-                <a:cs typeface="Poppins SemiBold"/>
-                <a:sym typeface="Poppins SemiBold"/>
-              </a:rPr>
-              <a:t>クイズの進行手順</a:t>
+              <a:t>参加受付と自撮り撮影</a:t>
             </a:r>
             <a:endParaRPr/>
           </a:p>
@@ -16915,122 +22149,14 @@
         </p:nvSpPr>
         <p:spPr>
           <a:xfrm>
-            <a:off x="571500" y="571500"/>
-            <a:ext cx="76200" cy="685800"/>
+            <a:off x="571500" y="1070074"/>
+            <a:ext cx="11049000" cy="38100"/>
           </a:xfrm>
           <a:prstGeom prst="rect">
             <a:avLst/>
           </a:prstGeom>
           <a:solidFill>
-            <a:srgbClr val="10B981"/>
-          </a:solidFill>
-          <a:ln>
-            <a:noFill/>
-          </a:ln>
-        </p:spPr>
-        <p:txBody>
-          <a:bodyPr spcFirstLastPara="1" wrap="square" lIns="91425" tIns="45700" rIns="91425" bIns="45700" anchor="ctr" anchorCtr="0">
-            <a:noAutofit/>
-          </a:bodyPr>
-          <a:lstStyle/>
-          <a:p>
-            <a:pPr marL="0" marR="0" lvl="0" indent="0" algn="ctr" rtl="0">
-              <a:spcBef>
-                <a:spcPts val="0"/>
-              </a:spcBef>
-              <a:spcAft>
-                <a:spcPts val="0"/>
-              </a:spcAft>
-              <a:buNone/>
-            </a:pPr>
-            <a:endParaRPr sz="1800" b="0" i="0" u="none" strike="noStrike" cap="none">
-              <a:solidFill>
-                <a:schemeClr val="dk1"/>
-              </a:solidFill>
-              <a:latin typeface="Calibri"/>
-              <a:ea typeface="Calibri"/>
-              <a:cs typeface="Calibri"/>
-              <a:sym typeface="Calibri"/>
-            </a:endParaRPr>
-          </a:p>
-        </p:txBody>
-      </p:sp>
-    </p:spTree>
-  </p:cSld>
-  <p:clrMapOvr>
-    <a:masterClrMapping/>
-  </p:clrMapOvr>
-</p:sld>
-</file>
-
-<file path=ppt/slides/slide9.xml><?xml version="1.0" encoding="utf-8"?>
-<p:sld xmlns:a="http://schemas.openxmlformats.org/drawingml/2006/main" xmlns:r="http://schemas.openxmlformats.org/officeDocument/2006/relationships" xmlns:p="http://schemas.openxmlformats.org/presentationml/2006/main">
-  <p:cSld>
-    <p:bg>
-      <p:bgPr>
-        <a:solidFill>
-          <a:srgbClr val="1E293B"/>
-        </a:solidFill>
-        <a:effectLst/>
-      </p:bgPr>
-    </p:bg>
-    <p:spTree>
-      <p:nvGrpSpPr>
-        <p:cNvPr id="1" name="Shape 183"/>
-        <p:cNvGrpSpPr/>
-        <p:nvPr/>
-      </p:nvGrpSpPr>
-      <p:grpSpPr>
-        <a:xfrm>
-          <a:off x="0" y="0"/>
-          <a:ext cx="0" cy="0"/>
-          <a:chOff x="0" y="0"/>
-          <a:chExt cx="0" cy="0"/>
-        </a:xfrm>
-      </p:grpSpPr>
-      <p:pic>
-        <p:nvPicPr>
-          <p:cNvPr id="184" name="Google Shape;184;p21" descr="image.png"/>
-          <p:cNvPicPr preferRelativeResize="0"/>
-          <p:nvPr/>
-        </p:nvPicPr>
-        <p:blipFill rotWithShape="1">
-          <a:blip r:embed="rId3">
-            <a:alphaModFix/>
-          </a:blip>
-          <a:srcRect/>
-          <a:stretch/>
-        </p:blipFill>
-        <p:spPr>
-          <a:xfrm>
-            <a:off x="0" y="0"/>
-            <a:ext cx="12192000" cy="6858000"/>
-          </a:xfrm>
-          <a:prstGeom prst="rect">
-            <a:avLst/>
-          </a:prstGeom>
-          <a:noFill/>
-          <a:ln>
-            <a:noFill/>
-          </a:ln>
-        </p:spPr>
-      </p:pic>
-      <p:sp>
-        <p:nvSpPr>
-          <p:cNvPr id="185" name="Google Shape;185;p21"/>
-          <p:cNvSpPr/>
-          <p:nvPr/>
-        </p:nvSpPr>
-        <p:spPr>
-          <a:xfrm>
-            <a:off x="952500" y="4419600"/>
-            <a:ext cx="10287000" cy="38100"/>
-          </a:xfrm>
-          <a:prstGeom prst="rect">
-            <a:avLst/>
-          </a:prstGeom>
-          <a:solidFill>
-            <a:srgbClr val="475569"/>
+            <a:srgbClr val="3498DB"/>
           </a:solidFill>
           <a:ln>
             <a:noFill/>
@@ -17065,70 +22191,14 @@
       </p:sp>
       <p:sp>
         <p:nvSpPr>
-          <p:cNvPr id="186" name="Google Shape;186;p21"/>
-          <p:cNvSpPr/>
-          <p:nvPr/>
-        </p:nvSpPr>
-        <p:spPr>
-          <a:xfrm>
-            <a:off x="1771650" y="3694807"/>
-            <a:ext cx="266700" cy="266700"/>
-          </a:xfrm>
-          <a:prstGeom prst="roundRect">
-            <a:avLst>
-              <a:gd name="adj" fmla="val 50000"/>
-            </a:avLst>
-          </a:prstGeom>
-          <a:solidFill>
-            <a:srgbClr val="10B981"/>
-          </a:solidFill>
-          <a:ln w="38100" cap="flat" cmpd="sng">
-            <a:solidFill>
-              <a:srgbClr val="1E293B"/>
-            </a:solidFill>
-            <a:prstDash val="solid"/>
-            <a:round/>
-            <a:headEnd type="none" w="sm" len="sm"/>
-            <a:tailEnd type="none" w="sm" len="sm"/>
-          </a:ln>
-        </p:spPr>
-        <p:txBody>
-          <a:bodyPr spcFirstLastPara="1" wrap="square" lIns="91425" tIns="45700" rIns="91425" bIns="45700" anchor="ctr" anchorCtr="0">
-            <a:noAutofit/>
-          </a:bodyPr>
-          <a:lstStyle/>
-          <a:p>
-            <a:pPr marL="0" marR="0" lvl="0" indent="0" algn="ctr" rtl="0">
-              <a:spcBef>
-                <a:spcPts val="0"/>
-              </a:spcBef>
-              <a:spcAft>
-                <a:spcPts val="0"/>
-              </a:spcAft>
-              <a:buNone/>
-            </a:pPr>
-            <a:endParaRPr sz="1800" b="0" i="0" u="none" strike="noStrike" cap="none">
-              <a:solidFill>
-                <a:schemeClr val="dk1"/>
-              </a:solidFill>
-              <a:latin typeface="Calibri"/>
-              <a:ea typeface="Calibri"/>
-              <a:cs typeface="Calibri"/>
-              <a:sym typeface="Calibri"/>
-            </a:endParaRPr>
-          </a:p>
-        </p:txBody>
-      </p:sp>
-      <p:sp>
-        <p:nvSpPr>
-          <p:cNvPr id="187" name="Google Shape;187;p21"/>
+          <p:cNvPr id="180" name="Google Shape;180;p20"/>
           <p:cNvSpPr txBox="1"/>
           <p:nvPr/>
         </p:nvSpPr>
         <p:spPr>
           <a:xfrm>
-            <a:off x="904875" y="4152007"/>
-            <a:ext cx="2000250" cy="276225"/>
+            <a:off x="571500" y="1813024"/>
+            <a:ext cx="5286375" cy="731341"/>
           </a:xfrm>
           <a:prstGeom prst="rect">
             <a:avLst/>
@@ -17144,7 +22214,10 @@
           </a:bodyPr>
           <a:lstStyle/>
           <a:p>
-            <a:pPr marL="0" marR="0" lvl="0" indent="0" algn="ctr" rtl="0">
+            <a:pPr marL="0" marR="0" lvl="0" indent="0" algn="l" rtl="0">
+              <a:lnSpc>
+                <a:spcPct val="159944"/>
+              </a:lnSpc>
               <a:spcBef>
                 <a:spcPts val="0"/>
               </a:spcBef>
@@ -17154,16 +22227,16 @@
               <a:buNone/>
             </a:pPr>
             <a:r>
-              <a:rPr lang="en-US" sz="1404" b="1" i="0" u="none" strike="noStrike" cap="none">
+              <a:rPr lang="en-US" sz="1800" b="0" i="0" u="none" strike="noStrike" cap="none">
                 <a:solidFill>
-                  <a:srgbClr val="F8FAFC"/>
+                  <a:srgbClr val="E0E0E0"/>
                 </a:solidFill>
-                <a:latin typeface="Poppins"/>
-                <a:ea typeface="Poppins"/>
-                <a:cs typeface="Poppins"/>
-                <a:sym typeface="Poppins"/>
+                <a:latin typeface="Noto Sans JP"/>
+                <a:ea typeface="Noto Sans JP"/>
+                <a:cs typeface="Noto Sans JP"/>
+                <a:sym typeface="Noto Sans JP"/>
               </a:rPr>
-              <a:t>待機</a:t>
+              <a:t>参加者はスクリーン上のQRコードを読み取り、スマホからエントリーします。</a:t>
             </a:r>
             <a:endParaRPr/>
           </a:p>
@@ -17171,14 +22244,14 @@
       </p:sp>
       <p:sp>
         <p:nvSpPr>
-          <p:cNvPr id="188" name="Google Shape;188;p21"/>
+          <p:cNvPr id="181" name="Google Shape;181;p20"/>
           <p:cNvSpPr txBox="1"/>
           <p:nvPr/>
         </p:nvSpPr>
         <p:spPr>
           <a:xfrm>
-            <a:off x="952500" y="4637782"/>
-            <a:ext cx="1905000" cy="335160"/>
+            <a:off x="1047750" y="2782490"/>
+            <a:ext cx="4810125" cy="807541"/>
           </a:xfrm>
           <a:prstGeom prst="rect">
             <a:avLst/>
@@ -17194,9 +22267,9 @@
           </a:bodyPr>
           <a:lstStyle/>
           <a:p>
-            <a:pPr marL="0" marR="0" lvl="0" indent="0" algn="ctr" rtl="0">
+            <a:pPr marL="0" marR="0" lvl="0" indent="0" algn="l" rtl="0">
               <a:lnSpc>
-                <a:spcPct val="160000"/>
+                <a:spcPct val="159944"/>
               </a:lnSpc>
               <a:spcBef>
                 <a:spcPts val="0"/>
@@ -17207,16 +22280,40 @@
               <a:buNone/>
             </a:pPr>
             <a:r>
-              <a:rPr lang="en-US" sz="1650" b="0" i="0" u="none" strike="noStrike" cap="none">
+              <a:rPr lang="en-US" sz="1800" b="0" i="0" u="none" strike="noStrike" cap="none">
                 <a:solidFill>
-                  <a:srgbClr val="CBD5E1"/>
+                  <a:srgbClr val="E0E0E0"/>
                 </a:solidFill>
-                <a:latin typeface="Lato"/>
-                <a:ea typeface="Lato"/>
-                <a:cs typeface="Lato"/>
-                <a:sym typeface="Lato"/>
+                <a:latin typeface="Noto Sans JP"/>
+                <a:ea typeface="Noto Sans JP"/>
+                <a:cs typeface="Noto Sans JP"/>
+                <a:sym typeface="Noto Sans JP"/>
               </a:rPr>
-              <a:t>受付画面の投影</a:t>
+              <a:t>チーム名を入力し、</a:t>
+            </a:r>
+            <a:r>
+              <a:rPr lang="en-US" sz="1800" b="1" i="0" u="none" strike="noStrike" cap="none">
+                <a:solidFill>
+                  <a:srgbClr val="F1C40F"/>
+                </a:solidFill>
+                <a:latin typeface="Noto Sans JP"/>
+                <a:ea typeface="Noto Sans JP"/>
+                <a:cs typeface="Noto Sans JP"/>
+                <a:sym typeface="Noto Sans JP"/>
+              </a:rPr>
+              <a:t>「顔写真を撮る」</a:t>
+            </a:r>
+            <a:r>
+              <a:rPr lang="en-US" sz="1800" b="0" i="0" u="none" strike="noStrike" cap="none">
+                <a:solidFill>
+                  <a:srgbClr val="E0E0E0"/>
+                </a:solidFill>
+                <a:latin typeface="Noto Sans JP"/>
+                <a:ea typeface="Noto Sans JP"/>
+                <a:cs typeface="Noto Sans JP"/>
+                <a:sym typeface="Noto Sans JP"/>
+              </a:rPr>
+              <a:t>ボタンでその場で自撮りしてもらいます。</a:t>
             </a:r>
             <a:endParaRPr/>
           </a:p>
@@ -17224,70 +22321,14 @@
       </p:sp>
       <p:sp>
         <p:nvSpPr>
-          <p:cNvPr id="189" name="Google Shape;189;p21"/>
-          <p:cNvSpPr/>
-          <p:nvPr/>
-        </p:nvSpPr>
-        <p:spPr>
-          <a:xfrm>
-            <a:off x="4565600" y="3694807"/>
-            <a:ext cx="266700" cy="266700"/>
-          </a:xfrm>
-          <a:prstGeom prst="roundRect">
-            <a:avLst>
-              <a:gd name="adj" fmla="val 50000"/>
-            </a:avLst>
-          </a:prstGeom>
-          <a:solidFill>
-            <a:srgbClr val="10B981"/>
-          </a:solidFill>
-          <a:ln w="38100" cap="flat" cmpd="sng">
-            <a:solidFill>
-              <a:srgbClr val="1E293B"/>
-            </a:solidFill>
-            <a:prstDash val="solid"/>
-            <a:round/>
-            <a:headEnd type="none" w="sm" len="sm"/>
-            <a:tailEnd type="none" w="sm" len="sm"/>
-          </a:ln>
-        </p:spPr>
-        <p:txBody>
-          <a:bodyPr spcFirstLastPara="1" wrap="square" lIns="91425" tIns="45700" rIns="91425" bIns="45700" anchor="ctr" anchorCtr="0">
-            <a:noAutofit/>
-          </a:bodyPr>
-          <a:lstStyle/>
-          <a:p>
-            <a:pPr marL="0" marR="0" lvl="0" indent="0" algn="ctr" rtl="0">
-              <a:spcBef>
-                <a:spcPts val="0"/>
-              </a:spcBef>
-              <a:spcAft>
-                <a:spcPts val="0"/>
-              </a:spcAft>
-              <a:buNone/>
-            </a:pPr>
-            <a:endParaRPr sz="1800" b="0" i="0" u="none" strike="noStrike" cap="none">
-              <a:solidFill>
-                <a:schemeClr val="dk1"/>
-              </a:solidFill>
-              <a:latin typeface="Calibri"/>
-              <a:ea typeface="Calibri"/>
-              <a:cs typeface="Calibri"/>
-              <a:sym typeface="Calibri"/>
-            </a:endParaRPr>
-          </a:p>
-        </p:txBody>
-      </p:sp>
-      <p:sp>
-        <p:nvSpPr>
-          <p:cNvPr id="190" name="Google Shape;190;p21"/>
+          <p:cNvPr id="182" name="Google Shape;182;p20"/>
           <p:cNvSpPr txBox="1"/>
           <p:nvPr/>
         </p:nvSpPr>
         <p:spPr>
           <a:xfrm>
-            <a:off x="3698825" y="4152007"/>
-            <a:ext cx="2000250" cy="276225"/>
+            <a:off x="1047750" y="3780532"/>
+            <a:ext cx="4810125" cy="1173212"/>
           </a:xfrm>
           <a:prstGeom prst="rect">
             <a:avLst/>
@@ -17303,7 +22344,10 @@
           </a:bodyPr>
           <a:lstStyle/>
           <a:p>
-            <a:pPr marL="0" marR="0" lvl="0" indent="0" algn="ctr" rtl="0">
+            <a:pPr marL="0" marR="0" lvl="0" indent="0" algn="l" rtl="0">
+              <a:lnSpc>
+                <a:spcPct val="159944"/>
+              </a:lnSpc>
               <a:spcBef>
                 <a:spcPts val="0"/>
               </a:spcBef>
@@ -17313,16 +22357,40 @@
               <a:buNone/>
             </a:pPr>
             <a:r>
-              <a:rPr lang="en-US" sz="1404" b="1" i="0" u="none" strike="noStrike" cap="none">
+              <a:rPr lang="en-US" sz="1800" b="0" i="0" u="none" strike="noStrike" cap="none">
                 <a:solidFill>
-                  <a:srgbClr val="F8FAFC"/>
+                  <a:srgbClr val="E0E0E0"/>
                 </a:solidFill>
-                <a:latin typeface="Poppins"/>
-                <a:ea typeface="Poppins"/>
-                <a:cs typeface="Poppins"/>
-                <a:sym typeface="Poppins"/>
+                <a:latin typeface="Noto Sans JP"/>
+                <a:ea typeface="Noto Sans JP"/>
+                <a:cs typeface="Noto Sans JP"/>
+                <a:sym typeface="Noto Sans JP"/>
               </a:rPr>
-              <a:t>出題</a:t>
+              <a:t>画像はスマホ内で</a:t>
+            </a:r>
+            <a:r>
+              <a:rPr lang="en-US" sz="1800" b="1" i="0" u="none" strike="noStrike" cap="none">
+                <a:solidFill>
+                  <a:srgbClr val="F1C40F"/>
+                </a:solidFill>
+                <a:latin typeface="Noto Sans JP"/>
+                <a:ea typeface="Noto Sans JP"/>
+                <a:cs typeface="Noto Sans JP"/>
+                <a:sym typeface="Noto Sans JP"/>
+              </a:rPr>
+              <a:t>極小サイズに自動圧縮</a:t>
+            </a:r>
+            <a:r>
+              <a:rPr lang="en-US" sz="1800" b="0" i="0" u="none" strike="noStrike" cap="none">
+                <a:solidFill>
+                  <a:srgbClr val="E0E0E0"/>
+                </a:solidFill>
+                <a:latin typeface="Noto Sans JP"/>
+                <a:ea typeface="Noto Sans JP"/>
+                <a:cs typeface="Noto Sans JP"/>
+                <a:sym typeface="Noto Sans JP"/>
+              </a:rPr>
+              <a:t>されてから送信されるため、一斉送信でもシステムは落ちません。</a:t>
             </a:r>
             <a:endParaRPr/>
           </a:p>
@@ -17330,14 +22398,14 @@
       </p:sp>
       <p:sp>
         <p:nvSpPr>
-          <p:cNvPr id="191" name="Google Shape;191;p21"/>
+          <p:cNvPr id="183" name="Google Shape;183;p20"/>
           <p:cNvSpPr txBox="1"/>
           <p:nvPr/>
         </p:nvSpPr>
         <p:spPr>
           <a:xfrm>
-            <a:off x="3746450" y="4637782"/>
-            <a:ext cx="1905000" cy="335160"/>
+            <a:off x="1047750" y="5144244"/>
+            <a:ext cx="4810125" cy="1097012"/>
           </a:xfrm>
           <a:prstGeom prst="rect">
             <a:avLst/>
@@ -17353,9 +22421,9 @@
           </a:bodyPr>
           <a:lstStyle/>
           <a:p>
-            <a:pPr marL="0" marR="0" lvl="0" indent="0" algn="ctr" rtl="0">
+            <a:pPr marL="0" marR="0" lvl="0" indent="0" algn="l" rtl="0">
               <a:lnSpc>
-                <a:spcPct val="160000"/>
+                <a:spcPct val="159944"/>
               </a:lnSpc>
               <a:spcBef>
                 <a:spcPts val="0"/>
@@ -17366,87 +22434,218 @@
               <a:buNone/>
             </a:pPr>
             <a:r>
-              <a:rPr lang="en-US" sz="1650" b="0" i="0" u="none" strike="noStrike" cap="none">
+              <a:rPr lang="en-US" sz="1800" b="0" i="0" u="none" strike="noStrike" cap="none">
                 <a:solidFill>
-                  <a:srgbClr val="CBD5E1"/>
+                  <a:srgbClr val="E0E0E0"/>
                 </a:solidFill>
-                <a:latin typeface="Lato"/>
-                <a:ea typeface="Lato"/>
-                <a:cs typeface="Lato"/>
-                <a:sym typeface="Lato"/>
+                <a:latin typeface="Noto Sans JP"/>
+                <a:ea typeface="Noto Sans JP"/>
+                <a:cs typeface="Noto Sans JP"/>
+                <a:sym typeface="Noto Sans JP"/>
               </a:rPr>
-              <a:t>問題文の表示</a:t>
+              <a:t>※カメラを拒否した場合や撮影に失敗したチームは、自動で「👤」アイコンになるため進行に支障はありません。</a:t>
             </a:r>
             <a:endParaRPr/>
           </a:p>
         </p:txBody>
       </p:sp>
+      <p:pic>
+        <p:nvPicPr>
+          <p:cNvPr id="184" name="Google Shape;184;p20" descr="image.png"/>
+          <p:cNvPicPr preferRelativeResize="0"/>
+          <p:nvPr/>
+        </p:nvPicPr>
+        <p:blipFill rotWithShape="1">
+          <a:blip r:embed="rId5">
+            <a:alphaModFix/>
+          </a:blip>
+          <a:srcRect/>
+          <a:stretch/>
+        </p:blipFill>
+        <p:spPr>
+          <a:xfrm>
+            <a:off x="6353175" y="2169765"/>
+            <a:ext cx="5248275" cy="3581400"/>
+          </a:xfrm>
+          <a:prstGeom prst="rect">
+            <a:avLst/>
+          </a:prstGeom>
+          <a:noFill/>
+          <a:ln>
+            <a:noFill/>
+          </a:ln>
+        </p:spPr>
+      </p:pic>
+      <p:pic>
+        <p:nvPicPr>
+          <p:cNvPr id="185" name="Google Shape;185;p20" descr="image.png"/>
+          <p:cNvPicPr preferRelativeResize="0"/>
+          <p:nvPr/>
+        </p:nvPicPr>
+        <p:blipFill rotWithShape="1">
+          <a:blip r:embed="rId6">
+            <a:alphaModFix/>
+          </a:blip>
+          <a:srcRect/>
+          <a:stretch/>
+        </p:blipFill>
+        <p:spPr>
+          <a:xfrm>
+            <a:off x="571500" y="2792015"/>
+            <a:ext cx="304800" cy="323850"/>
+          </a:xfrm>
+          <a:prstGeom prst="rect">
+            <a:avLst/>
+          </a:prstGeom>
+          <a:noFill/>
+          <a:ln>
+            <a:noFill/>
+          </a:ln>
+        </p:spPr>
+      </p:pic>
+      <p:pic>
+        <p:nvPicPr>
+          <p:cNvPr id="186" name="Google Shape;186;p20" descr="image.png"/>
+          <p:cNvPicPr preferRelativeResize="0"/>
+          <p:nvPr/>
+        </p:nvPicPr>
+        <p:blipFill rotWithShape="1">
+          <a:blip r:embed="rId7">
+            <a:alphaModFix/>
+          </a:blip>
+          <a:srcRect/>
+          <a:stretch/>
+        </p:blipFill>
+        <p:spPr>
+          <a:xfrm>
+            <a:off x="571500" y="3790057"/>
+            <a:ext cx="266700" cy="323850"/>
+          </a:xfrm>
+          <a:prstGeom prst="rect">
+            <a:avLst/>
+          </a:prstGeom>
+          <a:noFill/>
+          <a:ln>
+            <a:noFill/>
+          </a:ln>
+        </p:spPr>
+      </p:pic>
+      <p:pic>
+        <p:nvPicPr>
+          <p:cNvPr id="187" name="Google Shape;187;p20" descr="image.png"/>
+          <p:cNvPicPr preferRelativeResize="0"/>
+          <p:nvPr/>
+        </p:nvPicPr>
+        <p:blipFill rotWithShape="1">
+          <a:blip r:embed="rId8">
+            <a:alphaModFix/>
+          </a:blip>
+          <a:srcRect/>
+          <a:stretch/>
+        </p:blipFill>
+        <p:spPr>
+          <a:xfrm>
+            <a:off x="571500" y="5153769"/>
+            <a:ext cx="381000" cy="323850"/>
+          </a:xfrm>
+          <a:prstGeom prst="rect">
+            <a:avLst/>
+          </a:prstGeom>
+          <a:noFill/>
+          <a:ln>
+            <a:noFill/>
+          </a:ln>
+        </p:spPr>
+      </p:pic>
+    </p:spTree>
+  </p:cSld>
+  <p:clrMapOvr>
+    <a:masterClrMapping/>
+  </p:clrMapOvr>
+</p:sld>
+</file>
+
+<file path=ppt/slides/slide9.xml><?xml version="1.0" encoding="utf-8"?>
+<p:sld xmlns:a="http://schemas.openxmlformats.org/drawingml/2006/main" xmlns:r="http://schemas.openxmlformats.org/officeDocument/2006/relationships" xmlns:p="http://schemas.openxmlformats.org/presentationml/2006/main">
+  <p:cSld>
+    <p:spTree>
+      <p:nvGrpSpPr>
+        <p:cNvPr id="1" name="Shape 191"/>
+        <p:cNvGrpSpPr/>
+        <p:nvPr/>
+      </p:nvGrpSpPr>
+      <p:grpSpPr>
+        <a:xfrm>
+          <a:off x="0" y="0"/>
+          <a:ext cx="0" cy="0"/>
+          <a:chOff x="0" y="0"/>
+          <a:chExt cx="0" cy="0"/>
+        </a:xfrm>
+      </p:grpSpPr>
+      <p:pic>
+        <p:nvPicPr>
+          <p:cNvPr id="192" name="Google Shape;192;p21" descr="image.png"/>
+          <p:cNvPicPr preferRelativeResize="0"/>
+          <p:nvPr/>
+        </p:nvPicPr>
+        <p:blipFill rotWithShape="1">
+          <a:blip r:embed="rId3">
+            <a:alphaModFix/>
+          </a:blip>
+          <a:srcRect/>
+          <a:stretch/>
+        </p:blipFill>
+        <p:spPr>
+          <a:xfrm>
+            <a:off x="0" y="0"/>
+            <a:ext cx="12192000" cy="6858000"/>
+          </a:xfrm>
+          <a:prstGeom prst="rect">
+            <a:avLst/>
+          </a:prstGeom>
+          <a:noFill/>
+          <a:ln>
+            <a:noFill/>
+          </a:ln>
+        </p:spPr>
+      </p:pic>
+      <p:pic>
+        <p:nvPicPr>
+          <p:cNvPr id="193" name="Google Shape;193;p21" descr="image.png"/>
+          <p:cNvPicPr preferRelativeResize="0"/>
+          <p:nvPr/>
+        </p:nvPicPr>
+        <p:blipFill rotWithShape="1">
+          <a:blip r:embed="rId4">
+            <a:alphaModFix/>
+          </a:blip>
+          <a:srcRect/>
+          <a:stretch/>
+        </p:blipFill>
+        <p:spPr>
+          <a:xfrm>
+            <a:off x="6210300" y="3780680"/>
+            <a:ext cx="5410200" cy="2056804"/>
+          </a:xfrm>
+          <a:prstGeom prst="rect">
+            <a:avLst/>
+          </a:prstGeom>
+          <a:noFill/>
+          <a:ln>
+            <a:noFill/>
+          </a:ln>
+        </p:spPr>
+      </p:pic>
       <p:sp>
         <p:nvSpPr>
-          <p:cNvPr id="192" name="Google Shape;192;p21"/>
-          <p:cNvSpPr/>
-          <p:nvPr/>
-        </p:nvSpPr>
-        <p:spPr>
-          <a:xfrm>
-            <a:off x="7359550" y="3694807"/>
-            <a:ext cx="266700" cy="266700"/>
-          </a:xfrm>
-          <a:prstGeom prst="roundRect">
-            <a:avLst>
-              <a:gd name="adj" fmla="val 50000"/>
-            </a:avLst>
-          </a:prstGeom>
-          <a:solidFill>
-            <a:srgbClr val="10B981"/>
-          </a:solidFill>
-          <a:ln w="38100" cap="flat" cmpd="sng">
-            <a:solidFill>
-              <a:srgbClr val="1E293B"/>
-            </a:solidFill>
-            <a:prstDash val="solid"/>
-            <a:round/>
-            <a:headEnd type="none" w="sm" len="sm"/>
-            <a:tailEnd type="none" w="sm" len="sm"/>
-          </a:ln>
-        </p:spPr>
-        <p:txBody>
-          <a:bodyPr spcFirstLastPara="1" wrap="square" lIns="91425" tIns="45700" rIns="91425" bIns="45700" anchor="ctr" anchorCtr="0">
-            <a:noAutofit/>
-          </a:bodyPr>
-          <a:lstStyle/>
-          <a:p>
-            <a:pPr marL="0" marR="0" lvl="0" indent="0" algn="ctr" rtl="0">
-              <a:spcBef>
-                <a:spcPts val="0"/>
-              </a:spcBef>
-              <a:spcAft>
-                <a:spcPts val="0"/>
-              </a:spcAft>
-              <a:buNone/>
-            </a:pPr>
-            <a:endParaRPr sz="1800" b="0" i="0" u="none" strike="noStrike" cap="none">
-              <a:solidFill>
-                <a:schemeClr val="dk1"/>
-              </a:solidFill>
-              <a:latin typeface="Calibri"/>
-              <a:ea typeface="Calibri"/>
-              <a:cs typeface="Calibri"/>
-              <a:sym typeface="Calibri"/>
-            </a:endParaRPr>
-          </a:p>
-        </p:txBody>
-      </p:sp>
-      <p:sp>
-        <p:nvSpPr>
-          <p:cNvPr id="193" name="Google Shape;193;p21"/>
+          <p:cNvPr id="194" name="Google Shape;194;p21"/>
           <p:cNvSpPr txBox="1"/>
           <p:nvPr/>
         </p:nvSpPr>
         <p:spPr>
           <a:xfrm>
-            <a:off x="6492775" y="4152007"/>
-            <a:ext cx="2000250" cy="276225"/>
+            <a:off x="571500" y="476250"/>
+            <a:ext cx="11601450" cy="586680"/>
           </a:xfrm>
           <a:prstGeom prst="rect">
             <a:avLst/>
@@ -17462,7 +22661,10 @@
           </a:bodyPr>
           <a:lstStyle/>
           <a:p>
-            <a:pPr marL="0" marR="0" lvl="0" indent="0" algn="ctr" rtl="0">
+            <a:pPr marL="0" marR="0" lvl="0" indent="0" algn="l" rtl="0">
+              <a:lnSpc>
+                <a:spcPct val="120000"/>
+              </a:lnSpc>
               <a:spcBef>
                 <a:spcPts val="0"/>
               </a:spcBef>
@@ -17472,69 +22674,16 @@
               <a:buNone/>
             </a:pPr>
             <a:r>
-              <a:rPr lang="en-US" sz="1404" b="1" i="0" u="none" strike="noStrike" cap="none">
+              <a:rPr lang="en-US" sz="3600" b="1" i="0" u="none" strike="noStrike" cap="none">
                 <a:solidFill>
-                  <a:srgbClr val="F8FAFC"/>
+                  <a:srgbClr val="FFFFFF"/>
                 </a:solidFill>
-                <a:latin typeface="Poppins"/>
-                <a:ea typeface="Poppins"/>
-                <a:cs typeface="Poppins"/>
-                <a:sym typeface="Poppins"/>
+                <a:latin typeface="Noto Sans JP"/>
+                <a:ea typeface="Noto Sans JP"/>
+                <a:cs typeface="Noto Sans JP"/>
+                <a:sym typeface="Noto Sans JP"/>
               </a:rPr>
-              <a:t>締切</a:t>
-            </a:r>
-            <a:endParaRPr/>
-          </a:p>
-        </p:txBody>
-      </p:sp>
-      <p:sp>
-        <p:nvSpPr>
-          <p:cNvPr id="194" name="Google Shape;194;p21"/>
-          <p:cNvSpPr txBox="1"/>
-          <p:nvPr/>
-        </p:nvSpPr>
-        <p:spPr>
-          <a:xfrm>
-            <a:off x="6540400" y="4637782"/>
-            <a:ext cx="1905000" cy="335160"/>
-          </a:xfrm>
-          <a:prstGeom prst="rect">
-            <a:avLst/>
-          </a:prstGeom>
-          <a:noFill/>
-          <a:ln>
-            <a:noFill/>
-          </a:ln>
-        </p:spPr>
-        <p:txBody>
-          <a:bodyPr spcFirstLastPara="1" wrap="square" lIns="0" tIns="0" rIns="0" bIns="0" anchor="t" anchorCtr="0">
-            <a:spAutoFit/>
-          </a:bodyPr>
-          <a:lstStyle/>
-          <a:p>
-            <a:pPr marL="0" marR="0" lvl="0" indent="0" algn="ctr" rtl="0">
-              <a:lnSpc>
-                <a:spcPct val="160000"/>
-              </a:lnSpc>
-              <a:spcBef>
-                <a:spcPts val="0"/>
-              </a:spcBef>
-              <a:spcAft>
-                <a:spcPts val="0"/>
-              </a:spcAft>
-              <a:buNone/>
-            </a:pPr>
-            <a:r>
-              <a:rPr lang="en-US" sz="1650" b="0" i="0" u="none" strike="noStrike" cap="none">
-                <a:solidFill>
-                  <a:srgbClr val="CBD5E1"/>
-                </a:solidFill>
-                <a:latin typeface="Lato"/>
-                <a:ea typeface="Lato"/>
-                <a:cs typeface="Lato"/>
-                <a:sym typeface="Lato"/>
-              </a:rPr>
-              <a:t>正解の発表</a:t>
+              <a:t>高度な自動採点システム</a:t>
             </a:r>
             <a:endParaRPr/>
           </a:p>
@@ -17548,25 +22697,17 @@
         </p:nvSpPr>
         <p:spPr>
           <a:xfrm>
-            <a:off x="10153501" y="3694807"/>
-            <a:ext cx="266700" cy="266700"/>
-          </a:xfrm>
-          <a:prstGeom prst="roundRect">
-            <a:avLst>
-              <a:gd name="adj" fmla="val 50000"/>
-            </a:avLst>
+            <a:off x="571500" y="1120080"/>
+            <a:ext cx="11049000" cy="38100"/>
+          </a:xfrm>
+          <a:prstGeom prst="rect">
+            <a:avLst/>
           </a:prstGeom>
           <a:solidFill>
-            <a:srgbClr val="10B981"/>
+            <a:srgbClr val="3498DB"/>
           </a:solidFill>
-          <a:ln w="38100" cap="flat" cmpd="sng">
-            <a:solidFill>
-              <a:srgbClr val="1E293B"/>
-            </a:solidFill>
-            <a:prstDash val="solid"/>
-            <a:round/>
-            <a:headEnd type="none" w="sm" len="sm"/>
-            <a:tailEnd type="none" w="sm" len="sm"/>
+          <a:ln>
+            <a:noFill/>
           </a:ln>
         </p:spPr>
         <p:txBody>
@@ -17604,8 +22745,8 @@
         </p:nvSpPr>
         <p:spPr>
           <a:xfrm>
-            <a:off x="9286726" y="4152007"/>
-            <a:ext cx="2000250" cy="276225"/>
+            <a:off x="571500" y="2917477"/>
+            <a:ext cx="4972050" cy="1524000"/>
           </a:xfrm>
           <a:prstGeom prst="rect">
             <a:avLst/>
@@ -17622,6 +22763,9 @@
           <a:lstStyle/>
           <a:p>
             <a:pPr marL="0" marR="0" lvl="0" indent="0" algn="ctr" rtl="0">
+              <a:lnSpc>
+                <a:spcPct val="100000"/>
+              </a:lnSpc>
               <a:spcBef>
                 <a:spcPts val="0"/>
               </a:spcBef>
@@ -17631,16 +22775,16 @@
               <a:buNone/>
             </a:pPr>
             <a:r>
-              <a:rPr lang="en-US" sz="1404" b="1" i="0" u="none" strike="noStrike" cap="none">
+              <a:rPr lang="en-US" sz="12000" b="0" i="0" u="none" strike="noStrike" cap="none">
                 <a:solidFill>
-                  <a:srgbClr val="F8FAFC"/>
+                  <a:srgbClr val="E74C3C"/>
                 </a:solidFill>
-                <a:latin typeface="Poppins"/>
-                <a:ea typeface="Poppins"/>
-                <a:cs typeface="Poppins"/>
-                <a:sym typeface="Poppins"/>
+                <a:latin typeface="Noto Sans JP"/>
+                <a:ea typeface="Noto Sans JP"/>
+                <a:cs typeface="Noto Sans JP"/>
+                <a:sym typeface="Noto Sans JP"/>
               </a:rPr>
-              <a:t>発表</a:t>
+              <a:t>60秒</a:t>
             </a:r>
             <a:endParaRPr/>
           </a:p>
@@ -17654,8 +22798,8 @@
         </p:nvSpPr>
         <p:spPr>
           <a:xfrm>
-            <a:off x="9334351" y="4637782"/>
-            <a:ext cx="1905000" cy="335160"/>
+            <a:off x="571500" y="4584352"/>
+            <a:ext cx="4972050" cy="419100"/>
           </a:xfrm>
           <a:prstGeom prst="rect">
             <a:avLst/>
@@ -17672,9 +22816,6 @@
           <a:lstStyle/>
           <a:p>
             <a:pPr marL="0" marR="0" lvl="0" indent="0" algn="ctr" rtl="0">
-              <a:lnSpc>
-                <a:spcPct val="160000"/>
-              </a:lnSpc>
               <a:spcBef>
                 <a:spcPts val="0"/>
               </a:spcBef>
@@ -17684,16 +22825,16 @@
               <a:buNone/>
             </a:pPr>
             <a:r>
-              <a:rPr lang="en-US" sz="1650" b="0" i="0" u="none" strike="noStrike" cap="none">
+              <a:rPr lang="en-US" sz="2400" b="1" i="0" u="none" strike="noStrike" cap="none">
                 <a:solidFill>
-                  <a:srgbClr val="CBD5E1"/>
+                  <a:srgbClr val="F1C40F"/>
                 </a:solidFill>
-                <a:latin typeface="Lato"/>
-                <a:ea typeface="Lato"/>
-                <a:cs typeface="Lato"/>
-                <a:sym typeface="Lato"/>
+                <a:latin typeface="Noto Sans JP"/>
+                <a:ea typeface="Noto Sans JP"/>
+                <a:cs typeface="Noto Sans JP"/>
+                <a:sym typeface="Noto Sans JP"/>
               </a:rPr>
-              <a:t>最終ランク表示</a:t>
+              <a:t>制限時間＆最大ボーナス</a:t>
             </a:r>
             <a:endParaRPr/>
           </a:p>
@@ -17707,8 +22848,8 @@
         </p:nvSpPr>
         <p:spPr>
           <a:xfrm>
-            <a:off x="800100" y="571500"/>
-            <a:ext cx="11361420" cy="685800"/>
+            <a:off x="6210300" y="2083444"/>
+            <a:ext cx="5680710" cy="466725"/>
           </a:xfrm>
           <a:prstGeom prst="rect">
             <a:avLst/>
@@ -17734,16 +22875,16 @@
               <a:buNone/>
             </a:pPr>
             <a:r>
-              <a:rPr lang="en-US" sz="3600" b="0" i="0" u="none" strike="noStrike" cap="none">
+              <a:rPr lang="en-US" sz="2700" b="1" i="0" u="none" strike="noStrike" cap="none">
                 <a:solidFill>
-                  <a:srgbClr val="F8FAFC"/>
+                  <a:srgbClr val="3498DB"/>
                 </a:solidFill>
-                <a:latin typeface="Poppins SemiBold"/>
-                <a:ea typeface="Poppins SemiBold"/>
-                <a:cs typeface="Poppins SemiBold"/>
-                <a:sym typeface="Poppins SemiBold"/>
+                <a:latin typeface="Noto Sans JP"/>
+                <a:ea typeface="Noto Sans JP"/>
+                <a:cs typeface="Noto Sans JP"/>
+                <a:sym typeface="Noto Sans JP"/>
               </a:rPr>
-              <a:t>運営コントロールのフロー</a:t>
+              <a:t>正確無比なタイム計測</a:t>
             </a:r>
             <a:endParaRPr/>
           </a:p>
@@ -17752,31 +22893,32 @@
       <p:sp>
         <p:nvSpPr>
           <p:cNvPr id="199" name="Google Shape;199;p21"/>
-          <p:cNvSpPr/>
+          <p:cNvSpPr txBox="1"/>
           <p:nvPr/>
         </p:nvSpPr>
         <p:spPr>
           <a:xfrm>
-            <a:off x="571500" y="571500"/>
-            <a:ext cx="76200" cy="685800"/>
-          </a:xfrm>
-          <a:prstGeom prst="rect">
-            <a:avLst/>
-          </a:prstGeom>
-          <a:solidFill>
-            <a:srgbClr val="10B981"/>
-          </a:solidFill>
+            <a:off x="6210300" y="2797819"/>
+            <a:ext cx="5410200" cy="792360"/>
+          </a:xfrm>
+          <a:prstGeom prst="rect">
+            <a:avLst/>
+          </a:prstGeom>
+          <a:noFill/>
           <a:ln>
             <a:noFill/>
           </a:ln>
         </p:spPr>
         <p:txBody>
-          <a:bodyPr spcFirstLastPara="1" wrap="square" lIns="91425" tIns="45700" rIns="91425" bIns="45700" anchor="ctr" anchorCtr="0">
-            <a:noAutofit/>
+          <a:bodyPr spcFirstLastPara="1" wrap="square" lIns="0" tIns="0" rIns="0" bIns="0" anchor="t" anchorCtr="0">
+            <a:spAutoFit/>
           </a:bodyPr>
           <a:lstStyle/>
           <a:p>
-            <a:pPr marL="0" marR="0" lvl="0" indent="0" algn="ctr" rtl="0">
+            <a:pPr marL="0" marR="0" lvl="0" indent="0" algn="l" rtl="0">
+              <a:lnSpc>
+                <a:spcPct val="160000"/>
+              </a:lnSpc>
               <a:spcBef>
                 <a:spcPts val="0"/>
               </a:spcBef>
@@ -17785,15 +22927,143 @@
               </a:spcAft>
               <a:buNone/>
             </a:pPr>
-            <a:endParaRPr sz="1800" b="0" i="0" u="none" strike="noStrike" cap="none">
-              <a:solidFill>
-                <a:schemeClr val="dk1"/>
-              </a:solidFill>
-              <a:latin typeface="Calibri"/>
-              <a:ea typeface="Calibri"/>
-              <a:cs typeface="Calibri"/>
-              <a:sym typeface="Calibri"/>
-            </a:endParaRPr>
+            <a:r>
+              <a:rPr lang="en-US" sz="1950" b="0" i="0" u="none" strike="noStrike" cap="none">
+                <a:solidFill>
+                  <a:srgbClr val="E0E0E0"/>
+                </a:solidFill>
+                <a:latin typeface="Noto Sans JP"/>
+                <a:ea typeface="Noto Sans JP"/>
+                <a:cs typeface="Noto Sans JP"/>
+                <a:sym typeface="Noto Sans JP"/>
+              </a:rPr>
+              <a:t>早く回答するほど</a:t>
+            </a:r>
+            <a:r>
+              <a:rPr lang="en-US" sz="1950" b="1" i="0" u="none" strike="noStrike" cap="none">
+                <a:solidFill>
+                  <a:srgbClr val="F1C40F"/>
+                </a:solidFill>
+                <a:latin typeface="Noto Sans JP"/>
+                <a:ea typeface="Noto Sans JP"/>
+                <a:cs typeface="Noto Sans JP"/>
+                <a:sym typeface="Noto Sans JP"/>
+              </a:rPr>
+              <a:t>「残り時間(秒) × 1点」</a:t>
+            </a:r>
+            <a:r>
+              <a:rPr lang="en-US" sz="1950" b="0" i="0" u="none" strike="noStrike" cap="none">
+                <a:solidFill>
+                  <a:srgbClr val="E0E0E0"/>
+                </a:solidFill>
+                <a:latin typeface="Noto Sans JP"/>
+                <a:ea typeface="Noto Sans JP"/>
+                <a:cs typeface="Noto Sans JP"/>
+                <a:sym typeface="Noto Sans JP"/>
+              </a:rPr>
+              <a:t>のスピードボーナスが加算されます。</a:t>
+            </a:r>
+            <a:endParaRPr/>
+          </a:p>
+        </p:txBody>
+      </p:sp>
+      <p:sp>
+        <p:nvSpPr>
+          <p:cNvPr id="200" name="Google Shape;200;p21"/>
+          <p:cNvSpPr txBox="1"/>
+          <p:nvPr/>
+        </p:nvSpPr>
+        <p:spPr>
+          <a:xfrm>
+            <a:off x="6389126" y="3882692"/>
+            <a:ext cx="5114616" cy="1866217"/>
+          </a:xfrm>
+          <a:prstGeom prst="rect">
+            <a:avLst/>
+          </a:prstGeom>
+          <a:noFill/>
+          <a:ln>
+            <a:noFill/>
+          </a:ln>
+        </p:spPr>
+        <p:txBody>
+          <a:bodyPr spcFirstLastPara="1" wrap="square" lIns="0" tIns="0" rIns="0" bIns="0" anchor="t" anchorCtr="0">
+            <a:spAutoFit/>
+          </a:bodyPr>
+          <a:lstStyle/>
+          <a:p>
+            <a:pPr marL="0" marR="0" lvl="0" indent="0" algn="l" rtl="0">
+              <a:lnSpc>
+                <a:spcPct val="146666"/>
+              </a:lnSpc>
+              <a:spcBef>
+                <a:spcPts val="0"/>
+              </a:spcBef>
+              <a:spcAft>
+                <a:spcPts val="0"/>
+              </a:spcAft>
+              <a:buNone/>
+            </a:pPr>
+            <a:r>
+              <a:rPr lang="en-US" sz="1650" b="1" i="0" u="none" strike="noStrike" cap="none" dirty="0">
+                <a:solidFill>
+                  <a:srgbClr val="E0E0E0"/>
+                </a:solidFill>
+                <a:latin typeface="Noto Sans JP"/>
+                <a:ea typeface="Noto Sans JP"/>
+                <a:cs typeface="Noto Sans JP"/>
+                <a:sym typeface="Noto Sans JP"/>
+              </a:rPr>
+              <a:t>★</a:t>
+            </a:r>
+            <a:r>
+              <a:rPr lang="en-US" sz="1650" b="1" i="0" u="none" strike="noStrike" cap="none" dirty="0" err="1">
+                <a:solidFill>
+                  <a:srgbClr val="E0E0E0"/>
+                </a:solidFill>
+                <a:latin typeface="Noto Sans JP"/>
+                <a:ea typeface="Noto Sans JP"/>
+                <a:cs typeface="Noto Sans JP"/>
+                <a:sym typeface="Noto Sans JP"/>
+              </a:rPr>
+              <a:t>通信遅延に強い「スマホ自己計測</a:t>
+            </a:r>
+            <a:r>
+              <a:rPr lang="en-US" sz="1650" b="1" i="0" u="none" strike="noStrike" cap="none" dirty="0">
+                <a:solidFill>
+                  <a:srgbClr val="E0E0E0"/>
+                </a:solidFill>
+                <a:latin typeface="Noto Sans JP"/>
+                <a:ea typeface="Noto Sans JP"/>
+                <a:cs typeface="Noto Sans JP"/>
+                <a:sym typeface="Noto Sans JP"/>
+              </a:rPr>
+              <a:t>」</a:t>
+            </a:r>
+            <a:br>
+              <a:rPr lang="en-US" sz="1800" b="0" i="0" u="none" strike="noStrike" cap="none" dirty="0">
+                <a:solidFill>
+                  <a:schemeClr val="dk1"/>
+                </a:solidFill>
+                <a:latin typeface="Calibri"/>
+                <a:ea typeface="Calibri"/>
+                <a:cs typeface="Calibri"/>
+                <a:sym typeface="Calibri"/>
+              </a:rPr>
+            </a:br>
+            <a:r>
+              <a:rPr lang="en-US" sz="1650" b="0" i="0" u="none" strike="noStrike" cap="none" dirty="0">
+                <a:solidFill>
+                  <a:srgbClr val="E0E0E0"/>
+                </a:solidFill>
+                <a:latin typeface="Noto Sans JP"/>
+                <a:ea typeface="Noto Sans JP"/>
+                <a:cs typeface="Noto Sans JP"/>
+                <a:sym typeface="Noto Sans JP"/>
+              </a:rPr>
+              <a:t> 「スマホに問題が出た瞬間」から「ボタンを押した瞬間」までの秒数を、スマホ自身がカウントして送ります。会場のWi-Fiが遅くても、不公平な採点ズレは起きません。</a:t>
+            </a:r>
+            <a:endParaRPr dirty="0"/>
           </a:p>
         </p:txBody>
       </p:sp>

--- a/Manual.pptx
+++ b/Manual.pptx
@@ -12717,7 +12717,7 @@
         <p:spPr>
           <a:xfrm>
             <a:off x="571500" y="2232719"/>
-            <a:ext cx="11601450" cy="1508521"/>
+            <a:ext cx="11601450" cy="1828193"/>
           </a:xfrm>
           <a:prstGeom prst="rect">
             <a:avLst/>
@@ -12746,7 +12746,7 @@
               <a:buNone/>
             </a:pPr>
             <a:r>
-              <a:rPr lang="en-US" sz="5400" b="1" i="0" u="none" strike="noStrike" cap="none">
+              <a:rPr lang="en-US" sz="5400" b="1" i="0" u="none" strike="noStrike" cap="none" dirty="0">
                 <a:solidFill>
                   <a:srgbClr val="10B981"/>
                 </a:solidFill>
@@ -12755,10 +12755,10 @@
                 <a:cs typeface="Poppins"/>
                 <a:sym typeface="Poppins"/>
               </a:rPr>
-              <a:t>Speed Quiz 26</a:t>
+              <a:t>Speed Quiz</a:t>
             </a:r>
             <a:br>
-              <a:rPr lang="en-US" sz="1800" b="0" i="0" u="none" strike="noStrike" cap="none">
+              <a:rPr lang="en-US" sz="1800" b="0" i="0" u="none" strike="noStrike" cap="none" dirty="0">
                 <a:solidFill>
                   <a:schemeClr val="dk1"/>
                 </a:solidFill>
@@ -12769,7 +12769,7 @@
               </a:rPr>
             </a:br>
             <a:r>
-              <a:rPr lang="en-US" sz="5400" b="1" i="0" u="none" strike="noStrike" cap="none">
+              <a:rPr lang="en-US" sz="5400" b="1" i="0" u="none" strike="noStrike" cap="none" dirty="0">
                 <a:solidFill>
                   <a:srgbClr val="10B981"/>
                 </a:solidFill>
@@ -12780,7 +12780,7 @@
               </a:rPr>
               <a:t> Administrator Manual</a:t>
             </a:r>
-            <a:endParaRPr/>
+            <a:endParaRPr dirty="0"/>
           </a:p>
         </p:txBody>
       </p:sp>
@@ -15978,8 +15978,8 @@
         </p:nvSpPr>
         <p:spPr>
           <a:xfrm>
-            <a:off x="828675" y="4202757"/>
-            <a:ext cx="4676775" cy="2010965"/>
+            <a:off x="737419" y="4202757"/>
+            <a:ext cx="5001869" cy="1526893"/>
           </a:xfrm>
           <a:prstGeom prst="rect">
             <a:avLst/>
@@ -16008,7 +16008,7 @@
               <a:buNone/>
             </a:pPr>
             <a:r>
-              <a:rPr lang="en-US" sz="1650" b="0" i="0" u="none" strike="noStrike" cap="none">
+              <a:rPr lang="en-US" sz="1650" b="0" i="0" u="none" strike="noStrike" cap="none" dirty="0">
                 <a:solidFill>
                   <a:srgbClr val="E0E0E0"/>
                 </a:solidFill>
@@ -16017,10 +16017,10 @@
                 <a:cs typeface="Noto Sans JP"/>
                 <a:sym typeface="Noto Sans JP"/>
               </a:rPr>
-              <a:t>・Windows: 「Windowsキー + P」を押し、</a:t>
+              <a:t>・Windows: 「</a:t>
             </a:r>
             <a:r>
-              <a:rPr lang="en-US" sz="1650" b="1" i="0" u="none" strike="noStrike" cap="none">
+              <a:rPr lang="en-US" sz="1650" b="0" i="0" u="none" strike="noStrike" cap="none" dirty="0" err="1">
                 <a:solidFill>
                   <a:srgbClr val="E0E0E0"/>
                 </a:solidFill>
@@ -16029,10 +16029,10 @@
                 <a:cs typeface="Noto Sans JP"/>
                 <a:sym typeface="Noto Sans JP"/>
               </a:rPr>
-              <a:t>「拡張」</a:t>
+              <a:t>Windowsキ</a:t>
             </a:r>
             <a:r>
-              <a:rPr lang="en-US" sz="1650" b="0" i="0" u="none" strike="noStrike" cap="none">
+              <a:rPr lang="en-US" sz="1650" b="0" i="0" u="none" strike="noStrike" cap="none" dirty="0">
                 <a:solidFill>
                   <a:srgbClr val="E0E0E0"/>
                 </a:solidFill>
@@ -16041,10 +16041,82 @@
                 <a:cs typeface="Noto Sans JP"/>
                 <a:sym typeface="Noto Sans JP"/>
               </a:rPr>
-              <a:t>を選択。</a:t>
+              <a:t>ー + </a:t>
+            </a:r>
+            <a:r>
+              <a:rPr lang="en-US" sz="1650" b="0" i="0" u="none" strike="noStrike" cap="none" dirty="0" err="1">
+                <a:solidFill>
+                  <a:srgbClr val="E0E0E0"/>
+                </a:solidFill>
+                <a:latin typeface="Noto Sans JP"/>
+                <a:ea typeface="Noto Sans JP"/>
+                <a:cs typeface="Noto Sans JP"/>
+                <a:sym typeface="Noto Sans JP"/>
+              </a:rPr>
+              <a:t>P」を押し</a:t>
+            </a:r>
+            <a:r>
+              <a:rPr lang="en-US" sz="1650" b="0" i="0" u="none" strike="noStrike" cap="none" dirty="0">
+                <a:solidFill>
+                  <a:srgbClr val="E0E0E0"/>
+                </a:solidFill>
+                <a:latin typeface="Noto Sans JP"/>
+                <a:ea typeface="Noto Sans JP"/>
+                <a:cs typeface="Noto Sans JP"/>
+                <a:sym typeface="Noto Sans JP"/>
+              </a:rPr>
+              <a:t>、</a:t>
+            </a:r>
+            <a:r>
+              <a:rPr lang="en-US" sz="1650" b="1" i="0" u="none" strike="noStrike" cap="none" dirty="0">
+                <a:solidFill>
+                  <a:srgbClr val="E0E0E0"/>
+                </a:solidFill>
+                <a:latin typeface="Noto Sans JP"/>
+                <a:ea typeface="Noto Sans JP"/>
+                <a:cs typeface="Noto Sans JP"/>
+                <a:sym typeface="Noto Sans JP"/>
+              </a:rPr>
+              <a:t>「</a:t>
+            </a:r>
+            <a:r>
+              <a:rPr lang="en-US" sz="1650" b="1" i="0" u="none" strike="noStrike" cap="none" dirty="0" err="1">
+                <a:solidFill>
+                  <a:srgbClr val="E0E0E0"/>
+                </a:solidFill>
+                <a:latin typeface="Noto Sans JP"/>
+                <a:ea typeface="Noto Sans JP"/>
+                <a:cs typeface="Noto Sans JP"/>
+                <a:sym typeface="Noto Sans JP"/>
+              </a:rPr>
+              <a:t>拡張」</a:t>
+            </a:r>
+            <a:r>
+              <a:rPr lang="en-US" sz="1650" b="0" i="0" u="none" strike="noStrike" cap="none" dirty="0" err="1">
+                <a:solidFill>
+                  <a:srgbClr val="E0E0E0"/>
+                </a:solidFill>
+                <a:latin typeface="Noto Sans JP"/>
+                <a:ea typeface="Noto Sans JP"/>
+                <a:cs typeface="Noto Sans JP"/>
+                <a:sym typeface="Noto Sans JP"/>
+              </a:rPr>
+              <a:t>を選択</a:t>
+            </a:r>
+            <a:r>
+              <a:rPr lang="en-US" sz="1650" b="0" i="0" u="none" strike="noStrike" cap="none" dirty="0">
+                <a:solidFill>
+                  <a:srgbClr val="E0E0E0"/>
+                </a:solidFill>
+                <a:latin typeface="Noto Sans JP"/>
+                <a:ea typeface="Noto Sans JP"/>
+                <a:cs typeface="Noto Sans JP"/>
+                <a:sym typeface="Noto Sans JP"/>
+              </a:rPr>
+              <a:t>。</a:t>
             </a:r>
             <a:br>
-              <a:rPr lang="en-US" sz="1800" b="0" i="0" u="none" strike="noStrike" cap="none">
+              <a:rPr lang="en-US" sz="1800" b="0" i="0" u="none" strike="noStrike" cap="none" dirty="0">
                 <a:solidFill>
                   <a:schemeClr val="dk1"/>
                 </a:solidFill>
@@ -16055,7 +16127,7 @@
               </a:rPr>
             </a:br>
             <a:br>
-              <a:rPr lang="en-US" sz="1800" b="0" i="0" u="none" strike="noStrike" cap="none">
+              <a:rPr lang="en-US" sz="1800" b="0" i="0" u="none" strike="noStrike" cap="none" dirty="0">
                 <a:solidFill>
                   <a:schemeClr val="dk1"/>
                 </a:solidFill>
@@ -16066,7 +16138,7 @@
               </a:rPr>
             </a:br>
             <a:r>
-              <a:rPr lang="en-US" sz="1650" b="0" i="0" u="none" strike="noStrike" cap="none">
+              <a:rPr lang="en-US" sz="1650" b="0" i="0" u="none" strike="noStrike" cap="none" dirty="0">
                 <a:solidFill>
                   <a:srgbClr val="E0E0E0"/>
                 </a:solidFill>
@@ -16075,10 +16147,46 @@
                 <a:cs typeface="Noto Sans JP"/>
                 <a:sym typeface="Noto Sans JP"/>
               </a:rPr>
-              <a:t> ・Mac: 「システム設定」＞「ディスプレイ」から、プロジェクターを</a:t>
+              <a:t> ・Mac: 「</a:t>
             </a:r>
             <a:r>
-              <a:rPr lang="en-US" sz="1650" b="1" i="0" u="none" strike="noStrike" cap="none">
+              <a:rPr lang="en-US" sz="1650" b="0" i="0" u="none" strike="noStrike" cap="none" dirty="0" err="1">
+                <a:solidFill>
+                  <a:srgbClr val="E0E0E0"/>
+                </a:solidFill>
+                <a:latin typeface="Noto Sans JP"/>
+                <a:ea typeface="Noto Sans JP"/>
+                <a:cs typeface="Noto Sans JP"/>
+                <a:sym typeface="Noto Sans JP"/>
+              </a:rPr>
+              <a:t>システム設定</a:t>
+            </a:r>
+            <a:r>
+              <a:rPr lang="en-US" sz="1650" b="0" i="0" u="none" strike="noStrike" cap="none" dirty="0">
+                <a:solidFill>
+                  <a:srgbClr val="E0E0E0"/>
+                </a:solidFill>
+                <a:latin typeface="Noto Sans JP"/>
+                <a:ea typeface="Noto Sans JP"/>
+                <a:cs typeface="Noto Sans JP"/>
+                <a:sym typeface="Noto Sans JP"/>
+              </a:rPr>
+              <a:t>」＞「</a:t>
+            </a:r>
+            <a:r>
+              <a:rPr lang="en-US" sz="1650" b="0" i="0" u="none" strike="noStrike" cap="none" dirty="0" err="1">
+                <a:solidFill>
+                  <a:srgbClr val="E0E0E0"/>
+                </a:solidFill>
+                <a:latin typeface="Noto Sans JP"/>
+                <a:ea typeface="Noto Sans JP"/>
+                <a:cs typeface="Noto Sans JP"/>
+                <a:sym typeface="Noto Sans JP"/>
+              </a:rPr>
+              <a:t>ディスプレイ」から、プロジェクターを</a:t>
+            </a:r>
+            <a:r>
+              <a:rPr lang="en-US" sz="1650" b="1" i="0" u="none" strike="noStrike" cap="none" dirty="0" err="1">
                 <a:solidFill>
                   <a:srgbClr val="E0E0E0"/>
                 </a:solidFill>
@@ -16090,7 +16198,7 @@
               <a:t>「拡張ディスプレイ」</a:t>
             </a:r>
             <a:r>
-              <a:rPr lang="en-US" sz="1650" b="0" i="0" u="none" strike="noStrike" cap="none">
+              <a:rPr lang="en-US" sz="1650" b="0" i="0" u="none" strike="noStrike" cap="none" dirty="0" err="1">
                 <a:solidFill>
                   <a:srgbClr val="E0E0E0"/>
                 </a:solidFill>
@@ -16099,9 +16207,21 @@
                 <a:cs typeface="Noto Sans JP"/>
                 <a:sym typeface="Noto Sans JP"/>
               </a:rPr>
-              <a:t>に設定。</a:t>
+              <a:t>に設定</a:t>
             </a:r>
-            <a:endParaRPr/>
+            <a:r>
+              <a:rPr lang="en-US" sz="1650" b="0" i="0" u="none" strike="noStrike" cap="none" dirty="0">
+                <a:solidFill>
+                  <a:srgbClr val="E0E0E0"/>
+                </a:solidFill>
+                <a:latin typeface="Noto Sans JP"/>
+                <a:ea typeface="Noto Sans JP"/>
+                <a:cs typeface="Noto Sans JP"/>
+                <a:sym typeface="Noto Sans JP"/>
+              </a:rPr>
+              <a:t>。</a:t>
+            </a:r>
+            <a:endParaRPr dirty="0"/>
           </a:p>
         </p:txBody>
       </p:sp>
@@ -21367,7 +21487,7 @@
         </p:nvSpPr>
         <p:spPr>
           <a:xfrm>
-            <a:off x="571500" y="-327124"/>
+            <a:off x="726821" y="391121"/>
             <a:ext cx="11601450" cy="586680"/>
           </a:xfrm>
           <a:prstGeom prst="rect">
@@ -21397,7 +21517,7 @@
               <a:buNone/>
             </a:pPr>
             <a:r>
-              <a:rPr lang="en-US" sz="3600" b="1" i="0" u="none" strike="noStrike" cap="none">
+              <a:rPr lang="en-US" sz="3600" b="1" i="0" u="none" strike="noStrike" cap="none" dirty="0" err="1">
                 <a:solidFill>
                   <a:srgbClr val="FFFFFF"/>
                 </a:solidFill>
@@ -21406,9 +21526,21 @@
                 <a:cs typeface="Noto Sans JP"/>
                 <a:sym typeface="Noto Sans JP"/>
               </a:rPr>
-              <a:t>事前準備（セットアップ）</a:t>
+              <a:t>事前準備（セットアップ</a:t>
             </a:r>
-            <a:endParaRPr/>
+            <a:r>
+              <a:rPr lang="en-US" sz="3600" b="1" i="0" u="none" strike="noStrike" cap="none" dirty="0">
+                <a:solidFill>
+                  <a:srgbClr val="FFFFFF"/>
+                </a:solidFill>
+                <a:latin typeface="Noto Sans JP"/>
+                <a:ea typeface="Noto Sans JP"/>
+                <a:cs typeface="Noto Sans JP"/>
+                <a:sym typeface="Noto Sans JP"/>
+              </a:rPr>
+              <a:t>）</a:t>
+            </a:r>
+            <a:endParaRPr dirty="0"/>
           </a:p>
         </p:txBody>
       </p:sp>
@@ -21420,7 +21552,7 @@
         </p:nvSpPr>
         <p:spPr>
           <a:xfrm>
-            <a:off x="571500" y="316706"/>
+            <a:off x="571500" y="1091186"/>
             <a:ext cx="11049000" cy="38100"/>
           </a:xfrm>
           <a:prstGeom prst="rect">

--- a/Manual.pptx
+++ b/Manual.pptx
@@ -5,7 +5,7 @@
     <p:sldMasterId id="2147483659" r:id="rId1"/>
   </p:sldMasterIdLst>
   <p:notesMasterIdLst>
-    <p:notesMasterId r:id="rId15"/>
+    <p:notesMasterId r:id="rId14"/>
   </p:notesMasterIdLst>
   <p:sldIdLst>
     <p:sldId id="256" r:id="rId2"/>
@@ -20,24 +20,23 @@
     <p:sldId id="265" r:id="rId11"/>
     <p:sldId id="266" r:id="rId12"/>
     <p:sldId id="267" r:id="rId13"/>
-    <p:sldId id="268" r:id="rId14"/>
   </p:sldIdLst>
   <p:sldSz cx="12192000" cy="6858000"/>
   <p:notesSz cx="6858000" cy="9144000"/>
   <p:embeddedFontLst>
     <p:embeddedFont>
       <p:font typeface="Poppins" panose="00000500000000000000" pitchFamily="2" charset="0"/>
-      <p:regular r:id="rId16"/>
-      <p:bold r:id="rId17"/>
-      <p:italic r:id="rId18"/>
-      <p:boldItalic r:id="rId19"/>
+      <p:regular r:id="rId15"/>
+      <p:bold r:id="rId16"/>
+      <p:italic r:id="rId17"/>
+      <p:boldItalic r:id="rId18"/>
     </p:embeddedFont>
     <p:embeddedFont>
       <p:font typeface="Urbanist" panose="020B0600070205080204" charset="0"/>
-      <p:regular r:id="rId20"/>
-      <p:bold r:id="rId21"/>
-      <p:italic r:id="rId22"/>
-      <p:boldItalic r:id="rId23"/>
+      <p:regular r:id="rId19"/>
+      <p:bold r:id="rId20"/>
+      <p:italic r:id="rId21"/>
+      <p:boldItalic r:id="rId22"/>
     </p:embeddedFont>
   </p:embeddedFontLst>
   <p:defaultTextStyle>
@@ -1004,8 +1003,8 @@
         </p:nvSpPr>
         <p:spPr>
           <a:xfrm>
-            <a:off x="1143225" y="685800"/>
-            <a:ext cx="4572225" cy="3429000"/>
+            <a:off x="381000" y="685800"/>
+            <a:ext cx="6096000" cy="3429000"/>
           </a:xfrm>
           <a:custGeom>
             <a:avLst/>
@@ -1108,112 +1107,8 @@
         </p:nvSpPr>
         <p:spPr>
           <a:xfrm>
-            <a:off x="1143225" y="685800"/>
-            <a:ext cx="4572225" cy="3429000"/>
-          </a:xfrm>
-          <a:custGeom>
-            <a:avLst/>
-            <a:gdLst/>
-            <a:ahLst/>
-            <a:cxnLst/>
-            <a:rect l="l" t="t" r="r" b="b"/>
-            <a:pathLst>
-              <a:path w="120000" h="120000" extrusionOk="0">
-                <a:moveTo>
-                  <a:pt x="0" y="0"/>
-                </a:moveTo>
-                <a:lnTo>
-                  <a:pt x="120000" y="0"/>
-                </a:lnTo>
-                <a:lnTo>
-                  <a:pt x="120000" y="120000"/>
-                </a:lnTo>
-                <a:lnTo>
-                  <a:pt x="0" y="120000"/>
-                </a:lnTo>
-                <a:close/>
-              </a:path>
-            </a:pathLst>
-          </a:custGeom>
-        </p:spPr>
-      </p:sp>
-    </p:spTree>
-  </p:cSld>
-  <p:clrMapOvr>
-    <a:masterClrMapping/>
-  </p:clrMapOvr>
-</p:notes>
-</file>
-
-<file path=ppt/notesSlides/notesSlide13.xml><?xml version="1.0" encoding="utf-8"?>
-<p:notes xmlns:a="http://schemas.openxmlformats.org/drawingml/2006/main" xmlns:r="http://schemas.openxmlformats.org/officeDocument/2006/relationships" xmlns:p="http://schemas.openxmlformats.org/presentationml/2006/main" showMasterSp="0" showMasterPhAnim="0">
-  <p:cSld>
-    <p:spTree>
-      <p:nvGrpSpPr>
-        <p:cNvPr id="1" name="Shape 267"/>
-        <p:cNvGrpSpPr/>
-        <p:nvPr/>
-      </p:nvGrpSpPr>
-      <p:grpSpPr>
-        <a:xfrm>
-          <a:off x="0" y="0"/>
-          <a:ext cx="0" cy="0"/>
-          <a:chOff x="0" y="0"/>
-          <a:chExt cx="0" cy="0"/>
-        </a:xfrm>
-      </p:grpSpPr>
-      <p:sp>
-        <p:nvSpPr>
-          <p:cNvPr id="268" name="Google Shape;268;p13:notes"/>
-          <p:cNvSpPr txBox="1">
-            <a:spLocks noGrp="1"/>
-          </p:cNvSpPr>
-          <p:nvPr>
-            <p:ph type="body" idx="1"/>
-          </p:nvPr>
-        </p:nvSpPr>
-        <p:spPr>
-          <a:xfrm>
-            <a:off x="685800" y="4343400"/>
-            <a:ext cx="5486400" cy="4114800"/>
-          </a:xfrm>
-          <a:prstGeom prst="rect">
-            <a:avLst/>
-          </a:prstGeom>
-        </p:spPr>
-        <p:txBody>
-          <a:bodyPr spcFirstLastPara="1" wrap="square" lIns="91425" tIns="91425" rIns="91425" bIns="91425" anchor="t" anchorCtr="0">
-            <a:noAutofit/>
-          </a:bodyPr>
-          <a:lstStyle/>
-          <a:p>
-            <a:pPr marL="0" lvl="0" indent="0" algn="l" rtl="0">
-              <a:spcBef>
-                <a:spcPts val="0"/>
-              </a:spcBef>
-              <a:spcAft>
-                <a:spcPts val="0"/>
-              </a:spcAft>
-              <a:buNone/>
-            </a:pPr>
-            <a:endParaRPr/>
-          </a:p>
-        </p:txBody>
-      </p:sp>
-      <p:sp>
-        <p:nvSpPr>
-          <p:cNvPr id="269" name="Google Shape;269;p13:notes"/>
-          <p:cNvSpPr>
-            <a:spLocks noGrp="1" noRot="1" noChangeAspect="1"/>
-          </p:cNvSpPr>
-          <p:nvPr>
-            <p:ph type="sldImg" idx="2"/>
-          </p:nvPr>
-        </p:nvSpPr>
-        <p:spPr>
-          <a:xfrm>
-            <a:off x="1143225" y="685800"/>
-            <a:ext cx="4572225" cy="3429000"/>
+            <a:off x="381000" y="685800"/>
+            <a:ext cx="6096000" cy="3429000"/>
           </a:xfrm>
           <a:custGeom>
             <a:avLst/>
@@ -1836,8 +1731,8 @@
         </p:nvSpPr>
         <p:spPr>
           <a:xfrm>
-            <a:off x="1143225" y="685800"/>
-            <a:ext cx="4572225" cy="3429000"/>
+            <a:off x="381000" y="685800"/>
+            <a:ext cx="6096000" cy="3429000"/>
           </a:xfrm>
           <a:custGeom>
             <a:avLst/>
@@ -1940,8 +1835,8 @@
         </p:nvSpPr>
         <p:spPr>
           <a:xfrm>
-            <a:off x="1143225" y="685800"/>
-            <a:ext cx="4572225" cy="3429000"/>
+            <a:off x="381000" y="685800"/>
+            <a:ext cx="6096000" cy="3429000"/>
           </a:xfrm>
           <a:custGeom>
             <a:avLst/>
@@ -2044,8 +1939,8 @@
         </p:nvSpPr>
         <p:spPr>
           <a:xfrm>
-            <a:off x="1143225" y="685800"/>
-            <a:ext cx="4572225" cy="3429000"/>
+            <a:off x="381000" y="685800"/>
+            <a:ext cx="6096000" cy="3429000"/>
           </a:xfrm>
           <a:custGeom>
             <a:avLst/>
@@ -12679,7 +12574,7 @@
         </p:nvGraphicFramePr>
         <p:xfrm>
           <a:off x="571500" y="1518195"/>
-          <a:ext cx="3000000" cy="3000000"/>
+          <a:ext cx="11048975" cy="3038500"/>
         </p:xfrm>
         <a:graphic>
           <a:graphicData uri="http://schemas.openxmlformats.org/drawingml/2006/table">
@@ -15027,14 +14922,14 @@
       </p:sp>
       <p:sp>
         <p:nvSpPr>
-          <p:cNvPr id="264" name="Google Shape;264;p24"/>
+          <p:cNvPr id="265" name="Google Shape;265;p24"/>
           <p:cNvSpPr txBox="1"/>
           <p:nvPr/>
         </p:nvSpPr>
         <p:spPr>
           <a:xfrm>
-            <a:off x="571500" y="3952875"/>
-            <a:ext cx="11049000" cy="400050"/>
+            <a:off x="571500" y="4829175"/>
+            <a:ext cx="11049000" cy="415498"/>
           </a:xfrm>
           <a:prstGeom prst="rect">
             <a:avLst/>
@@ -15063,60 +14958,7 @@
               <a:buNone/>
             </a:pPr>
             <a:r>
-              <a:rPr lang="en-US" sz="2100" b="0" i="0" u="none" strike="noStrike" cap="none">
-                <a:solidFill>
-                  <a:srgbClr val="FFFFFF"/>
-                </a:solidFill>
-                <a:latin typeface="Urbanist"/>
-                <a:ea typeface="Urbanist"/>
-                <a:cs typeface="Urbanist"/>
-                <a:sym typeface="Urbanist"/>
-              </a:rPr>
-              <a:t>クイズ大会の成功を心より応援しております！</a:t>
-            </a:r>
-            <a:endParaRPr/>
-          </a:p>
-        </p:txBody>
-      </p:sp>
-      <p:sp>
-        <p:nvSpPr>
-          <p:cNvPr id="265" name="Google Shape;265;p24"/>
-          <p:cNvSpPr txBox="1"/>
-          <p:nvPr/>
-        </p:nvSpPr>
-        <p:spPr>
-          <a:xfrm>
-            <a:off x="571500" y="4829175"/>
-            <a:ext cx="11049000" cy="342900"/>
-          </a:xfrm>
-          <a:prstGeom prst="rect">
-            <a:avLst/>
-          </a:prstGeom>
-          <a:noFill/>
-          <a:ln>
-            <a:noFill/>
-          </a:ln>
-        </p:spPr>
-        <p:txBody>
-          <a:bodyPr spcFirstLastPara="1" wrap="square" lIns="0" tIns="0" rIns="0" bIns="0" anchor="t" anchorCtr="0">
-            <a:spAutoFit/>
-          </a:bodyPr>
-          <a:lstStyle/>
-          <a:p>
-            <a:pPr marL="0" marR="0" lvl="0" indent="0" algn="ctr" rtl="0">
-              <a:lnSpc>
-                <a:spcPct val="150000"/>
-              </a:lnSpc>
-              <a:spcBef>
-                <a:spcPts val="0"/>
-              </a:spcBef>
-              <a:spcAft>
-                <a:spcPts val="0"/>
-              </a:spcAft>
-              <a:buNone/>
-            </a:pPr>
-            <a:r>
-              <a:rPr lang="en-US" sz="1800" b="0" i="0" u="none" strike="noStrike" cap="none">
+              <a:rPr lang="en-US" sz="1800" b="0" i="0" u="none" strike="noStrike" cap="none" dirty="0">
                 <a:solidFill>
                   <a:srgbClr val="DAFFDE"/>
                 </a:solidFill>
@@ -15125,9 +14967,9 @@
                 <a:cs typeface="Urbanist"/>
                 <a:sym typeface="Urbanist"/>
               </a:rPr>
-              <a:t>Speed Quiz 2026 Admin Team</a:t>
+              <a:t>Speed Quiz 2026 Team</a:t>
             </a:r>
-            <a:endParaRPr/>
+            <a:endParaRPr dirty="0"/>
           </a:p>
         </p:txBody>
       </p:sp>
@@ -15158,838 +15000,6 @@
           </a:ln>
         </p:spPr>
       </p:pic>
-    </p:spTree>
-  </p:cSld>
-  <p:clrMapOvr>
-    <a:masterClrMapping/>
-  </p:clrMapOvr>
-</p:sld>
-</file>
-
-<file path=ppt/slides/slide13.xml><?xml version="1.0" encoding="utf-8"?>
-<p:sld xmlns:a="http://schemas.openxmlformats.org/drawingml/2006/main" xmlns:r="http://schemas.openxmlformats.org/officeDocument/2006/relationships" xmlns:p="http://schemas.openxmlformats.org/presentationml/2006/main">
-  <p:cSld>
-    <p:bg>
-      <p:bgPr>
-        <a:solidFill>
-          <a:srgbClr val="000000"/>
-        </a:solidFill>
-        <a:effectLst/>
-      </p:bgPr>
-    </p:bg>
-    <p:spTree>
-      <p:nvGrpSpPr>
-        <p:cNvPr id="1" name="Shape 270"/>
-        <p:cNvGrpSpPr/>
-        <p:nvPr/>
-      </p:nvGrpSpPr>
-      <p:grpSpPr>
-        <a:xfrm>
-          <a:off x="0" y="0"/>
-          <a:ext cx="0" cy="0"/>
-          <a:chOff x="0" y="0"/>
-          <a:chExt cx="0" cy="0"/>
-        </a:xfrm>
-      </p:grpSpPr>
-      <p:pic>
-        <p:nvPicPr>
-          <p:cNvPr id="271" name="Google Shape;271;p25" descr="image.png"/>
-          <p:cNvPicPr preferRelativeResize="0"/>
-          <p:nvPr/>
-        </p:nvPicPr>
-        <p:blipFill rotWithShape="1">
-          <a:blip r:embed="rId3">
-            <a:alphaModFix/>
-          </a:blip>
-          <a:srcRect/>
-          <a:stretch/>
-        </p:blipFill>
-        <p:spPr>
-          <a:xfrm>
-            <a:off x="0" y="0"/>
-            <a:ext cx="12192000" cy="6858000"/>
-          </a:xfrm>
-          <a:prstGeom prst="rect">
-            <a:avLst/>
-          </a:prstGeom>
-          <a:noFill/>
-          <a:ln>
-            <a:noFill/>
-          </a:ln>
-        </p:spPr>
-      </p:pic>
-      <p:sp>
-        <p:nvSpPr>
-          <p:cNvPr id="272" name="Google Shape;272;p25"/>
-          <p:cNvSpPr/>
-          <p:nvPr/>
-        </p:nvSpPr>
-        <p:spPr>
-          <a:xfrm>
-            <a:off x="571500" y="1518195"/>
-            <a:ext cx="11049000" cy="942975"/>
-          </a:xfrm>
-          <a:prstGeom prst="rect">
-            <a:avLst/>
-          </a:prstGeom>
-          <a:noFill/>
-          <a:ln>
-            <a:noFill/>
-          </a:ln>
-        </p:spPr>
-        <p:txBody>
-          <a:bodyPr spcFirstLastPara="1" wrap="square" lIns="91425" tIns="45700" rIns="91425" bIns="45700" anchor="ctr" anchorCtr="0">
-            <a:noAutofit/>
-          </a:bodyPr>
-          <a:lstStyle/>
-          <a:p>
-            <a:pPr marL="0" marR="0" lvl="0" indent="0" algn="ctr" rtl="0">
-              <a:spcBef>
-                <a:spcPts val="0"/>
-              </a:spcBef>
-              <a:spcAft>
-                <a:spcPts val="0"/>
-              </a:spcAft>
-              <a:buNone/>
-            </a:pPr>
-            <a:endParaRPr sz="1800" b="0" i="0" u="none" strike="noStrike" cap="none">
-              <a:solidFill>
-                <a:schemeClr val="dk1"/>
-              </a:solidFill>
-              <a:latin typeface="Calibri"/>
-              <a:ea typeface="Calibri"/>
-              <a:cs typeface="Calibri"/>
-              <a:sym typeface="Calibri"/>
-            </a:endParaRPr>
-          </a:p>
-        </p:txBody>
-      </p:sp>
-      <p:sp>
-        <p:nvSpPr>
-          <p:cNvPr id="273" name="Google Shape;273;p25"/>
-          <p:cNvSpPr/>
-          <p:nvPr/>
-        </p:nvSpPr>
-        <p:spPr>
-          <a:xfrm>
-            <a:off x="571500" y="2461170"/>
-            <a:ext cx="11049000" cy="771525"/>
-          </a:xfrm>
-          <a:prstGeom prst="rect">
-            <a:avLst/>
-          </a:prstGeom>
-          <a:noFill/>
-          <a:ln>
-            <a:noFill/>
-          </a:ln>
-        </p:spPr>
-        <p:txBody>
-          <a:bodyPr spcFirstLastPara="1" wrap="square" lIns="91425" tIns="45700" rIns="91425" bIns="45700" anchor="ctr" anchorCtr="0">
-            <a:noAutofit/>
-          </a:bodyPr>
-          <a:lstStyle/>
-          <a:p>
-            <a:pPr marL="0" marR="0" lvl="0" indent="0" algn="ctr" rtl="0">
-              <a:spcBef>
-                <a:spcPts val="0"/>
-              </a:spcBef>
-              <a:spcAft>
-                <a:spcPts val="0"/>
-              </a:spcAft>
-              <a:buNone/>
-            </a:pPr>
-            <a:endParaRPr sz="1800" b="0" i="0" u="none" strike="noStrike" cap="none">
-              <a:solidFill>
-                <a:schemeClr val="dk1"/>
-              </a:solidFill>
-              <a:latin typeface="Calibri"/>
-              <a:ea typeface="Calibri"/>
-              <a:cs typeface="Calibri"/>
-              <a:sym typeface="Calibri"/>
-            </a:endParaRPr>
-          </a:p>
-        </p:txBody>
-      </p:sp>
-      <p:sp>
-        <p:nvSpPr>
-          <p:cNvPr id="274" name="Google Shape;274;p25"/>
-          <p:cNvSpPr/>
-          <p:nvPr/>
-        </p:nvSpPr>
-        <p:spPr>
-          <a:xfrm>
-            <a:off x="571500" y="2451645"/>
-            <a:ext cx="11049000" cy="9525"/>
-          </a:xfrm>
-          <a:prstGeom prst="rect">
-            <a:avLst/>
-          </a:prstGeom>
-          <a:solidFill>
-            <a:srgbClr val="757575"/>
-          </a:solidFill>
-          <a:ln>
-            <a:noFill/>
-          </a:ln>
-        </p:spPr>
-        <p:txBody>
-          <a:bodyPr spcFirstLastPara="1" wrap="square" lIns="91425" tIns="45700" rIns="91425" bIns="45700" anchor="ctr" anchorCtr="0">
-            <a:noAutofit/>
-          </a:bodyPr>
-          <a:lstStyle/>
-          <a:p>
-            <a:pPr marL="0" marR="0" lvl="0" indent="0" algn="ctr" rtl="0">
-              <a:spcBef>
-                <a:spcPts val="0"/>
-              </a:spcBef>
-              <a:spcAft>
-                <a:spcPts val="0"/>
-              </a:spcAft>
-              <a:buNone/>
-            </a:pPr>
-            <a:endParaRPr sz="1800" b="0" i="0" u="none" strike="noStrike" cap="none">
-              <a:solidFill>
-                <a:schemeClr val="dk1"/>
-              </a:solidFill>
-              <a:latin typeface="Calibri"/>
-              <a:ea typeface="Calibri"/>
-              <a:cs typeface="Calibri"/>
-              <a:sym typeface="Calibri"/>
-            </a:endParaRPr>
-          </a:p>
-        </p:txBody>
-      </p:sp>
-      <p:sp>
-        <p:nvSpPr>
-          <p:cNvPr id="275" name="Google Shape;275;p25"/>
-          <p:cNvSpPr/>
-          <p:nvPr/>
-        </p:nvSpPr>
-        <p:spPr>
-          <a:xfrm>
-            <a:off x="571500" y="2451645"/>
-            <a:ext cx="11049000" cy="9525"/>
-          </a:xfrm>
-          <a:prstGeom prst="rect">
-            <a:avLst/>
-          </a:prstGeom>
-          <a:solidFill>
-            <a:srgbClr val="757575"/>
-          </a:solidFill>
-          <a:ln>
-            <a:noFill/>
-          </a:ln>
-        </p:spPr>
-        <p:txBody>
-          <a:bodyPr spcFirstLastPara="1" wrap="square" lIns="91425" tIns="45700" rIns="91425" bIns="45700" anchor="ctr" anchorCtr="0">
-            <a:noAutofit/>
-          </a:bodyPr>
-          <a:lstStyle/>
-          <a:p>
-            <a:pPr marL="0" marR="0" lvl="0" indent="0" algn="ctr" rtl="0">
-              <a:spcBef>
-                <a:spcPts val="0"/>
-              </a:spcBef>
-              <a:spcAft>
-                <a:spcPts val="0"/>
-              </a:spcAft>
-              <a:buNone/>
-            </a:pPr>
-            <a:endParaRPr sz="1800" b="0" i="0" u="none" strike="noStrike" cap="none">
-              <a:solidFill>
-                <a:schemeClr val="dk1"/>
-              </a:solidFill>
-              <a:latin typeface="Calibri"/>
-              <a:ea typeface="Calibri"/>
-              <a:cs typeface="Calibri"/>
-              <a:sym typeface="Calibri"/>
-            </a:endParaRPr>
-          </a:p>
-        </p:txBody>
-      </p:sp>
-      <p:sp>
-        <p:nvSpPr>
-          <p:cNvPr id="276" name="Google Shape;276;p25"/>
-          <p:cNvSpPr/>
-          <p:nvPr/>
-        </p:nvSpPr>
-        <p:spPr>
-          <a:xfrm>
-            <a:off x="571500" y="3223170"/>
-            <a:ext cx="11049000" cy="9525"/>
-          </a:xfrm>
-          <a:prstGeom prst="rect">
-            <a:avLst/>
-          </a:prstGeom>
-          <a:solidFill>
-            <a:srgbClr val="757575"/>
-          </a:solidFill>
-          <a:ln>
-            <a:noFill/>
-          </a:ln>
-        </p:spPr>
-        <p:txBody>
-          <a:bodyPr spcFirstLastPara="1" wrap="square" lIns="91425" tIns="45700" rIns="91425" bIns="45700" anchor="ctr" anchorCtr="0">
-            <a:noAutofit/>
-          </a:bodyPr>
-          <a:lstStyle/>
-          <a:p>
-            <a:pPr marL="0" marR="0" lvl="0" indent="0" algn="ctr" rtl="0">
-              <a:spcBef>
-                <a:spcPts val="0"/>
-              </a:spcBef>
-              <a:spcAft>
-                <a:spcPts val="0"/>
-              </a:spcAft>
-              <a:buNone/>
-            </a:pPr>
-            <a:endParaRPr sz="1800" b="0" i="0" u="none" strike="noStrike" cap="none">
-              <a:solidFill>
-                <a:schemeClr val="dk1"/>
-              </a:solidFill>
-              <a:latin typeface="Calibri"/>
-              <a:ea typeface="Calibri"/>
-              <a:cs typeface="Calibri"/>
-              <a:sym typeface="Calibri"/>
-            </a:endParaRPr>
-          </a:p>
-        </p:txBody>
-      </p:sp>
-      <p:sp>
-        <p:nvSpPr>
-          <p:cNvPr id="277" name="Google Shape;277;p25"/>
-          <p:cNvSpPr/>
-          <p:nvPr/>
-        </p:nvSpPr>
-        <p:spPr>
-          <a:xfrm>
-            <a:off x="571500" y="3223170"/>
-            <a:ext cx="11049000" cy="9525"/>
-          </a:xfrm>
-          <a:prstGeom prst="rect">
-            <a:avLst/>
-          </a:prstGeom>
-          <a:solidFill>
-            <a:srgbClr val="757575"/>
-          </a:solidFill>
-          <a:ln>
-            <a:noFill/>
-          </a:ln>
-        </p:spPr>
-        <p:txBody>
-          <a:bodyPr spcFirstLastPara="1" wrap="square" lIns="91425" tIns="45700" rIns="91425" bIns="45700" anchor="ctr" anchorCtr="0">
-            <a:noAutofit/>
-          </a:bodyPr>
-          <a:lstStyle/>
-          <a:p>
-            <a:pPr marL="0" marR="0" lvl="0" indent="0" algn="ctr" rtl="0">
-              <a:spcBef>
-                <a:spcPts val="0"/>
-              </a:spcBef>
-              <a:spcAft>
-                <a:spcPts val="0"/>
-              </a:spcAft>
-              <a:buNone/>
-            </a:pPr>
-            <a:endParaRPr sz="1800" b="0" i="0" u="none" strike="noStrike" cap="none">
-              <a:solidFill>
-                <a:schemeClr val="dk1"/>
-              </a:solidFill>
-              <a:latin typeface="Calibri"/>
-              <a:ea typeface="Calibri"/>
-              <a:cs typeface="Calibri"/>
-              <a:sym typeface="Calibri"/>
-            </a:endParaRPr>
-          </a:p>
-        </p:txBody>
-      </p:sp>
-      <p:pic>
-        <p:nvPicPr>
-          <p:cNvPr id="278" name="Google Shape;278;p25" descr="image.png"/>
-          <p:cNvPicPr preferRelativeResize="0"/>
-          <p:nvPr/>
-        </p:nvPicPr>
-        <p:blipFill rotWithShape="1">
-          <a:blip r:embed="rId4">
-            <a:alphaModFix/>
-          </a:blip>
-          <a:srcRect/>
-          <a:stretch/>
-        </p:blipFill>
-        <p:spPr>
-          <a:xfrm>
-            <a:off x="571500" y="1746795"/>
-            <a:ext cx="857250" cy="476250"/>
-          </a:xfrm>
-          <a:prstGeom prst="rect">
-            <a:avLst/>
-          </a:prstGeom>
-          <a:noFill/>
-          <a:ln>
-            <a:noFill/>
-          </a:ln>
-        </p:spPr>
-      </p:pic>
-      <p:sp>
-        <p:nvSpPr>
-          <p:cNvPr id="279" name="Google Shape;279;p25"/>
-          <p:cNvSpPr txBox="1"/>
-          <p:nvPr/>
-        </p:nvSpPr>
-        <p:spPr>
-          <a:xfrm>
-            <a:off x="1666875" y="1661070"/>
-            <a:ext cx="9953625" cy="371475"/>
-          </a:xfrm>
-          <a:prstGeom prst="rect">
-            <a:avLst/>
-          </a:prstGeom>
-          <a:noFill/>
-          <a:ln>
-            <a:noFill/>
-          </a:ln>
-        </p:spPr>
-        <p:txBody>
-          <a:bodyPr spcFirstLastPara="1" wrap="square" lIns="0" tIns="0" rIns="0" bIns="0" anchor="t" anchorCtr="0">
-            <a:spAutoFit/>
-          </a:bodyPr>
-          <a:lstStyle/>
-          <a:p>
-            <a:pPr marL="0" marR="0" lvl="0" indent="0" algn="l" rtl="0">
-              <a:lnSpc>
-                <a:spcPct val="149948"/>
-              </a:lnSpc>
-              <a:spcBef>
-                <a:spcPts val="0"/>
-              </a:spcBef>
-              <a:spcAft>
-                <a:spcPts val="0"/>
-              </a:spcAft>
-              <a:buNone/>
-            </a:pPr>
-            <a:r>
-              <a:rPr lang="en-US" sz="975" b="0" i="0" u="none" strike="noStrike" cap="none">
-                <a:solidFill>
-                  <a:srgbClr val="DAFFDE"/>
-                </a:solidFill>
-                <a:latin typeface="Urbanist"/>
-                <a:ea typeface="Urbanist"/>
-                <a:cs typeface="Urbanist"/>
-                <a:sym typeface="Urbanist"/>
-              </a:rPr>
-              <a:t>https://static.vecteezy.com/system/resources/previews/026/150/083/non_2x/of-futuristic-technology-cyber-hud-dashboard-monitor-green-neon-light-power-status-on-grey-design-ultramodern-element-vector.jpg</a:t>
-            </a:r>
-            <a:endParaRPr/>
-          </a:p>
-        </p:txBody>
-      </p:sp>
-      <p:sp>
-        <p:nvSpPr>
-          <p:cNvPr id="280" name="Google Shape;280;p25"/>
-          <p:cNvSpPr txBox="1"/>
-          <p:nvPr/>
-        </p:nvSpPr>
-        <p:spPr>
-          <a:xfrm>
-            <a:off x="1666875" y="2080170"/>
-            <a:ext cx="9953625" cy="228600"/>
-          </a:xfrm>
-          <a:prstGeom prst="rect">
-            <a:avLst/>
-          </a:prstGeom>
-          <a:noFill/>
-          <a:ln>
-            <a:noFill/>
-          </a:ln>
-        </p:spPr>
-        <p:txBody>
-          <a:bodyPr spcFirstLastPara="1" wrap="square" lIns="0" tIns="0" rIns="0" bIns="0" anchor="t" anchorCtr="0">
-            <a:spAutoFit/>
-          </a:bodyPr>
-          <a:lstStyle/>
-          <a:p>
-            <a:pPr marL="0" marR="0" lvl="0" indent="0" algn="l" rtl="0">
-              <a:lnSpc>
-                <a:spcPct val="150000"/>
-              </a:lnSpc>
-              <a:spcBef>
-                <a:spcPts val="0"/>
-              </a:spcBef>
-              <a:spcAft>
-                <a:spcPts val="0"/>
-              </a:spcAft>
-              <a:buNone/>
-            </a:pPr>
-            <a:r>
-              <a:rPr lang="en-US" sz="1200" b="0" i="0" u="none" strike="noStrike" cap="none">
-                <a:solidFill>
-                  <a:srgbClr val="DAFFDE"/>
-                </a:solidFill>
-                <a:latin typeface="Urbanist"/>
-                <a:ea typeface="Urbanist"/>
-                <a:cs typeface="Urbanist"/>
-                <a:sym typeface="Urbanist"/>
-              </a:rPr>
-              <a:t>Source: </a:t>
-            </a:r>
-            <a:r>
-              <a:rPr lang="en-US" sz="1200" b="0" i="0" u="none" strike="noStrike" cap="none">
-                <a:solidFill>
-                  <a:srgbClr val="4F46E5"/>
-                </a:solidFill>
-                <a:latin typeface="Urbanist"/>
-                <a:ea typeface="Urbanist"/>
-                <a:cs typeface="Urbanist"/>
-                <a:sym typeface="Urbanist"/>
-              </a:rPr>
-              <a:t>www.vecteezy.com</a:t>
-            </a:r>
-            <a:endParaRPr/>
-          </a:p>
-        </p:txBody>
-      </p:sp>
-      <p:pic>
-        <p:nvPicPr>
-          <p:cNvPr id="281" name="Google Shape;281;p25" descr="image.png"/>
-          <p:cNvPicPr preferRelativeResize="0"/>
-          <p:nvPr/>
-        </p:nvPicPr>
-        <p:blipFill rotWithShape="1">
-          <a:blip r:embed="rId5">
-            <a:alphaModFix/>
-          </a:blip>
-          <a:srcRect/>
-          <a:stretch/>
-        </p:blipFill>
-        <p:spPr>
-          <a:xfrm>
-            <a:off x="571500" y="2604045"/>
-            <a:ext cx="857250" cy="476250"/>
-          </a:xfrm>
-          <a:prstGeom prst="rect">
-            <a:avLst/>
-          </a:prstGeom>
-          <a:noFill/>
-          <a:ln>
-            <a:noFill/>
-          </a:ln>
-        </p:spPr>
-      </p:pic>
-      <p:sp>
-        <p:nvSpPr>
-          <p:cNvPr id="282" name="Google Shape;282;p25"/>
-          <p:cNvSpPr txBox="1"/>
-          <p:nvPr/>
-        </p:nvSpPr>
-        <p:spPr>
-          <a:xfrm>
-            <a:off x="1666875" y="2611189"/>
-            <a:ext cx="9953625" cy="185737"/>
-          </a:xfrm>
-          <a:prstGeom prst="rect">
-            <a:avLst/>
-          </a:prstGeom>
-          <a:noFill/>
-          <a:ln>
-            <a:noFill/>
-          </a:ln>
-        </p:spPr>
-        <p:txBody>
-          <a:bodyPr spcFirstLastPara="1" wrap="square" lIns="0" tIns="0" rIns="0" bIns="0" anchor="t" anchorCtr="0">
-            <a:spAutoFit/>
-          </a:bodyPr>
-          <a:lstStyle/>
-          <a:p>
-            <a:pPr marL="0" marR="0" lvl="0" indent="0" algn="l" rtl="0">
-              <a:lnSpc>
-                <a:spcPct val="149948"/>
-              </a:lnSpc>
-              <a:spcBef>
-                <a:spcPts val="0"/>
-              </a:spcBef>
-              <a:spcAft>
-                <a:spcPts val="0"/>
-              </a:spcAft>
-              <a:buNone/>
-            </a:pPr>
-            <a:r>
-              <a:rPr lang="en-US" sz="975" b="0" i="0" u="none" strike="noStrike" cap="none">
-                <a:solidFill>
-                  <a:srgbClr val="DAFFDE"/>
-                </a:solidFill>
-                <a:latin typeface="Urbanist"/>
-                <a:ea typeface="Urbanist"/>
-                <a:cs typeface="Urbanist"/>
-                <a:sym typeface="Urbanist"/>
-              </a:rPr>
-              <a:t>https://celexon.com/cdn/shop/files/cx-produktbild2-rollo-pro-plus.webp?v=1767098975&amp;width=2400</a:t>
-            </a:r>
-            <a:endParaRPr/>
-          </a:p>
-        </p:txBody>
-      </p:sp>
-      <p:sp>
-        <p:nvSpPr>
-          <p:cNvPr id="283" name="Google Shape;283;p25"/>
-          <p:cNvSpPr txBox="1"/>
-          <p:nvPr/>
-        </p:nvSpPr>
-        <p:spPr>
-          <a:xfrm>
-            <a:off x="1666875" y="2844551"/>
-            <a:ext cx="9953625" cy="228600"/>
-          </a:xfrm>
-          <a:prstGeom prst="rect">
-            <a:avLst/>
-          </a:prstGeom>
-          <a:noFill/>
-          <a:ln>
-            <a:noFill/>
-          </a:ln>
-        </p:spPr>
-        <p:txBody>
-          <a:bodyPr spcFirstLastPara="1" wrap="square" lIns="0" tIns="0" rIns="0" bIns="0" anchor="t" anchorCtr="0">
-            <a:spAutoFit/>
-          </a:bodyPr>
-          <a:lstStyle/>
-          <a:p>
-            <a:pPr marL="0" marR="0" lvl="0" indent="0" algn="l" rtl="0">
-              <a:lnSpc>
-                <a:spcPct val="150000"/>
-              </a:lnSpc>
-              <a:spcBef>
-                <a:spcPts val="0"/>
-              </a:spcBef>
-              <a:spcAft>
-                <a:spcPts val="0"/>
-              </a:spcAft>
-              <a:buNone/>
-            </a:pPr>
-            <a:r>
-              <a:rPr lang="en-US" sz="1200" b="0" i="0" u="none" strike="noStrike" cap="none">
-                <a:solidFill>
-                  <a:srgbClr val="DAFFDE"/>
-                </a:solidFill>
-                <a:latin typeface="Urbanist"/>
-                <a:ea typeface="Urbanist"/>
-                <a:cs typeface="Urbanist"/>
-                <a:sym typeface="Urbanist"/>
-              </a:rPr>
-              <a:t>Source: </a:t>
-            </a:r>
-            <a:r>
-              <a:rPr lang="en-US" sz="1200" b="0" i="0" u="none" strike="noStrike" cap="none">
-                <a:solidFill>
-                  <a:srgbClr val="4F46E5"/>
-                </a:solidFill>
-                <a:latin typeface="Urbanist"/>
-                <a:ea typeface="Urbanist"/>
-                <a:cs typeface="Urbanist"/>
-                <a:sym typeface="Urbanist"/>
-              </a:rPr>
-              <a:t>celexon.com</a:t>
-            </a:r>
-            <a:endParaRPr/>
-          </a:p>
-        </p:txBody>
-      </p:sp>
-      <p:pic>
-        <p:nvPicPr>
-          <p:cNvPr id="284" name="Google Shape;284;p25" descr="image.png"/>
-          <p:cNvPicPr preferRelativeResize="0"/>
-          <p:nvPr/>
-        </p:nvPicPr>
-        <p:blipFill rotWithShape="1">
-          <a:blip r:embed="rId6">
-            <a:alphaModFix/>
-          </a:blip>
-          <a:srcRect/>
-          <a:stretch/>
-        </p:blipFill>
-        <p:spPr>
-          <a:xfrm>
-            <a:off x="571500" y="3375570"/>
-            <a:ext cx="857250" cy="476250"/>
-          </a:xfrm>
-          <a:prstGeom prst="rect">
-            <a:avLst/>
-          </a:prstGeom>
-          <a:noFill/>
-          <a:ln>
-            <a:noFill/>
-          </a:ln>
-        </p:spPr>
-      </p:pic>
-      <p:sp>
-        <p:nvSpPr>
-          <p:cNvPr id="285" name="Google Shape;285;p25"/>
-          <p:cNvSpPr txBox="1"/>
-          <p:nvPr/>
-        </p:nvSpPr>
-        <p:spPr>
-          <a:xfrm>
-            <a:off x="1666875" y="3382714"/>
-            <a:ext cx="9953625" cy="185737"/>
-          </a:xfrm>
-          <a:prstGeom prst="rect">
-            <a:avLst/>
-          </a:prstGeom>
-          <a:noFill/>
-          <a:ln>
-            <a:noFill/>
-          </a:ln>
-        </p:spPr>
-        <p:txBody>
-          <a:bodyPr spcFirstLastPara="1" wrap="square" lIns="0" tIns="0" rIns="0" bIns="0" anchor="t" anchorCtr="0">
-            <a:spAutoFit/>
-          </a:bodyPr>
-          <a:lstStyle/>
-          <a:p>
-            <a:pPr marL="0" marR="0" lvl="0" indent="0" algn="l" rtl="0">
-              <a:lnSpc>
-                <a:spcPct val="149948"/>
-              </a:lnSpc>
-              <a:spcBef>
-                <a:spcPts val="0"/>
-              </a:spcBef>
-              <a:spcAft>
-                <a:spcPts val="0"/>
-              </a:spcAft>
-              <a:buNone/>
-            </a:pPr>
-            <a:r>
-              <a:rPr lang="en-US" sz="975" b="0" i="0" u="none" strike="noStrike" cap="none">
-                <a:solidFill>
-                  <a:srgbClr val="DAFFDE"/>
-                </a:solidFill>
-                <a:latin typeface="Urbanist"/>
-                <a:ea typeface="Urbanist"/>
-                <a:cs typeface="Urbanist"/>
-                <a:sym typeface="Urbanist"/>
-              </a:rPr>
-              <a:t>https://static.vecteezy.com/system/resources/thumbnails/072/455/149/small/close-up-of-a-high-quality-hdmi-cable-connector-with-gold-plated-pins-photo.jpg</a:t>
-            </a:r>
-            <a:endParaRPr/>
-          </a:p>
-        </p:txBody>
-      </p:sp>
-      <p:sp>
-        <p:nvSpPr>
-          <p:cNvPr id="286" name="Google Shape;286;p25"/>
-          <p:cNvSpPr txBox="1"/>
-          <p:nvPr/>
-        </p:nvSpPr>
-        <p:spPr>
-          <a:xfrm>
-            <a:off x="1666875" y="3616076"/>
-            <a:ext cx="9953625" cy="228600"/>
-          </a:xfrm>
-          <a:prstGeom prst="rect">
-            <a:avLst/>
-          </a:prstGeom>
-          <a:noFill/>
-          <a:ln>
-            <a:noFill/>
-          </a:ln>
-        </p:spPr>
-        <p:txBody>
-          <a:bodyPr spcFirstLastPara="1" wrap="square" lIns="0" tIns="0" rIns="0" bIns="0" anchor="t" anchorCtr="0">
-            <a:spAutoFit/>
-          </a:bodyPr>
-          <a:lstStyle/>
-          <a:p>
-            <a:pPr marL="0" marR="0" lvl="0" indent="0" algn="l" rtl="0">
-              <a:lnSpc>
-                <a:spcPct val="150000"/>
-              </a:lnSpc>
-              <a:spcBef>
-                <a:spcPts val="0"/>
-              </a:spcBef>
-              <a:spcAft>
-                <a:spcPts val="0"/>
-              </a:spcAft>
-              <a:buNone/>
-            </a:pPr>
-            <a:r>
-              <a:rPr lang="en-US" sz="1200" b="0" i="0" u="none" strike="noStrike" cap="none">
-                <a:solidFill>
-                  <a:srgbClr val="DAFFDE"/>
-                </a:solidFill>
-                <a:latin typeface="Urbanist"/>
-                <a:ea typeface="Urbanist"/>
-                <a:cs typeface="Urbanist"/>
-                <a:sym typeface="Urbanist"/>
-              </a:rPr>
-              <a:t>Source: </a:t>
-            </a:r>
-            <a:r>
-              <a:rPr lang="en-US" sz="1200" b="0" i="0" u="none" strike="noStrike" cap="none">
-                <a:solidFill>
-                  <a:srgbClr val="4F46E5"/>
-                </a:solidFill>
-                <a:latin typeface="Urbanist"/>
-                <a:ea typeface="Urbanist"/>
-                <a:cs typeface="Urbanist"/>
-                <a:sym typeface="Urbanist"/>
-              </a:rPr>
-              <a:t>www.vecteezy.com</a:t>
-            </a:r>
-            <a:endParaRPr/>
-          </a:p>
-        </p:txBody>
-      </p:sp>
-      <p:sp>
-        <p:nvSpPr>
-          <p:cNvPr id="287" name="Google Shape;287;p25"/>
-          <p:cNvSpPr txBox="1"/>
-          <p:nvPr/>
-        </p:nvSpPr>
-        <p:spPr>
-          <a:xfrm>
-            <a:off x="571500" y="571500"/>
-            <a:ext cx="11601450" cy="565695"/>
-          </a:xfrm>
-          <a:prstGeom prst="rect">
-            <a:avLst/>
-          </a:prstGeom>
-          <a:noFill/>
-          <a:ln>
-            <a:noFill/>
-          </a:ln>
-        </p:spPr>
-        <p:txBody>
-          <a:bodyPr spcFirstLastPara="1" wrap="square" lIns="0" tIns="0" rIns="0" bIns="0" anchor="t" anchorCtr="0">
-            <a:spAutoFit/>
-          </a:bodyPr>
-          <a:lstStyle/>
-          <a:p>
-            <a:pPr marL="0" marR="0" lvl="0" indent="0" algn="l" rtl="0">
-              <a:lnSpc>
-                <a:spcPct val="110000"/>
-              </a:lnSpc>
-              <a:spcBef>
-                <a:spcPts val="0"/>
-              </a:spcBef>
-              <a:spcAft>
-                <a:spcPts val="0"/>
-              </a:spcAft>
-              <a:buNone/>
-            </a:pPr>
-            <a:r>
-              <a:rPr lang="en-US" sz="4050" b="1" i="0" u="none" strike="noStrike" cap="none">
-                <a:solidFill>
-                  <a:srgbClr val="F5F5F5"/>
-                </a:solidFill>
-                <a:latin typeface="Poppins"/>
-                <a:ea typeface="Poppins"/>
-                <a:cs typeface="Poppins"/>
-                <a:sym typeface="Poppins"/>
-              </a:rPr>
-              <a:t>Image Sources</a:t>
-            </a:r>
-            <a:endParaRPr/>
-          </a:p>
-        </p:txBody>
-      </p:sp>
     </p:spTree>
   </p:cSld>
   <p:clrMapOvr>
@@ -18466,7 +17476,7 @@
         <p:spPr>
           <a:xfrm>
             <a:off x="6334125" y="1984920"/>
-            <a:ext cx="5286375" cy="857250"/>
+            <a:ext cx="5550693" cy="692497"/>
           </a:xfrm>
           <a:prstGeom prst="rect">
             <a:avLst/>
@@ -18495,7 +17505,7 @@
               <a:buNone/>
             </a:pPr>
             <a:r>
-              <a:rPr lang="en-US" sz="1500" b="0" i="0" u="none" strike="noStrike" cap="none">
+              <a:rPr lang="en-US" sz="1500" b="0" i="0" u="none" strike="noStrike" cap="none" dirty="0" err="1">
                 <a:solidFill>
                   <a:srgbClr val="DAFFDE"/>
                 </a:solidFill>
@@ -18504,9 +17514,21 @@
                 <a:cs typeface="Urbanist"/>
                 <a:sym typeface="Urbanist"/>
               </a:rPr>
-              <a:t>管理者画面から問題を即座に追加・削除。画像のプレビューはFirebaseからの読み込み時にキャッシュを回避する設計です。</a:t>
+              <a:t>管理者画面から問題を即座に追加・削除。画像のプレビューはFirebaseからの読み込み時にキャッシュを回避する設計です</a:t>
             </a:r>
-            <a:endParaRPr/>
+            <a:r>
+              <a:rPr lang="en-US" sz="1500" b="0" i="0" u="none" strike="noStrike" cap="none" dirty="0">
+                <a:solidFill>
+                  <a:srgbClr val="DAFFDE"/>
+                </a:solidFill>
+                <a:latin typeface="Urbanist"/>
+                <a:ea typeface="Urbanist"/>
+                <a:cs typeface="Urbanist"/>
+                <a:sym typeface="Urbanist"/>
+              </a:rPr>
+              <a:t>。</a:t>
+            </a:r>
+            <a:endParaRPr dirty="0"/>
           </a:p>
         </p:txBody>
       </p:sp>
@@ -19311,7 +18333,7 @@
         </p:nvSpPr>
         <p:spPr>
           <a:xfrm>
-            <a:off x="6256094" y="537120"/>
+            <a:off x="6256093" y="822869"/>
             <a:ext cx="2552193" cy="314325"/>
           </a:xfrm>
           <a:prstGeom prst="rect">
@@ -19338,7 +18360,7 @@
               <a:buNone/>
             </a:pPr>
             <a:r>
-              <a:rPr lang="en-US" sz="1650" b="1" i="0" u="none" strike="noStrike" cap="none">
+              <a:rPr lang="en-US" sz="1650" b="1" i="0" u="none" strike="noStrike" cap="none" dirty="0">
                 <a:solidFill>
                   <a:srgbClr val="DEFF9A"/>
                 </a:solidFill>
@@ -19347,9 +18369,45 @@
                 <a:cs typeface="Poppins"/>
                 <a:sym typeface="Poppins"/>
               </a:rPr>
-              <a:t>3. 第n問 受付</a:t>
+              <a:t>3. </a:t>
             </a:r>
-            <a:endParaRPr/>
+            <a:r>
+              <a:rPr lang="en-US" sz="1650" b="1" i="0" u="none" strike="noStrike" cap="none" dirty="0" err="1">
+                <a:solidFill>
+                  <a:srgbClr val="DEFF9A"/>
+                </a:solidFill>
+                <a:latin typeface="Poppins"/>
+                <a:ea typeface="Poppins"/>
+                <a:cs typeface="Poppins"/>
+                <a:sym typeface="Poppins"/>
+              </a:rPr>
+              <a:t>第n問</a:t>
+            </a:r>
+            <a:r>
+              <a:rPr lang="en-US" sz="1650" b="1" i="0" u="none" strike="noStrike" cap="none" dirty="0">
+                <a:solidFill>
+                  <a:srgbClr val="DEFF9A"/>
+                </a:solidFill>
+                <a:latin typeface="Poppins"/>
+                <a:ea typeface="Poppins"/>
+                <a:cs typeface="Poppins"/>
+                <a:sym typeface="Poppins"/>
+              </a:rPr>
+              <a:t> </a:t>
+            </a:r>
+            <a:r>
+              <a:rPr lang="en-US" sz="1650" b="1" i="0" u="none" strike="noStrike" cap="none" dirty="0" err="1">
+                <a:solidFill>
+                  <a:srgbClr val="DEFF9A"/>
+                </a:solidFill>
+                <a:latin typeface="Poppins"/>
+                <a:ea typeface="Poppins"/>
+                <a:cs typeface="Poppins"/>
+                <a:sym typeface="Poppins"/>
+              </a:rPr>
+              <a:t>受付</a:t>
+            </a:r>
+            <a:endParaRPr dirty="0"/>
           </a:p>
         </p:txBody>
       </p:sp>
@@ -19361,7 +18419,7 @@
         </p:nvSpPr>
         <p:spPr>
           <a:xfrm>
-            <a:off x="6316860" y="1041945"/>
+            <a:off x="6316859" y="1322933"/>
             <a:ext cx="2430660" cy="857250"/>
           </a:xfrm>
           <a:prstGeom prst="rect">
@@ -19391,7 +18449,7 @@
               <a:buNone/>
             </a:pPr>
             <a:r>
-              <a:rPr lang="en-US" sz="1500" b="0" i="0" u="none" strike="noStrike" cap="none">
+              <a:rPr lang="en-US" sz="1500" b="0" i="0" u="none" strike="noStrike" cap="none" dirty="0" err="1">
                 <a:solidFill>
                   <a:srgbClr val="DAFFDE"/>
                 </a:solidFill>
@@ -19400,9 +18458,21 @@
                 <a:cs typeface="Urbanist"/>
                 <a:sym typeface="Urbanist"/>
               </a:rPr>
-              <a:t>問題文と画像を表示。回答者のスマホが有効化される。</a:t>
+              <a:t>問題文と画像を表示。回答者のスマホが有効化される</a:t>
             </a:r>
-            <a:endParaRPr/>
+            <a:r>
+              <a:rPr lang="en-US" sz="1500" b="0" i="0" u="none" strike="noStrike" cap="none" dirty="0">
+                <a:solidFill>
+                  <a:srgbClr val="DAFFDE"/>
+                </a:solidFill>
+                <a:latin typeface="Urbanist"/>
+                <a:ea typeface="Urbanist"/>
+                <a:cs typeface="Urbanist"/>
+                <a:sym typeface="Urbanist"/>
+              </a:rPr>
+              <a:t>。</a:t>
+            </a:r>
+            <a:endParaRPr dirty="0"/>
           </a:p>
         </p:txBody>
       </p:sp>
@@ -19517,7 +18587,7 @@
         </p:nvSpPr>
         <p:spPr>
           <a:xfrm>
-            <a:off x="571500" y="571500"/>
+            <a:off x="295275" y="100012"/>
             <a:ext cx="11601450" cy="565695"/>
           </a:xfrm>
           <a:prstGeom prst="rect">
@@ -19547,7 +18617,7 @@
               <a:buNone/>
             </a:pPr>
             <a:r>
-              <a:rPr lang="en-US" sz="4050" b="1" i="0" u="none" strike="noStrike" cap="none">
+              <a:rPr lang="en-US" sz="4050" b="1" i="0" u="none" strike="noStrike" cap="none" dirty="0" err="1">
                 <a:solidFill>
                   <a:srgbClr val="F5F5F5"/>
                 </a:solidFill>
@@ -19556,10 +18626,22 @@
                 <a:cs typeface="Poppins"/>
                 <a:sym typeface="Poppins"/>
               </a:rPr>
-              <a:t>当日の進行フロー</a:t>
+              <a:t>当日の進行フロ</a:t>
             </a:r>
             <a:r>
-              <a:rPr lang="en-US" sz="4050" b="1" i="0" u="none" strike="noStrike" cap="none">
+              <a:rPr lang="en-US" sz="4050" b="1" i="0" u="none" strike="noStrike" cap="none" dirty="0">
+                <a:solidFill>
+                  <a:srgbClr val="F5F5F5"/>
+                </a:solidFill>
+                <a:latin typeface="Poppins"/>
+                <a:ea typeface="Poppins"/>
+                <a:cs typeface="Poppins"/>
+                <a:sym typeface="Poppins"/>
+              </a:rPr>
+              <a:t>ー</a:t>
+            </a:r>
+            <a:r>
+              <a:rPr lang="en-US" sz="4050" b="1" i="0" u="none" strike="noStrike" cap="none" dirty="0">
                 <a:solidFill>
                   <a:srgbClr val="DEFF9A"/>
                 </a:solidFill>
@@ -19568,9 +18650,33 @@
                 <a:cs typeface="Poppins"/>
                 <a:sym typeface="Poppins"/>
               </a:rPr>
-              <a:t>（前半）</a:t>
+              <a:t>（</a:t>
             </a:r>
-            <a:endParaRPr/>
+            <a:r>
+              <a:rPr lang="en-US" sz="4050" b="1" i="0" u="none" strike="noStrike" cap="none" dirty="0" err="1">
+                <a:solidFill>
+                  <a:srgbClr val="DEFF9A"/>
+                </a:solidFill>
+                <a:latin typeface="Poppins"/>
+                <a:ea typeface="Poppins"/>
+                <a:cs typeface="Poppins"/>
+                <a:sym typeface="Poppins"/>
+              </a:rPr>
+              <a:t>前半</a:t>
+            </a:r>
+            <a:r>
+              <a:rPr lang="en-US" sz="4050" b="1" i="0" u="none" strike="noStrike" cap="none" dirty="0">
+                <a:solidFill>
+                  <a:srgbClr val="DEFF9A"/>
+                </a:solidFill>
+                <a:latin typeface="Poppins"/>
+                <a:ea typeface="Poppins"/>
+                <a:cs typeface="Poppins"/>
+                <a:sym typeface="Poppins"/>
+              </a:rPr>
+              <a:t>）</a:t>
+            </a:r>
+            <a:endParaRPr dirty="0"/>
           </a:p>
         </p:txBody>
       </p:sp>
@@ -19622,7 +18728,7 @@
         </p:blipFill>
         <p:spPr>
           <a:xfrm>
-            <a:off x="0" y="0"/>
+            <a:off x="-1740218" y="0"/>
             <a:ext cx="12192000" cy="6858000"/>
           </a:xfrm>
           <a:prstGeom prst="rect">
@@ -20046,7 +19152,7 @@
         </p:nvSpPr>
         <p:spPr>
           <a:xfrm>
-            <a:off x="8222932" y="822870"/>
+            <a:off x="8140065" y="822870"/>
             <a:ext cx="3480435" cy="314325"/>
           </a:xfrm>
           <a:prstGeom prst="rect">
@@ -20073,7 +19179,7 @@
               <a:buNone/>
             </a:pPr>
             <a:r>
-              <a:rPr lang="en-US" sz="1650" b="1" i="0" u="none" strike="noStrike" cap="none">
+              <a:rPr lang="en-US" sz="1650" b="1" i="0" u="none" strike="noStrike" cap="none" dirty="0">
                 <a:solidFill>
                   <a:srgbClr val="DEFF9A"/>
                 </a:solidFill>
@@ -20082,9 +19188,21 @@
                 <a:cs typeface="Poppins"/>
                 <a:sym typeface="Poppins"/>
               </a:rPr>
-              <a:t>7. 総合順位</a:t>
+              <a:t>7. </a:t>
             </a:r>
-            <a:endParaRPr/>
+            <a:r>
+              <a:rPr lang="en-US" sz="1650" b="1" i="0" u="none" strike="noStrike" cap="none" dirty="0" err="1">
+                <a:solidFill>
+                  <a:srgbClr val="DEFF9A"/>
+                </a:solidFill>
+                <a:latin typeface="Poppins"/>
+                <a:ea typeface="Poppins"/>
+                <a:cs typeface="Poppins"/>
+                <a:sym typeface="Poppins"/>
+              </a:rPr>
+              <a:t>総合順位</a:t>
+            </a:r>
+            <a:endParaRPr dirty="0"/>
           </a:p>
         </p:txBody>
       </p:sp>
@@ -20126,7 +19244,7 @@
               <a:buNone/>
             </a:pPr>
             <a:r>
-              <a:rPr lang="en-US" sz="1500" b="0" i="0" u="none" strike="noStrike" cap="none">
+              <a:rPr lang="en-US" sz="1500" b="0" i="0" u="none" strike="noStrike" cap="none" dirty="0" err="1">
                 <a:solidFill>
                   <a:srgbClr val="DAFFDE"/>
                 </a:solidFill>
@@ -20135,9 +19253,21 @@
                 <a:cs typeface="Urbanist"/>
                 <a:sym typeface="Urbanist"/>
               </a:rPr>
-              <a:t>詳細マトリクス表を投影。正解数とタイムの合算で優勝決定。</a:t>
+              <a:t>詳細マトリクス表を投影。正解数とタイムの合算で優勝決定</a:t>
             </a:r>
-            <a:endParaRPr/>
+            <a:r>
+              <a:rPr lang="en-US" sz="1500" b="0" i="0" u="none" strike="noStrike" cap="none" dirty="0">
+                <a:solidFill>
+                  <a:srgbClr val="DAFFDE"/>
+                </a:solidFill>
+                <a:latin typeface="Urbanist"/>
+                <a:ea typeface="Urbanist"/>
+                <a:cs typeface="Urbanist"/>
+                <a:sym typeface="Urbanist"/>
+              </a:rPr>
+              <a:t>。</a:t>
+            </a:r>
+            <a:endParaRPr dirty="0"/>
           </a:p>
         </p:txBody>
       </p:sp>
@@ -20149,7 +19279,7 @@
         </p:nvSpPr>
         <p:spPr>
           <a:xfrm>
-            <a:off x="571500" y="571500"/>
+            <a:off x="390525" y="161925"/>
             <a:ext cx="11601450" cy="565695"/>
           </a:xfrm>
           <a:prstGeom prst="rect">
@@ -20179,7 +19309,7 @@
               <a:buNone/>
             </a:pPr>
             <a:r>
-              <a:rPr lang="en-US" sz="4050" b="1" i="0" u="none" strike="noStrike" cap="none">
+              <a:rPr lang="en-US" sz="4050" b="1" i="0" u="none" strike="noStrike" cap="none" dirty="0" err="1">
                 <a:solidFill>
                   <a:srgbClr val="F5F5F5"/>
                 </a:solidFill>
@@ -20188,10 +19318,22 @@
                 <a:cs typeface="Poppins"/>
                 <a:sym typeface="Poppins"/>
               </a:rPr>
-              <a:t>当日の進行フロー</a:t>
+              <a:t>当日の進行フロ</a:t>
             </a:r>
             <a:r>
-              <a:rPr lang="en-US" sz="4050" b="1" i="0" u="none" strike="noStrike" cap="none">
+              <a:rPr lang="en-US" sz="4050" b="1" i="0" u="none" strike="noStrike" cap="none" dirty="0">
+                <a:solidFill>
+                  <a:srgbClr val="F5F5F5"/>
+                </a:solidFill>
+                <a:latin typeface="Poppins"/>
+                <a:ea typeface="Poppins"/>
+                <a:cs typeface="Poppins"/>
+                <a:sym typeface="Poppins"/>
+              </a:rPr>
+              <a:t>ー</a:t>
+            </a:r>
+            <a:r>
+              <a:rPr lang="en-US" sz="4050" b="1" i="0" u="none" strike="noStrike" cap="none" dirty="0">
                 <a:solidFill>
                   <a:srgbClr val="DEFF9A"/>
                 </a:solidFill>
@@ -20200,9 +19342,33 @@
                 <a:cs typeface="Poppins"/>
                 <a:sym typeface="Poppins"/>
               </a:rPr>
-              <a:t>（後半）</a:t>
+              <a:t>（</a:t>
             </a:r>
-            <a:endParaRPr/>
+            <a:r>
+              <a:rPr lang="en-US" sz="4050" b="1" i="0" u="none" strike="noStrike" cap="none" dirty="0" err="1">
+                <a:solidFill>
+                  <a:srgbClr val="DEFF9A"/>
+                </a:solidFill>
+                <a:latin typeface="Poppins"/>
+                <a:ea typeface="Poppins"/>
+                <a:cs typeface="Poppins"/>
+                <a:sym typeface="Poppins"/>
+              </a:rPr>
+              <a:t>後半</a:t>
+            </a:r>
+            <a:r>
+              <a:rPr lang="en-US" sz="4050" b="1" i="0" u="none" strike="noStrike" cap="none" dirty="0">
+                <a:solidFill>
+                  <a:srgbClr val="DEFF9A"/>
+                </a:solidFill>
+                <a:latin typeface="Poppins"/>
+                <a:ea typeface="Poppins"/>
+                <a:cs typeface="Poppins"/>
+                <a:sym typeface="Poppins"/>
+              </a:rPr>
+              <a:t>）</a:t>
+            </a:r>
+            <a:endParaRPr dirty="0"/>
           </a:p>
         </p:txBody>
       </p:sp>
@@ -20599,8 +19765,8 @@
         </p:nvSpPr>
         <p:spPr>
           <a:xfrm>
-            <a:off x="571500" y="4360366"/>
-            <a:ext cx="4953000" cy="571500"/>
+            <a:off x="571499" y="4360366"/>
+            <a:ext cx="5200649" cy="346249"/>
           </a:xfrm>
           <a:prstGeom prst="rect">
             <a:avLst/>
@@ -20629,7 +19795,7 @@
               <a:buNone/>
             </a:pPr>
             <a:r>
-              <a:rPr lang="en-US" sz="1500" b="0" i="1" u="none" strike="noStrike" cap="none">
+              <a:rPr lang="en-US" sz="1500" b="0" i="1" u="none" strike="noStrike" cap="none" dirty="0">
                 <a:solidFill>
                   <a:srgbClr val="DAFFDE"/>
                 </a:solidFill>
@@ -20640,7 +19806,7 @@
               </a:rPr>
               <a:t>これにより完璧な16:9比率のクイズ番組空間が完成します。</a:t>
             </a:r>
-            <a:endParaRPr/>
+            <a:endParaRPr dirty="0"/>
           </a:p>
         </p:txBody>
       </p:sp>
